--- a/public/KiberQoriqchi_Prezentatsiya.pptx
+++ b/public/KiberQoriqchi_Prezentatsiya.pptx
@@ -1882,8 +1882,8 @@
         </p:nvSpPr>
         <p:spPr>
           <a:xfrm>
-            <a:off x="731520" y="548640"/>
-            <a:ext cx="2926080" cy="347472"/>
+            <a:off x="548640" y="457200"/>
+            <a:ext cx="3108960" cy="329184"/>
           </a:xfrm>
           <a:prstGeom prst="roundRect">
             <a:avLst/>
@@ -1907,8 +1907,8 @@
         </p:nvSpPr>
         <p:spPr>
           <a:xfrm>
-            <a:off x="731520" y="548640"/>
-            <a:ext cx="2926080" cy="347472"/>
+            <a:off x="548640" y="457200"/>
+            <a:ext cx="3108960" cy="329184"/>
           </a:xfrm>
           <a:prstGeom prst="rect">
             <a:avLst/>
@@ -1943,7 +1943,7 @@
         </p:nvSpPr>
         <p:spPr>
           <a:xfrm>
-            <a:off x="685800" y="1005840"/>
+            <a:off x="502920" y="914400"/>
             <a:ext cx="4389120" cy="731520"/>
           </a:xfrm>
           <a:prstGeom prst="rect">
@@ -1982,8 +1982,8 @@
         </p:nvSpPr>
         <p:spPr>
           <a:xfrm>
-            <a:off x="731520" y="1783080"/>
-            <a:ext cx="4206240" cy="731520"/>
+            <a:off x="548640" y="1691640"/>
+            <a:ext cx="4206240" cy="640080"/>
           </a:xfrm>
           <a:prstGeom prst="rect">
             <a:avLst/>
@@ -2002,14 +2002,14 @@
               <a:buNone/>
             </a:pPr>
             <a:r>
-              <a:rPr lang="en-US" sz="1300" dirty="0">
+              <a:rPr lang="en-US" sz="1250" dirty="0">
                 <a:solidFill>
                   <a:srgbClr val="94A3B8"/>
                 </a:solidFill>
               </a:rPr>
               <a:t>Kiberxavflarni tushunish, amaliy himoyalanish va milliy kiber-madaniyatni shakllantirish platformasi.</a:t>
             </a:r>
-            <a:endParaRPr lang="en-US" sz="1300" dirty="0"/>
+            <a:endParaRPr lang="en-US" sz="1250" dirty="0"/>
           </a:p>
         </p:txBody>
       </p:sp>
@@ -2021,7 +2021,7 @@
         </p:nvSpPr>
         <p:spPr>
           <a:xfrm>
-            <a:off x="731520" y="2606040"/>
+            <a:off x="548640" y="2468880"/>
             <a:ext cx="4206240" cy="777240"/>
           </a:xfrm>
           <a:prstGeom prst="roundRect">
@@ -2046,8 +2046,8 @@
         </p:nvSpPr>
         <p:spPr>
           <a:xfrm>
-            <a:off x="868680" y="2670048"/>
-            <a:ext cx="3931920" cy="640080"/>
+            <a:off x="685800" y="2514600"/>
+            <a:ext cx="3931920" cy="685800"/>
           </a:xfrm>
           <a:prstGeom prst="rect">
             <a:avLst/>
@@ -2068,7 +2068,7 @@
                   <a:srgbClr val="94A3B8"/>
                 </a:solidFill>
               </a:rPr>
-              <a:t>Rasmiy Web Manzil:
+              <a:t>🌐 Rasmiy Sayt Manzili:
 </a:t>
             </a:r>
             <a:pPr indent="0" marL="0">
@@ -2094,7 +2094,7 @@
         </p:nvSpPr>
         <p:spPr>
           <a:xfrm>
-            <a:off x="731520" y="3520440"/>
+            <a:off x="548640" y="3429000"/>
             <a:ext cx="4206240" cy="320040"/>
           </a:xfrm>
           <a:prstGeom prst="rect">
@@ -2130,8 +2130,8 @@
         </p:nvSpPr>
         <p:spPr>
           <a:xfrm>
-            <a:off x="5029200" y="640080"/>
-            <a:ext cx="3566160" cy="3931920"/>
+            <a:off x="4992624" y="512064"/>
+            <a:ext cx="3639312" cy="4370832"/>
           </a:xfrm>
           <a:prstGeom prst="roundRect">
             <a:avLst/>
@@ -2139,9 +2139,9 @@
           <a:solidFill>
             <a:srgbClr val="0D1A26"/>
           </a:solidFill>
-          <a:ln w="25400">
+          <a:ln w="19050">
             <a:solidFill>
-              <a:srgbClr val="10B981"/>
+              <a:srgbClr val="059669"/>
             </a:solidFill>
             <a:prstDash val="solid"/>
           </a:ln>
@@ -2163,14 +2163,50 @@
         </p:blipFill>
         <p:spPr>
           <a:xfrm>
-            <a:off x="5074920" y="685800"/>
-            <a:ext cx="3474720" cy="3840480"/>
+            <a:off x="5029200" y="548640"/>
+            <a:ext cx="3566160" cy="4023360"/>
           </a:xfrm>
           <a:prstGeom prst="rect">
             <a:avLst/>
           </a:prstGeom>
         </p:spPr>
       </p:pic>
+      <p:sp>
+        <p:nvSpPr>
+          <p:cNvPr id="12" name="Text 9"/>
+          <p:cNvSpPr/>
+          <p:nvPr/>
+        </p:nvSpPr>
+        <p:spPr>
+          <a:xfrm>
+            <a:off x="5029200" y="4608576"/>
+            <a:ext cx="3566160" cy="274320"/>
+          </a:xfrm>
+          <a:prstGeom prst="rect">
+            <a:avLst/>
+          </a:prstGeom>
+          <a:noFill/>
+          <a:ln/>
+        </p:spPr>
+        <p:txBody>
+          <a:bodyPr wrap="square" rtlCol="0" anchor="ctr"/>
+          <a:lstStyle/>
+          <a:p>
+            <a:pPr algn="ctr" indent="0" marL="0">
+              <a:buNone/>
+            </a:pPr>
+            <a:r>
+              <a:rPr lang="en-US" sz="900" dirty="0">
+                <a:solidFill>
+                  <a:srgbClr val="BAE6FD"/>
+                </a:solidFill>
+              </a:rPr>
+              <a:t>📸 Saytning jonli bosh sahifasi (Hero ekrani)</a:t>
+            </a:r>
+            <a:endParaRPr lang="en-US" sz="900" dirty="0"/>
+          </a:p>
+        </p:txBody>
+      </p:sp>
     </p:spTree>
   </p:cSld>
   <p:clrMapOvr>
@@ -2185,7 +2221,7 @@
     <p:bg>
       <p:bgPr>
         <a:solidFill>
-          <a:srgbClr val="F8FAFC"/>
+          <a:srgbClr val="F4F6F9"/>
         </a:solidFill>
       </p:bgPr>
     </p:bg>
@@ -2211,8 +2247,8 @@
         </p:nvSpPr>
         <p:spPr>
           <a:xfrm>
-            <a:off x="731520" y="320040"/>
-            <a:ext cx="2194560" cy="292608"/>
+            <a:off x="548640" y="228600"/>
+            <a:ext cx="2011680" cy="274320"/>
           </a:xfrm>
           <a:prstGeom prst="roundRect">
             <a:avLst/>
@@ -2236,8 +2272,8 @@
         </p:nvSpPr>
         <p:spPr>
           <a:xfrm>
-            <a:off x="731520" y="320040"/>
-            <a:ext cx="2194560" cy="292608"/>
+            <a:off x="548640" y="228600"/>
+            <a:ext cx="2011680" cy="274320"/>
           </a:xfrm>
           <a:prstGeom prst="rect">
             <a:avLst/>
@@ -2272,31 +2308,31 @@
         </p:nvSpPr>
         <p:spPr>
           <a:xfrm>
-            <a:off x="731520" y="658368"/>
-            <a:ext cx="7680960" cy="457200"/>
-          </a:xfrm>
-          <a:prstGeom prst="rect">
-            <a:avLst/>
-          </a:prstGeom>
-          <a:noFill/>
-          <a:ln/>
-        </p:spPr>
-        <p:txBody>
-          <a:bodyPr wrap="square" rtlCol="0" anchor="ctr"/>
-          <a:lstStyle/>
-          <a:p>
-            <a:pPr indent="0" marL="0">
-              <a:buNone/>
-            </a:pPr>
-            <a:r>
-              <a:rPr lang="en-US" sz="2200" b="1" dirty="0">
+            <a:off x="548640" y="548640"/>
+            <a:ext cx="8046720" cy="411480"/>
+          </a:xfrm>
+          <a:prstGeom prst="rect">
+            <a:avLst/>
+          </a:prstGeom>
+          <a:noFill/>
+          <a:ln/>
+        </p:spPr>
+        <p:txBody>
+          <a:bodyPr wrap="square" rtlCol="0" anchor="ctr"/>
+          <a:lstStyle/>
+          <a:p>
+            <a:pPr indent="0" marL="0">
+              <a:buNone/>
+            </a:pPr>
+            <a:r>
+              <a:rPr lang="en-US" sz="2000" b="1" dirty="0">
                 <a:solidFill>
                   <a:srgbClr val="0F172A"/>
                 </a:solidFill>
               </a:rPr>
               <a:t>Kamchiliklar va Rivojlantirish Rejalari</a:t>
             </a:r>
-            <a:endParaRPr lang="en-US" sz="2200" dirty="0"/>
+            <a:endParaRPr lang="en-US" sz="2000" dirty="0"/>
           </a:p>
         </p:txBody>
       </p:sp>
@@ -2308,31 +2344,31 @@
         </p:nvSpPr>
         <p:spPr>
           <a:xfrm>
-            <a:off x="731520" y="1078992"/>
-            <a:ext cx="7680960" cy="292608"/>
-          </a:xfrm>
-          <a:prstGeom prst="rect">
-            <a:avLst/>
-          </a:prstGeom>
-          <a:noFill/>
-          <a:ln/>
-        </p:spPr>
-        <p:txBody>
-          <a:bodyPr wrap="square" rtlCol="0" anchor="ctr"/>
-          <a:lstStyle/>
-          <a:p>
-            <a:pPr indent="0" marL="0">
-              <a:buNone/>
-            </a:pPr>
-            <a:r>
-              <a:rPr lang="en-US" sz="1200" dirty="0">
+            <a:off x="548640" y="960120"/>
+            <a:ext cx="8046720" cy="274320"/>
+          </a:xfrm>
+          <a:prstGeom prst="rect">
+            <a:avLst/>
+          </a:prstGeom>
+          <a:noFill/>
+          <a:ln/>
+        </p:spPr>
+        <p:txBody>
+          <a:bodyPr wrap="square" rtlCol="0" anchor="ctr"/>
+          <a:lstStyle/>
+          <a:p>
+            <a:pPr indent="0" marL="0">
+              <a:buNone/>
+            </a:pPr>
+            <a:r>
+              <a:rPr lang="en-US" sz="1100" dirty="0">
                 <a:solidFill>
                   <a:srgbClr val="475569"/>
                 </a:solidFill>
               </a:rPr>
               <a:t>Haqiqiy holatni ochiq baholash va kelajakdagi takomillashtirish bosqichlari</a:t>
             </a:r>
-            <a:endParaRPr lang="en-US" sz="1200" dirty="0"/>
+            <a:endParaRPr lang="en-US" sz="1100" dirty="0"/>
           </a:p>
         </p:txBody>
       </p:sp>
@@ -2344,8 +2380,93 @@
         </p:nvSpPr>
         <p:spPr>
           <a:xfrm>
-            <a:off x="731520" y="1463040"/>
-            <a:ext cx="3657600" cy="3200400"/>
+            <a:off x="512064" y="1289304"/>
+            <a:ext cx="4096512" cy="3822192"/>
+          </a:xfrm>
+          <a:prstGeom prst="roundRect">
+            <a:avLst/>
+          </a:prstGeom>
+          <a:solidFill>
+            <a:srgbClr val="0D1A26"/>
+          </a:solidFill>
+          <a:ln w="19050">
+            <a:solidFill>
+              <a:srgbClr val="059669"/>
+            </a:solidFill>
+            <a:prstDash val="solid"/>
+          </a:ln>
+        </p:spPr>
+      </p:sp>
+      <p:pic>
+        <p:nvPicPr>
+          <p:cNvPr id="7" name="Image 0" descr="C:\Users\User\Desktop\kiber xavfsizlik boyicha sayt\public\screenshots\12_casestudy.png">    </p:cNvPr>
+          <p:cNvPicPr>
+            <a:picLocks noChangeAspect="1"/>
+          </p:cNvPicPr>
+          <p:nvPr/>
+        </p:nvPicPr>
+        <p:blipFill>
+          <a:blip r:embed="rId1"/>
+          <a:stretch>
+            <a:fillRect/>
+          </a:stretch>
+        </p:blipFill>
+        <p:spPr>
+          <a:xfrm>
+            <a:off x="548640" y="1325880"/>
+            <a:ext cx="4023360" cy="3474720"/>
+          </a:xfrm>
+          <a:prstGeom prst="rect">
+            <a:avLst/>
+          </a:prstGeom>
+        </p:spPr>
+      </p:pic>
+      <p:sp>
+        <p:nvSpPr>
+          <p:cNvPr id="8" name="Text 5"/>
+          <p:cNvSpPr/>
+          <p:nvPr/>
+        </p:nvSpPr>
+        <p:spPr>
+          <a:xfrm>
+            <a:off x="548640" y="4837176"/>
+            <a:ext cx="4023360" cy="274320"/>
+          </a:xfrm>
+          <a:prstGeom prst="rect">
+            <a:avLst/>
+          </a:prstGeom>
+          <a:noFill/>
+          <a:ln/>
+        </p:spPr>
+        <p:txBody>
+          <a:bodyPr wrap="square" rtlCol="0" anchor="ctr"/>
+          <a:lstStyle/>
+          <a:p>
+            <a:pPr algn="ctr" indent="0" marL="0">
+              <a:buNone/>
+            </a:pPr>
+            <a:r>
+              <a:rPr lang="en-US" sz="900" dirty="0">
+                <a:solidFill>
+                  <a:srgbClr val="BAE6FD"/>
+                </a:solidFill>
+              </a:rPr>
+              <a:t>📸 "Hodisalar Tahlili" (Case Study) — kiber-hujumlar tahlili</a:t>
+            </a:r>
+            <a:endParaRPr lang="en-US" sz="900" dirty="0"/>
+          </a:p>
+        </p:txBody>
+      </p:sp>
+      <p:sp>
+        <p:nvSpPr>
+          <p:cNvPr id="9" name="Shape 6"/>
+          <p:cNvSpPr/>
+          <p:nvPr/>
+        </p:nvSpPr>
+        <p:spPr>
+          <a:xfrm>
+            <a:off x="4846320" y="1325880"/>
+            <a:ext cx="3749040" cy="1645920"/>
           </a:xfrm>
           <a:prstGeom prst="roundRect">
             <a:avLst/>
@@ -2363,164 +2484,143 @@
       </p:sp>
       <p:sp>
         <p:nvSpPr>
-          <p:cNvPr id="7" name="Text 5"/>
-          <p:cNvSpPr/>
-          <p:nvPr/>
-        </p:nvSpPr>
-        <p:spPr>
-          <a:xfrm>
-            <a:off x="914400" y="1645920"/>
-            <a:ext cx="3291840" cy="365760"/>
-          </a:xfrm>
-          <a:prstGeom prst="rect">
-            <a:avLst/>
-          </a:prstGeom>
-          <a:noFill/>
-          <a:ln/>
-        </p:spPr>
-        <p:txBody>
-          <a:bodyPr wrap="square" rtlCol="0" anchor="ctr"/>
-          <a:lstStyle/>
-          <a:p>
-            <a:pPr indent="0" marL="0">
-              <a:buNone/>
-            </a:pPr>
-            <a:r>
-              <a:rPr lang="en-US" sz="1300" b="1" dirty="0">
+          <p:cNvPr id="10" name="Text 7"/>
+          <p:cNvSpPr/>
+          <p:nvPr/>
+        </p:nvSpPr>
+        <p:spPr>
+          <a:xfrm>
+            <a:off x="4983480" y="1417320"/>
+            <a:ext cx="3474720" cy="274320"/>
+          </a:xfrm>
+          <a:prstGeom prst="rect">
+            <a:avLst/>
+          </a:prstGeom>
+          <a:noFill/>
+          <a:ln/>
+        </p:spPr>
+        <p:txBody>
+          <a:bodyPr wrap="square" rtlCol="0" anchor="ctr"/>
+          <a:lstStyle/>
+          <a:p>
+            <a:pPr indent="0" marL="0">
+              <a:buNone/>
+            </a:pPr>
+            <a:r>
+              <a:rPr lang="en-US" sz="1100" b="1" dirty="0">
                 <a:solidFill>
                   <a:srgbClr val="B45309"/>
                 </a:solidFill>
               </a:rPr>
-              <a:t>⚠️ Hozirgi Kamchiliklar (MVP)</a:t>
-            </a:r>
-            <a:endParaRPr lang="en-US" sz="1300" dirty="0"/>
-          </a:p>
-        </p:txBody>
-      </p:sp>
-      <p:sp>
-        <p:nvSpPr>
-          <p:cNvPr id="8" name="Text 6"/>
-          <p:cNvSpPr/>
-          <p:nvPr/>
-        </p:nvSpPr>
-        <p:spPr>
-          <a:xfrm>
-            <a:off x="914400" y="2103120"/>
-            <a:ext cx="3291840" cy="2377440"/>
-          </a:xfrm>
-          <a:prstGeom prst="rect">
-            <a:avLst/>
-          </a:prstGeom>
-          <a:noFill/>
-          <a:ln/>
-        </p:spPr>
-        <p:txBody>
-          <a:bodyPr wrap="square" rtlCol="0" anchor="ctr"/>
-          <a:lstStyle/>
-          <a:p>
-            <a:pPr indent="0" marL="0">
-              <a:lnSpc>
-                <a:spcPct val="115000"/>
-              </a:lnSpc>
-              <a:buNone/>
-            </a:pPr>
-            <a:r>
-              <a:rPr lang="en-US" sz="1100" b="1" dirty="0">
+              <a:t>⚠️ Aniqlangan Kamchiliklar (MVP):</a:t>
+            </a:r>
+            <a:endParaRPr lang="en-US" sz="1100" dirty="0"/>
+          </a:p>
+        </p:txBody>
+      </p:sp>
+      <p:sp>
+        <p:nvSpPr>
+          <p:cNvPr id="11" name="Text 8"/>
+          <p:cNvSpPr/>
+          <p:nvPr/>
+        </p:nvSpPr>
+        <p:spPr>
+          <a:xfrm>
+            <a:off x="4983480" y="1737360"/>
+            <a:ext cx="3474720" cy="1143000"/>
+          </a:xfrm>
+          <a:prstGeom prst="rect">
+            <a:avLst/>
+          </a:prstGeom>
+          <a:noFill/>
+          <a:ln/>
+        </p:spPr>
+        <p:txBody>
+          <a:bodyPr wrap="square" rtlCol="0" anchor="ctr"/>
+          <a:lstStyle/>
+          <a:p>
+            <a:pPr indent="0" marL="0">
+              <a:buNone/>
+            </a:pPr>
+            <a:r>
+              <a:rPr lang="en-US" sz="900" b="1" dirty="0">
                 <a:solidFill>
                   <a:srgbClr val="0F172A"/>
                 </a:solidFill>
               </a:rPr>
-              <a:t>1. Dinamik Server-Side Sandboxing:
+              <a:t>• Dinamik Server Sandboxing: </a:t>
+            </a:r>
+            <a:pPr indent="0" marL="0">
+              <a:buNone/>
+            </a:pPr>
+            <a:r>
+              <a:rPr lang="en-US" sz="900" dirty="0">
+                <a:solidFill>
+                  <a:srgbClr val="475569"/>
+                </a:solidFill>
+              </a:rPr>
+              <a:t>Hozircha veb-simulyatsiya; to‘liq Docker muhiti zarur.
 </a:t>
             </a:r>
             <a:pPr indent="0" marL="0">
-              <a:lnSpc>
-                <a:spcPct val="115000"/>
-              </a:lnSpc>
-              <a:buNone/>
-            </a:pPr>
-            <a:r>
-              <a:rPr lang="en-US" sz="950" dirty="0">
+              <a:buNone/>
+            </a:pPr>
+            <a:r>
+              <a:rPr lang="en-US" sz="900" b="1" dirty="0">
+                <a:solidFill>
+                  <a:srgbClr val="0F172A"/>
+                </a:solidFill>
+              </a:rPr>
+              <a:t>• Mahalliy ilova yo‘qligi: </a:t>
+            </a:r>
+            <a:pPr indent="0" marL="0">
+              <a:buNone/>
+            </a:pPr>
+            <a:r>
+              <a:rPr lang="en-US" sz="900" dirty="0">
                 <a:solidFill>
                   <a:srgbClr val="475569"/>
                 </a:solidFill>
               </a:rPr>
-              <a:t>Hozirda laboratoriyalar veb-simulyatsiya asosida; to'liq Docker konteynerli serverlar talab etiladi.
+              <a:t>Android/iOS ilovasi ishlab chiqilmoqda.
 </a:t>
             </a:r>
             <a:pPr indent="0" marL="0">
-              <a:lnSpc>
-                <a:spcPct val="115000"/>
-              </a:lnSpc>
-              <a:buNone/>
-            </a:pPr>
-            <a:r>
-              <a:rPr lang="en-US" sz="1100" b="1" dirty="0">
+              <a:buNone/>
+            </a:pPr>
+            <a:r>
+              <a:rPr lang="en-US" sz="900" b="1" dirty="0">
                 <a:solidFill>
                   <a:srgbClr val="0F172A"/>
                 </a:solidFill>
               </a:rPr>
-              <a:t>2. Mobil Ilova Mavjud Emas:
-</a:t>
-            </a:r>
-            <a:pPr indent="0" marL="0">
-              <a:lnSpc>
-                <a:spcPct val="115000"/>
-              </a:lnSpc>
-              <a:buNone/>
-            </a:pPr>
-            <a:r>
-              <a:rPr lang="en-US" sz="950" dirty="0">
+              <a:t>• Telegram bot: </a:t>
+            </a:r>
+            <a:pPr indent="0" marL="0">
+              <a:buNone/>
+            </a:pPr>
+            <a:r>
+              <a:rPr lang="en-US" sz="900" dirty="0">
                 <a:solidFill>
                   <a:srgbClr val="475569"/>
                 </a:solidFill>
               </a:rPr>
-              <a:t>Hozircha sayt faqat veb-brauzer orqali ishlaydi, mahalliy Android ilova ishlab chiqilmoqda.
-</a:t>
-            </a:r>
-            <a:pPr indent="0" marL="0">
-              <a:lnSpc>
-                <a:spcPct val="115000"/>
-              </a:lnSpc>
-              <a:buNone/>
-            </a:pPr>
-            <a:r>
-              <a:rPr lang="en-US" sz="1100" b="1" dirty="0">
-                <a:solidFill>
-                  <a:srgbClr val="0F172A"/>
-                </a:solidFill>
-              </a:rPr>
-              <a:t>3. Avtomatlashtirilgan Telegram Bot:
-</a:t>
-            </a:r>
-            <a:pPr indent="0" marL="0">
-              <a:lnSpc>
-                <a:spcPct val="115000"/>
-              </a:lnSpc>
-              <a:buNone/>
-            </a:pPr>
-            <a:r>
-              <a:rPr lang="en-US" sz="950" dirty="0">
-                <a:solidFill>
-                  <a:srgbClr val="475569"/>
-                </a:solidFill>
-              </a:rPr>
-              <a:t>Telegram orqali fayl tekshirish boti hali integratsiya qilinmoqda.</a:t>
-            </a:r>
-            <a:endParaRPr lang="en-US" sz="1100" dirty="0"/>
-          </a:p>
-        </p:txBody>
-      </p:sp>
-      <p:sp>
-        <p:nvSpPr>
-          <p:cNvPr id="9" name="Shape 7"/>
-          <p:cNvSpPr/>
-          <p:nvPr/>
-        </p:nvSpPr>
-        <p:spPr>
-          <a:xfrm>
-            <a:off x="4754880" y="1463040"/>
-            <a:ext cx="3657600" cy="3200400"/>
+              <a:t>Avtomatik APK tekshiruvchi bot ulanmoqda.</a:t>
+            </a:r>
+            <a:endParaRPr lang="en-US" sz="900" dirty="0"/>
+          </a:p>
+        </p:txBody>
+      </p:sp>
+      <p:sp>
+        <p:nvSpPr>
+          <p:cNvPr id="12" name="Shape 9"/>
+          <p:cNvSpPr/>
+          <p:nvPr/>
+        </p:nvSpPr>
+        <p:spPr>
+          <a:xfrm>
+            <a:off x="4846320" y="3154680"/>
+            <a:ext cx="3749040" cy="1645920"/>
           </a:xfrm>
           <a:prstGeom prst="roundRect">
             <a:avLst/>
@@ -2538,151 +2638,130 @@
       </p:sp>
       <p:sp>
         <p:nvSpPr>
-          <p:cNvPr id="10" name="Text 8"/>
-          <p:cNvSpPr/>
-          <p:nvPr/>
-        </p:nvSpPr>
-        <p:spPr>
-          <a:xfrm>
-            <a:off x="4937760" y="1645920"/>
-            <a:ext cx="3291840" cy="365760"/>
-          </a:xfrm>
-          <a:prstGeom prst="rect">
-            <a:avLst/>
-          </a:prstGeom>
-          <a:noFill/>
-          <a:ln/>
-        </p:spPr>
-        <p:txBody>
-          <a:bodyPr wrap="square" rtlCol="0" anchor="ctr"/>
-          <a:lstStyle/>
-          <a:p>
-            <a:pPr indent="0" marL="0">
-              <a:buNone/>
-            </a:pPr>
-            <a:r>
-              <a:rPr lang="en-US" sz="1300" b="1" dirty="0">
+          <p:cNvPr id="13" name="Text 10"/>
+          <p:cNvSpPr/>
+          <p:nvPr/>
+        </p:nvSpPr>
+        <p:spPr>
+          <a:xfrm>
+            <a:off x="4983480" y="3246120"/>
+            <a:ext cx="3474720" cy="274320"/>
+          </a:xfrm>
+          <a:prstGeom prst="rect">
+            <a:avLst/>
+          </a:prstGeom>
+          <a:noFill/>
+          <a:ln/>
+        </p:spPr>
+        <p:txBody>
+          <a:bodyPr wrap="square" rtlCol="0" anchor="ctr"/>
+          <a:lstStyle/>
+          <a:p>
+            <a:pPr indent="0" marL="0">
+              <a:buNone/>
+            </a:pPr>
+            <a:r>
+              <a:rPr lang="en-US" sz="1100" b="1" dirty="0">
                 <a:solidFill>
                   <a:srgbClr val="059669"/>
                 </a:solidFill>
               </a:rPr>
-              <a:t>🚀 Rivojlantirish Yo‘l Xaritasi</a:t>
-            </a:r>
-            <a:endParaRPr lang="en-US" sz="1300" dirty="0"/>
-          </a:p>
-        </p:txBody>
-      </p:sp>
-      <p:sp>
-        <p:nvSpPr>
-          <p:cNvPr id="11" name="Text 9"/>
-          <p:cNvSpPr/>
-          <p:nvPr/>
-        </p:nvSpPr>
-        <p:spPr>
-          <a:xfrm>
-            <a:off x="4937760" y="2103120"/>
-            <a:ext cx="3291840" cy="2377440"/>
-          </a:xfrm>
-          <a:prstGeom prst="rect">
-            <a:avLst/>
-          </a:prstGeom>
-          <a:noFill/>
-          <a:ln/>
-        </p:spPr>
-        <p:txBody>
-          <a:bodyPr wrap="square" rtlCol="0" anchor="ctr"/>
-          <a:lstStyle/>
-          <a:p>
-            <a:pPr indent="0" marL="0">
-              <a:lnSpc>
-                <a:spcPct val="115000"/>
-              </a:lnSpc>
-              <a:buNone/>
-            </a:pPr>
-            <a:r>
-              <a:rPr lang="en-US" sz="1100" b="1" dirty="0">
+              <a:t>🚀 Kelajakdagi Rivojlantirish:</a:t>
+            </a:r>
+            <a:endParaRPr lang="en-US" sz="1100" dirty="0"/>
+          </a:p>
+        </p:txBody>
+      </p:sp>
+      <p:sp>
+        <p:nvSpPr>
+          <p:cNvPr id="14" name="Text 11"/>
+          <p:cNvSpPr/>
+          <p:nvPr/>
+        </p:nvSpPr>
+        <p:spPr>
+          <a:xfrm>
+            <a:off x="4983480" y="3566160"/>
+            <a:ext cx="3474720" cy="1143000"/>
+          </a:xfrm>
+          <a:prstGeom prst="rect">
+            <a:avLst/>
+          </a:prstGeom>
+          <a:noFill/>
+          <a:ln/>
+        </p:spPr>
+        <p:txBody>
+          <a:bodyPr wrap="square" rtlCol="0" anchor="ctr"/>
+          <a:lstStyle/>
+          <a:p>
+            <a:pPr indent="0" marL="0">
+              <a:buNone/>
+            </a:pPr>
+            <a:r>
+              <a:rPr lang="en-US" sz="900" b="1" dirty="0">
                 <a:solidFill>
                   <a:srgbClr val="0F172A"/>
                 </a:solidFill>
               </a:rPr>
-              <a:t>1. Telegram Xavfsizlik Boti (2026 Q3):
+              <a:t>• Telegram Xavfsizlik Boti: </a:t>
+            </a:r>
+            <a:pPr indent="0" marL="0">
+              <a:buNone/>
+            </a:pPr>
+            <a:r>
+              <a:rPr lang="en-US" sz="900" dirty="0">
+                <a:solidFill>
+                  <a:srgbClr val="475569"/>
+                </a:solidFill>
+              </a:rPr>
+              <a:t>Shubhali faylni botga yuborib 2 soniyada natija olish.
 </a:t>
             </a:r>
             <a:pPr indent="0" marL="0">
-              <a:lnSpc>
-                <a:spcPct val="115000"/>
-              </a:lnSpc>
-              <a:buNone/>
-            </a:pPr>
-            <a:r>
-              <a:rPr lang="en-US" sz="950" dirty="0">
+              <a:buNone/>
+            </a:pPr>
+            <a:r>
+              <a:rPr lang="en-US" sz="900" b="1" dirty="0">
+                <a:solidFill>
+                  <a:srgbClr val="0F172A"/>
+                </a:solidFill>
+              </a:rPr>
+              <a:t>• B2B Korporativ Audit: </a:t>
+            </a:r>
+            <a:pPr indent="0" marL="0">
+              <a:buNone/>
+            </a:pPr>
+            <a:r>
+              <a:rPr lang="en-US" sz="900" dirty="0">
                 <a:solidFill>
                   <a:srgbClr val="475569"/>
                 </a:solidFill>
               </a:rPr>
-              <a:t>Foydalanuvchilar shubhali APK yoki havolani botga yuborib 2 soniyada natija oladi.
+              <a:t>Banklar va korxonalar uchun fishing simulyatsiyasi.
 </a:t>
             </a:r>
             <a:pPr indent="0" marL="0">
-              <a:lnSpc>
-                <a:spcPct val="115000"/>
-              </a:lnSpc>
-              <a:buNone/>
-            </a:pPr>
-            <a:r>
-              <a:rPr lang="en-US" sz="1100" b="1" dirty="0">
+              <a:buNone/>
+            </a:pPr>
+            <a:r>
+              <a:rPr lang="en-US" sz="900" b="1" dirty="0">
                 <a:solidFill>
                   <a:srgbClr val="0F172A"/>
                 </a:solidFill>
               </a:rPr>
-              <a:t>2. B2B Korporativ Trening Moduli:
-</a:t>
-            </a:r>
-            <a:pPr indent="0" marL="0">
-              <a:lnSpc>
-                <a:spcPct val="115000"/>
-              </a:lnSpc>
-              <a:buNone/>
-            </a:pPr>
-            <a:r>
-              <a:rPr lang="en-US" sz="950" dirty="0">
+              <a:t>• Respublika CTF Musobaqasi: </a:t>
+            </a:r>
+            <a:pPr indent="0" marL="0">
+              <a:buNone/>
+            </a:pPr>
+            <a:r>
+              <a:rPr lang="en-US" sz="900" dirty="0">
                 <a:solidFill>
                   <a:srgbClr val="475569"/>
                 </a:solidFill>
               </a:rPr>
-              <a:t>Banklar va kompaniyalar xodimlari uchun maxsus kiber-audit va fishing simulyatsiyasi.
-</a:t>
-            </a:r>
-            <a:pPr indent="0" marL="0">
-              <a:lnSpc>
-                <a:spcPct val="115000"/>
-              </a:lnSpc>
-              <a:buNone/>
-            </a:pPr>
-            <a:r>
-              <a:rPr lang="en-US" sz="1100" b="1" dirty="0">
-                <a:solidFill>
-                  <a:srgbClr val="0F172A"/>
-                </a:solidFill>
-              </a:rPr>
-              <a:t>3. Milliy Kiber-Olimpiada va CTF:
-</a:t>
-            </a:r>
-            <a:pPr indent="0" marL="0">
-              <a:lnSpc>
-                <a:spcPct val="115000"/>
-              </a:lnSpc>
-              <a:buNone/>
-            </a:pPr>
-            <a:r>
-              <a:rPr lang="en-US" sz="950" dirty="0">
-                <a:solidFill>
-                  <a:srgbClr val="475569"/>
-                </a:solidFill>
-              </a:rPr>
-              <a:t>Talabalar o'rtasida respublika miqyosida sovrinli kiber-musobaqalar o'tkazish.</a:t>
-            </a:r>
-            <a:endParaRPr lang="en-US" sz="1100" dirty="0"/>
+              <a:t>Yoshlar o‘rtasida kiber-olimpiada o‘tkazish.</a:t>
+            </a:r>
+            <a:endParaRPr lang="en-US" sz="900" dirty="0"/>
           </a:p>
         </p:txBody>
       </p:sp>
@@ -2700,7 +2779,7 @@
     <p:bg>
       <p:bgPr>
         <a:solidFill>
-          <a:srgbClr val="F8FAFC"/>
+          <a:srgbClr val="F4F6F9"/>
         </a:solidFill>
       </p:bgPr>
     </p:bg>
@@ -2726,8 +2805,8 @@
         </p:nvSpPr>
         <p:spPr>
           <a:xfrm>
-            <a:off x="731520" y="320040"/>
-            <a:ext cx="2194560" cy="292608"/>
+            <a:off x="548640" y="228600"/>
+            <a:ext cx="2011680" cy="274320"/>
           </a:xfrm>
           <a:prstGeom prst="roundRect">
             <a:avLst/>
@@ -2751,8 +2830,8 @@
         </p:nvSpPr>
         <p:spPr>
           <a:xfrm>
-            <a:off x="731520" y="320040"/>
-            <a:ext cx="2194560" cy="292608"/>
+            <a:off x="548640" y="228600"/>
+            <a:ext cx="2011680" cy="274320"/>
           </a:xfrm>
           <a:prstGeom prst="rect">
             <a:avLst/>
@@ -2787,31 +2866,31 @@
         </p:nvSpPr>
         <p:spPr>
           <a:xfrm>
-            <a:off x="731520" y="658368"/>
-            <a:ext cx="7680960" cy="457200"/>
-          </a:xfrm>
-          <a:prstGeom prst="rect">
-            <a:avLst/>
-          </a:prstGeom>
-          <a:noFill/>
-          <a:ln/>
-        </p:spPr>
-        <p:txBody>
-          <a:bodyPr wrap="square" rtlCol="0" anchor="ctr"/>
-          <a:lstStyle/>
-          <a:p>
-            <a:pPr indent="0" marL="0">
-              <a:buNone/>
-            </a:pPr>
-            <a:r>
-              <a:rPr lang="en-US" sz="2200" b="1" dirty="0">
+            <a:off x="548640" y="548640"/>
+            <a:ext cx="8046720" cy="411480"/>
+          </a:xfrm>
+          <a:prstGeom prst="rect">
+            <a:avLst/>
+          </a:prstGeom>
+          <a:noFill/>
+          <a:ln/>
+        </p:spPr>
+        <p:txBody>
+          <a:bodyPr wrap="square" rtlCol="0" anchor="ctr"/>
+          <a:lstStyle/>
+          <a:p>
+            <a:pPr indent="0" marL="0">
+              <a:buNone/>
+            </a:pPr>
+            <a:r>
+              <a:rPr lang="en-US" sz="2000" b="1" dirty="0">
                 <a:solidFill>
                   <a:srgbClr val="0F172A"/>
                 </a:solidFill>
               </a:rPr>
-              <a:t>Xulosa: KiberQoriqchi natijasi va jamiyatga foydasi</a:t>
-            </a:r>
-            <a:endParaRPr lang="en-US" sz="2200" dirty="0"/>
+              <a:t>Xulosa: Loyiha natijasi va jamiyatga foydasi</a:t>
+            </a:r>
+            <a:endParaRPr lang="en-US" sz="2000" dirty="0"/>
           </a:p>
         </p:txBody>
       </p:sp>
@@ -2823,31 +2902,31 @@
         </p:nvSpPr>
         <p:spPr>
           <a:xfrm>
-            <a:off x="731520" y="1078992"/>
-            <a:ext cx="7680960" cy="292608"/>
-          </a:xfrm>
-          <a:prstGeom prst="rect">
-            <a:avLst/>
-          </a:prstGeom>
-          <a:noFill/>
-          <a:ln/>
-        </p:spPr>
-        <p:txBody>
-          <a:bodyPr wrap="square" rtlCol="0" anchor="ctr"/>
-          <a:lstStyle/>
-          <a:p>
-            <a:pPr indent="0" marL="0">
-              <a:buNone/>
-            </a:pPr>
-            <a:r>
-              <a:rPr lang="en-US" sz="1200" dirty="0">
+            <a:off x="548640" y="960120"/>
+            <a:ext cx="8046720" cy="274320"/>
+          </a:xfrm>
+          <a:prstGeom prst="rect">
+            <a:avLst/>
+          </a:prstGeom>
+          <a:noFill/>
+          <a:ln/>
+        </p:spPr>
+        <p:txBody>
+          <a:bodyPr wrap="square" rtlCol="0" anchor="ctr"/>
+          <a:lstStyle/>
+          <a:p>
+            <a:pPr indent="0" marL="0">
+              <a:buNone/>
+            </a:pPr>
+            <a:r>
+              <a:rPr lang="en-US" sz="1100" dirty="0">
                 <a:solidFill>
                   <a:srgbClr val="475569"/>
                 </a:solidFill>
               </a:rPr>
               <a:t>Kiberxavfsizlik — faqat texnologiya emas, balki to‘g‘ri odatlar va amaliy bilimdir</a:t>
             </a:r>
-            <a:endParaRPr lang="en-US" sz="1200" dirty="0"/>
+            <a:endParaRPr lang="en-US" sz="1100" dirty="0"/>
           </a:p>
         </p:txBody>
       </p:sp>
@@ -2859,33 +2938,57 @@
         </p:nvSpPr>
         <p:spPr>
           <a:xfrm>
-            <a:off x="731520" y="1554480"/>
-            <a:ext cx="2468880" cy="1463040"/>
+            <a:off x="512064" y="1289304"/>
+            <a:ext cx="4096512" cy="3822192"/>
           </a:xfrm>
           <a:prstGeom prst="roundRect">
             <a:avLst/>
           </a:prstGeom>
           <a:solidFill>
-            <a:srgbClr val="FFFFFF"/>
+            <a:srgbClr val="0D1A26"/>
           </a:solidFill>
-          <a:ln w="25400">
+          <a:ln w="19050">
             <a:solidFill>
-              <a:srgbClr val="6EE7B7"/>
+              <a:srgbClr val="059669"/>
             </a:solidFill>
             <a:prstDash val="solid"/>
           </a:ln>
         </p:spPr>
       </p:sp>
-      <p:sp>
-        <p:nvSpPr>
-          <p:cNvPr id="7" name="Text 5"/>
-          <p:cNvSpPr/>
-          <p:nvPr/>
-        </p:nvSpPr>
-        <p:spPr>
-          <a:xfrm>
-            <a:off x="731520" y="1737360"/>
-            <a:ext cx="2468880" cy="548640"/>
+      <p:pic>
+        <p:nvPicPr>
+          <p:cNvPr id="7" name="Image 0" descr="C:\Users\User\Desktop\kiber xavfsizlik boyicha sayt\public\screenshots\10_login.png">    </p:cNvPr>
+          <p:cNvPicPr>
+            <a:picLocks noChangeAspect="1"/>
+          </p:cNvPicPr>
+          <p:nvPr/>
+        </p:nvPicPr>
+        <p:blipFill>
+          <a:blip r:embed="rId1"/>
+          <a:stretch>
+            <a:fillRect/>
+          </a:stretch>
+        </p:blipFill>
+        <p:spPr>
+          <a:xfrm>
+            <a:off x="548640" y="1325880"/>
+            <a:ext cx="4023360" cy="3474720"/>
+          </a:xfrm>
+          <a:prstGeom prst="rect">
+            <a:avLst/>
+          </a:prstGeom>
+        </p:spPr>
+      </p:pic>
+      <p:sp>
+        <p:nvSpPr>
+          <p:cNvPr id="8" name="Text 5"/>
+          <p:cNvSpPr/>
+          <p:nvPr/>
+        </p:nvSpPr>
+        <p:spPr>
+          <a:xfrm>
+            <a:off x="548640" y="4837176"/>
+            <a:ext cx="4023360" cy="274320"/>
           </a:xfrm>
           <a:prstGeom prst="rect">
             <a:avLst/>
@@ -2901,263 +3004,33 @@
               <a:buNone/>
             </a:pPr>
             <a:r>
-              <a:rPr lang="en-US" sz="2800" b="1" dirty="0">
-                <a:solidFill>
-                  <a:srgbClr val="059669"/>
-                </a:solidFill>
-              </a:rPr>
-              <a:t>32M+</a:t>
-            </a:r>
-            <a:endParaRPr lang="en-US" sz="2800" dirty="0"/>
-          </a:p>
-        </p:txBody>
-      </p:sp>
-      <p:sp>
-        <p:nvSpPr>
-          <p:cNvPr id="8" name="Text 6"/>
-          <p:cNvSpPr/>
-          <p:nvPr/>
-        </p:nvSpPr>
-        <p:spPr>
-          <a:xfrm>
-            <a:off x="868680" y="2286000"/>
-            <a:ext cx="2194560" cy="594360"/>
-          </a:xfrm>
-          <a:prstGeom prst="rect">
-            <a:avLst/>
-          </a:prstGeom>
-          <a:noFill/>
-          <a:ln/>
-        </p:spPr>
-        <p:txBody>
-          <a:bodyPr wrap="square" rtlCol="0" anchor="ctr"/>
-          <a:lstStyle/>
-          <a:p>
-            <a:pPr algn="ctr" indent="0" marL="0">
-              <a:buNone/>
-            </a:pPr>
-            <a:r>
-              <a:rPr lang="en-US" sz="1050" dirty="0">
-                <a:solidFill>
-                  <a:srgbClr val="0F172A"/>
-                </a:solidFill>
-              </a:rPr>
-              <a:t>Aholi kiber-xavflardan himoyalanish madaniyatiga ega bo‘ladi.</a:t>
-            </a:r>
-            <a:endParaRPr lang="en-US" sz="1050" dirty="0"/>
-          </a:p>
-        </p:txBody>
-      </p:sp>
-      <p:sp>
-        <p:nvSpPr>
-          <p:cNvPr id="9" name="Shape 7"/>
-          <p:cNvSpPr/>
-          <p:nvPr/>
-        </p:nvSpPr>
-        <p:spPr>
-          <a:xfrm>
-            <a:off x="3337560" y="1554480"/>
-            <a:ext cx="2468880" cy="1463040"/>
+              <a:rPr lang="en-US" sz="900" dirty="0">
+                <a:solidFill>
+                  <a:srgbClr val="BAE6FD"/>
+                </a:solidFill>
+              </a:rPr>
+              <a:t>📸 Ro‘yxatdan o‘tish va shaxsiy kabinet interfeysi</a:t>
+            </a:r>
+            <a:endParaRPr lang="en-US" sz="900" dirty="0"/>
+          </a:p>
+        </p:txBody>
+      </p:sp>
+      <p:sp>
+        <p:nvSpPr>
+          <p:cNvPr id="9" name="Shape 6"/>
+          <p:cNvSpPr/>
+          <p:nvPr/>
+        </p:nvSpPr>
+        <p:spPr>
+          <a:xfrm>
+            <a:off x="4846320" y="1325880"/>
+            <a:ext cx="3749040" cy="1005840"/>
           </a:xfrm>
           <a:prstGeom prst="roundRect">
             <a:avLst/>
           </a:prstGeom>
           <a:solidFill>
             <a:srgbClr val="FFFFFF"/>
-          </a:solidFill>
-          <a:ln w="25400">
-            <a:solidFill>
-              <a:srgbClr val="6EE7B7"/>
-            </a:solidFill>
-            <a:prstDash val="solid"/>
-          </a:ln>
-        </p:spPr>
-      </p:sp>
-      <p:sp>
-        <p:nvSpPr>
-          <p:cNvPr id="10" name="Text 8"/>
-          <p:cNvSpPr/>
-          <p:nvPr/>
-        </p:nvSpPr>
-        <p:spPr>
-          <a:xfrm>
-            <a:off x="3337560" y="1737360"/>
-            <a:ext cx="2468880" cy="548640"/>
-          </a:xfrm>
-          <a:prstGeom prst="rect">
-            <a:avLst/>
-          </a:prstGeom>
-          <a:noFill/>
-          <a:ln/>
-        </p:spPr>
-        <p:txBody>
-          <a:bodyPr wrap="square" rtlCol="0" anchor="ctr"/>
-          <a:lstStyle/>
-          <a:p>
-            <a:pPr algn="ctr" indent="0" marL="0">
-              <a:buNone/>
-            </a:pPr>
-            <a:r>
-              <a:rPr lang="en-US" sz="2800" b="1" dirty="0">
-                <a:solidFill>
-                  <a:srgbClr val="059669"/>
-                </a:solidFill>
-              </a:rPr>
-              <a:t>1-Click</a:t>
-            </a:r>
-            <a:endParaRPr lang="en-US" sz="2800" dirty="0"/>
-          </a:p>
-        </p:txBody>
-      </p:sp>
-      <p:sp>
-        <p:nvSpPr>
-          <p:cNvPr id="11" name="Text 9"/>
-          <p:cNvSpPr/>
-          <p:nvPr/>
-        </p:nvSpPr>
-        <p:spPr>
-          <a:xfrm>
-            <a:off x="3474720" y="2286000"/>
-            <a:ext cx="2194560" cy="594360"/>
-          </a:xfrm>
-          <a:prstGeom prst="rect">
-            <a:avLst/>
-          </a:prstGeom>
-          <a:noFill/>
-          <a:ln/>
-        </p:spPr>
-        <p:txBody>
-          <a:bodyPr wrap="square" rtlCol="0" anchor="ctr"/>
-          <a:lstStyle/>
-          <a:p>
-            <a:pPr algn="ctr" indent="0" marL="0">
-              <a:buNone/>
-            </a:pPr>
-            <a:r>
-              <a:rPr lang="en-US" sz="1050" dirty="0">
-                <a:solidFill>
-                  <a:srgbClr val="0F172A"/>
-                </a:solidFill>
-              </a:rPr>
-              <a:t>Smartfon va APK xavfsizligini tekshirish uchun oson milliy yechim.</a:t>
-            </a:r>
-            <a:endParaRPr lang="en-US" sz="1050" dirty="0"/>
-          </a:p>
-        </p:txBody>
-      </p:sp>
-      <p:sp>
-        <p:nvSpPr>
-          <p:cNvPr id="12" name="Shape 10"/>
-          <p:cNvSpPr/>
-          <p:nvPr/>
-        </p:nvSpPr>
-        <p:spPr>
-          <a:xfrm>
-            <a:off x="5943600" y="1554480"/>
-            <a:ext cx="2468880" cy="1463040"/>
-          </a:xfrm>
-          <a:prstGeom prst="roundRect">
-            <a:avLst/>
-          </a:prstGeom>
-          <a:solidFill>
-            <a:srgbClr val="FFFFFF"/>
-          </a:solidFill>
-          <a:ln w="25400">
-            <a:solidFill>
-              <a:srgbClr val="6EE7B7"/>
-            </a:solidFill>
-            <a:prstDash val="solid"/>
-          </a:ln>
-        </p:spPr>
-      </p:sp>
-      <p:sp>
-        <p:nvSpPr>
-          <p:cNvPr id="13" name="Text 11"/>
-          <p:cNvSpPr/>
-          <p:nvPr/>
-        </p:nvSpPr>
-        <p:spPr>
-          <a:xfrm>
-            <a:off x="5943600" y="1737360"/>
-            <a:ext cx="2468880" cy="548640"/>
-          </a:xfrm>
-          <a:prstGeom prst="rect">
-            <a:avLst/>
-          </a:prstGeom>
-          <a:noFill/>
-          <a:ln/>
-        </p:spPr>
-        <p:txBody>
-          <a:bodyPr wrap="square" rtlCol="0" anchor="ctr"/>
-          <a:lstStyle/>
-          <a:p>
-            <a:pPr algn="ctr" indent="0" marL="0">
-              <a:buNone/>
-            </a:pPr>
-            <a:r>
-              <a:rPr lang="en-US" sz="2800" b="1" dirty="0">
-                <a:solidFill>
-                  <a:srgbClr val="059669"/>
-                </a:solidFill>
-              </a:rPr>
-              <a:t>100%</a:t>
-            </a:r>
-            <a:endParaRPr lang="en-US" sz="2800" dirty="0"/>
-          </a:p>
-        </p:txBody>
-      </p:sp>
-      <p:sp>
-        <p:nvSpPr>
-          <p:cNvPr id="14" name="Text 12"/>
-          <p:cNvSpPr/>
-          <p:nvPr/>
-        </p:nvSpPr>
-        <p:spPr>
-          <a:xfrm>
-            <a:off x="6080760" y="2286000"/>
-            <a:ext cx="2194560" cy="594360"/>
-          </a:xfrm>
-          <a:prstGeom prst="rect">
-            <a:avLst/>
-          </a:prstGeom>
-          <a:noFill/>
-          <a:ln/>
-        </p:spPr>
-        <p:txBody>
-          <a:bodyPr wrap="square" rtlCol="0" anchor="ctr"/>
-          <a:lstStyle/>
-          <a:p>
-            <a:pPr algn="ctr" indent="0" marL="0">
-              <a:buNone/>
-            </a:pPr>
-            <a:r>
-              <a:rPr lang="en-US" sz="1050" dirty="0">
-                <a:solidFill>
-                  <a:srgbClr val="0F172A"/>
-                </a:solidFill>
-              </a:rPr>
-              <a:t>Ona tilimizda yangi avlod kiberxavfsizlik mutaxassislari tayyorlanadi.</a:t>
-            </a:r>
-            <a:endParaRPr lang="en-US" sz="1050" dirty="0"/>
-          </a:p>
-        </p:txBody>
-      </p:sp>
-      <p:sp>
-        <p:nvSpPr>
-          <p:cNvPr id="15" name="Shape 13"/>
-          <p:cNvSpPr/>
-          <p:nvPr/>
-        </p:nvSpPr>
-        <p:spPr>
-          <a:xfrm>
-            <a:off x="731520" y="3291840"/>
-            <a:ext cx="7680960" cy="1280160"/>
-          </a:xfrm>
-          <a:prstGeom prst="roundRect">
-            <a:avLst/>
-          </a:prstGeom>
-          <a:solidFill>
-            <a:srgbClr val="ECFDF5"/>
           </a:solidFill>
           <a:ln w="19050">
             <a:solidFill>
@@ -3169,14 +3042,14 @@
       </p:sp>
       <p:sp>
         <p:nvSpPr>
-          <p:cNvPr id="16" name="Text 14"/>
-          <p:cNvSpPr/>
-          <p:nvPr/>
-        </p:nvSpPr>
-        <p:spPr>
-          <a:xfrm>
-            <a:off x="914400" y="3474720"/>
-            <a:ext cx="7315200" cy="914400"/>
+          <p:cNvPr id="10" name="Text 7"/>
+          <p:cNvSpPr/>
+          <p:nvPr/>
+        </p:nvSpPr>
+        <p:spPr>
+          <a:xfrm>
+            <a:off x="5029200" y="1417320"/>
+            <a:ext cx="1280160" cy="731520"/>
           </a:xfrm>
           <a:prstGeom prst="rect">
             <a:avLst/>
@@ -3189,35 +3062,247 @@
           <a:lstStyle/>
           <a:p>
             <a:pPr algn="ctr" indent="0" marL="0">
-              <a:lnSpc>
-                <a:spcPct val="120000"/>
-              </a:lnSpc>
-              <a:buNone/>
-            </a:pPr>
-            <a:r>
-              <a:rPr lang="en-US" sz="1300" b="1" dirty="0">
+              <a:buNone/>
+            </a:pPr>
+            <a:r>
+              <a:rPr lang="en-US" sz="2600" b="1" dirty="0">
                 <a:solidFill>
                   <a:srgbClr val="059669"/>
                 </a:solidFill>
               </a:rPr>
-              <a:t>«KiberQoriqchi — shunchaki veb-sayt emas, balki Raqamli O‘zbekistonni kiber-tahdidlardan himoya qiluvchi ishonchli milliy qalqondir!»
-</a:t>
-            </a:r>
+              <a:t>32M+</a:t>
+            </a:r>
+            <a:endParaRPr lang="en-US" sz="2600" dirty="0"/>
+          </a:p>
+        </p:txBody>
+      </p:sp>
+      <p:sp>
+        <p:nvSpPr>
+          <p:cNvPr id="11" name="Text 8"/>
+          <p:cNvSpPr/>
+          <p:nvPr/>
+        </p:nvSpPr>
+        <p:spPr>
+          <a:xfrm>
+            <a:off x="6400800" y="1463040"/>
+            <a:ext cx="2057400" cy="731520"/>
+          </a:xfrm>
+          <a:prstGeom prst="rect">
+            <a:avLst/>
+          </a:prstGeom>
+          <a:noFill/>
+          <a:ln/>
+        </p:spPr>
+        <p:txBody>
+          <a:bodyPr wrap="square" rtlCol="0" anchor="ctr"/>
+          <a:lstStyle/>
+          <a:p>
+            <a:pPr indent="0" marL="0">
+              <a:buNone/>
+            </a:pPr>
+            <a:r>
+              <a:rPr lang="en-US" sz="1000" dirty="0">
+                <a:solidFill>
+                  <a:srgbClr val="0F172A"/>
+                </a:solidFill>
+              </a:rPr>
+              <a:t>Aholi kiber-xavflardan himoyalanish madaniyatiga ega bo‘ladi.</a:t>
+            </a:r>
+            <a:endParaRPr lang="en-US" sz="1000" dirty="0"/>
+          </a:p>
+        </p:txBody>
+      </p:sp>
+      <p:sp>
+        <p:nvSpPr>
+          <p:cNvPr id="12" name="Shape 9"/>
+          <p:cNvSpPr/>
+          <p:nvPr/>
+        </p:nvSpPr>
+        <p:spPr>
+          <a:xfrm>
+            <a:off x="4846320" y="2468880"/>
+            <a:ext cx="3749040" cy="1005840"/>
+          </a:xfrm>
+          <a:prstGeom prst="roundRect">
+            <a:avLst/>
+          </a:prstGeom>
+          <a:solidFill>
+            <a:srgbClr val="FFFFFF"/>
+          </a:solidFill>
+          <a:ln w="19050">
+            <a:solidFill>
+              <a:srgbClr val="6EE7B7"/>
+            </a:solidFill>
+            <a:prstDash val="solid"/>
+          </a:ln>
+        </p:spPr>
+      </p:sp>
+      <p:sp>
+        <p:nvSpPr>
+          <p:cNvPr id="13" name="Text 10"/>
+          <p:cNvSpPr/>
+          <p:nvPr/>
+        </p:nvSpPr>
+        <p:spPr>
+          <a:xfrm>
+            <a:off x="5029200" y="2560320"/>
+            <a:ext cx="1280160" cy="731520"/>
+          </a:xfrm>
+          <a:prstGeom prst="rect">
+            <a:avLst/>
+          </a:prstGeom>
+          <a:noFill/>
+          <a:ln/>
+        </p:spPr>
+        <p:txBody>
+          <a:bodyPr wrap="square" rtlCol="0" anchor="ctr"/>
+          <a:lstStyle/>
+          <a:p>
             <a:pPr algn="ctr" indent="0" marL="0">
-              <a:lnSpc>
-                <a:spcPct val="120000"/>
-              </a:lnSpc>
-              <a:buNone/>
-            </a:pPr>
-            <a:r>
-              <a:rPr lang="en-US" sz="1100" dirty="0">
+              <a:buNone/>
+            </a:pPr>
+            <a:r>
+              <a:rPr lang="en-US" sz="2600" b="1" dirty="0">
+                <a:solidFill>
+                  <a:srgbClr val="059669"/>
+                </a:solidFill>
+              </a:rPr>
+              <a:t>1-Click</a:t>
+            </a:r>
+            <a:endParaRPr lang="en-US" sz="2600" dirty="0"/>
+          </a:p>
+        </p:txBody>
+      </p:sp>
+      <p:sp>
+        <p:nvSpPr>
+          <p:cNvPr id="14" name="Text 11"/>
+          <p:cNvSpPr/>
+          <p:nvPr/>
+        </p:nvSpPr>
+        <p:spPr>
+          <a:xfrm>
+            <a:off x="6400800" y="2606040"/>
+            <a:ext cx="2057400" cy="731520"/>
+          </a:xfrm>
+          <a:prstGeom prst="rect">
+            <a:avLst/>
+          </a:prstGeom>
+          <a:noFill/>
+          <a:ln/>
+        </p:spPr>
+        <p:txBody>
+          <a:bodyPr wrap="square" rtlCol="0" anchor="ctr"/>
+          <a:lstStyle/>
+          <a:p>
+            <a:pPr indent="0" marL="0">
+              <a:buNone/>
+            </a:pPr>
+            <a:r>
+              <a:rPr lang="en-US" sz="1000" dirty="0">
                 <a:solidFill>
                   <a:srgbClr val="0F172A"/>
                 </a:solidFill>
               </a:rPr>
-              <a:t>Platforma foydalanuvchini xavfni tanish → chorani tanlash → xavfsiz harakat qilish bosqichlariga o‘rgatadi.</a:t>
-            </a:r>
-            <a:endParaRPr lang="en-US" sz="1300" dirty="0"/>
+              <a:t>Smartfon va APK xavfsizligini tekshirish uchun oson milliy yechim.</a:t>
+            </a:r>
+            <a:endParaRPr lang="en-US" sz="1000" dirty="0"/>
+          </a:p>
+        </p:txBody>
+      </p:sp>
+      <p:sp>
+        <p:nvSpPr>
+          <p:cNvPr id="15" name="Shape 12"/>
+          <p:cNvSpPr/>
+          <p:nvPr/>
+        </p:nvSpPr>
+        <p:spPr>
+          <a:xfrm>
+            <a:off x="4846320" y="3611880"/>
+            <a:ext cx="3749040" cy="1005840"/>
+          </a:xfrm>
+          <a:prstGeom prst="roundRect">
+            <a:avLst/>
+          </a:prstGeom>
+          <a:solidFill>
+            <a:srgbClr val="FFFFFF"/>
+          </a:solidFill>
+          <a:ln w="19050">
+            <a:solidFill>
+              <a:srgbClr val="6EE7B7"/>
+            </a:solidFill>
+            <a:prstDash val="solid"/>
+          </a:ln>
+        </p:spPr>
+      </p:sp>
+      <p:sp>
+        <p:nvSpPr>
+          <p:cNvPr id="16" name="Text 13"/>
+          <p:cNvSpPr/>
+          <p:nvPr/>
+        </p:nvSpPr>
+        <p:spPr>
+          <a:xfrm>
+            <a:off x="5029200" y="3703320"/>
+            <a:ext cx="1280160" cy="731520"/>
+          </a:xfrm>
+          <a:prstGeom prst="rect">
+            <a:avLst/>
+          </a:prstGeom>
+          <a:noFill/>
+          <a:ln/>
+        </p:spPr>
+        <p:txBody>
+          <a:bodyPr wrap="square" rtlCol="0" anchor="ctr"/>
+          <a:lstStyle/>
+          <a:p>
+            <a:pPr algn="ctr" indent="0" marL="0">
+              <a:buNone/>
+            </a:pPr>
+            <a:r>
+              <a:rPr lang="en-US" sz="2600" b="1" dirty="0">
+                <a:solidFill>
+                  <a:srgbClr val="059669"/>
+                </a:solidFill>
+              </a:rPr>
+              <a:t>100%</a:t>
+            </a:r>
+            <a:endParaRPr lang="en-US" sz="2600" dirty="0"/>
+          </a:p>
+        </p:txBody>
+      </p:sp>
+      <p:sp>
+        <p:nvSpPr>
+          <p:cNvPr id="17" name="Text 14"/>
+          <p:cNvSpPr/>
+          <p:nvPr/>
+        </p:nvSpPr>
+        <p:spPr>
+          <a:xfrm>
+            <a:off x="6400800" y="3749040"/>
+            <a:ext cx="2057400" cy="731520"/>
+          </a:xfrm>
+          <a:prstGeom prst="rect">
+            <a:avLst/>
+          </a:prstGeom>
+          <a:noFill/>
+          <a:ln/>
+        </p:spPr>
+        <p:txBody>
+          <a:bodyPr wrap="square" rtlCol="0" anchor="ctr"/>
+          <a:lstStyle/>
+          <a:p>
+            <a:pPr indent="0" marL="0">
+              <a:buNone/>
+            </a:pPr>
+            <a:r>
+              <a:rPr lang="en-US" sz="1000" dirty="0">
+                <a:solidFill>
+                  <a:srgbClr val="0F172A"/>
+                </a:solidFill>
+              </a:rPr>
+              <a:t>Ona tilimizda yangi avlod kiber-mutaxassislari tayyorlanadi.</a:t>
+            </a:r>
+            <a:endParaRPr lang="en-US" sz="1000" dirty="0"/>
           </a:p>
         </p:txBody>
       </p:sp>
@@ -3281,8 +3366,8 @@
         </p:nvSpPr>
         <p:spPr>
           <a:xfrm>
-            <a:off x="731520" y="822960"/>
-            <a:ext cx="4572000" cy="640080"/>
+            <a:off x="548640" y="594360"/>
+            <a:ext cx="4572000" cy="594360"/>
           </a:xfrm>
           <a:prstGeom prst="rect">
             <a:avLst/>
@@ -3317,8 +3402,8 @@
         </p:nvSpPr>
         <p:spPr>
           <a:xfrm>
-            <a:off x="731520" y="1508760"/>
-            <a:ext cx="4389120" cy="457200"/>
+            <a:off x="548640" y="1234440"/>
+            <a:ext cx="4389120" cy="411480"/>
           </a:xfrm>
           <a:prstGeom prst="rect">
             <a:avLst/>
@@ -3353,8 +3438,8 @@
         </p:nvSpPr>
         <p:spPr>
           <a:xfrm>
-            <a:off x="731520" y="2103120"/>
-            <a:ext cx="4389120" cy="2011680"/>
+            <a:off x="548640" y="1783080"/>
+            <a:ext cx="4389120" cy="2834640"/>
           </a:xfrm>
           <a:prstGeom prst="roundRect">
             <a:avLst/>
@@ -3378,8 +3463,8 @@
         </p:nvSpPr>
         <p:spPr>
           <a:xfrm>
-            <a:off x="914400" y="2240280"/>
-            <a:ext cx="4023360" cy="1737360"/>
+            <a:off x="731520" y="1920240"/>
+            <a:ext cx="4023360" cy="2468880"/>
           </a:xfrm>
           <a:prstGeom prst="rect">
             <a:avLst/>
@@ -3393,7 +3478,7 @@
           <a:p>
             <a:pPr indent="0" marL="0">
               <a:lnSpc>
-                <a:spcPct val="115000"/>
+                <a:spcPct val="120000"/>
               </a:lnSpc>
               <a:buNone/>
             </a:pPr>
@@ -3403,12 +3488,12 @@
                   <a:srgbClr val="10B981"/>
                 </a:solidFill>
               </a:rPr>
-              <a:t>🌐 Sayt havolasi:
+              <a:t>🌐 Jonli Sayt Havolasi:
 </a:t>
             </a:r>
             <a:pPr indent="0" marL="0">
               <a:lnSpc>
-                <a:spcPct val="115000"/>
+                <a:spcPct val="120000"/>
               </a:lnSpc>
               <a:buNone/>
             </a:pPr>
@@ -3423,7 +3508,7 @@
             </a:r>
             <a:pPr indent="0" marL="0">
               <a:lnSpc>
-                <a:spcPct val="115000"/>
+                <a:spcPct val="120000"/>
               </a:lnSpc>
               <a:buNone/>
             </a:pPr>
@@ -3438,12 +3523,12 @@
             </a:r>
             <a:pPr indent="0" marL="0">
               <a:lnSpc>
-                <a:spcPct val="115000"/>
+                <a:spcPct val="120000"/>
               </a:lnSpc>
               <a:buNone/>
             </a:pPr>
             <a:r>
-              <a:rPr lang="en-US" sz="1000" dirty="0">
+              <a:rPr lang="en-US" sz="1050" dirty="0">
                 <a:solidFill>
                   <a:srgbClr val="F8FAFC"/>
                 </a:solidFill>
@@ -3453,12 +3538,12 @@
             </a:r>
             <a:pPr indent="0" marL="0">
               <a:lnSpc>
-                <a:spcPct val="115000"/>
+                <a:spcPct val="120000"/>
               </a:lnSpc>
               <a:buNone/>
             </a:pPr>
             <a:r>
-              <a:rPr lang="en-US" sz="1000" i="1" dirty="0">
+              <a:rPr lang="en-US" sz="1100" i="1" dirty="0">
                 <a:solidFill>
                   <a:srgbClr val="34D399"/>
                 </a:solidFill>
@@ -3477,8 +3562,8 @@
         </p:nvSpPr>
         <p:spPr>
           <a:xfrm>
-            <a:off x="5394960" y="731520"/>
-            <a:ext cx="3200400" cy="3840480"/>
+            <a:off x="5175504" y="557784"/>
+            <a:ext cx="3456432" cy="4370832"/>
           </a:xfrm>
           <a:prstGeom prst="roundRect">
             <a:avLst/>
@@ -3486,9 +3571,9 @@
           <a:solidFill>
             <a:srgbClr val="0D1A26"/>
           </a:solidFill>
-          <a:ln w="25400">
+          <a:ln w="19050">
             <a:solidFill>
-              <a:srgbClr val="10B981"/>
+              <a:srgbClr val="059669"/>
             </a:solidFill>
             <a:prstDash val="solid"/>
           </a:ln>
@@ -3510,14 +3595,50 @@
         </p:blipFill>
         <p:spPr>
           <a:xfrm>
-            <a:off x="5440680" y="777240"/>
-            <a:ext cx="3108960" cy="3749040"/>
+            <a:off x="5212080" y="594360"/>
+            <a:ext cx="3383280" cy="4023360"/>
           </a:xfrm>
           <a:prstGeom prst="rect">
             <a:avLst/>
           </a:prstGeom>
         </p:spPr>
       </p:pic>
+      <p:sp>
+        <p:nvSpPr>
+          <p:cNvPr id="9" name="Text 6"/>
+          <p:cNvSpPr/>
+          <p:nvPr/>
+        </p:nvSpPr>
+        <p:spPr>
+          <a:xfrm>
+            <a:off x="5212080" y="4654296"/>
+            <a:ext cx="3383280" cy="274320"/>
+          </a:xfrm>
+          <a:prstGeom prst="rect">
+            <a:avLst/>
+          </a:prstGeom>
+          <a:noFill/>
+          <a:ln/>
+        </p:spPr>
+        <p:txBody>
+          <a:bodyPr wrap="square" rtlCol="0" anchor="ctr"/>
+          <a:lstStyle/>
+          <a:p>
+            <a:pPr algn="ctr" indent="0" marL="0">
+              <a:buNone/>
+            </a:pPr>
+            <a:r>
+              <a:rPr lang="en-US" sz="900" dirty="0">
+                <a:solidFill>
+                  <a:srgbClr val="BAE6FD"/>
+                </a:solidFill>
+              </a:rPr>
+              <a:t>📸 KiberQoriqchi rasmiy web-platformasi</a:t>
+            </a:r>
+            <a:endParaRPr lang="en-US" sz="900" dirty="0"/>
+          </a:p>
+        </p:txBody>
+      </p:sp>
     </p:spTree>
   </p:cSld>
   <p:clrMapOvr>
@@ -3532,7 +3653,7 @@
     <p:bg>
       <p:bgPr>
         <a:solidFill>
-          <a:srgbClr val="F8FAFC"/>
+          <a:srgbClr val="F4F6F9"/>
         </a:solidFill>
       </p:bgPr>
     </p:bg>
@@ -3558,8 +3679,8 @@
         </p:nvSpPr>
         <p:spPr>
           <a:xfrm>
-            <a:off x="731520" y="320040"/>
-            <a:ext cx="2194560" cy="292608"/>
+            <a:off x="548640" y="228600"/>
+            <a:ext cx="2011680" cy="274320"/>
           </a:xfrm>
           <a:prstGeom prst="roundRect">
             <a:avLst/>
@@ -3583,8 +3704,8 @@
         </p:nvSpPr>
         <p:spPr>
           <a:xfrm>
-            <a:off x="731520" y="320040"/>
-            <a:ext cx="2194560" cy="292608"/>
+            <a:off x="548640" y="228600"/>
+            <a:ext cx="2011680" cy="274320"/>
           </a:xfrm>
           <a:prstGeom prst="rect">
             <a:avLst/>
@@ -3619,31 +3740,31 @@
         </p:nvSpPr>
         <p:spPr>
           <a:xfrm>
-            <a:off x="731520" y="658368"/>
-            <a:ext cx="7680960" cy="457200"/>
-          </a:xfrm>
-          <a:prstGeom prst="rect">
-            <a:avLst/>
-          </a:prstGeom>
-          <a:noFill/>
-          <a:ln/>
-        </p:spPr>
-        <p:txBody>
-          <a:bodyPr wrap="square" rtlCol="0" anchor="ctr"/>
-          <a:lstStyle/>
-          <a:p>
-            <a:pPr indent="0" marL="0">
-              <a:buNone/>
-            </a:pPr>
-            <a:r>
-              <a:rPr lang="en-US" sz="2200" b="1" dirty="0">
+            <a:off x="548640" y="548640"/>
+            <a:ext cx="8046720" cy="411480"/>
+          </a:xfrm>
+          <a:prstGeom prst="rect">
+            <a:avLst/>
+          </a:prstGeom>
+          <a:noFill/>
+          <a:ln/>
+        </p:spPr>
+        <p:txBody>
+          <a:bodyPr wrap="square" rtlCol="0" anchor="ctr"/>
+          <a:lstStyle/>
+          <a:p>
+            <a:pPr indent="0" marL="0">
+              <a:buNone/>
+            </a:pPr>
+            <a:r>
+              <a:rPr lang="en-US" sz="2000" b="1" dirty="0">
                 <a:solidFill>
                   <a:srgbClr val="0F172A"/>
                 </a:solidFill>
               </a:rPr>
               <a:t>Loyiha haqida: Muammo va Yechim</a:t>
             </a:r>
-            <a:endParaRPr lang="en-US" sz="2200" dirty="0"/>
+            <a:endParaRPr lang="en-US" sz="2000" dirty="0"/>
           </a:p>
         </p:txBody>
       </p:sp>
@@ -3655,31 +3776,31 @@
         </p:nvSpPr>
         <p:spPr>
           <a:xfrm>
-            <a:off x="731520" y="1078992"/>
-            <a:ext cx="7680960" cy="292608"/>
-          </a:xfrm>
-          <a:prstGeom prst="rect">
-            <a:avLst/>
-          </a:prstGeom>
-          <a:noFill/>
-          <a:ln/>
-        </p:spPr>
-        <p:txBody>
-          <a:bodyPr wrap="square" rtlCol="0" anchor="ctr"/>
-          <a:lstStyle/>
-          <a:p>
-            <a:pPr indent="0" marL="0">
-              <a:buNone/>
-            </a:pPr>
-            <a:r>
-              <a:rPr lang="en-US" sz="1200" dirty="0">
+            <a:off x="548640" y="960120"/>
+            <a:ext cx="8046720" cy="274320"/>
+          </a:xfrm>
+          <a:prstGeom prst="rect">
+            <a:avLst/>
+          </a:prstGeom>
+          <a:noFill/>
+          <a:ln/>
+        </p:spPr>
+        <p:txBody>
+          <a:bodyPr wrap="square" rtlCol="0" anchor="ctr"/>
+          <a:lstStyle/>
+          <a:p>
+            <a:pPr indent="0" marL="0">
+              <a:buNone/>
+            </a:pPr>
+            <a:r>
+              <a:rPr lang="en-US" sz="1100" dirty="0">
                 <a:solidFill>
                   <a:srgbClr val="475569"/>
                 </a:solidFill>
               </a:rPr>
-              <a:t>Nega KiberQoriqchi platformasi yaratildi va u qanday ehtiyojni qoplaydi?</a:t>
-            </a:r>
-            <a:endParaRPr lang="en-US" sz="1200" dirty="0"/>
+              <a:t>Nega KiberQoriqchi platformasi yaratildi va qanday real muammolarni hal qiladi?</a:t>
+            </a:r>
+            <a:endParaRPr lang="en-US" sz="1100" dirty="0"/>
           </a:p>
         </p:txBody>
       </p:sp>
@@ -3691,8 +3812,8 @@
         </p:nvSpPr>
         <p:spPr>
           <a:xfrm>
-            <a:off x="731520" y="1463040"/>
-            <a:ext cx="3657600" cy="3200400"/>
+            <a:off x="548640" y="1325880"/>
+            <a:ext cx="3840480" cy="3474720"/>
           </a:xfrm>
           <a:prstGeom prst="roundRect">
             <a:avLst/>
@@ -3702,7 +3823,7 @@
           </a:solidFill>
           <a:ln w="19050">
             <a:solidFill>
-              <a:srgbClr val="FCA5A5"/>
+              <a:srgbClr val="E2E8F0"/>
             </a:solidFill>
             <a:prstDash val="solid"/>
           </a:ln>
@@ -3710,376 +3831,244 @@
       </p:sp>
       <p:sp>
         <p:nvSpPr>
-          <p:cNvPr id="7" name="Shape 5"/>
+          <p:cNvPr id="7" name="Text 5"/>
           <p:cNvSpPr/>
           <p:nvPr/>
         </p:nvSpPr>
         <p:spPr>
           <a:xfrm>
             <a:off x="731520" y="1463040"/>
-            <a:ext cx="3657600" cy="502920"/>
+            <a:ext cx="3474720" cy="3200400"/>
+          </a:xfrm>
+          <a:prstGeom prst="rect">
+            <a:avLst/>
+          </a:prstGeom>
+          <a:noFill/>
+          <a:ln/>
+        </p:spPr>
+        <p:txBody>
+          <a:bodyPr wrap="square" rtlCol="0" anchor="ctr"/>
+          <a:lstStyle/>
+          <a:p>
+            <a:pPr indent="0" marL="0">
+              <a:lnSpc>
+                <a:spcPct val="110000"/>
+              </a:lnSpc>
+              <a:buNone/>
+            </a:pPr>
+            <a:r>
+              <a:rPr lang="en-US" sz="1300" b="1" dirty="0">
+                <a:solidFill>
+                  <a:srgbClr val="DC2626"/>
+                </a:solidFill>
+              </a:rPr>
+              <a:t>🚨 Raqamli muhitdagi 3 ta asosiy muammo:
+</a:t>
+            </a:r>
+            <a:pPr indent="0" marL="0">
+              <a:lnSpc>
+                <a:spcPct val="110000"/>
+              </a:lnSpc>
+              <a:buNone/>
+            </a:pPr>
+            <a:r>
+              <a:rPr lang="en-US" sz="1100" b="1" dirty="0">
+                <a:solidFill>
+                  <a:srgbClr val="0F172A"/>
+                </a:solidFill>
+              </a:rPr>
+              <a:t>1. Fishing va soxta to‘lovlar:
+</a:t>
+            </a:r>
+            <a:pPr indent="0" marL="0">
+              <a:lnSpc>
+                <a:spcPct val="110000"/>
+              </a:lnSpc>
+              <a:buNone/>
+            </a:pPr>
+            <a:r>
+              <a:rPr lang="en-US" sz="950" dirty="0">
+                <a:solidFill>
+                  <a:srgbClr val="475569"/>
+                </a:solidFill>
+              </a:rPr>
+              <a:t>Fuqarolar soxta Click/Payme havolalari orqali karta pullaridan ayrilmoqda.
+</a:t>
+            </a:r>
+            <a:pPr indent="0" marL="0">
+              <a:lnSpc>
+                <a:spcPct val="110000"/>
+              </a:lnSpc>
+              <a:buNone/>
+            </a:pPr>
+            <a:r>
+              <a:rPr lang="en-US" sz="1100" b="1" dirty="0">
+                <a:solidFill>
+                  <a:srgbClr val="0F172A"/>
+                </a:solidFill>
+              </a:rPr>
+              <a:t>2. Zararli Telegram APK troyanlari:
+</a:t>
+            </a:r>
+            <a:pPr indent="0" marL="0">
+              <a:lnSpc>
+                <a:spcPct val="110000"/>
+              </a:lnSpc>
+              <a:buNone/>
+            </a:pPr>
+            <a:r>
+              <a:rPr lang="en-US" sz="950" dirty="0">
+                <a:solidFill>
+                  <a:srgbClr val="475569"/>
+                </a:solidFill>
+              </a:rPr>
+              <a:t>Telegram orqali kelgan ilovalar SMS va parollarni o'g'irlamoqda.
+</a:t>
+            </a:r>
+            <a:pPr indent="0" marL="0">
+              <a:lnSpc>
+                <a:spcPct val="110000"/>
+              </a:lnSpc>
+              <a:buNone/>
+            </a:pPr>
+            <a:r>
+              <a:rPr lang="en-US" sz="1100" b="1" dirty="0">
+                <a:solidFill>
+                  <a:srgbClr val="0F172A"/>
+                </a:solidFill>
+              </a:rPr>
+              <a:t>3. Amaliy ta'lim yo'qligi:
+</a:t>
+            </a:r>
+            <a:pPr indent="0" marL="0">
+              <a:lnSpc>
+                <a:spcPct val="110000"/>
+              </a:lnSpc>
+              <a:buNone/>
+            </a:pPr>
+            <a:r>
+              <a:rPr lang="en-US" sz="950" dirty="0">
+                <a:solidFill>
+                  <a:srgbClr val="475569"/>
+                </a:solidFill>
+              </a:rPr>
+              <a:t>Mavjud manbalar faqat quruq nazariya yoki chet tillarida.
+</a:t>
+            </a:r>
+            <a:pPr indent="0" marL="0">
+              <a:lnSpc>
+                <a:spcPct val="110000"/>
+              </a:lnSpc>
+              <a:buNone/>
+            </a:pPr>
+            <a:r>
+              <a:rPr lang="en-US" sz="1100" b="1" dirty="0">
+                <a:solidFill>
+                  <a:srgbClr val="059669"/>
+                </a:solidFill>
+              </a:rPr>
+              <a:t>✅ KiberQoriqchi yechimi: </a:t>
+            </a:r>
+            <a:pPr indent="0" marL="0">
+              <a:lnSpc>
+                <a:spcPct val="110000"/>
+              </a:lnSpc>
+              <a:buNone/>
+            </a:pPr>
+            <a:r>
+              <a:rPr lang="en-US" sz="950" dirty="0">
+                <a:solidFill>
+                  <a:srgbClr val="0F172A"/>
+                </a:solidFill>
+              </a:rPr>
+              <a:t>Ona tilimizda virtual laboratoriyalar va jonli himoya vositalari!</a:t>
+            </a:r>
+            <a:endParaRPr lang="en-US" sz="1300" dirty="0"/>
+          </a:p>
+        </p:txBody>
+      </p:sp>
+      <p:sp>
+        <p:nvSpPr>
+          <p:cNvPr id="8" name="Shape 6"/>
+          <p:cNvSpPr/>
+          <p:nvPr/>
+        </p:nvSpPr>
+        <p:spPr>
+          <a:xfrm>
+            <a:off x="4626864" y="1289304"/>
+            <a:ext cx="4005072" cy="3547872"/>
           </a:xfrm>
           <a:prstGeom prst="roundRect">
             <a:avLst/>
           </a:prstGeom>
           <a:solidFill>
-            <a:srgbClr val="FEE2E2"/>
+            <a:srgbClr val="0D1A26"/>
           </a:solidFill>
-          <a:ln w="12700">
+          <a:ln w="19050">
             <a:solidFill>
-              <a:srgbClr val="FEE2E2"/>
+              <a:srgbClr val="059669"/>
             </a:solidFill>
             <a:prstDash val="solid"/>
           </a:ln>
         </p:spPr>
       </p:sp>
-      <p:sp>
-        <p:nvSpPr>
-          <p:cNvPr id="8" name="Text 6"/>
-          <p:cNvSpPr/>
-          <p:nvPr/>
-        </p:nvSpPr>
-        <p:spPr>
-          <a:xfrm>
-            <a:off x="914400" y="1508760"/>
-            <a:ext cx="3291840" cy="411480"/>
-          </a:xfrm>
-          <a:prstGeom prst="rect">
-            <a:avLst/>
-          </a:prstGeom>
-          <a:noFill/>
-          <a:ln/>
-        </p:spPr>
-        <p:txBody>
-          <a:bodyPr wrap="square" rtlCol="0" anchor="ctr"/>
-          <a:lstStyle/>
-          <a:p>
-            <a:pPr indent="0" marL="0">
-              <a:buNone/>
-            </a:pPr>
-            <a:r>
-              <a:rPr lang="en-US" sz="1300" b="1" dirty="0">
-                <a:solidFill>
-                  <a:srgbClr val="DC2626"/>
-                </a:solidFill>
-              </a:rPr>
-              <a:t>🚨 Kiber muhitdagi 3 ta asosiy muammo</a:t>
-            </a:r>
-            <a:endParaRPr lang="en-US" sz="1300" dirty="0"/>
-          </a:p>
-        </p:txBody>
-      </p:sp>
-      <p:sp>
-        <p:nvSpPr>
-          <p:cNvPr id="9" name="Text 7"/>
-          <p:cNvSpPr/>
-          <p:nvPr/>
-        </p:nvSpPr>
-        <p:spPr>
-          <a:xfrm>
-            <a:off x="914400" y="2057400"/>
-            <a:ext cx="3291840" cy="2468880"/>
-          </a:xfrm>
-          <a:prstGeom prst="rect">
-            <a:avLst/>
-          </a:prstGeom>
-          <a:noFill/>
-          <a:ln/>
-        </p:spPr>
-        <p:txBody>
-          <a:bodyPr wrap="square" rtlCol="0" anchor="ctr"/>
-          <a:lstStyle/>
-          <a:p>
-            <a:pPr indent="0" marL="0">
-              <a:lnSpc>
-                <a:spcPct val="110000"/>
-              </a:lnSpc>
-              <a:buNone/>
-            </a:pPr>
-            <a:r>
-              <a:rPr lang="en-US" sz="1200" b="1" dirty="0">
-                <a:solidFill>
-                  <a:srgbClr val="0F172A"/>
-                </a:solidFill>
-              </a:rPr>
-              <a:t>1. Fishing va soxta to‘lovlar:
-</a:t>
-            </a:r>
-            <a:pPr indent="0" marL="0">
-              <a:lnSpc>
-                <a:spcPct val="110000"/>
-              </a:lnSpc>
-              <a:buNone/>
-            </a:pPr>
-            <a:r>
-              <a:rPr lang="en-US" sz="1050" dirty="0">
-                <a:solidFill>
-                  <a:srgbClr val="475569"/>
-                </a:solidFill>
-              </a:rPr>
-              <a:t>Fuqarolar soxta havolalar orqali karta pullaridan ayrilmoqda.
-</a:t>
-            </a:r>
-            <a:pPr indent="0" marL="0">
-              <a:lnSpc>
-                <a:spcPct val="110000"/>
-              </a:lnSpc>
-              <a:buNone/>
-            </a:pPr>
-            <a:r>
-              <a:rPr lang="en-US" sz="1200" b="1" dirty="0">
-                <a:solidFill>
-                  <a:srgbClr val="0F172A"/>
-                </a:solidFill>
-              </a:rPr>
-              <a:t>2. Zararli Telegram APK fayllari:
-</a:t>
-            </a:r>
-            <a:pPr indent="0" marL="0">
-              <a:lnSpc>
-                <a:spcPct val="110000"/>
-              </a:lnSpc>
-              <a:buNone/>
-            </a:pPr>
-            <a:r>
-              <a:rPr lang="en-US" sz="1050" dirty="0">
-                <a:solidFill>
-                  <a:srgbClr val="475569"/>
-                </a:solidFill>
-              </a:rPr>
-              <a:t>Ijtimoiy tarmoqlarda virusli dasturlar shaxsiy SMS va ma'lumotlarni o'g'irlamoqda.
-</a:t>
-            </a:r>
-            <a:pPr indent="0" marL="0">
-              <a:lnSpc>
-                <a:spcPct val="110000"/>
-              </a:lnSpc>
-              <a:buNone/>
-            </a:pPr>
-            <a:r>
-              <a:rPr lang="en-US" sz="1200" b="1" dirty="0">
-                <a:solidFill>
-                  <a:srgbClr val="0F172A"/>
-                </a:solidFill>
-              </a:rPr>
-              <a:t>3. Amaliy ta'lim yo'qligi:
-</a:t>
-            </a:r>
-            <a:pPr indent="0" marL="0">
-              <a:lnSpc>
-                <a:spcPct val="110000"/>
-              </a:lnSpc>
-              <a:buNone/>
-            </a:pPr>
-            <a:r>
-              <a:rPr lang="en-US" sz="1050" dirty="0">
-                <a:solidFill>
-                  <a:srgbClr val="475569"/>
-                </a:solidFill>
-              </a:rPr>
-              <a:t>Mavjud manbalar chet tilida yoki faqat quruq nazariyadan iborat.</a:t>
-            </a:r>
-            <a:endParaRPr lang="en-US" sz="1200" dirty="0"/>
-          </a:p>
-        </p:txBody>
-      </p:sp>
-      <p:sp>
-        <p:nvSpPr>
-          <p:cNvPr id="10" name="Shape 8"/>
-          <p:cNvSpPr/>
-          <p:nvPr/>
-        </p:nvSpPr>
-        <p:spPr>
-          <a:xfrm>
-            <a:off x="4754880" y="1463040"/>
-            <a:ext cx="3657600" cy="3200400"/>
-          </a:xfrm>
-          <a:prstGeom prst="roundRect">
-            <a:avLst/>
-          </a:prstGeom>
-          <a:solidFill>
-            <a:srgbClr val="FFFFFF"/>
-          </a:solidFill>
-          <a:ln w="25400">
-            <a:solidFill>
-              <a:srgbClr val="6EE7B7"/>
-            </a:solidFill>
-            <a:prstDash val="solid"/>
-          </a:ln>
-        </p:spPr>
-      </p:sp>
-      <p:sp>
-        <p:nvSpPr>
-          <p:cNvPr id="11" name="Shape 9"/>
-          <p:cNvSpPr/>
-          <p:nvPr/>
-        </p:nvSpPr>
-        <p:spPr>
-          <a:xfrm>
-            <a:off x="4754880" y="1463040"/>
-            <a:ext cx="3657600" cy="502920"/>
-          </a:xfrm>
-          <a:prstGeom prst="roundRect">
-            <a:avLst/>
-          </a:prstGeom>
-          <a:solidFill>
-            <a:srgbClr val="ECFDF5"/>
-          </a:solidFill>
-          <a:ln w="12700">
-            <a:solidFill>
-              <a:srgbClr val="ECFDF5"/>
-            </a:solidFill>
-            <a:prstDash val="solid"/>
-          </a:ln>
-        </p:spPr>
-      </p:sp>
-      <p:sp>
-        <p:nvSpPr>
-          <p:cNvPr id="12" name="Text 10"/>
-          <p:cNvSpPr/>
-          <p:nvPr/>
-        </p:nvSpPr>
-        <p:spPr>
-          <a:xfrm>
-            <a:off x="4937760" y="1508760"/>
-            <a:ext cx="3291840" cy="411480"/>
-          </a:xfrm>
-          <a:prstGeom prst="rect">
-            <a:avLst/>
-          </a:prstGeom>
-          <a:noFill/>
-          <a:ln/>
-        </p:spPr>
-        <p:txBody>
-          <a:bodyPr wrap="square" rtlCol="0" anchor="ctr"/>
-          <a:lstStyle/>
-          <a:p>
-            <a:pPr indent="0" marL="0">
-              <a:buNone/>
-            </a:pPr>
-            <a:r>
-              <a:rPr lang="en-US" sz="1300" b="1" dirty="0">
-                <a:solidFill>
-                  <a:srgbClr val="059669"/>
-                </a:solidFill>
-              </a:rPr>
-              <a:t>✅ KiberQoriqchi platformasi yechimi</a:t>
-            </a:r>
-            <a:endParaRPr lang="en-US" sz="1300" dirty="0"/>
-          </a:p>
-        </p:txBody>
-      </p:sp>
-      <p:sp>
-        <p:nvSpPr>
-          <p:cNvPr id="13" name="Text 11"/>
-          <p:cNvSpPr/>
-          <p:nvPr/>
-        </p:nvSpPr>
-        <p:spPr>
-          <a:xfrm>
-            <a:off x="4937760" y="2057400"/>
-            <a:ext cx="3291840" cy="2468880"/>
-          </a:xfrm>
-          <a:prstGeom prst="rect">
-            <a:avLst/>
-          </a:prstGeom>
-          <a:noFill/>
-          <a:ln/>
-        </p:spPr>
-        <p:txBody>
-          <a:bodyPr wrap="square" rtlCol="0" anchor="ctr"/>
-          <a:lstStyle/>
-          <a:p>
-            <a:pPr indent="0" marL="0">
-              <a:lnSpc>
-                <a:spcPct val="110000"/>
-              </a:lnSpc>
-              <a:buNone/>
-            </a:pPr>
-            <a:r>
-              <a:rPr lang="en-US" sz="1200" b="1" dirty="0">
-                <a:solidFill>
-                  <a:srgbClr val="0F172A"/>
-                </a:solidFill>
-              </a:rPr>
-              <a:t>1. 100% Ona tilimizda interaktiv ta'lim:
-</a:t>
-            </a:r>
-            <a:pPr indent="0" marL="0">
-              <a:lnSpc>
-                <a:spcPct val="110000"/>
-              </a:lnSpc>
-              <a:buNone/>
-            </a:pPr>
-            <a:r>
-              <a:rPr lang="en-US" sz="1050" dirty="0">
-                <a:solidFill>
-                  <a:srgbClr val="475569"/>
-                </a:solidFill>
-              </a:rPr>
-              <a:t>Kiberxavfsizlik asoslari va kibergigiyena sodda tilda tushuntiriladi.
-</a:t>
-            </a:r>
-            <a:pPr indent="0" marL="0">
-              <a:lnSpc>
-                <a:spcPct val="110000"/>
-              </a:lnSpc>
-              <a:buNone/>
-            </a:pPr>
-            <a:r>
-              <a:rPr lang="en-US" sz="1200" b="1" dirty="0">
-                <a:solidFill>
-                  <a:srgbClr val="0F172A"/>
-                </a:solidFill>
-              </a:rPr>
-              <a:t>2. Virtual amaliy laboratoriyalar (CTF):
-</a:t>
-            </a:r>
-            <a:pPr indent="0" marL="0">
-              <a:lnSpc>
-                <a:spcPct val="110000"/>
-              </a:lnSpc>
-              <a:buNone/>
-            </a:pPr>
-            <a:r>
-              <a:rPr lang="en-US" sz="1050" dirty="0">
-                <a:solidFill>
-                  <a:srgbClr val="475569"/>
-                </a:solidFill>
-              </a:rPr>
-              <a:t>Foydalanuvchi brauzerning o'zida real zaifliklarni bartaraf etishni mashq qiladi.
-</a:t>
-            </a:r>
-            <a:pPr indent="0" marL="0">
-              <a:lnSpc>
-                <a:spcPct val="110000"/>
-              </a:lnSpc>
-              <a:buNone/>
-            </a:pPr>
-            <a:r>
-              <a:rPr lang="en-US" sz="1200" b="1" dirty="0">
-                <a:solidFill>
-                  <a:srgbClr val="0F172A"/>
-                </a:solidFill>
-              </a:rPr>
-              <a:t>3. Real himoya vositalari:
-</a:t>
-            </a:r>
-            <a:pPr indent="0" marL="0">
-              <a:lnSpc>
-                <a:spcPct val="110000"/>
-              </a:lnSpc>
-              <a:buNone/>
-            </a:pPr>
-            <a:r>
-              <a:rPr lang="en-US" sz="1050" dirty="0">
-                <a:solidFill>
-                  <a:srgbClr val="475569"/>
-                </a:solidFill>
-              </a:rPr>
-              <a:t>Telegramdan kelgan APK fayl va telefonni 1-klikda tekshirish imkoniyati.</a:t>
-            </a:r>
-            <a:endParaRPr lang="en-US" sz="1200" dirty="0"/>
+      <p:pic>
+        <p:nvPicPr>
+          <p:cNvPr id="9" name="Image 0" descr="C:\Users\User\Desktop\kiber xavfsizlik boyicha sayt\public\screenshots\03_paths.png">    </p:cNvPr>
+          <p:cNvPicPr>
+            <a:picLocks noChangeAspect="1"/>
+          </p:cNvPicPr>
+          <p:nvPr/>
+        </p:nvPicPr>
+        <p:blipFill>
+          <a:blip r:embed="rId1"/>
+          <a:stretch>
+            <a:fillRect/>
+          </a:stretch>
+        </p:blipFill>
+        <p:spPr>
+          <a:xfrm>
+            <a:off x="4663440" y="1325880"/>
+            <a:ext cx="3931920" cy="3200400"/>
+          </a:xfrm>
+          <a:prstGeom prst="rect">
+            <a:avLst/>
+          </a:prstGeom>
+        </p:spPr>
+      </p:pic>
+      <p:sp>
+        <p:nvSpPr>
+          <p:cNvPr id="10" name="Text 7"/>
+          <p:cNvSpPr/>
+          <p:nvPr/>
+        </p:nvSpPr>
+        <p:spPr>
+          <a:xfrm>
+            <a:off x="4663440" y="4562856"/>
+            <a:ext cx="3931920" cy="274320"/>
+          </a:xfrm>
+          <a:prstGeom prst="rect">
+            <a:avLst/>
+          </a:prstGeom>
+          <a:noFill/>
+          <a:ln/>
+        </p:spPr>
+        <p:txBody>
+          <a:bodyPr wrap="square" rtlCol="0" anchor="ctr"/>
+          <a:lstStyle/>
+          <a:p>
+            <a:pPr algn="ctr" indent="0" marL="0">
+              <a:buNone/>
+            </a:pPr>
+            <a:r>
+              <a:rPr lang="en-US" sz="900" dirty="0">
+                <a:solidFill>
+                  <a:srgbClr val="BAE6FD"/>
+                </a:solidFill>
+              </a:rPr>
+              <a:t>📸 KiberQoriqchi — tizimli ta'lim yo'nalishlari interfeysi</a:t>
+            </a:r>
+            <a:endParaRPr lang="en-US" sz="900" dirty="0"/>
           </a:p>
         </p:txBody>
       </p:sp>
@@ -4097,7 +4086,7 @@
     <p:bg>
       <p:bgPr>
         <a:solidFill>
-          <a:srgbClr val="F8FAFC"/>
+          <a:srgbClr val="F4F6F9"/>
         </a:solidFill>
       </p:bgPr>
     </p:bg>
@@ -4123,8 +4112,8 @@
         </p:nvSpPr>
         <p:spPr>
           <a:xfrm>
-            <a:off x="731520" y="320040"/>
-            <a:ext cx="2194560" cy="292608"/>
+            <a:off x="548640" y="228600"/>
+            <a:ext cx="2011680" cy="274320"/>
           </a:xfrm>
           <a:prstGeom prst="roundRect">
             <a:avLst/>
@@ -4148,8 +4137,8 @@
         </p:nvSpPr>
         <p:spPr>
           <a:xfrm>
-            <a:off x="731520" y="320040"/>
-            <a:ext cx="2194560" cy="292608"/>
+            <a:off x="548640" y="228600"/>
+            <a:ext cx="2011680" cy="274320"/>
           </a:xfrm>
           <a:prstGeom prst="rect">
             <a:avLst/>
@@ -4184,31 +4173,31 @@
         </p:nvSpPr>
         <p:spPr>
           <a:xfrm>
-            <a:off x="731520" y="658368"/>
-            <a:ext cx="7680960" cy="457200"/>
-          </a:xfrm>
-          <a:prstGeom prst="rect">
-            <a:avLst/>
-          </a:prstGeom>
-          <a:noFill/>
-          <a:ln/>
-        </p:spPr>
-        <p:txBody>
-          <a:bodyPr wrap="square" rtlCol="0" anchor="ctr"/>
-          <a:lstStyle/>
-          <a:p>
-            <a:pPr indent="0" marL="0">
-              <a:buNone/>
-            </a:pPr>
-            <a:r>
-              <a:rPr lang="en-US" sz="2200" b="1" dirty="0">
+            <a:off x="548640" y="548640"/>
+            <a:ext cx="8046720" cy="411480"/>
+          </a:xfrm>
+          <a:prstGeom prst="rect">
+            <a:avLst/>
+          </a:prstGeom>
+          <a:noFill/>
+          <a:ln/>
+        </p:spPr>
+        <p:txBody>
+          <a:bodyPr wrap="square" rtlCol="0" anchor="ctr"/>
+          <a:lstStyle/>
+          <a:p>
+            <a:pPr indent="0" marL="0">
+              <a:buNone/>
+            </a:pPr>
+            <a:r>
+              <a:rPr lang="en-US" sz="2000" b="1" dirty="0">
                 <a:solidFill>
                   <a:srgbClr val="0F172A"/>
                 </a:solidFill>
               </a:rPr>
               <a:t>Bosh sahifa: Haqiqiy interfeys va elementlar</a:t>
             </a:r>
-            <a:endParaRPr lang="en-US" sz="2200" dirty="0"/>
+            <a:endParaRPr lang="en-US" sz="2000" dirty="0"/>
           </a:p>
         </p:txBody>
       </p:sp>
@@ -4220,31 +4209,31 @@
         </p:nvSpPr>
         <p:spPr>
           <a:xfrm>
-            <a:off x="731520" y="1078992"/>
-            <a:ext cx="7680960" cy="292608"/>
-          </a:xfrm>
-          <a:prstGeom prst="rect">
-            <a:avLst/>
-          </a:prstGeom>
-          <a:noFill/>
-          <a:ln/>
-        </p:spPr>
-        <p:txBody>
-          <a:bodyPr wrap="square" rtlCol="0" anchor="ctr"/>
-          <a:lstStyle/>
-          <a:p>
-            <a:pPr indent="0" marL="0">
-              <a:buNone/>
-            </a:pPr>
-            <a:r>
-              <a:rPr lang="en-US" sz="1200" dirty="0">
+            <a:off x="548640" y="960120"/>
+            <a:ext cx="8046720" cy="274320"/>
+          </a:xfrm>
+          <a:prstGeom prst="rect">
+            <a:avLst/>
+          </a:prstGeom>
+          <a:noFill/>
+          <a:ln/>
+        </p:spPr>
+        <p:txBody>
+          <a:bodyPr wrap="square" rtlCol="0" anchor="ctr"/>
+          <a:lstStyle/>
+          <a:p>
+            <a:pPr indent="0" marL="0">
+              <a:buNone/>
+            </a:pPr>
+            <a:r>
+              <a:rPr lang="en-US" sz="1100" dirty="0">
                 <a:solidFill>
                   <a:srgbClr val="475569"/>
                 </a:solidFill>
               </a:rPr>
-              <a:t>Saytning bosh sahifasi (Hero qismi) va asosiy harakatga undovchi tugmalar</a:t>
-            </a:r>
-            <a:endParaRPr lang="en-US" sz="1200" dirty="0"/>
+              <a:t>Saytning bosh sahifasi (Hero) va asosiy harakatga undovchi elementlar</a:t>
+            </a:r>
+            <a:endParaRPr lang="en-US" sz="1100" dirty="0"/>
           </a:p>
         </p:txBody>
       </p:sp>
@@ -4256,14 +4245,14 @@
         </p:nvSpPr>
         <p:spPr>
           <a:xfrm>
-            <a:off x="731520" y="1463040"/>
-            <a:ext cx="5303520" cy="3200400"/>
+            <a:off x="512064" y="1289304"/>
+            <a:ext cx="5102352" cy="3822192"/>
           </a:xfrm>
           <a:prstGeom prst="roundRect">
             <a:avLst/>
           </a:prstGeom>
           <a:solidFill>
-            <a:srgbClr val="0F172A"/>
+            <a:srgbClr val="0D1A26"/>
           </a:solidFill>
           <a:ln w="19050">
             <a:solidFill>
@@ -4289,8 +4278,8 @@
         </p:blipFill>
         <p:spPr>
           <a:xfrm>
-            <a:off x="777240" y="1508760"/>
-            <a:ext cx="5212080" cy="3108960"/>
+            <a:off x="548640" y="1325880"/>
+            <a:ext cx="5029200" cy="3474720"/>
           </a:xfrm>
           <a:prstGeom prst="rect">
             <a:avLst/>
@@ -4299,14 +4288,50 @@
       </p:pic>
       <p:sp>
         <p:nvSpPr>
-          <p:cNvPr id="8" name="Shape 5"/>
-          <p:cNvSpPr/>
-          <p:nvPr/>
-        </p:nvSpPr>
-        <p:spPr>
-          <a:xfrm>
-            <a:off x="6217920" y="1463040"/>
-            <a:ext cx="2194560" cy="713232"/>
+          <p:cNvPr id="8" name="Text 5"/>
+          <p:cNvSpPr/>
+          <p:nvPr/>
+        </p:nvSpPr>
+        <p:spPr>
+          <a:xfrm>
+            <a:off x="548640" y="4837176"/>
+            <a:ext cx="5029200" cy="274320"/>
+          </a:xfrm>
+          <a:prstGeom prst="rect">
+            <a:avLst/>
+          </a:prstGeom>
+          <a:noFill/>
+          <a:ln/>
+        </p:spPr>
+        <p:txBody>
+          <a:bodyPr wrap="square" rtlCol="0" anchor="ctr"/>
+          <a:lstStyle/>
+          <a:p>
+            <a:pPr algn="ctr" indent="0" marL="0">
+              <a:buNone/>
+            </a:pPr>
+            <a:r>
+              <a:rPr lang="en-US" sz="900" dirty="0">
+                <a:solidFill>
+                  <a:srgbClr val="BAE6FD"/>
+                </a:solidFill>
+              </a:rPr>
+              <a:t>📸 Bosh sahifa — Hero bloki, neon kiber dizayn va asosiy tugmalar</a:t>
+            </a:r>
+            <a:endParaRPr lang="en-US" sz="900" dirty="0"/>
+          </a:p>
+        </p:txBody>
+      </p:sp>
+      <p:sp>
+        <p:nvSpPr>
+          <p:cNvPr id="9" name="Shape 6"/>
+          <p:cNvSpPr/>
+          <p:nvPr/>
+        </p:nvSpPr>
+        <p:spPr>
+          <a:xfrm>
+            <a:off x="5852160" y="1325880"/>
+            <a:ext cx="2743200" cy="749808"/>
           </a:xfrm>
           <a:prstGeom prst="roundRect">
             <a:avLst/>
@@ -4324,86 +4349,86 @@
       </p:sp>
       <p:sp>
         <p:nvSpPr>
-          <p:cNvPr id="9" name="Text 6"/>
-          <p:cNvSpPr/>
-          <p:nvPr/>
-        </p:nvSpPr>
-        <p:spPr>
-          <a:xfrm>
-            <a:off x="6309360" y="1536192"/>
-            <a:ext cx="2011680" cy="256032"/>
-          </a:xfrm>
-          <a:prstGeom prst="rect">
-            <a:avLst/>
-          </a:prstGeom>
-          <a:noFill/>
-          <a:ln/>
-        </p:spPr>
-        <p:txBody>
-          <a:bodyPr wrap="square" rtlCol="0" anchor="ctr"/>
-          <a:lstStyle/>
-          <a:p>
-            <a:pPr indent="0" marL="0">
-              <a:buNone/>
-            </a:pPr>
-            <a:r>
-              <a:rPr lang="en-US" sz="1050" b="1" dirty="0">
+          <p:cNvPr id="10" name="Text 7"/>
+          <p:cNvSpPr/>
+          <p:nvPr/>
+        </p:nvSpPr>
+        <p:spPr>
+          <a:xfrm>
+            <a:off x="5989320" y="1399032"/>
+            <a:ext cx="2468880" cy="274320"/>
+          </a:xfrm>
+          <a:prstGeom prst="rect">
+            <a:avLst/>
+          </a:prstGeom>
+          <a:noFill/>
+          <a:ln/>
+        </p:spPr>
+        <p:txBody>
+          <a:bodyPr wrap="square" rtlCol="0" anchor="ctr"/>
+          <a:lstStyle/>
+          <a:p>
+            <a:pPr indent="0" marL="0">
+              <a:buNone/>
+            </a:pPr>
+            <a:r>
+              <a:rPr lang="en-US" sz="1100" b="1" dirty="0">
                 <a:solidFill>
                   <a:srgbClr val="059669"/>
                 </a:solidFill>
               </a:rPr>
-              <a:t>1. Interaktiv Hero matni</a:t>
-            </a:r>
-            <a:endParaRPr lang="en-US" sz="1050" dirty="0"/>
-          </a:p>
-        </p:txBody>
-      </p:sp>
-      <p:sp>
-        <p:nvSpPr>
-          <p:cNvPr id="10" name="Text 7"/>
-          <p:cNvSpPr/>
-          <p:nvPr/>
-        </p:nvSpPr>
-        <p:spPr>
-          <a:xfrm>
-            <a:off x="6309360" y="1792224"/>
-            <a:ext cx="2011680" cy="347472"/>
-          </a:xfrm>
-          <a:prstGeom prst="rect">
-            <a:avLst/>
-          </a:prstGeom>
-          <a:noFill/>
-          <a:ln/>
-        </p:spPr>
-        <p:txBody>
-          <a:bodyPr wrap="square" rtlCol="0" anchor="ctr"/>
-          <a:lstStyle/>
-          <a:p>
-            <a:pPr indent="0" marL="0">
-              <a:buNone/>
-            </a:pPr>
-            <a:r>
-              <a:rPr lang="en-US" sz="900" dirty="0">
+              <a:t>1. Sarlavha &amp; Shior</a:t>
+            </a:r>
+            <a:endParaRPr lang="en-US" sz="1100" dirty="0"/>
+          </a:p>
+        </p:txBody>
+      </p:sp>
+      <p:sp>
+        <p:nvSpPr>
+          <p:cNvPr id="11" name="Text 8"/>
+          <p:cNvSpPr/>
+          <p:nvPr/>
+        </p:nvSpPr>
+        <p:spPr>
+          <a:xfrm>
+            <a:off x="5989320" y="1673352"/>
+            <a:ext cx="2468880" cy="347472"/>
+          </a:xfrm>
+          <a:prstGeom prst="rect">
+            <a:avLst/>
+          </a:prstGeom>
+          <a:noFill/>
+          <a:ln/>
+        </p:spPr>
+        <p:txBody>
+          <a:bodyPr wrap="square" rtlCol="0" anchor="ctr"/>
+          <a:lstStyle/>
+          <a:p>
+            <a:pPr indent="0" marL="0">
+              <a:buNone/>
+            </a:pPr>
+            <a:r>
+              <a:rPr lang="en-US" sz="950" dirty="0">
                 <a:solidFill>
                   <a:srgbClr val="475569"/>
                 </a:solidFill>
               </a:rPr>
-              <a:t>"Kiberxavfsizlikni amalda o‘rganing" bosh shiori va qisqa ta'rif.</a:t>
-            </a:r>
-            <a:endParaRPr lang="en-US" sz="900" dirty="0"/>
-          </a:p>
-        </p:txBody>
-      </p:sp>
-      <p:sp>
-        <p:nvSpPr>
-          <p:cNvPr id="11" name="Shape 8"/>
-          <p:cNvSpPr/>
-          <p:nvPr/>
-        </p:nvSpPr>
-        <p:spPr>
-          <a:xfrm>
-            <a:off x="6217920" y="2267712"/>
-            <a:ext cx="2194560" cy="713232"/>
+              <a:t>"Kiberxavfsizlikni amalda o‘rganing" bosh shiori va yo'nalish tavsifi.</a:t>
+            </a:r>
+            <a:endParaRPr lang="en-US" sz="950" dirty="0"/>
+          </a:p>
+        </p:txBody>
+      </p:sp>
+      <p:sp>
+        <p:nvSpPr>
+          <p:cNvPr id="12" name="Shape 9"/>
+          <p:cNvSpPr/>
+          <p:nvPr/>
+        </p:nvSpPr>
+        <p:spPr>
+          <a:xfrm>
+            <a:off x="5852160" y="2194560"/>
+            <a:ext cx="2743200" cy="749808"/>
           </a:xfrm>
           <a:prstGeom prst="roundRect">
             <a:avLst/>
@@ -4421,86 +4446,86 @@
       </p:sp>
       <p:sp>
         <p:nvSpPr>
-          <p:cNvPr id="12" name="Text 9"/>
-          <p:cNvSpPr/>
-          <p:nvPr/>
-        </p:nvSpPr>
-        <p:spPr>
-          <a:xfrm>
-            <a:off x="6309360" y="2340864"/>
-            <a:ext cx="2011680" cy="256032"/>
-          </a:xfrm>
-          <a:prstGeom prst="rect">
-            <a:avLst/>
-          </a:prstGeom>
-          <a:noFill/>
-          <a:ln/>
-        </p:spPr>
-        <p:txBody>
-          <a:bodyPr wrap="square" rtlCol="0" anchor="ctr"/>
-          <a:lstStyle/>
-          <a:p>
-            <a:pPr indent="0" marL="0">
-              <a:buNone/>
-            </a:pPr>
-            <a:r>
-              <a:rPr lang="en-US" sz="1050" b="1" dirty="0">
+          <p:cNvPr id="13" name="Text 10"/>
+          <p:cNvSpPr/>
+          <p:nvPr/>
+        </p:nvSpPr>
+        <p:spPr>
+          <a:xfrm>
+            <a:off x="5989320" y="2267712"/>
+            <a:ext cx="2468880" cy="274320"/>
+          </a:xfrm>
+          <a:prstGeom prst="rect">
+            <a:avLst/>
+          </a:prstGeom>
+          <a:noFill/>
+          <a:ln/>
+        </p:spPr>
+        <p:txBody>
+          <a:bodyPr wrap="square" rtlCol="0" anchor="ctr"/>
+          <a:lstStyle/>
+          <a:p>
+            <a:pPr indent="0" marL="0">
+              <a:buNone/>
+            </a:pPr>
+            <a:r>
+              <a:rPr lang="en-US" sz="1100" b="1" dirty="0">
                 <a:solidFill>
                   <a:srgbClr val="059669"/>
                 </a:solidFill>
               </a:rPr>
-              <a:t>2. Asosiy harakat (CTA)</a:t>
-            </a:r>
-            <a:endParaRPr lang="en-US" sz="1050" dirty="0"/>
-          </a:p>
-        </p:txBody>
-      </p:sp>
-      <p:sp>
-        <p:nvSpPr>
-          <p:cNvPr id="13" name="Text 10"/>
-          <p:cNvSpPr/>
-          <p:nvPr/>
-        </p:nvSpPr>
-        <p:spPr>
-          <a:xfrm>
-            <a:off x="6309360" y="2596896"/>
-            <a:ext cx="2011680" cy="347472"/>
-          </a:xfrm>
-          <a:prstGeom prst="rect">
-            <a:avLst/>
-          </a:prstGeom>
-          <a:noFill/>
-          <a:ln/>
-        </p:spPr>
-        <p:txBody>
-          <a:bodyPr wrap="square" rtlCol="0" anchor="ctr"/>
-          <a:lstStyle/>
-          <a:p>
-            <a:pPr indent="0" marL="0">
-              <a:buNone/>
-            </a:pPr>
-            <a:r>
-              <a:rPr lang="en-US" sz="900" dirty="0">
+              <a:t>2. Boshlash Tugmasi</a:t>
+            </a:r>
+            <a:endParaRPr lang="en-US" sz="1100" dirty="0"/>
+          </a:p>
+        </p:txBody>
+      </p:sp>
+      <p:sp>
+        <p:nvSpPr>
+          <p:cNvPr id="14" name="Text 11"/>
+          <p:cNvSpPr/>
+          <p:nvPr/>
+        </p:nvSpPr>
+        <p:spPr>
+          <a:xfrm>
+            <a:off x="5989320" y="2542032"/>
+            <a:ext cx="2468880" cy="347472"/>
+          </a:xfrm>
+          <a:prstGeom prst="rect">
+            <a:avLst/>
+          </a:prstGeom>
+          <a:noFill/>
+          <a:ln/>
+        </p:spPr>
+        <p:txBody>
+          <a:bodyPr wrap="square" rtlCol="0" anchor="ctr"/>
+          <a:lstStyle/>
+          <a:p>
+            <a:pPr indent="0" marL="0">
+              <a:buNone/>
+            </a:pPr>
+            <a:r>
+              <a:rPr lang="en-US" sz="950" dirty="0">
                 <a:solidFill>
                   <a:srgbClr val="475569"/>
                 </a:solidFill>
               </a:rPr>
-              <a:t>"Hoziroq boshlash" va yo'nalishlarga yo'llovchi dinamik tugmalar.</a:t>
-            </a:r>
-            <a:endParaRPr lang="en-US" sz="900" dirty="0"/>
-          </a:p>
-        </p:txBody>
-      </p:sp>
-      <p:sp>
-        <p:nvSpPr>
-          <p:cNvPr id="14" name="Shape 11"/>
-          <p:cNvSpPr/>
-          <p:nvPr/>
-        </p:nvSpPr>
-        <p:spPr>
-          <a:xfrm>
-            <a:off x="6217920" y="3072384"/>
-            <a:ext cx="2194560" cy="713232"/>
+              <a:t>"Hoziroq boshlash" orqali darhol laboratoriyalarga yo'l ochiladi.</a:t>
+            </a:r>
+            <a:endParaRPr lang="en-US" sz="950" dirty="0"/>
+          </a:p>
+        </p:txBody>
+      </p:sp>
+      <p:sp>
+        <p:nvSpPr>
+          <p:cNvPr id="15" name="Shape 12"/>
+          <p:cNvSpPr/>
+          <p:nvPr/>
+        </p:nvSpPr>
+        <p:spPr>
+          <a:xfrm>
+            <a:off x="5852160" y="3063240"/>
+            <a:ext cx="2743200" cy="749808"/>
           </a:xfrm>
           <a:prstGeom prst="roundRect">
             <a:avLst/>
@@ -4518,86 +4543,86 @@
       </p:sp>
       <p:sp>
         <p:nvSpPr>
-          <p:cNvPr id="15" name="Text 12"/>
-          <p:cNvSpPr/>
-          <p:nvPr/>
-        </p:nvSpPr>
-        <p:spPr>
-          <a:xfrm>
-            <a:off x="6309360" y="3145536"/>
-            <a:ext cx="2011680" cy="256032"/>
-          </a:xfrm>
-          <a:prstGeom prst="rect">
-            <a:avLst/>
-          </a:prstGeom>
-          <a:noFill/>
-          <a:ln/>
-        </p:spPr>
-        <p:txBody>
-          <a:bodyPr wrap="square" rtlCol="0" anchor="ctr"/>
-          <a:lstStyle/>
-          <a:p>
-            <a:pPr indent="0" marL="0">
-              <a:buNone/>
-            </a:pPr>
-            <a:r>
-              <a:rPr lang="en-US" sz="1050" b="1" dirty="0">
+          <p:cNvPr id="16" name="Text 13"/>
+          <p:cNvSpPr/>
+          <p:nvPr/>
+        </p:nvSpPr>
+        <p:spPr>
+          <a:xfrm>
+            <a:off x="5989320" y="3136392"/>
+            <a:ext cx="2468880" cy="274320"/>
+          </a:xfrm>
+          <a:prstGeom prst="rect">
+            <a:avLst/>
+          </a:prstGeom>
+          <a:noFill/>
+          <a:ln/>
+        </p:spPr>
+        <p:txBody>
+          <a:bodyPr wrap="square" rtlCol="0" anchor="ctr"/>
+          <a:lstStyle/>
+          <a:p>
+            <a:pPr indent="0" marL="0">
+              <a:buNone/>
+            </a:pPr>
+            <a:r>
+              <a:rPr lang="en-US" sz="1100" b="1" dirty="0">
                 <a:solidFill>
                   <a:srgbClr val="059669"/>
                 </a:solidFill>
               </a:rPr>
-              <a:t>3. Til almashtirgich (UZ/RU/EN)</a:t>
-            </a:r>
-            <a:endParaRPr lang="en-US" sz="1050" dirty="0"/>
-          </a:p>
-        </p:txBody>
-      </p:sp>
-      <p:sp>
-        <p:nvSpPr>
-          <p:cNvPr id="16" name="Text 13"/>
-          <p:cNvSpPr/>
-          <p:nvPr/>
-        </p:nvSpPr>
-        <p:spPr>
-          <a:xfrm>
-            <a:off x="6309360" y="3401568"/>
-            <a:ext cx="2011680" cy="347472"/>
-          </a:xfrm>
-          <a:prstGeom prst="rect">
-            <a:avLst/>
-          </a:prstGeom>
-          <a:noFill/>
-          <a:ln/>
-        </p:spPr>
-        <p:txBody>
-          <a:bodyPr wrap="square" rtlCol="0" anchor="ctr"/>
-          <a:lstStyle/>
-          <a:p>
-            <a:pPr indent="0" marL="0">
-              <a:buNone/>
-            </a:pPr>
-            <a:r>
-              <a:rPr lang="en-US" sz="900" dirty="0">
+              <a:t>3. 3 Tilda Lokalizatsiya</a:t>
+            </a:r>
+            <a:endParaRPr lang="en-US" sz="1100" dirty="0"/>
+          </a:p>
+        </p:txBody>
+      </p:sp>
+      <p:sp>
+        <p:nvSpPr>
+          <p:cNvPr id="17" name="Text 14"/>
+          <p:cNvSpPr/>
+          <p:nvPr/>
+        </p:nvSpPr>
+        <p:spPr>
+          <a:xfrm>
+            <a:off x="5989320" y="3410712"/>
+            <a:ext cx="2468880" cy="347472"/>
+          </a:xfrm>
+          <a:prstGeom prst="rect">
+            <a:avLst/>
+          </a:prstGeom>
+          <a:noFill/>
+          <a:ln/>
+        </p:spPr>
+        <p:txBody>
+          <a:bodyPr wrap="square" rtlCol="0" anchor="ctr"/>
+          <a:lstStyle/>
+          <a:p>
+            <a:pPr indent="0" marL="0">
+              <a:buNone/>
+            </a:pPr>
+            <a:r>
+              <a:rPr lang="en-US" sz="950" dirty="0">
                 <a:solidFill>
                   <a:srgbClr val="475569"/>
                 </a:solidFill>
               </a:rPr>
-              <a:t>Yuqori o'ng burchakda 3 ta tilda to'liq lokalizatsiya.</a:t>
-            </a:r>
-            <a:endParaRPr lang="en-US" sz="900" dirty="0"/>
-          </a:p>
-        </p:txBody>
-      </p:sp>
-      <p:sp>
-        <p:nvSpPr>
-          <p:cNvPr id="17" name="Shape 14"/>
-          <p:cNvSpPr/>
-          <p:nvPr/>
-        </p:nvSpPr>
-        <p:spPr>
-          <a:xfrm>
-            <a:off x="6217920" y="3877056"/>
-            <a:ext cx="2194560" cy="713232"/>
+              <a:t>O'zbek, Rus va Ingliz tillarida to'liq moslashtirilgan interfeys.</a:t>
+            </a:r>
+            <a:endParaRPr lang="en-US" sz="950" dirty="0"/>
+          </a:p>
+        </p:txBody>
+      </p:sp>
+      <p:sp>
+        <p:nvSpPr>
+          <p:cNvPr id="18" name="Shape 15"/>
+          <p:cNvSpPr/>
+          <p:nvPr/>
+        </p:nvSpPr>
+        <p:spPr>
+          <a:xfrm>
+            <a:off x="5852160" y="3931920"/>
+            <a:ext cx="2743200" cy="749808"/>
           </a:xfrm>
           <a:prstGeom prst="roundRect">
             <a:avLst/>
@@ -4615,73 +4640,73 @@
       </p:sp>
       <p:sp>
         <p:nvSpPr>
-          <p:cNvPr id="18" name="Text 15"/>
-          <p:cNvSpPr/>
-          <p:nvPr/>
-        </p:nvSpPr>
-        <p:spPr>
-          <a:xfrm>
-            <a:off x="6309360" y="3950208"/>
-            <a:ext cx="2011680" cy="256032"/>
-          </a:xfrm>
-          <a:prstGeom prst="rect">
-            <a:avLst/>
-          </a:prstGeom>
-          <a:noFill/>
-          <a:ln/>
-        </p:spPr>
-        <p:txBody>
-          <a:bodyPr wrap="square" rtlCol="0" anchor="ctr"/>
-          <a:lstStyle/>
-          <a:p>
-            <a:pPr indent="0" marL="0">
-              <a:buNone/>
-            </a:pPr>
-            <a:r>
-              <a:rPr lang="en-US" sz="1050" b="1" dirty="0">
+          <p:cNvPr id="19" name="Text 16"/>
+          <p:cNvSpPr/>
+          <p:nvPr/>
+        </p:nvSpPr>
+        <p:spPr>
+          <a:xfrm>
+            <a:off x="5989320" y="4005072"/>
+            <a:ext cx="2468880" cy="274320"/>
+          </a:xfrm>
+          <a:prstGeom prst="rect">
+            <a:avLst/>
+          </a:prstGeom>
+          <a:noFill/>
+          <a:ln/>
+        </p:spPr>
+        <p:txBody>
+          <a:bodyPr wrap="square" rtlCol="0" anchor="ctr"/>
+          <a:lstStyle/>
+          <a:p>
+            <a:pPr indent="0" marL="0">
+              <a:buNone/>
+            </a:pPr>
+            <a:r>
+              <a:rPr lang="en-US" sz="1100" b="1" dirty="0">
                 <a:solidFill>
                   <a:srgbClr val="059669"/>
                 </a:solidFill>
               </a:rPr>
               <a:t>4. Profil va Ballar</a:t>
             </a:r>
-            <a:endParaRPr lang="en-US" sz="1050" dirty="0"/>
-          </a:p>
-        </p:txBody>
-      </p:sp>
-      <p:sp>
-        <p:nvSpPr>
-          <p:cNvPr id="19" name="Text 16"/>
-          <p:cNvSpPr/>
-          <p:nvPr/>
-        </p:nvSpPr>
-        <p:spPr>
-          <a:xfrm>
-            <a:off x="6309360" y="4206240"/>
-            <a:ext cx="2011680" cy="347472"/>
-          </a:xfrm>
-          <a:prstGeom prst="rect">
-            <a:avLst/>
-          </a:prstGeom>
-          <a:noFill/>
-          <a:ln/>
-        </p:spPr>
-        <p:txBody>
-          <a:bodyPr wrap="square" rtlCol="0" anchor="ctr"/>
-          <a:lstStyle/>
-          <a:p>
-            <a:pPr indent="0" marL="0">
-              <a:buNone/>
-            </a:pPr>
-            <a:r>
-              <a:rPr lang="en-US" sz="900" dirty="0">
+            <a:endParaRPr lang="en-US" sz="1100" dirty="0"/>
+          </a:p>
+        </p:txBody>
+      </p:sp>
+      <p:sp>
+        <p:nvSpPr>
+          <p:cNvPr id="20" name="Text 17"/>
+          <p:cNvSpPr/>
+          <p:nvPr/>
+        </p:nvSpPr>
+        <p:spPr>
+          <a:xfrm>
+            <a:off x="5989320" y="4279392"/>
+            <a:ext cx="2468880" cy="347472"/>
+          </a:xfrm>
+          <a:prstGeom prst="rect">
+            <a:avLst/>
+          </a:prstGeom>
+          <a:noFill/>
+          <a:ln/>
+        </p:spPr>
+        <p:txBody>
+          <a:bodyPr wrap="square" rtlCol="0" anchor="ctr"/>
+          <a:lstStyle/>
+          <a:p>
+            <a:pPr indent="0" marL="0">
+              <a:buNone/>
+            </a:pPr>
+            <a:r>
+              <a:rPr lang="en-US" sz="950" dirty="0">
                 <a:solidFill>
                   <a:srgbClr val="475569"/>
                 </a:solidFill>
               </a:rPr>
-              <a:t>Foydalanuvchining login va ballar hisoblagichi paneli.</a:t>
-            </a:r>
-            <a:endParaRPr lang="en-US" sz="900" dirty="0"/>
+              <a:t>Foydalanuvchining login holati va yig'ilgan ballar paneli.</a:t>
+            </a:r>
+            <a:endParaRPr lang="en-US" sz="950" dirty="0"/>
           </a:p>
         </p:txBody>
       </p:sp>
@@ -4699,7 +4724,7 @@
     <p:bg>
       <p:bgPr>
         <a:solidFill>
-          <a:srgbClr val="F8FAFC"/>
+          <a:srgbClr val="F4F6F9"/>
         </a:solidFill>
       </p:bgPr>
     </p:bg>
@@ -4725,8 +4750,8 @@
         </p:nvSpPr>
         <p:spPr>
           <a:xfrm>
-            <a:off x="731520" y="320040"/>
-            <a:ext cx="2194560" cy="292608"/>
+            <a:off x="548640" y="228600"/>
+            <a:ext cx="2011680" cy="274320"/>
           </a:xfrm>
           <a:prstGeom prst="roundRect">
             <a:avLst/>
@@ -4750,8 +4775,8 @@
         </p:nvSpPr>
         <p:spPr>
           <a:xfrm>
-            <a:off x="731520" y="320040"/>
-            <a:ext cx="2194560" cy="292608"/>
+            <a:off x="548640" y="228600"/>
+            <a:ext cx="2011680" cy="274320"/>
           </a:xfrm>
           <a:prstGeom prst="rect">
             <a:avLst/>
@@ -4786,31 +4811,31 @@
         </p:nvSpPr>
         <p:spPr>
           <a:xfrm>
-            <a:off x="731520" y="658368"/>
-            <a:ext cx="7680960" cy="457200"/>
-          </a:xfrm>
-          <a:prstGeom prst="rect">
-            <a:avLst/>
-          </a:prstGeom>
-          <a:noFill/>
-          <a:ln/>
-        </p:spPr>
-        <p:txBody>
-          <a:bodyPr wrap="square" rtlCol="0" anchor="ctr"/>
-          <a:lstStyle/>
-          <a:p>
-            <a:pPr indent="0" marL="0">
-              <a:buNone/>
-            </a:pPr>
-            <a:r>
-              <a:rPr lang="en-US" sz="2200" b="1" dirty="0">
+            <a:off x="548640" y="548640"/>
+            <a:ext cx="8046720" cy="411480"/>
+          </a:xfrm>
+          <a:prstGeom prst="rect">
+            <a:avLst/>
+          </a:prstGeom>
+          <a:noFill/>
+          <a:ln/>
+        </p:spPr>
+        <p:txBody>
+          <a:bodyPr wrap="square" rtlCol="0" anchor="ctr"/>
+          <a:lstStyle/>
+          <a:p>
+            <a:pPr indent="0" marL="0">
+              <a:buNone/>
+            </a:pPr>
+            <a:r>
+              <a:rPr lang="en-US" sz="2000" b="1" dirty="0">
                 <a:solidFill>
                   <a:srgbClr val="0F172A"/>
                 </a:solidFill>
               </a:rPr>
               <a:t>Sayt menyusi: Haqiqiy navigatsiya tuzilishi</a:t>
             </a:r>
-            <a:endParaRPr lang="en-US" sz="2200" dirty="0"/>
+            <a:endParaRPr lang="en-US" sz="2000" dirty="0"/>
           </a:p>
         </p:txBody>
       </p:sp>
@@ -4822,31 +4847,31 @@
         </p:nvSpPr>
         <p:spPr>
           <a:xfrm>
-            <a:off x="731520" y="1078992"/>
-            <a:ext cx="7680960" cy="292608"/>
-          </a:xfrm>
-          <a:prstGeom prst="rect">
-            <a:avLst/>
-          </a:prstGeom>
-          <a:noFill/>
-          <a:ln/>
-        </p:spPr>
-        <p:txBody>
-          <a:bodyPr wrap="square" rtlCol="0" anchor="ctr"/>
-          <a:lstStyle/>
-          <a:p>
-            <a:pPr indent="0" marL="0">
-              <a:buNone/>
-            </a:pPr>
-            <a:r>
-              <a:rPr lang="en-US" sz="1200" dirty="0">
+            <a:off x="548640" y="960120"/>
+            <a:ext cx="8046720" cy="274320"/>
+          </a:xfrm>
+          <a:prstGeom prst="rect">
+            <a:avLst/>
+          </a:prstGeom>
+          <a:noFill/>
+          <a:ln/>
+        </p:spPr>
+        <p:txBody>
+          <a:bodyPr wrap="square" rtlCol="0" anchor="ctr"/>
+          <a:lstStyle/>
+          <a:p>
+            <a:pPr indent="0" marL="0">
+              <a:buNone/>
+            </a:pPr>
+            <a:r>
+              <a:rPr lang="en-US" sz="1100" dirty="0">
                 <a:solidFill>
                   <a:srgbClr val="475569"/>
                 </a:solidFill>
               </a:rPr>
-              <a:t>Platformadagi asosiy bo‘limlar va ularning o‘zaro bog‘liqligi</a:t>
-            </a:r>
-            <a:endParaRPr lang="en-US" sz="1200" dirty="0"/>
+              <a:t>Platformadagi barcha bo‘limlar va ularning o‘zaro bog‘liqligi</a:t>
+            </a:r>
+            <a:endParaRPr lang="en-US" sz="1100" dirty="0"/>
           </a:p>
         </p:txBody>
       </p:sp>
@@ -4858,18 +4883,18 @@
         </p:nvSpPr>
         <p:spPr>
           <a:xfrm>
-            <a:off x="731520" y="1417320"/>
-            <a:ext cx="7680960" cy="731520"/>
+            <a:off x="512064" y="1289304"/>
+            <a:ext cx="8119872" cy="1261872"/>
           </a:xfrm>
           <a:prstGeom prst="roundRect">
             <a:avLst/>
           </a:prstGeom>
           <a:solidFill>
-            <a:srgbClr val="0F172A"/>
+            <a:srgbClr val="0D1A26"/>
           </a:solidFill>
           <a:ln w="19050">
             <a:solidFill>
-              <a:srgbClr val="0EA5E9"/>
+              <a:srgbClr val="059669"/>
             </a:solidFill>
             <a:prstDash val="solid"/>
           </a:ln>
@@ -4891,8 +4916,8 @@
         </p:blipFill>
         <p:spPr>
           <a:xfrm>
-            <a:off x="777240" y="1463040"/>
-            <a:ext cx="7589520" cy="640080"/>
+            <a:off x="548640" y="1325880"/>
+            <a:ext cx="8046720" cy="914400"/>
           </a:xfrm>
           <a:prstGeom prst="rect">
             <a:avLst/>
@@ -4901,14 +4926,50 @@
       </p:pic>
       <p:sp>
         <p:nvSpPr>
-          <p:cNvPr id="8" name="Shape 5"/>
-          <p:cNvSpPr/>
-          <p:nvPr/>
-        </p:nvSpPr>
-        <p:spPr>
-          <a:xfrm>
-            <a:off x="731520" y="2377440"/>
-            <a:ext cx="1828800" cy="2194560"/>
+          <p:cNvPr id="8" name="Text 5"/>
+          <p:cNvSpPr/>
+          <p:nvPr/>
+        </p:nvSpPr>
+        <p:spPr>
+          <a:xfrm>
+            <a:off x="548640" y="2276856"/>
+            <a:ext cx="8046720" cy="274320"/>
+          </a:xfrm>
+          <a:prstGeom prst="rect">
+            <a:avLst/>
+          </a:prstGeom>
+          <a:noFill/>
+          <a:ln/>
+        </p:spPr>
+        <p:txBody>
+          <a:bodyPr wrap="square" rtlCol="0" anchor="ctr"/>
+          <a:lstStyle/>
+          <a:p>
+            <a:pPr algn="ctr" indent="0" marL="0">
+              <a:buNone/>
+            </a:pPr>
+            <a:r>
+              <a:rPr lang="en-US" sz="900" dirty="0">
+                <a:solidFill>
+                  <a:srgbClr val="BAE6FD"/>
+                </a:solidFill>
+              </a:rPr>
+              <a:t>📸 Saytning haqiqiy Navbar komponenti</a:t>
+            </a:r>
+            <a:endParaRPr lang="en-US" sz="900" dirty="0"/>
+          </a:p>
+        </p:txBody>
+      </p:sp>
+      <p:sp>
+        <p:nvSpPr>
+          <p:cNvPr id="9" name="Shape 6"/>
+          <p:cNvSpPr/>
+          <p:nvPr/>
+        </p:nvSpPr>
+        <p:spPr>
+          <a:xfrm>
+            <a:off x="548640" y="2560320"/>
+            <a:ext cx="1874520" cy="2194560"/>
           </a:xfrm>
           <a:prstGeom prst="roundRect">
             <a:avLst/>
@@ -4926,14 +4987,14 @@
       </p:sp>
       <p:sp>
         <p:nvSpPr>
-          <p:cNvPr id="9" name="Text 6"/>
-          <p:cNvSpPr/>
-          <p:nvPr/>
-        </p:nvSpPr>
-        <p:spPr>
-          <a:xfrm>
-            <a:off x="822960" y="2560320"/>
-            <a:ext cx="1645920" cy="457200"/>
+          <p:cNvPr id="10" name="Text 7"/>
+          <p:cNvSpPr/>
+          <p:nvPr/>
+        </p:nvSpPr>
+        <p:spPr>
+          <a:xfrm>
+            <a:off x="640080" y="2697480"/>
+            <a:ext cx="1691640" cy="457200"/>
           </a:xfrm>
           <a:prstGeom prst="rect">
             <a:avLst/>
@@ -4954,7 +5015,7 @@
                   <a:srgbClr val="059669"/>
                 </a:solidFill>
               </a:rPr>
-              <a:t>1. Yo‘nalishlar</a:t>
+              <a:t>1. Yo‘nalishlar (Paths)</a:t>
             </a:r>
             <a:endParaRPr lang="en-US" sz="1200" dirty="0"/>
           </a:p>
@@ -4962,14 +5023,14 @@
       </p:sp>
       <p:sp>
         <p:nvSpPr>
-          <p:cNvPr id="10" name="Text 7"/>
-          <p:cNvSpPr/>
-          <p:nvPr/>
-        </p:nvSpPr>
-        <p:spPr>
-          <a:xfrm>
-            <a:off x="868680" y="3063240"/>
-            <a:ext cx="1554480" cy="1280160"/>
+          <p:cNvPr id="11" name="Text 8"/>
+          <p:cNvSpPr/>
+          <p:nvPr/>
+        </p:nvSpPr>
+        <p:spPr>
+          <a:xfrm>
+            <a:off x="640080" y="3200400"/>
+            <a:ext cx="1691640" cy="1371600"/>
           </a:xfrm>
           <a:prstGeom prst="rect">
             <a:avLst/>
@@ -4993,7 +5054,7 @@
                   <a:srgbClr val="475569"/>
                 </a:solidFill>
               </a:rPr>
-              <a:t>Kibergigiyena, Web xavfsizlik, Tarmoq himoyasi va Linux kasbiy yo'llari.</a:t>
+              <a:t>Kibergigiyena, Web xavfsizlik, Linux va Tarmoq himoyasi kasbiy yo'llari.</a:t>
             </a:r>
             <a:endParaRPr lang="en-US" sz="1000" dirty="0"/>
           </a:p>
@@ -5001,14 +5062,14 @@
       </p:sp>
       <p:sp>
         <p:nvSpPr>
-          <p:cNvPr id="11" name="Shape 8"/>
-          <p:cNvSpPr/>
-          <p:nvPr/>
-        </p:nvSpPr>
-        <p:spPr>
-          <a:xfrm>
-            <a:off x="2697480" y="2377440"/>
-            <a:ext cx="1828800" cy="2194560"/>
+          <p:cNvPr id="12" name="Shape 9"/>
+          <p:cNvSpPr/>
+          <p:nvPr/>
+        </p:nvSpPr>
+        <p:spPr>
+          <a:xfrm>
+            <a:off x="2606040" y="2560320"/>
+            <a:ext cx="1874520" cy="2194560"/>
           </a:xfrm>
           <a:prstGeom prst="roundRect">
             <a:avLst/>
@@ -5026,14 +5087,14 @@
       </p:sp>
       <p:sp>
         <p:nvSpPr>
-          <p:cNvPr id="12" name="Text 9"/>
-          <p:cNvSpPr/>
-          <p:nvPr/>
-        </p:nvSpPr>
-        <p:spPr>
-          <a:xfrm>
-            <a:off x="2788920" y="2560320"/>
-            <a:ext cx="1645920" cy="457200"/>
+          <p:cNvPr id="13" name="Text 10"/>
+          <p:cNvSpPr/>
+          <p:nvPr/>
+        </p:nvSpPr>
+        <p:spPr>
+          <a:xfrm>
+            <a:off x="2697480" y="2697480"/>
+            <a:ext cx="1691640" cy="457200"/>
           </a:xfrm>
           <a:prstGeom prst="rect">
             <a:avLst/>
@@ -5054,7 +5115,7 @@
                   <a:srgbClr val="059669"/>
                 </a:solidFill>
               </a:rPr>
-              <a:t>2. Amaliyot &amp; Lablar</a:t>
+              <a:t>2. Amaliyot (Practice)</a:t>
             </a:r>
             <a:endParaRPr lang="en-US" sz="1200" dirty="0"/>
           </a:p>
@@ -5062,14 +5123,14 @@
       </p:sp>
       <p:sp>
         <p:nvSpPr>
-          <p:cNvPr id="13" name="Text 10"/>
-          <p:cNvSpPr/>
-          <p:nvPr/>
-        </p:nvSpPr>
-        <p:spPr>
-          <a:xfrm>
-            <a:off x="2834640" y="3063240"/>
-            <a:ext cx="1554480" cy="1280160"/>
+          <p:cNvPr id="14" name="Text 11"/>
+          <p:cNvSpPr/>
+          <p:nvPr/>
+        </p:nvSpPr>
+        <p:spPr>
+          <a:xfrm>
+            <a:off x="2697480" y="3200400"/>
+            <a:ext cx="1691640" cy="1371600"/>
           </a:xfrm>
           <a:prstGeom prst="rect">
             <a:avLst/>
@@ -5093,7 +5154,7 @@
                   <a:srgbClr val="475569"/>
                 </a:solidFill>
               </a:rPr>
-              <a:t>Virtual kiber-laboratoriya xonalari (CTF) va interaktiv zaiflik testlari.</a:t>
+              <a:t>Virtual kiber-laboratoriya xonalari (CTF) va real zaifliklarni sinash.</a:t>
             </a:r>
             <a:endParaRPr lang="en-US" sz="1000" dirty="0"/>
           </a:p>
@@ -5101,14 +5162,14 @@
       </p:sp>
       <p:sp>
         <p:nvSpPr>
-          <p:cNvPr id="14" name="Shape 11"/>
-          <p:cNvSpPr/>
-          <p:nvPr/>
-        </p:nvSpPr>
-        <p:spPr>
-          <a:xfrm>
-            <a:off x="4663440" y="2377440"/>
-            <a:ext cx="1828800" cy="2194560"/>
+          <p:cNvPr id="15" name="Shape 12"/>
+          <p:cNvSpPr/>
+          <p:nvPr/>
+        </p:nvSpPr>
+        <p:spPr>
+          <a:xfrm>
+            <a:off x="4663440" y="2560320"/>
+            <a:ext cx="1874520" cy="2194560"/>
           </a:xfrm>
           <a:prstGeom prst="roundRect">
             <a:avLst/>
@@ -5126,14 +5187,14 @@
       </p:sp>
       <p:sp>
         <p:nvSpPr>
-          <p:cNvPr id="15" name="Text 12"/>
-          <p:cNvSpPr/>
-          <p:nvPr/>
-        </p:nvSpPr>
-        <p:spPr>
-          <a:xfrm>
-            <a:off x="4754880" y="2560320"/>
-            <a:ext cx="1645920" cy="457200"/>
+          <p:cNvPr id="16" name="Text 13"/>
+          <p:cNvSpPr/>
+          <p:nvPr/>
+        </p:nvSpPr>
+        <p:spPr>
+          <a:xfrm>
+            <a:off x="4754880" y="2697480"/>
+            <a:ext cx="1691640" cy="457200"/>
           </a:xfrm>
           <a:prstGeom prst="rect">
             <a:avLst/>
@@ -5154,7 +5215,7 @@
                   <a:srgbClr val="059669"/>
                 </a:solidFill>
               </a:rPr>
-              <a:t>3. APK Qo‘riqchi &amp; Xavfsizlik</a:t>
+              <a:t>3. APK Qo‘riqchi</a:t>
             </a:r>
             <a:endParaRPr lang="en-US" sz="1200" dirty="0"/>
           </a:p>
@@ -5162,14 +5223,14 @@
       </p:sp>
       <p:sp>
         <p:nvSpPr>
-          <p:cNvPr id="16" name="Text 13"/>
-          <p:cNvSpPr/>
-          <p:nvPr/>
-        </p:nvSpPr>
-        <p:spPr>
-          <a:xfrm>
-            <a:off x="4800600" y="3063240"/>
-            <a:ext cx="1554480" cy="1280160"/>
+          <p:cNvPr id="17" name="Text 14"/>
+          <p:cNvSpPr/>
+          <p:nvPr/>
+        </p:nvSpPr>
+        <p:spPr>
+          <a:xfrm>
+            <a:off x="4754880" y="3200400"/>
+            <a:ext cx="1691640" cy="1371600"/>
           </a:xfrm>
           <a:prstGeom prst="rect">
             <a:avLst/>
@@ -5193,7 +5254,7 @@
                   <a:srgbClr val="475569"/>
                 </a:solidFill>
               </a:rPr>
-              <a:t>Android APK fayllarini tahlil qilish va smartfon xavfsizlik konsoli.</a:t>
+              <a:t>Android APK fayllarini tahlil qilish va zararli kodlarni fosh etish.</a:t>
             </a:r>
             <a:endParaRPr lang="en-US" sz="1000" dirty="0"/>
           </a:p>
@@ -5201,14 +5262,14 @@
       </p:sp>
       <p:sp>
         <p:nvSpPr>
-          <p:cNvPr id="17" name="Shape 14"/>
-          <p:cNvSpPr/>
-          <p:nvPr/>
-        </p:nvSpPr>
-        <p:spPr>
-          <a:xfrm>
-            <a:off x="6629400" y="2377440"/>
-            <a:ext cx="1828800" cy="2194560"/>
+          <p:cNvPr id="18" name="Shape 15"/>
+          <p:cNvSpPr/>
+          <p:nvPr/>
+        </p:nvSpPr>
+        <p:spPr>
+          <a:xfrm>
+            <a:off x="6720840" y="2560320"/>
+            <a:ext cx="1874520" cy="2194560"/>
           </a:xfrm>
           <a:prstGeom prst="roundRect">
             <a:avLst/>
@@ -5226,14 +5287,14 @@
       </p:sp>
       <p:sp>
         <p:nvSpPr>
-          <p:cNvPr id="18" name="Text 15"/>
-          <p:cNvSpPr/>
-          <p:nvPr/>
-        </p:nvSpPr>
-        <p:spPr>
-          <a:xfrm>
-            <a:off x="6720840" y="2560320"/>
-            <a:ext cx="1645920" cy="457200"/>
+          <p:cNvPr id="19" name="Text 16"/>
+          <p:cNvSpPr/>
+          <p:nvPr/>
+        </p:nvSpPr>
+        <p:spPr>
+          <a:xfrm>
+            <a:off x="6812280" y="2697480"/>
+            <a:ext cx="1691640" cy="457200"/>
           </a:xfrm>
           <a:prstGeom prst="rect">
             <a:avLst/>
@@ -5254,7 +5315,7 @@
                   <a:srgbClr val="059669"/>
                 </a:solidFill>
               </a:rPr>
-              <a:t>4. Reyting &amp; AI Assistent</a:t>
+              <a:t>4. CyberGuard AI</a:t>
             </a:r>
             <a:endParaRPr lang="en-US" sz="1200" dirty="0"/>
           </a:p>
@@ -5262,14 +5323,14 @@
       </p:sp>
       <p:sp>
         <p:nvSpPr>
-          <p:cNvPr id="19" name="Text 16"/>
-          <p:cNvSpPr/>
-          <p:nvPr/>
-        </p:nvSpPr>
-        <p:spPr>
-          <a:xfrm>
-            <a:off x="6766560" y="3063240"/>
-            <a:ext cx="1554480" cy="1280160"/>
+          <p:cNvPr id="20" name="Text 17"/>
+          <p:cNvSpPr/>
+          <p:nvPr/>
+        </p:nvSpPr>
+        <p:spPr>
+          <a:xfrm>
+            <a:off x="6812280" y="3200400"/>
+            <a:ext cx="1691640" cy="1371600"/>
           </a:xfrm>
           <a:prstGeom prst="rect">
             <a:avLst/>
@@ -5293,7 +5354,7 @@
                   <a:srgbClr val="475569"/>
                 </a:solidFill>
               </a:rPr>
-              <a:t>Talabalar musobaqa jadvali (Leaderboard) va CyberGuard AI kiber-maslahatchi.</a:t>
+              <a:t>Kiberxavfsizlik bo‘yicha o‘zbek tilida 24/7 javob beruvchi sun'iy intellekt.</a:t>
             </a:r>
             <a:endParaRPr lang="en-US" sz="1000" dirty="0"/>
           </a:p>
@@ -5313,7 +5374,7 @@
     <p:bg>
       <p:bgPr>
         <a:solidFill>
-          <a:srgbClr val="F8FAFC"/>
+          <a:srgbClr val="F4F6F9"/>
         </a:solidFill>
       </p:bgPr>
     </p:bg>
@@ -5339,8 +5400,8 @@
         </p:nvSpPr>
         <p:spPr>
           <a:xfrm>
-            <a:off x="731520" y="320040"/>
-            <a:ext cx="2194560" cy="292608"/>
+            <a:off x="548640" y="228600"/>
+            <a:ext cx="2011680" cy="274320"/>
           </a:xfrm>
           <a:prstGeom prst="roundRect">
             <a:avLst/>
@@ -5364,8 +5425,8 @@
         </p:nvSpPr>
         <p:spPr>
           <a:xfrm>
-            <a:off x="731520" y="320040"/>
-            <a:ext cx="2194560" cy="292608"/>
+            <a:off x="548640" y="228600"/>
+            <a:ext cx="2011680" cy="274320"/>
           </a:xfrm>
           <a:prstGeom prst="rect">
             <a:avLst/>
@@ -5400,31 +5461,31 @@
         </p:nvSpPr>
         <p:spPr>
           <a:xfrm>
-            <a:off x="731520" y="658368"/>
-            <a:ext cx="7680960" cy="457200"/>
-          </a:xfrm>
-          <a:prstGeom prst="rect">
-            <a:avLst/>
-          </a:prstGeom>
-          <a:noFill/>
-          <a:ln/>
-        </p:spPr>
-        <p:txBody>
-          <a:bodyPr wrap="square" rtlCol="0" anchor="ctr"/>
-          <a:lstStyle/>
-          <a:p>
-            <a:pPr indent="0" marL="0">
-              <a:buNone/>
-            </a:pPr>
-            <a:r>
-              <a:rPr lang="en-US" sz="2200" b="1" dirty="0">
+            <a:off x="548640" y="548640"/>
+            <a:ext cx="8046720" cy="411480"/>
+          </a:xfrm>
+          <a:prstGeom prst="rect">
+            <a:avLst/>
+          </a:prstGeom>
+          <a:noFill/>
+          <a:ln/>
+        </p:spPr>
+        <p:txBody>
+          <a:bodyPr wrap="square" rtlCol="0" anchor="ctr"/>
+          <a:lstStyle/>
+          <a:p>
+            <a:pPr indent="0" marL="0">
+              <a:buNone/>
+            </a:pPr>
+            <a:r>
+              <a:rPr lang="en-US" sz="2000" b="1" dirty="0">
                 <a:solidFill>
                   <a:srgbClr val="0F172A"/>
                 </a:solidFill>
               </a:rPr>
               <a:t>Kiberxavfsizlik bo‘limlari va o‘quv yo‘nalishlari</a:t>
             </a:r>
-            <a:endParaRPr lang="en-US" sz="2200" dirty="0"/>
+            <a:endParaRPr lang="en-US" sz="2000" dirty="0"/>
           </a:p>
         </p:txBody>
       </p:sp>
@@ -5436,31 +5497,31 @@
         </p:nvSpPr>
         <p:spPr>
           <a:xfrm>
-            <a:off x="731520" y="1078992"/>
-            <a:ext cx="7680960" cy="292608"/>
-          </a:xfrm>
-          <a:prstGeom prst="rect">
-            <a:avLst/>
-          </a:prstGeom>
-          <a:noFill/>
-          <a:ln/>
-        </p:spPr>
-        <p:txBody>
-          <a:bodyPr wrap="square" rtlCol="0" anchor="ctr"/>
-          <a:lstStyle/>
-          <a:p>
-            <a:pPr indent="0" marL="0">
-              <a:buNone/>
-            </a:pPr>
-            <a:r>
-              <a:rPr lang="en-US" sz="1200" dirty="0">
+            <a:off x="548640" y="960120"/>
+            <a:ext cx="8046720" cy="274320"/>
+          </a:xfrm>
+          <a:prstGeom prst="rect">
+            <a:avLst/>
+          </a:prstGeom>
+          <a:noFill/>
+          <a:ln/>
+        </p:spPr>
+        <p:txBody>
+          <a:bodyPr wrap="square" rtlCol="0" anchor="ctr"/>
+          <a:lstStyle/>
+          <a:p>
+            <a:pPr indent="0" marL="0">
+              <a:buNone/>
+            </a:pPr>
+            <a:r>
+              <a:rPr lang="en-US" sz="1100" dirty="0">
                 <a:solidFill>
                   <a:srgbClr val="475569"/>
                 </a:solidFill>
               </a:rPr>
-              <a:t>Saytda mavjud bo‘lgan kasbiy ta'lim yo‘nalishlari va ularning vazifalari</a:t>
-            </a:r>
-            <a:endParaRPr lang="en-US" sz="1200" dirty="0"/>
+              <a:t>Saytda mavjud bo‘lgan kasbiy ta'lim yo‘nalishlari va amaliy laboratoriya xonalari</a:t>
+            </a:r>
+            <a:endParaRPr lang="en-US" sz="1100" dirty="0"/>
           </a:p>
         </p:txBody>
       </p:sp>
@@ -5472,14 +5533,14 @@
         </p:nvSpPr>
         <p:spPr>
           <a:xfrm>
-            <a:off x="731520" y="1463040"/>
-            <a:ext cx="4937760" cy="3200400"/>
+            <a:off x="512064" y="1289304"/>
+            <a:ext cx="3959352" cy="2816352"/>
           </a:xfrm>
           <a:prstGeom prst="roundRect">
             <a:avLst/>
           </a:prstGeom>
           <a:solidFill>
-            <a:srgbClr val="0F172A"/>
+            <a:srgbClr val="0D1A26"/>
           </a:solidFill>
           <a:ln w="19050">
             <a:solidFill>
@@ -5505,8 +5566,8 @@
         </p:blipFill>
         <p:spPr>
           <a:xfrm>
-            <a:off x="777240" y="1508760"/>
-            <a:ext cx="4846320" cy="3108960"/>
+            <a:off x="548640" y="1325880"/>
+            <a:ext cx="3886200" cy="2468880"/>
           </a:xfrm>
           <a:prstGeom prst="rect">
             <a:avLst/>
@@ -5515,14 +5576,135 @@
       </p:pic>
       <p:sp>
         <p:nvSpPr>
-          <p:cNvPr id="8" name="Shape 5"/>
-          <p:cNvSpPr/>
-          <p:nvPr/>
-        </p:nvSpPr>
-        <p:spPr>
-          <a:xfrm>
-            <a:off x="5852160" y="1463040"/>
-            <a:ext cx="2560320" cy="3200400"/>
+          <p:cNvPr id="8" name="Text 5"/>
+          <p:cNvSpPr/>
+          <p:nvPr/>
+        </p:nvSpPr>
+        <p:spPr>
+          <a:xfrm>
+            <a:off x="548640" y="3831336"/>
+            <a:ext cx="3886200" cy="274320"/>
+          </a:xfrm>
+          <a:prstGeom prst="rect">
+            <a:avLst/>
+          </a:prstGeom>
+          <a:noFill/>
+          <a:ln/>
+        </p:spPr>
+        <p:txBody>
+          <a:bodyPr wrap="square" rtlCol="0" anchor="ctr"/>
+          <a:lstStyle/>
+          <a:p>
+            <a:pPr algn="ctr" indent="0" marL="0">
+              <a:buNone/>
+            </a:pPr>
+            <a:r>
+              <a:rPr lang="en-US" sz="900" dirty="0">
+                <a:solidFill>
+                  <a:srgbClr val="BAE6FD"/>
+                </a:solidFill>
+              </a:rPr>
+              <a:t>📸 "Yo‘nalishlar" — Kibergigiyena, Web, Linux darslari</a:t>
+            </a:r>
+            <a:endParaRPr lang="en-US" sz="900" dirty="0"/>
+          </a:p>
+        </p:txBody>
+      </p:sp>
+      <p:sp>
+        <p:nvSpPr>
+          <p:cNvPr id="9" name="Shape 6"/>
+          <p:cNvSpPr/>
+          <p:nvPr/>
+        </p:nvSpPr>
+        <p:spPr>
+          <a:xfrm>
+            <a:off x="4672584" y="1289304"/>
+            <a:ext cx="3959352" cy="2816352"/>
+          </a:xfrm>
+          <a:prstGeom prst="roundRect">
+            <a:avLst/>
+          </a:prstGeom>
+          <a:solidFill>
+            <a:srgbClr val="0D1A26"/>
+          </a:solidFill>
+          <a:ln w="19050">
+            <a:solidFill>
+              <a:srgbClr val="059669"/>
+            </a:solidFill>
+            <a:prstDash val="solid"/>
+          </a:ln>
+        </p:spPr>
+      </p:sp>
+      <p:pic>
+        <p:nvPicPr>
+          <p:cNvPr id="10" name="Image 1" descr="C:\Users\User\Desktop\kiber xavfsizlik boyicha sayt\public\screenshots\11_practice_rooms.png">    </p:cNvPr>
+          <p:cNvPicPr>
+            <a:picLocks noChangeAspect="1"/>
+          </p:cNvPicPr>
+          <p:nvPr/>
+        </p:nvPicPr>
+        <p:blipFill>
+          <a:blip r:embed="rId2"/>
+          <a:stretch>
+            <a:fillRect/>
+          </a:stretch>
+        </p:blipFill>
+        <p:spPr>
+          <a:xfrm>
+            <a:off x="4709160" y="1325880"/>
+            <a:ext cx="3886200" cy="2468880"/>
+          </a:xfrm>
+          <a:prstGeom prst="rect">
+            <a:avLst/>
+          </a:prstGeom>
+        </p:spPr>
+      </p:pic>
+      <p:sp>
+        <p:nvSpPr>
+          <p:cNvPr id="11" name="Text 7"/>
+          <p:cNvSpPr/>
+          <p:nvPr/>
+        </p:nvSpPr>
+        <p:spPr>
+          <a:xfrm>
+            <a:off x="4709160" y="3831336"/>
+            <a:ext cx="3886200" cy="274320"/>
+          </a:xfrm>
+          <a:prstGeom prst="rect">
+            <a:avLst/>
+          </a:prstGeom>
+          <a:noFill/>
+          <a:ln/>
+        </p:spPr>
+        <p:txBody>
+          <a:bodyPr wrap="square" rtlCol="0" anchor="ctr"/>
+          <a:lstStyle/>
+          <a:p>
+            <a:pPr algn="ctr" indent="0" marL="0">
+              <a:buNone/>
+            </a:pPr>
+            <a:r>
+              <a:rPr lang="en-US" sz="900" dirty="0">
+                <a:solidFill>
+                  <a:srgbClr val="BAE6FD"/>
+                </a:solidFill>
+              </a:rPr>
+              <a:t>📸 "Amaliyot" — CTF xonalari va zaiflik laboratoriyalari</a:t>
+            </a:r>
+            <a:endParaRPr lang="en-US" sz="900" dirty="0"/>
+          </a:p>
+        </p:txBody>
+      </p:sp>
+      <p:sp>
+        <p:nvSpPr>
+          <p:cNvPr id="12" name="Shape 8"/>
+          <p:cNvSpPr/>
+          <p:nvPr/>
+        </p:nvSpPr>
+        <p:spPr>
+          <a:xfrm>
+            <a:off x="548640" y="4069080"/>
+            <a:ext cx="8046720" cy="777240"/>
           </a:xfrm>
           <a:prstGeom prst="roundRect">
             <a:avLst/>
@@ -5530,9 +5712,9 @@
           <a:solidFill>
             <a:srgbClr val="FFFFFF"/>
           </a:solidFill>
-          <a:ln w="19050">
+          <a:ln w="12700">
             <a:solidFill>
-              <a:srgbClr val="E2E8F0"/>
+              <a:srgbClr val="6EE7B7"/>
             </a:solidFill>
             <a:prstDash val="solid"/>
           </a:ln>
@@ -5540,179 +5722,46 @@
       </p:sp>
       <p:sp>
         <p:nvSpPr>
-          <p:cNvPr id="9" name="Text 6"/>
-          <p:cNvSpPr/>
-          <p:nvPr/>
-        </p:nvSpPr>
-        <p:spPr>
-          <a:xfrm>
-            <a:off x="5989320" y="1600200"/>
-            <a:ext cx="2286000" cy="320040"/>
-          </a:xfrm>
-          <a:prstGeom prst="rect">
-            <a:avLst/>
-          </a:prstGeom>
-          <a:noFill/>
-          <a:ln/>
-        </p:spPr>
-        <p:txBody>
-          <a:bodyPr wrap="square" rtlCol="0" anchor="ctr"/>
-          <a:lstStyle/>
-          <a:p>
-            <a:pPr indent="0" marL="0">
-              <a:buNone/>
-            </a:pPr>
-            <a:r>
-              <a:rPr lang="en-US" sz="1300" b="1" dirty="0">
+          <p:cNvPr id="13" name="Text 9"/>
+          <p:cNvSpPr/>
+          <p:nvPr/>
+        </p:nvSpPr>
+        <p:spPr>
+          <a:xfrm>
+            <a:off x="731520" y="4114800"/>
+            <a:ext cx="7680960" cy="640080"/>
+          </a:xfrm>
+          <a:prstGeom prst="rect">
+            <a:avLst/>
+          </a:prstGeom>
+          <a:noFill/>
+          <a:ln/>
+        </p:spPr>
+        <p:txBody>
+          <a:bodyPr wrap="square" rtlCol="0" anchor="ctr"/>
+          <a:lstStyle/>
+          <a:p>
+            <a:pPr indent="0" marL="0">
+              <a:buNone/>
+            </a:pPr>
+            <a:r>
+              <a:rPr lang="en-US" sz="1050" b="1" dirty="0">
                 <a:solidFill>
                   <a:srgbClr val="059669"/>
                 </a:solidFill>
               </a:rPr>
-              <a:t>Yo‘nalishlar vazifasi:</a:t>
-            </a:r>
-            <a:endParaRPr lang="en-US" sz="1300" dirty="0"/>
-          </a:p>
-        </p:txBody>
-      </p:sp>
-      <p:sp>
-        <p:nvSpPr>
-          <p:cNvPr id="10" name="Text 7"/>
-          <p:cNvSpPr/>
-          <p:nvPr/>
-        </p:nvSpPr>
-        <p:spPr>
-          <a:xfrm>
-            <a:off x="5989320" y="1965960"/>
-            <a:ext cx="2286000" cy="2560320"/>
-          </a:xfrm>
-          <a:prstGeom prst="rect">
-            <a:avLst/>
-          </a:prstGeom>
-          <a:noFill/>
-          <a:ln/>
-        </p:spPr>
-        <p:txBody>
-          <a:bodyPr wrap="square" rtlCol="0" anchor="ctr"/>
-          <a:lstStyle/>
-          <a:p>
-            <a:pPr indent="0" marL="0">
-              <a:lnSpc>
-                <a:spcPct val="110000"/>
-              </a:lnSpc>
-              <a:buNone/>
-            </a:pPr>
-            <a:r>
-              <a:rPr lang="en-US" sz="1050" b="1" dirty="0">
+              <a:t>• Nazariya va Amaliyot uyg‘unligi: </a:t>
+            </a:r>
+            <a:pPr indent="0" marL="0">
+              <a:buNone/>
+            </a:pPr>
+            <a:r>
+              <a:rPr lang="en-US" sz="1050" dirty="0">
                 <a:solidFill>
                   <a:srgbClr val="0F172A"/>
                 </a:solidFill>
               </a:rPr>
-              <a:t>• Boshlang‘ich kibergigiyena:
-</a:t>
-            </a:r>
-            <a:pPr indent="0" marL="0">
-              <a:lnSpc>
-                <a:spcPct val="110000"/>
-              </a:lnSpc>
-              <a:buNone/>
-            </a:pPr>
-            <a:r>
-              <a:rPr lang="en-US" sz="950" dirty="0">
-                <a:solidFill>
-                  <a:srgbClr val="475569"/>
-                </a:solidFill>
-              </a:rPr>
-              <a:t>Parollar, 2FA, fishingni aniqlash.
-</a:t>
-            </a:r>
-            <a:pPr indent="0" marL="0">
-              <a:lnSpc>
-                <a:spcPct val="110000"/>
-              </a:lnSpc>
-              <a:buNone/>
-            </a:pPr>
-            <a:r>
-              <a:rPr lang="en-US" sz="1050" b="1" dirty="0">
-                <a:solidFill>
-                  <a:srgbClr val="0F172A"/>
-                </a:solidFill>
-              </a:rPr>
-              <a:t>• Web xavfsizlik (OWASP):
-</a:t>
-            </a:r>
-            <a:pPr indent="0" marL="0">
-              <a:lnSpc>
-                <a:spcPct val="110000"/>
-              </a:lnSpc>
-              <a:buNone/>
-            </a:pPr>
-            <a:r>
-              <a:rPr lang="en-US" sz="950" dirty="0">
-                <a:solidFill>
-                  <a:srgbClr val="475569"/>
-                </a:solidFill>
-              </a:rPr>
-              <a:t>SQL injection, XSS, CSRF tushunchalari.
-</a:t>
-            </a:r>
-            <a:pPr indent="0" marL="0">
-              <a:lnSpc>
-                <a:spcPct val="110000"/>
-              </a:lnSpc>
-              <a:buNone/>
-            </a:pPr>
-            <a:r>
-              <a:rPr lang="en-US" sz="1050" b="1" dirty="0">
-                <a:solidFill>
-                  <a:srgbClr val="0F172A"/>
-                </a:solidFill>
-              </a:rPr>
-              <a:t>• Tarmoq &amp; Linux:
-</a:t>
-            </a:r>
-            <a:pPr indent="0" marL="0">
-              <a:lnSpc>
-                <a:spcPct val="110000"/>
-              </a:lnSpc>
-              <a:buNone/>
-            </a:pPr>
-            <a:r>
-              <a:rPr lang="en-US" sz="950" dirty="0">
-                <a:solidFill>
-                  <a:srgbClr val="475569"/>
-                </a:solidFill>
-              </a:rPr>
-              <a:t>Portlar, IP manzillar, server himoyasi.
-</a:t>
-            </a:r>
-            <a:pPr indent="0" marL="0">
-              <a:lnSpc>
-                <a:spcPct val="110000"/>
-              </a:lnSpc>
-              <a:buNone/>
-            </a:pPr>
-            <a:r>
-              <a:rPr lang="en-US" sz="1050" b="1" dirty="0">
-                <a:solidFill>
-                  <a:srgbClr val="0F172A"/>
-                </a:solidFill>
-              </a:rPr>
-              <a:t>• Penetration testing:
-</a:t>
-            </a:r>
-            <a:pPr indent="0" marL="0">
-              <a:lnSpc>
-                <a:spcPct val="110000"/>
-              </a:lnSpc>
-              <a:buNone/>
-            </a:pPr>
-            <a:r>
-              <a:rPr lang="en-US" sz="950" dirty="0">
-                <a:solidFill>
-                  <a:srgbClr val="475569"/>
-                </a:solidFill>
-              </a:rPr>
-              <a:t>Axloqiy xakkerlik asoslari.</a:t>
+              <a:t>O‘quvchi har bir mavzuni o‘rgangach, darhol virtual laboratoriya xonasiga kirib amalda sinab ko‘radi (SQLi, XSS, Brute force, Phishing).</a:t>
             </a:r>
             <a:endParaRPr lang="en-US" sz="1050" dirty="0"/>
           </a:p>
@@ -5732,7 +5781,7 @@
     <p:bg>
       <p:bgPr>
         <a:solidFill>
-          <a:srgbClr val="F8FAFC"/>
+          <a:srgbClr val="F4F6F9"/>
         </a:solidFill>
       </p:bgPr>
     </p:bg>
@@ -5758,8 +5807,8 @@
         </p:nvSpPr>
         <p:spPr>
           <a:xfrm>
-            <a:off x="731520" y="320040"/>
-            <a:ext cx="2194560" cy="292608"/>
+            <a:off x="548640" y="228600"/>
+            <a:ext cx="2011680" cy="274320"/>
           </a:xfrm>
           <a:prstGeom prst="roundRect">
             <a:avLst/>
@@ -5783,8 +5832,8 @@
         </p:nvSpPr>
         <p:spPr>
           <a:xfrm>
-            <a:off x="731520" y="320040"/>
-            <a:ext cx="2194560" cy="292608"/>
+            <a:off x="548640" y="228600"/>
+            <a:ext cx="2011680" cy="274320"/>
           </a:xfrm>
           <a:prstGeom prst="rect">
             <a:avLst/>
@@ -5819,31 +5868,31 @@
         </p:nvSpPr>
         <p:spPr>
           <a:xfrm>
-            <a:off x="731520" y="658368"/>
-            <a:ext cx="7680960" cy="457200"/>
-          </a:xfrm>
-          <a:prstGeom prst="rect">
-            <a:avLst/>
-          </a:prstGeom>
-          <a:noFill/>
-          <a:ln/>
-        </p:spPr>
-        <p:txBody>
-          <a:bodyPr wrap="square" rtlCol="0" anchor="ctr"/>
-          <a:lstStyle/>
-          <a:p>
-            <a:pPr indent="0" marL="0">
-              <a:buNone/>
-            </a:pPr>
-            <a:r>
-              <a:rPr lang="en-US" sz="2200" b="1" dirty="0">
+            <a:off x="548640" y="548640"/>
+            <a:ext cx="8046720" cy="411480"/>
+          </a:xfrm>
+          <a:prstGeom prst="rect">
+            <a:avLst/>
+          </a:prstGeom>
+          <a:noFill/>
+          <a:ln/>
+        </p:spPr>
+        <p:txBody>
+          <a:bodyPr wrap="square" rtlCol="0" anchor="ctr"/>
+          <a:lstStyle/>
+          <a:p>
+            <a:pPr indent="0" marL="0">
+              <a:buNone/>
+            </a:pPr>
+            <a:r>
+              <a:rPr lang="en-US" sz="2000" b="1" dirty="0">
                 <a:solidFill>
                   <a:srgbClr val="0F172A"/>
                 </a:solidFill>
               </a:rPr>
-              <a:t>Amaliy imkoniyatlar: APK Qo‘riqchi va Himoya Vositalari</a:t>
-            </a:r>
-            <a:endParaRPr lang="en-US" sz="2200" dirty="0"/>
+              <a:t>Amaliy imkoniyatlar: APK Qo‘riqchi va Telefon Paneli</a:t>
+            </a:r>
+            <a:endParaRPr lang="en-US" sz="2000" dirty="0"/>
           </a:p>
         </p:txBody>
       </p:sp>
@@ -5855,31 +5904,31 @@
         </p:nvSpPr>
         <p:spPr>
           <a:xfrm>
-            <a:off x="731520" y="1078992"/>
-            <a:ext cx="7680960" cy="292608"/>
-          </a:xfrm>
-          <a:prstGeom prst="rect">
-            <a:avLst/>
-          </a:prstGeom>
-          <a:noFill/>
-          <a:ln/>
-        </p:spPr>
-        <p:txBody>
-          <a:bodyPr wrap="square" rtlCol="0" anchor="ctr"/>
-          <a:lstStyle/>
-          <a:p>
-            <a:pPr indent="0" marL="0">
-              <a:buNone/>
-            </a:pPr>
-            <a:r>
-              <a:rPr lang="en-US" sz="1200" dirty="0">
+            <a:off x="548640" y="960120"/>
+            <a:ext cx="8046720" cy="274320"/>
+          </a:xfrm>
+          <a:prstGeom prst="rect">
+            <a:avLst/>
+          </a:prstGeom>
+          <a:noFill/>
+          <a:ln/>
+        </p:spPr>
+        <p:txBody>
+          <a:bodyPr wrap="square" rtlCol="0" anchor="ctr"/>
+          <a:lstStyle/>
+          <a:p>
+            <a:pPr indent="0" marL="0">
+              <a:buNone/>
+            </a:pPr>
+            <a:r>
+              <a:rPr lang="en-US" sz="1100" dirty="0">
                 <a:solidFill>
                   <a:srgbClr val="475569"/>
                 </a:solidFill>
               </a:rPr>
-              <a:t>Foydalanuvchilar o‘z qurilmalari va shubhali fayllarini real vaqtda tekshirishi mumkin</a:t>
-            </a:r>
-            <a:endParaRPr lang="en-US" sz="1200" dirty="0"/>
+              <a:t>Sayt ichidagi haqiqiy tahlil va himoya vositalari</a:t>
+            </a:r>
+            <a:endParaRPr lang="en-US" sz="1100" dirty="0"/>
           </a:p>
         </p:txBody>
       </p:sp>
@@ -5891,14 +5940,14 @@
         </p:nvSpPr>
         <p:spPr>
           <a:xfrm>
-            <a:off x="731520" y="1463040"/>
-            <a:ext cx="3657600" cy="2194560"/>
+            <a:off x="512064" y="1289304"/>
+            <a:ext cx="3959352" cy="2816352"/>
           </a:xfrm>
           <a:prstGeom prst="roundRect">
             <a:avLst/>
           </a:prstGeom>
           <a:solidFill>
-            <a:srgbClr val="0F172A"/>
+            <a:srgbClr val="0D1A26"/>
           </a:solidFill>
           <a:ln w="19050">
             <a:solidFill>
@@ -5924,8 +5973,8 @@
         </p:blipFill>
         <p:spPr>
           <a:xfrm>
-            <a:off x="777240" y="1508760"/>
-            <a:ext cx="3566160" cy="2103120"/>
+            <a:off x="548640" y="1325880"/>
+            <a:ext cx="3886200" cy="2468880"/>
           </a:xfrm>
           <a:prstGeom prst="rect">
             <a:avLst/>
@@ -5934,14 +5983,50 @@
       </p:pic>
       <p:sp>
         <p:nvSpPr>
-          <p:cNvPr id="8" name="Shape 5"/>
-          <p:cNvSpPr/>
-          <p:nvPr/>
-        </p:nvSpPr>
-        <p:spPr>
-          <a:xfrm>
-            <a:off x="731520" y="3749040"/>
-            <a:ext cx="3657600" cy="1005840"/>
+          <p:cNvPr id="8" name="Text 5"/>
+          <p:cNvSpPr/>
+          <p:nvPr/>
+        </p:nvSpPr>
+        <p:spPr>
+          <a:xfrm>
+            <a:off x="548640" y="3831336"/>
+            <a:ext cx="3886200" cy="274320"/>
+          </a:xfrm>
+          <a:prstGeom prst="rect">
+            <a:avLst/>
+          </a:prstGeom>
+          <a:noFill/>
+          <a:ln/>
+        </p:spPr>
+        <p:txBody>
+          <a:bodyPr wrap="square" rtlCol="0" anchor="ctr"/>
+          <a:lstStyle/>
+          <a:p>
+            <a:pPr algn="ctr" indent="0" marL="0">
+              <a:buNone/>
+            </a:pPr>
+            <a:r>
+              <a:rPr lang="en-US" sz="900" dirty="0">
+                <a:solidFill>
+                  <a:srgbClr val="BAE6FD"/>
+                </a:solidFill>
+              </a:rPr>
+              <a:t>📸 "APK Qo‘riqchi" — Android ilovalarni tahlil qilish moduli</a:t>
+            </a:r>
+            <a:endParaRPr lang="en-US" sz="900" dirty="0"/>
+          </a:p>
+        </p:txBody>
+      </p:sp>
+      <p:sp>
+        <p:nvSpPr>
+          <p:cNvPr id="9" name="Shape 6"/>
+          <p:cNvSpPr/>
+          <p:nvPr/>
+        </p:nvSpPr>
+        <p:spPr>
+          <a:xfrm>
+            <a:off x="548640" y="4069080"/>
+            <a:ext cx="3886200" cy="777240"/>
           </a:xfrm>
           <a:prstGeom prst="roundRect">
             <a:avLst/>
@@ -5959,36 +6044,35 @@
       </p:sp>
       <p:sp>
         <p:nvSpPr>
-          <p:cNvPr id="9" name="Text 6"/>
-          <p:cNvSpPr/>
-          <p:nvPr/>
-        </p:nvSpPr>
-        <p:spPr>
-          <a:xfrm>
-            <a:off x="822960" y="3794760"/>
-            <a:ext cx="3474720" cy="896112"/>
-          </a:xfrm>
-          <a:prstGeom prst="rect">
-            <a:avLst/>
-          </a:prstGeom>
-          <a:noFill/>
-          <a:ln/>
-        </p:spPr>
-        <p:txBody>
-          <a:bodyPr wrap="square" rtlCol="0" anchor="ctr"/>
-          <a:lstStyle/>
-          <a:p>
-            <a:pPr indent="0" marL="0">
-              <a:buNone/>
-            </a:pPr>
-            <a:r>
-              <a:rPr lang="en-US" sz="1100" b="1" dirty="0">
+          <p:cNvPr id="10" name="Text 7"/>
+          <p:cNvSpPr/>
+          <p:nvPr/>
+        </p:nvSpPr>
+        <p:spPr>
+          <a:xfrm>
+            <a:off x="685800" y="4114800"/>
+            <a:ext cx="3611880" cy="685800"/>
+          </a:xfrm>
+          <a:prstGeom prst="rect">
+            <a:avLst/>
+          </a:prstGeom>
+          <a:noFill/>
+          <a:ln/>
+        </p:spPr>
+        <p:txBody>
+          <a:bodyPr wrap="square" rtlCol="0" anchor="ctr"/>
+          <a:lstStyle/>
+          <a:p>
+            <a:pPr indent="0" marL="0">
+              <a:buNone/>
+            </a:pPr>
+            <a:r>
+              <a:rPr lang="en-US" sz="950" b="1" dirty="0">
                 <a:solidFill>
                   <a:srgbClr val="059669"/>
                 </a:solidFill>
               </a:rPr>
-              <a:t>📱 APK Qo‘riqchi Moduli:
-</a:t>
+              <a:t>📱 APK Qo‘riqchi: </a:t>
             </a:r>
             <a:pPr indent="0" marL="0">
               <a:buNone/>
@@ -5999,32 +6083,32 @@
                   <a:srgbClr val="475569"/>
                 </a:solidFill>
               </a:rPr>
-              <a:t>Telegram orqali yuborilgan noma'lum APK fayllarni statik dekompilyatsiya qilib, SMS va parollarni o'g'irlovchi troyanlarni aniqlaydi.</a:t>
-            </a:r>
-            <a:endParaRPr lang="en-US" sz="1100" dirty="0"/>
-          </a:p>
-        </p:txBody>
-      </p:sp>
-      <p:sp>
-        <p:nvSpPr>
-          <p:cNvPr id="10" name="Shape 7"/>
-          <p:cNvSpPr/>
-          <p:nvPr/>
-        </p:nvSpPr>
-        <p:spPr>
-          <a:xfrm>
-            <a:off x="4754880" y="1463040"/>
-            <a:ext cx="3657600" cy="2194560"/>
+              <a:t>Faylni yuklab, uning so'ragan ruxsatlari, SMS o'g'irlash kodlari va troyan signaturalarini fosh etish.</a:t>
+            </a:r>
+            <a:endParaRPr lang="en-US" sz="950" dirty="0"/>
+          </a:p>
+        </p:txBody>
+      </p:sp>
+      <p:sp>
+        <p:nvSpPr>
+          <p:cNvPr id="11" name="Shape 8"/>
+          <p:cNvSpPr/>
+          <p:nvPr/>
+        </p:nvSpPr>
+        <p:spPr>
+          <a:xfrm>
+            <a:off x="4672584" y="1289304"/>
+            <a:ext cx="3959352" cy="2816352"/>
           </a:xfrm>
           <a:prstGeom prst="roundRect">
             <a:avLst/>
           </a:prstGeom>
           <a:solidFill>
-            <a:srgbClr val="0F172A"/>
+            <a:srgbClr val="0D1A26"/>
           </a:solidFill>
           <a:ln w="19050">
             <a:solidFill>
-              <a:srgbClr val="0EA5E9"/>
+              <a:srgbClr val="059669"/>
             </a:solidFill>
             <a:prstDash val="solid"/>
           </a:ln>
@@ -6032,7 +6116,7 @@
       </p:sp>
       <p:pic>
         <p:nvPicPr>
-          <p:cNvPr id="11" name="Image 1" descr="C:\Users\User\Desktop\kiber xavfsizlik boyicha sayt\public\screenshots\06_security_phone.png">    </p:cNvPr>
+          <p:cNvPr id="12" name="Image 1" descr="C:\Users\User\Desktop\kiber xavfsizlik boyicha sayt\public\screenshots\06_security_phone.png">    </p:cNvPr>
           <p:cNvPicPr>
             <a:picLocks noChangeAspect="1"/>
           </p:cNvPicPr>
@@ -6046,8 +6130,8 @@
         </p:blipFill>
         <p:spPr>
           <a:xfrm>
-            <a:off x="4800600" y="1508760"/>
-            <a:ext cx="3566160" cy="2103120"/>
+            <a:off x="4709160" y="1325880"/>
+            <a:ext cx="3886200" cy="2468880"/>
           </a:xfrm>
           <a:prstGeom prst="rect">
             <a:avLst/>
@@ -6056,14 +6140,50 @@
       </p:pic>
       <p:sp>
         <p:nvSpPr>
-          <p:cNvPr id="12" name="Shape 8"/>
-          <p:cNvSpPr/>
-          <p:nvPr/>
-        </p:nvSpPr>
-        <p:spPr>
-          <a:xfrm>
-            <a:off x="4754880" y="3749040"/>
-            <a:ext cx="3657600" cy="1005840"/>
+          <p:cNvPr id="13" name="Text 9"/>
+          <p:cNvSpPr/>
+          <p:nvPr/>
+        </p:nvSpPr>
+        <p:spPr>
+          <a:xfrm>
+            <a:off x="4709160" y="3831336"/>
+            <a:ext cx="3886200" cy="274320"/>
+          </a:xfrm>
+          <a:prstGeom prst="rect">
+            <a:avLst/>
+          </a:prstGeom>
+          <a:noFill/>
+          <a:ln/>
+        </p:spPr>
+        <p:txBody>
+          <a:bodyPr wrap="square" rtlCol="0" anchor="ctr"/>
+          <a:lstStyle/>
+          <a:p>
+            <a:pPr algn="ctr" indent="0" marL="0">
+              <a:buNone/>
+            </a:pPr>
+            <a:r>
+              <a:rPr lang="en-US" sz="900" dirty="0">
+                <a:solidFill>
+                  <a:srgbClr val="BAE6FD"/>
+                </a:solidFill>
+              </a:rPr>
+              <a:t>📸 "Telefon Xavfsizlik Paneli" — qurilma auditi va 1-Click Fix</a:t>
+            </a:r>
+            <a:endParaRPr lang="en-US" sz="900" dirty="0"/>
+          </a:p>
+        </p:txBody>
+      </p:sp>
+      <p:sp>
+        <p:nvSpPr>
+          <p:cNvPr id="14" name="Shape 10"/>
+          <p:cNvSpPr/>
+          <p:nvPr/>
+        </p:nvSpPr>
+        <p:spPr>
+          <a:xfrm>
+            <a:off x="4709160" y="4069080"/>
+            <a:ext cx="3886200" cy="777240"/>
           </a:xfrm>
           <a:prstGeom prst="roundRect">
             <a:avLst/>
@@ -6081,36 +6201,35 @@
       </p:sp>
       <p:sp>
         <p:nvSpPr>
-          <p:cNvPr id="13" name="Text 9"/>
-          <p:cNvSpPr/>
-          <p:nvPr/>
-        </p:nvSpPr>
-        <p:spPr>
-          <a:xfrm>
-            <a:off x="4846320" y="3794760"/>
-            <a:ext cx="3474720" cy="896112"/>
-          </a:xfrm>
-          <a:prstGeom prst="rect">
-            <a:avLst/>
-          </a:prstGeom>
-          <a:noFill/>
-          <a:ln/>
-        </p:spPr>
-        <p:txBody>
-          <a:bodyPr wrap="square" rtlCol="0" anchor="ctr"/>
-          <a:lstStyle/>
-          <a:p>
-            <a:pPr indent="0" marL="0">
-              <a:buNone/>
-            </a:pPr>
-            <a:r>
-              <a:rPr lang="en-US" sz="1100" b="1" dirty="0">
+          <p:cNvPr id="15" name="Text 11"/>
+          <p:cNvSpPr/>
+          <p:nvPr/>
+        </p:nvSpPr>
+        <p:spPr>
+          <a:xfrm>
+            <a:off x="4846320" y="4114800"/>
+            <a:ext cx="3611880" cy="685800"/>
+          </a:xfrm>
+          <a:prstGeom prst="rect">
+            <a:avLst/>
+          </a:prstGeom>
+          <a:noFill/>
+          <a:ln/>
+        </p:spPr>
+        <p:txBody>
+          <a:bodyPr wrap="square" rtlCol="0" anchor="ctr"/>
+          <a:lstStyle/>
+          <a:p>
+            <a:pPr indent="0" marL="0">
+              <a:buNone/>
+            </a:pPr>
+            <a:r>
+              <a:rPr lang="en-US" sz="950" b="1" dirty="0">
                 <a:solidFill>
                   <a:srgbClr val="0284C7"/>
                 </a:solidFill>
               </a:rPr>
-              <a:t>🔒 Telefon Xavfsizlik Paneli:
-</a:t>
+              <a:t>🔒 Smartfon Himoyasi: </a:t>
             </a:r>
             <a:pPr indent="0" marL="0">
               <a:buNone/>
@@ -6121,9 +6240,9 @@
                   <a:srgbClr val="475569"/>
                 </a:solidFill>
               </a:rPr>
-              <a:t>Ochiq USB debugging, ekran qulfi va ruxsatnomalarni 1-klikda tekshiradi hamda "1-Click Fix" orqali zaiflikni tuzatadi.</a:t>
-            </a:r>
-            <a:endParaRPr lang="en-US" sz="1100" dirty="0"/>
+              <a:t>Ochiq USB debugging, ekran qulfi va xavfli ruxsatnomalarni 1-klikda tekshirish va to'g'irlash.</a:t>
+            </a:r>
+            <a:endParaRPr lang="en-US" sz="950" dirty="0"/>
           </a:p>
         </p:txBody>
       </p:sp>
@@ -6141,7 +6260,7 @@
     <p:bg>
       <p:bgPr>
         <a:solidFill>
-          <a:srgbClr val="F8FAFC"/>
+          <a:srgbClr val="F4F6F9"/>
         </a:solidFill>
       </p:bgPr>
     </p:bg>
@@ -6167,8 +6286,8 @@
         </p:nvSpPr>
         <p:spPr>
           <a:xfrm>
-            <a:off x="731520" y="320040"/>
-            <a:ext cx="2194560" cy="292608"/>
+            <a:off x="548640" y="228600"/>
+            <a:ext cx="2011680" cy="274320"/>
           </a:xfrm>
           <a:prstGeom prst="roundRect">
             <a:avLst/>
@@ -6192,8 +6311,8 @@
         </p:nvSpPr>
         <p:spPr>
           <a:xfrm>
-            <a:off x="731520" y="320040"/>
-            <a:ext cx="2194560" cy="292608"/>
+            <a:off x="548640" y="228600"/>
+            <a:ext cx="2011680" cy="274320"/>
           </a:xfrm>
           <a:prstGeom prst="rect">
             <a:avLst/>
@@ -6228,31 +6347,31 @@
         </p:nvSpPr>
         <p:spPr>
           <a:xfrm>
-            <a:off x="731520" y="658368"/>
-            <a:ext cx="7680960" cy="457200"/>
-          </a:xfrm>
-          <a:prstGeom prst="rect">
-            <a:avLst/>
-          </a:prstGeom>
-          <a:noFill/>
-          <a:ln/>
-        </p:spPr>
-        <p:txBody>
-          <a:bodyPr wrap="square" rtlCol="0" anchor="ctr"/>
-          <a:lstStyle/>
-          <a:p>
-            <a:pPr indent="0" marL="0">
-              <a:buNone/>
-            </a:pPr>
-            <a:r>
-              <a:rPr lang="en-US" sz="2200" b="1" dirty="0">
+            <a:off x="548640" y="548640"/>
+            <a:ext cx="8046720" cy="411480"/>
+          </a:xfrm>
+          <a:prstGeom prst="rect">
+            <a:avLst/>
+          </a:prstGeom>
+          <a:noFill/>
+          <a:ln/>
+        </p:spPr>
+        <p:txBody>
+          <a:bodyPr wrap="square" rtlCol="0" anchor="ctr"/>
+          <a:lstStyle/>
+          <a:p>
+            <a:pPr indent="0" marL="0">
+              <a:buNone/>
+            </a:pPr>
+            <a:r>
+              <a:rPr lang="en-US" sz="2000" b="1" dirty="0">
                 <a:solidFill>
                   <a:srgbClr val="0F172A"/>
                 </a:solidFill>
               </a:rPr>
               <a:t>Sayt qanday ishlaydi? (Foydalanish oqimi)</a:t>
             </a:r>
-            <a:endParaRPr lang="en-US" sz="2200" dirty="0"/>
+            <a:endParaRPr lang="en-US" sz="2000" dirty="0"/>
           </a:p>
         </p:txBody>
       </p:sp>
@@ -6264,31 +6383,31 @@
         </p:nvSpPr>
         <p:spPr>
           <a:xfrm>
-            <a:off x="731520" y="1078992"/>
-            <a:ext cx="7680960" cy="292608"/>
-          </a:xfrm>
-          <a:prstGeom prst="rect">
-            <a:avLst/>
-          </a:prstGeom>
-          <a:noFill/>
-          <a:ln/>
-        </p:spPr>
-        <p:txBody>
-          <a:bodyPr wrap="square" rtlCol="0" anchor="ctr"/>
-          <a:lstStyle/>
-          <a:p>
-            <a:pPr indent="0" marL="0">
-              <a:buNone/>
-            </a:pPr>
-            <a:r>
-              <a:rPr lang="en-US" sz="1200" dirty="0">
+            <a:off x="548640" y="960120"/>
+            <a:ext cx="8046720" cy="274320"/>
+          </a:xfrm>
+          <a:prstGeom prst="rect">
+            <a:avLst/>
+          </a:prstGeom>
+          <a:noFill/>
+          <a:ln/>
+        </p:spPr>
+        <p:txBody>
+          <a:bodyPr wrap="square" rtlCol="0" anchor="ctr"/>
+          <a:lstStyle/>
+          <a:p>
+            <a:pPr indent="0" marL="0">
+              <a:buNone/>
+            </a:pPr>
+            <a:r>
+              <a:rPr lang="en-US" sz="1100" dirty="0">
                 <a:solidFill>
                   <a:srgbClr val="475569"/>
                 </a:solidFill>
               </a:rPr>
               <a:t>Foydalanuvchi platformaga kirgandan so‘ng bilim olish va himoyalanish zanjiri</a:t>
             </a:r>
-            <a:endParaRPr lang="en-US" sz="1200" dirty="0"/>
+            <a:endParaRPr lang="en-US" sz="1100" dirty="0"/>
           </a:p>
         </p:txBody>
       </p:sp>
@@ -6300,8 +6419,93 @@
         </p:nvSpPr>
         <p:spPr>
           <a:xfrm>
-            <a:off x="731520" y="1645920"/>
-            <a:ext cx="1828800" cy="2834640"/>
+            <a:off x="512064" y="1289304"/>
+            <a:ext cx="4279392" cy="3822192"/>
+          </a:xfrm>
+          <a:prstGeom prst="roundRect">
+            <a:avLst/>
+          </a:prstGeom>
+          <a:solidFill>
+            <a:srgbClr val="0D1A26"/>
+          </a:solidFill>
+          <a:ln w="19050">
+            <a:solidFill>
+              <a:srgbClr val="059669"/>
+            </a:solidFill>
+            <a:prstDash val="solid"/>
+          </a:ln>
+        </p:spPr>
+      </p:sp>
+      <p:pic>
+        <p:nvPicPr>
+          <p:cNvPr id="7" name="Image 0" descr="C:\Users\User\Desktop\kiber xavfsizlik boyicha sayt\public\screenshots\09_lab_room.png">    </p:cNvPr>
+          <p:cNvPicPr>
+            <a:picLocks noChangeAspect="1"/>
+          </p:cNvPicPr>
+          <p:nvPr/>
+        </p:nvPicPr>
+        <p:blipFill>
+          <a:blip r:embed="rId1"/>
+          <a:stretch>
+            <a:fillRect/>
+          </a:stretch>
+        </p:blipFill>
+        <p:spPr>
+          <a:xfrm>
+            <a:off x="548640" y="1325880"/>
+            <a:ext cx="4206240" cy="3474720"/>
+          </a:xfrm>
+          <a:prstGeom prst="rect">
+            <a:avLst/>
+          </a:prstGeom>
+        </p:spPr>
+      </p:pic>
+      <p:sp>
+        <p:nvSpPr>
+          <p:cNvPr id="8" name="Text 5"/>
+          <p:cNvSpPr/>
+          <p:nvPr/>
+        </p:nvSpPr>
+        <p:spPr>
+          <a:xfrm>
+            <a:off x="548640" y="4837176"/>
+            <a:ext cx="4206240" cy="274320"/>
+          </a:xfrm>
+          <a:prstGeom prst="rect">
+            <a:avLst/>
+          </a:prstGeom>
+          <a:noFill/>
+          <a:ln/>
+        </p:spPr>
+        <p:txBody>
+          <a:bodyPr wrap="square" rtlCol="0" anchor="ctr"/>
+          <a:lstStyle/>
+          <a:p>
+            <a:pPr algn="ctr" indent="0" marL="0">
+              <a:buNone/>
+            </a:pPr>
+            <a:r>
+              <a:rPr lang="en-US" sz="900" dirty="0">
+                <a:solidFill>
+                  <a:srgbClr val="BAE6FD"/>
+                </a:solidFill>
+              </a:rPr>
+              <a:t>📸 Haqiqiy virtual laboratoriya xonasi (Lab Room) interfeysi</a:t>
+            </a:r>
+            <a:endParaRPr lang="en-US" sz="900" dirty="0"/>
+          </a:p>
+        </p:txBody>
+      </p:sp>
+      <p:sp>
+        <p:nvSpPr>
+          <p:cNvPr id="9" name="Shape 6"/>
+          <p:cNvSpPr/>
+          <p:nvPr/>
+        </p:nvSpPr>
+        <p:spPr>
+          <a:xfrm>
+            <a:off x="5029200" y="1325880"/>
+            <a:ext cx="3566160" cy="749808"/>
           </a:xfrm>
           <a:prstGeom prst="roundRect">
             <a:avLst/>
@@ -6319,16 +6523,16 @@
       </p:sp>
       <p:sp>
         <p:nvSpPr>
-          <p:cNvPr id="7" name="Shape 5"/>
-          <p:cNvSpPr/>
-          <p:nvPr/>
-        </p:nvSpPr>
-        <p:spPr>
-          <a:xfrm>
-            <a:off x="1325880" y="1874520"/>
-            <a:ext cx="640080" cy="640080"/>
-          </a:xfrm>
-          <a:prstGeom prst="ellipse">
+          <p:cNvPr id="10" name="Shape 7"/>
+          <p:cNvSpPr/>
+          <p:nvPr/>
+        </p:nvSpPr>
+        <p:spPr>
+          <a:xfrm>
+            <a:off x="5166360" y="1472184"/>
+            <a:ext cx="457200" cy="457200"/>
+          </a:xfrm>
+          <a:prstGeom prst="roundRect">
             <a:avLst/>
           </a:prstGeom>
           <a:solidFill>
@@ -6339,14 +6543,14 @@
       </p:sp>
       <p:sp>
         <p:nvSpPr>
-          <p:cNvPr id="8" name="Text 6"/>
-          <p:cNvSpPr/>
-          <p:nvPr/>
-        </p:nvSpPr>
-        <p:spPr>
-          <a:xfrm>
-            <a:off x="1325880" y="1874520"/>
-            <a:ext cx="640080" cy="640080"/>
+          <p:cNvPr id="11" name="Text 8"/>
+          <p:cNvSpPr/>
+          <p:nvPr/>
+        </p:nvSpPr>
+        <p:spPr>
+          <a:xfrm>
+            <a:off x="5166360" y="1472184"/>
+            <a:ext cx="457200" cy="457200"/>
           </a:xfrm>
           <a:prstGeom prst="rect">
             <a:avLst/>
@@ -6362,78 +6566,75 @@
               <a:buNone/>
             </a:pPr>
             <a:r>
-              <a:rPr lang="en-US" sz="1600" b="1" dirty="0">
+              <a:rPr lang="en-US" sz="1200" b="1" dirty="0">
                 <a:solidFill>
                   <a:srgbClr val="000000"/>
                 </a:solidFill>
               </a:rPr>
-              <a:t>1</a:t>
-            </a:r>
-            <a:endParaRPr lang="en-US" sz="1600" dirty="0"/>
-          </a:p>
-        </p:txBody>
-      </p:sp>
-      <p:sp>
-        <p:nvSpPr>
-          <p:cNvPr id="9" name="Text 7"/>
-          <p:cNvSpPr/>
-          <p:nvPr/>
-        </p:nvSpPr>
-        <p:spPr>
-          <a:xfrm>
-            <a:off x="822960" y="2651760"/>
-            <a:ext cx="1645920" cy="411480"/>
-          </a:xfrm>
-          <a:prstGeom prst="rect">
-            <a:avLst/>
-          </a:prstGeom>
-          <a:noFill/>
-          <a:ln/>
-        </p:spPr>
-        <p:txBody>
-          <a:bodyPr wrap="square" rtlCol="0" anchor="ctr"/>
-          <a:lstStyle/>
-          <a:p>
-            <a:pPr algn="ctr" indent="0" marL="0">
-              <a:buNone/>
-            </a:pPr>
-            <a:r>
-              <a:rPr lang="en-US" sz="1200" b="1" dirty="0">
+              <a:t>01</a:t>
+            </a:r>
+            <a:endParaRPr lang="en-US" sz="1200" dirty="0"/>
+          </a:p>
+        </p:txBody>
+      </p:sp>
+      <p:sp>
+        <p:nvSpPr>
+          <p:cNvPr id="12" name="Text 9"/>
+          <p:cNvSpPr/>
+          <p:nvPr/>
+        </p:nvSpPr>
+        <p:spPr>
+          <a:xfrm>
+            <a:off x="5760720" y="1399032"/>
+            <a:ext cx="2743200" cy="274320"/>
+          </a:xfrm>
+          <a:prstGeom prst="rect">
+            <a:avLst/>
+          </a:prstGeom>
+          <a:noFill/>
+          <a:ln/>
+        </p:spPr>
+        <p:txBody>
+          <a:bodyPr wrap="square" rtlCol="0" anchor="ctr"/>
+          <a:lstStyle/>
+          <a:p>
+            <a:pPr indent="0" marL="0">
+              <a:buNone/>
+            </a:pPr>
+            <a:r>
+              <a:rPr lang="en-US" sz="1100" b="1" dirty="0">
                 <a:solidFill>
                   <a:srgbClr val="0F172A"/>
                 </a:solidFill>
               </a:rPr>
               <a:t>Saytga kirish</a:t>
             </a:r>
-            <a:endParaRPr lang="en-US" sz="1200" dirty="0"/>
-          </a:p>
-        </p:txBody>
-      </p:sp>
-      <p:sp>
-        <p:nvSpPr>
-          <p:cNvPr id="10" name="Text 8"/>
-          <p:cNvSpPr/>
-          <p:nvPr/>
-        </p:nvSpPr>
-        <p:spPr>
-          <a:xfrm>
-            <a:off x="822960" y="3108960"/>
-            <a:ext cx="1645920" cy="1188720"/>
-          </a:xfrm>
-          <a:prstGeom prst="rect">
-            <a:avLst/>
-          </a:prstGeom>
-          <a:noFill/>
-          <a:ln/>
-        </p:spPr>
-        <p:txBody>
-          <a:bodyPr wrap="square" rtlCol="0" anchor="ctr"/>
-          <a:lstStyle/>
-          <a:p>
-            <a:pPr algn="ctr" indent="0" marL="0">
-              <a:lnSpc>
-                <a:spcPct val="115000"/>
-              </a:lnSpc>
+            <a:endParaRPr lang="en-US" sz="1100" dirty="0"/>
+          </a:p>
+        </p:txBody>
+      </p:sp>
+      <p:sp>
+        <p:nvSpPr>
+          <p:cNvPr id="13" name="Text 10"/>
+          <p:cNvSpPr/>
+          <p:nvPr/>
+        </p:nvSpPr>
+        <p:spPr>
+          <a:xfrm>
+            <a:off x="5760720" y="1673352"/>
+            <a:ext cx="2743200" cy="347472"/>
+          </a:xfrm>
+          <a:prstGeom prst="rect">
+            <a:avLst/>
+          </a:prstGeom>
+          <a:noFill/>
+          <a:ln/>
+        </p:spPr>
+        <p:txBody>
+          <a:bodyPr wrap="square" rtlCol="0" anchor="ctr"/>
+          <a:lstStyle/>
+          <a:p>
+            <a:pPr indent="0" marL="0">
               <a:buNone/>
             </a:pPr>
             <a:r>
@@ -6442,7 +6643,7 @@
                   <a:srgbClr val="475569"/>
                 </a:solidFill>
               </a:rPr>
-              <a:t>Brauzer orqali ro‘yxatdan o‘tish yoki to‘g‘ridan-to‘g‘ri mehmon sifatida platformaga ulanish.</a:t>
+              <a:t>Brauzer orqali kiber-platformaga kirish va tilni tanlash.</a:t>
             </a:r>
             <a:endParaRPr lang="en-US" sz="950" dirty="0"/>
           </a:p>
@@ -6450,14 +6651,14 @@
       </p:sp>
       <p:sp>
         <p:nvSpPr>
-          <p:cNvPr id="11" name="Shape 9"/>
-          <p:cNvSpPr/>
-          <p:nvPr/>
-        </p:nvSpPr>
-        <p:spPr>
-          <a:xfrm>
-            <a:off x="2697480" y="1645920"/>
-            <a:ext cx="1828800" cy="2834640"/>
+          <p:cNvPr id="14" name="Shape 11"/>
+          <p:cNvSpPr/>
+          <p:nvPr/>
+        </p:nvSpPr>
+        <p:spPr>
+          <a:xfrm>
+            <a:off x="5029200" y="2194560"/>
+            <a:ext cx="3566160" cy="749808"/>
           </a:xfrm>
           <a:prstGeom prst="roundRect">
             <a:avLst/>
@@ -6475,16 +6676,16 @@
       </p:sp>
       <p:sp>
         <p:nvSpPr>
-          <p:cNvPr id="12" name="Shape 10"/>
-          <p:cNvSpPr/>
-          <p:nvPr/>
-        </p:nvSpPr>
-        <p:spPr>
-          <a:xfrm>
-            <a:off x="3291840" y="1874520"/>
-            <a:ext cx="640080" cy="640080"/>
-          </a:xfrm>
-          <a:prstGeom prst="ellipse">
+          <p:cNvPr id="15" name="Shape 12"/>
+          <p:cNvSpPr/>
+          <p:nvPr/>
+        </p:nvSpPr>
+        <p:spPr>
+          <a:xfrm>
+            <a:off x="5166360" y="2340864"/>
+            <a:ext cx="457200" cy="457200"/>
+          </a:xfrm>
+          <a:prstGeom prst="roundRect">
             <a:avLst/>
           </a:prstGeom>
           <a:solidFill>
@@ -6495,14 +6696,14 @@
       </p:sp>
       <p:sp>
         <p:nvSpPr>
-          <p:cNvPr id="13" name="Text 11"/>
-          <p:cNvSpPr/>
-          <p:nvPr/>
-        </p:nvSpPr>
-        <p:spPr>
-          <a:xfrm>
-            <a:off x="3291840" y="1874520"/>
-            <a:ext cx="640080" cy="640080"/>
+          <p:cNvPr id="16" name="Text 13"/>
+          <p:cNvSpPr/>
+          <p:nvPr/>
+        </p:nvSpPr>
+        <p:spPr>
+          <a:xfrm>
+            <a:off x="5166360" y="2340864"/>
+            <a:ext cx="457200" cy="457200"/>
           </a:xfrm>
           <a:prstGeom prst="rect">
             <a:avLst/>
@@ -6518,78 +6719,75 @@
               <a:buNone/>
             </a:pPr>
             <a:r>
-              <a:rPr lang="en-US" sz="1600" b="1" dirty="0">
+              <a:rPr lang="en-US" sz="1200" b="1" dirty="0">
                 <a:solidFill>
                   <a:srgbClr val="000000"/>
                 </a:solidFill>
               </a:rPr>
-              <a:t>2</a:t>
-            </a:r>
-            <a:endParaRPr lang="en-US" sz="1600" dirty="0"/>
-          </a:p>
-        </p:txBody>
-      </p:sp>
-      <p:sp>
-        <p:nvSpPr>
-          <p:cNvPr id="14" name="Text 12"/>
-          <p:cNvSpPr/>
-          <p:nvPr/>
-        </p:nvSpPr>
-        <p:spPr>
-          <a:xfrm>
-            <a:off x="2788920" y="2651760"/>
-            <a:ext cx="1645920" cy="411480"/>
-          </a:xfrm>
-          <a:prstGeom prst="rect">
-            <a:avLst/>
-          </a:prstGeom>
-          <a:noFill/>
-          <a:ln/>
-        </p:spPr>
-        <p:txBody>
-          <a:bodyPr wrap="square" rtlCol="0" anchor="ctr"/>
-          <a:lstStyle/>
-          <a:p>
-            <a:pPr algn="ctr" indent="0" marL="0">
-              <a:buNone/>
-            </a:pPr>
-            <a:r>
-              <a:rPr lang="en-US" sz="1200" b="1" dirty="0">
+              <a:t>02</a:t>
+            </a:r>
+            <a:endParaRPr lang="en-US" sz="1200" dirty="0"/>
+          </a:p>
+        </p:txBody>
+      </p:sp>
+      <p:sp>
+        <p:nvSpPr>
+          <p:cNvPr id="17" name="Text 14"/>
+          <p:cNvSpPr/>
+          <p:nvPr/>
+        </p:nvSpPr>
+        <p:spPr>
+          <a:xfrm>
+            <a:off x="5760720" y="2267712"/>
+            <a:ext cx="2743200" cy="274320"/>
+          </a:xfrm>
+          <a:prstGeom prst="rect">
+            <a:avLst/>
+          </a:prstGeom>
+          <a:noFill/>
+          <a:ln/>
+        </p:spPr>
+        <p:txBody>
+          <a:bodyPr wrap="square" rtlCol="0" anchor="ctr"/>
+          <a:lstStyle/>
+          <a:p>
+            <a:pPr indent="0" marL="0">
+              <a:buNone/>
+            </a:pPr>
+            <a:r>
+              <a:rPr lang="en-US" sz="1100" b="1" dirty="0">
                 <a:solidFill>
                   <a:srgbClr val="0F172A"/>
                 </a:solidFill>
               </a:rPr>
               <a:t>Yo‘nalishni tanlash</a:t>
             </a:r>
-            <a:endParaRPr lang="en-US" sz="1200" dirty="0"/>
-          </a:p>
-        </p:txBody>
-      </p:sp>
-      <p:sp>
-        <p:nvSpPr>
-          <p:cNvPr id="15" name="Text 13"/>
-          <p:cNvSpPr/>
-          <p:nvPr/>
-        </p:nvSpPr>
-        <p:spPr>
-          <a:xfrm>
-            <a:off x="2788920" y="3108960"/>
-            <a:ext cx="1645920" cy="1188720"/>
-          </a:xfrm>
-          <a:prstGeom prst="rect">
-            <a:avLst/>
-          </a:prstGeom>
-          <a:noFill/>
-          <a:ln/>
-        </p:spPr>
-        <p:txBody>
-          <a:bodyPr wrap="square" rtlCol="0" anchor="ctr"/>
-          <a:lstStyle/>
-          <a:p>
-            <a:pPr algn="ctr" indent="0" marL="0">
-              <a:lnSpc>
-                <a:spcPct val="115000"/>
-              </a:lnSpc>
+            <a:endParaRPr lang="en-US" sz="1100" dirty="0"/>
+          </a:p>
+        </p:txBody>
+      </p:sp>
+      <p:sp>
+        <p:nvSpPr>
+          <p:cNvPr id="18" name="Text 15"/>
+          <p:cNvSpPr/>
+          <p:nvPr/>
+        </p:nvSpPr>
+        <p:spPr>
+          <a:xfrm>
+            <a:off x="5760720" y="2542032"/>
+            <a:ext cx="2743200" cy="347472"/>
+          </a:xfrm>
+          <a:prstGeom prst="rect">
+            <a:avLst/>
+          </a:prstGeom>
+          <a:noFill/>
+          <a:ln/>
+        </p:spPr>
+        <p:txBody>
+          <a:bodyPr wrap="square" rtlCol="0" anchor="ctr"/>
+          <a:lstStyle/>
+          <a:p>
+            <a:pPr indent="0" marL="0">
               <a:buNone/>
             </a:pPr>
             <a:r>
@@ -6598,7 +6796,7 @@
                   <a:srgbClr val="475569"/>
                 </a:solidFill>
               </a:rPr>
-              <a:t>Boshlang‘ich kibergigiyena, web xavfsizlik yoki CTF laboratoriyalarini tanlash.</a:t>
+              <a:t>Kibergigiyena, Web xavfsizlik yoki CTF kursini tanlash.</a:t>
             </a:r>
             <a:endParaRPr lang="en-US" sz="950" dirty="0"/>
           </a:p>
@@ -6606,14 +6804,14 @@
       </p:sp>
       <p:sp>
         <p:nvSpPr>
-          <p:cNvPr id="16" name="Shape 14"/>
-          <p:cNvSpPr/>
-          <p:nvPr/>
-        </p:nvSpPr>
-        <p:spPr>
-          <a:xfrm>
-            <a:off x="4663440" y="1645920"/>
-            <a:ext cx="1828800" cy="2834640"/>
+          <p:cNvPr id="19" name="Shape 16"/>
+          <p:cNvSpPr/>
+          <p:nvPr/>
+        </p:nvSpPr>
+        <p:spPr>
+          <a:xfrm>
+            <a:off x="5029200" y="3063240"/>
+            <a:ext cx="3566160" cy="749808"/>
           </a:xfrm>
           <a:prstGeom prst="roundRect">
             <a:avLst/>
@@ -6631,16 +6829,16 @@
       </p:sp>
       <p:sp>
         <p:nvSpPr>
-          <p:cNvPr id="17" name="Shape 15"/>
-          <p:cNvSpPr/>
-          <p:nvPr/>
-        </p:nvSpPr>
-        <p:spPr>
-          <a:xfrm>
-            <a:off x="5257800" y="1874520"/>
-            <a:ext cx="640080" cy="640080"/>
-          </a:xfrm>
-          <a:prstGeom prst="ellipse">
+          <p:cNvPr id="20" name="Shape 17"/>
+          <p:cNvSpPr/>
+          <p:nvPr/>
+        </p:nvSpPr>
+        <p:spPr>
+          <a:xfrm>
+            <a:off x="5166360" y="3209544"/>
+            <a:ext cx="457200" cy="457200"/>
+          </a:xfrm>
+          <a:prstGeom prst="roundRect">
             <a:avLst/>
           </a:prstGeom>
           <a:solidFill>
@@ -6651,14 +6849,14 @@
       </p:sp>
       <p:sp>
         <p:nvSpPr>
-          <p:cNvPr id="18" name="Text 16"/>
-          <p:cNvSpPr/>
-          <p:nvPr/>
-        </p:nvSpPr>
-        <p:spPr>
-          <a:xfrm>
-            <a:off x="5257800" y="1874520"/>
-            <a:ext cx="640080" cy="640080"/>
+          <p:cNvPr id="21" name="Text 18"/>
+          <p:cNvSpPr/>
+          <p:nvPr/>
+        </p:nvSpPr>
+        <p:spPr>
+          <a:xfrm>
+            <a:off x="5166360" y="3209544"/>
+            <a:ext cx="457200" cy="457200"/>
           </a:xfrm>
           <a:prstGeom prst="rect">
             <a:avLst/>
@@ -6674,78 +6872,75 @@
               <a:buNone/>
             </a:pPr>
             <a:r>
-              <a:rPr lang="en-US" sz="1600" b="1" dirty="0">
+              <a:rPr lang="en-US" sz="1200" b="1" dirty="0">
                 <a:solidFill>
                   <a:srgbClr val="000000"/>
                 </a:solidFill>
               </a:rPr>
-              <a:t>3</a:t>
-            </a:r>
-            <a:endParaRPr lang="en-US" sz="1600" dirty="0"/>
-          </a:p>
-        </p:txBody>
-      </p:sp>
-      <p:sp>
-        <p:nvSpPr>
-          <p:cNvPr id="19" name="Text 17"/>
-          <p:cNvSpPr/>
-          <p:nvPr/>
-        </p:nvSpPr>
-        <p:spPr>
-          <a:xfrm>
-            <a:off x="4754880" y="2651760"/>
-            <a:ext cx="1645920" cy="411480"/>
-          </a:xfrm>
-          <a:prstGeom prst="rect">
-            <a:avLst/>
-          </a:prstGeom>
-          <a:noFill/>
-          <a:ln/>
-        </p:spPr>
-        <p:txBody>
-          <a:bodyPr wrap="square" rtlCol="0" anchor="ctr"/>
-          <a:lstStyle/>
-          <a:p>
-            <a:pPr algn="ctr" indent="0" marL="0">
-              <a:buNone/>
-            </a:pPr>
-            <a:r>
-              <a:rPr lang="en-US" sz="1200" b="1" dirty="0">
+              <a:t>03</a:t>
+            </a:r>
+            <a:endParaRPr lang="en-US" sz="1200" dirty="0"/>
+          </a:p>
+        </p:txBody>
+      </p:sp>
+      <p:sp>
+        <p:nvSpPr>
+          <p:cNvPr id="22" name="Text 19"/>
+          <p:cNvSpPr/>
+          <p:nvPr/>
+        </p:nvSpPr>
+        <p:spPr>
+          <a:xfrm>
+            <a:off x="5760720" y="3136392"/>
+            <a:ext cx="2743200" cy="274320"/>
+          </a:xfrm>
+          <a:prstGeom prst="rect">
+            <a:avLst/>
+          </a:prstGeom>
+          <a:noFill/>
+          <a:ln/>
+        </p:spPr>
+        <p:txBody>
+          <a:bodyPr wrap="square" rtlCol="0" anchor="ctr"/>
+          <a:lstStyle/>
+          <a:p>
+            <a:pPr indent="0" marL="0">
+              <a:buNone/>
+            </a:pPr>
+            <a:r>
+              <a:rPr lang="en-US" sz="1100" b="1" dirty="0">
                 <a:solidFill>
                   <a:srgbClr val="0F172A"/>
                 </a:solidFill>
               </a:rPr>
               <a:t>Amaliy laboratoriya</a:t>
             </a:r>
-            <a:endParaRPr lang="en-US" sz="1200" dirty="0"/>
-          </a:p>
-        </p:txBody>
-      </p:sp>
-      <p:sp>
-        <p:nvSpPr>
-          <p:cNvPr id="20" name="Text 18"/>
-          <p:cNvSpPr/>
-          <p:nvPr/>
-        </p:nvSpPr>
-        <p:spPr>
-          <a:xfrm>
-            <a:off x="4754880" y="3108960"/>
-            <a:ext cx="1645920" cy="1188720"/>
-          </a:xfrm>
-          <a:prstGeom prst="rect">
-            <a:avLst/>
-          </a:prstGeom>
-          <a:noFill/>
-          <a:ln/>
-        </p:spPr>
-        <p:txBody>
-          <a:bodyPr wrap="square" rtlCol="0" anchor="ctr"/>
-          <a:lstStyle/>
-          <a:p>
-            <a:pPr algn="ctr" indent="0" marL="0">
-              <a:lnSpc>
-                <a:spcPct val="115000"/>
-              </a:lnSpc>
+            <a:endParaRPr lang="en-US" sz="1100" dirty="0"/>
+          </a:p>
+        </p:txBody>
+      </p:sp>
+      <p:sp>
+        <p:nvSpPr>
+          <p:cNvPr id="23" name="Text 20"/>
+          <p:cNvSpPr/>
+          <p:nvPr/>
+        </p:nvSpPr>
+        <p:spPr>
+          <a:xfrm>
+            <a:off x="5760720" y="3410712"/>
+            <a:ext cx="2743200" cy="347472"/>
+          </a:xfrm>
+          <a:prstGeom prst="rect">
+            <a:avLst/>
+          </a:prstGeom>
+          <a:noFill/>
+          <a:ln/>
+        </p:spPr>
+        <p:txBody>
+          <a:bodyPr wrap="square" rtlCol="0" anchor="ctr"/>
+          <a:lstStyle/>
+          <a:p>
+            <a:pPr indent="0" marL="0">
               <a:buNone/>
             </a:pPr>
             <a:r>
@@ -6754,7 +6949,7 @@
                   <a:srgbClr val="475569"/>
                 </a:solidFill>
               </a:rPr>
-              <a:t>Brauzer qumlog‘ida (sandbox) real zaifliklarni bartaraf etib bayroq (flag) topish.</a:t>
+              <a:t>Brauzerda real vaziyatlarni bartaraf etib bayroq (flag) topish.</a:t>
             </a:r>
             <a:endParaRPr lang="en-US" sz="950" dirty="0"/>
           </a:p>
@@ -6762,14 +6957,14 @@
       </p:sp>
       <p:sp>
         <p:nvSpPr>
-          <p:cNvPr id="21" name="Shape 19"/>
-          <p:cNvSpPr/>
-          <p:nvPr/>
-        </p:nvSpPr>
-        <p:spPr>
-          <a:xfrm>
-            <a:off x="6629400" y="1645920"/>
-            <a:ext cx="1828800" cy="2834640"/>
+          <p:cNvPr id="24" name="Shape 21"/>
+          <p:cNvSpPr/>
+          <p:nvPr/>
+        </p:nvSpPr>
+        <p:spPr>
+          <a:xfrm>
+            <a:off x="5029200" y="3931920"/>
+            <a:ext cx="3566160" cy="749808"/>
           </a:xfrm>
           <a:prstGeom prst="roundRect">
             <a:avLst/>
@@ -6787,16 +6982,16 @@
       </p:sp>
       <p:sp>
         <p:nvSpPr>
-          <p:cNvPr id="22" name="Shape 20"/>
-          <p:cNvSpPr/>
-          <p:nvPr/>
-        </p:nvSpPr>
-        <p:spPr>
-          <a:xfrm>
-            <a:off x="7223760" y="1874520"/>
-            <a:ext cx="640080" cy="640080"/>
-          </a:xfrm>
-          <a:prstGeom prst="ellipse">
+          <p:cNvPr id="25" name="Shape 22"/>
+          <p:cNvSpPr/>
+          <p:nvPr/>
+        </p:nvSpPr>
+        <p:spPr>
+          <a:xfrm>
+            <a:off x="5166360" y="4078224"/>
+            <a:ext cx="457200" cy="457200"/>
+          </a:xfrm>
+          <a:prstGeom prst="roundRect">
             <a:avLst/>
           </a:prstGeom>
           <a:solidFill>
@@ -6807,14 +7002,14 @@
       </p:sp>
       <p:sp>
         <p:nvSpPr>
-          <p:cNvPr id="23" name="Text 21"/>
-          <p:cNvSpPr/>
-          <p:nvPr/>
-        </p:nvSpPr>
-        <p:spPr>
-          <a:xfrm>
-            <a:off x="7223760" y="1874520"/>
-            <a:ext cx="640080" cy="640080"/>
+          <p:cNvPr id="26" name="Text 23"/>
+          <p:cNvSpPr/>
+          <p:nvPr/>
+        </p:nvSpPr>
+        <p:spPr>
+          <a:xfrm>
+            <a:off x="5166360" y="4078224"/>
+            <a:ext cx="457200" cy="457200"/>
           </a:xfrm>
           <a:prstGeom prst="rect">
             <a:avLst/>
@@ -6830,78 +7025,75 @@
               <a:buNone/>
             </a:pPr>
             <a:r>
-              <a:rPr lang="en-US" sz="1600" b="1" dirty="0">
+              <a:rPr lang="en-US" sz="1200" b="1" dirty="0">
                 <a:solidFill>
                   <a:srgbClr val="000000"/>
                 </a:solidFill>
               </a:rPr>
-              <a:t>4</a:t>
-            </a:r>
-            <a:endParaRPr lang="en-US" sz="1600" dirty="0"/>
-          </a:p>
-        </p:txBody>
-      </p:sp>
-      <p:sp>
-        <p:nvSpPr>
-          <p:cNvPr id="24" name="Text 22"/>
-          <p:cNvSpPr/>
-          <p:nvPr/>
-        </p:nvSpPr>
-        <p:spPr>
-          <a:xfrm>
-            <a:off x="6720840" y="2651760"/>
-            <a:ext cx="1645920" cy="411480"/>
-          </a:xfrm>
-          <a:prstGeom prst="rect">
-            <a:avLst/>
-          </a:prstGeom>
-          <a:noFill/>
-          <a:ln/>
-        </p:spPr>
-        <p:txBody>
-          <a:bodyPr wrap="square" rtlCol="0" anchor="ctr"/>
-          <a:lstStyle/>
-          <a:p>
-            <a:pPr algn="ctr" indent="0" marL="0">
-              <a:buNone/>
-            </a:pPr>
-            <a:r>
-              <a:rPr lang="en-US" sz="1200" b="1" dirty="0">
+              <a:t>04</a:t>
+            </a:r>
+            <a:endParaRPr lang="en-US" sz="1200" dirty="0"/>
+          </a:p>
+        </p:txBody>
+      </p:sp>
+      <p:sp>
+        <p:nvSpPr>
+          <p:cNvPr id="27" name="Text 24"/>
+          <p:cNvSpPr/>
+          <p:nvPr/>
+        </p:nvSpPr>
+        <p:spPr>
+          <a:xfrm>
+            <a:off x="5760720" y="4005072"/>
+            <a:ext cx="2743200" cy="274320"/>
+          </a:xfrm>
+          <a:prstGeom prst="rect">
+            <a:avLst/>
+          </a:prstGeom>
+          <a:noFill/>
+          <a:ln/>
+        </p:spPr>
+        <p:txBody>
+          <a:bodyPr wrap="square" rtlCol="0" anchor="ctr"/>
+          <a:lstStyle/>
+          <a:p>
+            <a:pPr indent="0" marL="0">
+              <a:buNone/>
+            </a:pPr>
+            <a:r>
+              <a:rPr lang="en-US" sz="1100" b="1" dirty="0">
                 <a:solidFill>
                   <a:srgbClr val="0F172A"/>
                 </a:solidFill>
               </a:rPr>
-              <a:t>Himoyani qo‘llash</a:t>
-            </a:r>
-            <a:endParaRPr lang="en-US" sz="1200" dirty="0"/>
-          </a:p>
-        </p:txBody>
-      </p:sp>
-      <p:sp>
-        <p:nvSpPr>
-          <p:cNvPr id="25" name="Text 23"/>
-          <p:cNvSpPr/>
-          <p:nvPr/>
-        </p:nvSpPr>
-        <p:spPr>
-          <a:xfrm>
-            <a:off x="6720840" y="3108960"/>
-            <a:ext cx="1645920" cy="1188720"/>
-          </a:xfrm>
-          <a:prstGeom prst="rect">
-            <a:avLst/>
-          </a:prstGeom>
-          <a:noFill/>
-          <a:ln/>
-        </p:spPr>
-        <p:txBody>
-          <a:bodyPr wrap="square" rtlCol="0" anchor="ctr"/>
-          <a:lstStyle/>
-          <a:p>
-            <a:pPr algn="ctr" indent="0" marL="0">
-              <a:lnSpc>
-                <a:spcPct val="115000"/>
-              </a:lnSpc>
+              <a:t>Qurilmani himoyalash</a:t>
+            </a:r>
+            <a:endParaRPr lang="en-US" sz="1100" dirty="0"/>
+          </a:p>
+        </p:txBody>
+      </p:sp>
+      <p:sp>
+        <p:nvSpPr>
+          <p:cNvPr id="28" name="Text 25"/>
+          <p:cNvSpPr/>
+          <p:nvPr/>
+        </p:nvSpPr>
+        <p:spPr>
+          <a:xfrm>
+            <a:off x="5760720" y="4279392"/>
+            <a:ext cx="2743200" cy="347472"/>
+          </a:xfrm>
+          <a:prstGeom prst="rect">
+            <a:avLst/>
+          </a:prstGeom>
+          <a:noFill/>
+          <a:ln/>
+        </p:spPr>
+        <p:txBody>
+          <a:bodyPr wrap="square" rtlCol="0" anchor="ctr"/>
+          <a:lstStyle/>
+          <a:p>
+            <a:pPr indent="0" marL="0">
               <a:buNone/>
             </a:pPr>
             <a:r>
@@ -6910,7 +7102,7 @@
                   <a:srgbClr val="475569"/>
                 </a:solidFill>
               </a:rPr>
-              <a:t>O‘z smartfoni yoki APK fayllarini testdan o‘tkazib, real kiber-himoyaga ega bo‘lish.</a:t>
+              <a:t>APK yoki smartfonni skaner qilib, real himoyaga ega bo‘lish.</a:t>
             </a:r>
             <a:endParaRPr lang="en-US" sz="950" dirty="0"/>
           </a:p>
@@ -6930,7 +7122,7 @@
     <p:bg>
       <p:bgPr>
         <a:solidFill>
-          <a:srgbClr val="F8FAFC"/>
+          <a:srgbClr val="F4F6F9"/>
         </a:solidFill>
       </p:bgPr>
     </p:bg>
@@ -6956,8 +7148,8 @@
         </p:nvSpPr>
         <p:spPr>
           <a:xfrm>
-            <a:off x="731520" y="320040"/>
-            <a:ext cx="2194560" cy="292608"/>
+            <a:off x="548640" y="228600"/>
+            <a:ext cx="2011680" cy="274320"/>
           </a:xfrm>
           <a:prstGeom prst="roundRect">
             <a:avLst/>
@@ -6981,8 +7173,8 @@
         </p:nvSpPr>
         <p:spPr>
           <a:xfrm>
-            <a:off x="731520" y="320040"/>
-            <a:ext cx="2194560" cy="292608"/>
+            <a:off x="548640" y="228600"/>
+            <a:ext cx="2011680" cy="274320"/>
           </a:xfrm>
           <a:prstGeom prst="rect">
             <a:avLst/>
@@ -7017,31 +7209,31 @@
         </p:nvSpPr>
         <p:spPr>
           <a:xfrm>
-            <a:off x="731520" y="658368"/>
-            <a:ext cx="7680960" cy="457200"/>
-          </a:xfrm>
-          <a:prstGeom prst="rect">
-            <a:avLst/>
-          </a:prstGeom>
-          <a:noFill/>
-          <a:ln/>
-        </p:spPr>
-        <p:txBody>
-          <a:bodyPr wrap="square" rtlCol="0" anchor="ctr"/>
-          <a:lstStyle/>
-          <a:p>
-            <a:pPr indent="0" marL="0">
-              <a:buNone/>
-            </a:pPr>
-            <a:r>
-              <a:rPr lang="en-US" sz="2200" b="1" dirty="0">
+            <a:off x="548640" y="548640"/>
+            <a:ext cx="8046720" cy="411480"/>
+          </a:xfrm>
+          <a:prstGeom prst="rect">
+            <a:avLst/>
+          </a:prstGeom>
+          <a:noFill/>
+          <a:ln/>
+        </p:spPr>
+        <p:txBody>
+          <a:bodyPr wrap="square" rtlCol="0" anchor="ctr"/>
+          <a:lstStyle/>
+          <a:p>
+            <a:pPr indent="0" marL="0">
+              <a:buNone/>
+            </a:pPr>
+            <a:r>
+              <a:rPr lang="en-US" sz="2000" b="1" dirty="0">
                 <a:solidFill>
                   <a:srgbClr val="0F172A"/>
                 </a:solidFill>
               </a:rPr>
               <a:t>Texnologiyalar: Loyihaning haqiqiy texnik asosi</a:t>
             </a:r>
-            <a:endParaRPr lang="en-US" sz="2200" dirty="0"/>
+            <a:endParaRPr lang="en-US" sz="2000" dirty="0"/>
           </a:p>
         </p:txBody>
       </p:sp>
@@ -7053,31 +7245,31 @@
         </p:nvSpPr>
         <p:spPr>
           <a:xfrm>
-            <a:off x="731520" y="1078992"/>
-            <a:ext cx="7680960" cy="292608"/>
-          </a:xfrm>
-          <a:prstGeom prst="rect">
-            <a:avLst/>
-          </a:prstGeom>
-          <a:noFill/>
-          <a:ln/>
-        </p:spPr>
-        <p:txBody>
-          <a:bodyPr wrap="square" rtlCol="0" anchor="ctr"/>
-          <a:lstStyle/>
-          <a:p>
-            <a:pPr indent="0" marL="0">
-              <a:buNone/>
-            </a:pPr>
-            <a:r>
-              <a:rPr lang="en-US" sz="1200" dirty="0">
+            <a:off x="548640" y="960120"/>
+            <a:ext cx="8046720" cy="274320"/>
+          </a:xfrm>
+          <a:prstGeom prst="rect">
+            <a:avLst/>
+          </a:prstGeom>
+          <a:noFill/>
+          <a:ln/>
+        </p:spPr>
+        <p:txBody>
+          <a:bodyPr wrap="square" rtlCol="0" anchor="ctr"/>
+          <a:lstStyle/>
+          <a:p>
+            <a:pPr indent="0" marL="0">
+              <a:buNone/>
+            </a:pPr>
+            <a:r>
+              <a:rPr lang="en-US" sz="1100" dirty="0">
                 <a:solidFill>
                   <a:srgbClr val="475569"/>
                 </a:solidFill>
               </a:rPr>
-              <a:t>Kod bazasi (package.json va arxitektura) orqali 100% aniqlangan texnologiyalar</a:t>
-            </a:r>
-            <a:endParaRPr lang="en-US" sz="1200" dirty="0"/>
+              <a:t>Kod bazasi (package.json va arxitektura) orqali 100% tasdiqlangan texnologiyalar</a:t>
+            </a:r>
+            <a:endParaRPr lang="en-US" sz="1100" dirty="0"/>
           </a:p>
         </p:txBody>
       </p:sp>
@@ -7089,8 +7281,93 @@
         </p:nvSpPr>
         <p:spPr>
           <a:xfrm>
-            <a:off x="731520" y="1463040"/>
-            <a:ext cx="7680960" cy="694944"/>
+            <a:off x="512064" y="1289304"/>
+            <a:ext cx="4096512" cy="3822192"/>
+          </a:xfrm>
+          <a:prstGeom prst="roundRect">
+            <a:avLst/>
+          </a:prstGeom>
+          <a:solidFill>
+            <a:srgbClr val="0D1A26"/>
+          </a:solidFill>
+          <a:ln w="19050">
+            <a:solidFill>
+              <a:srgbClr val="059669"/>
+            </a:solidFill>
+            <a:prstDash val="solid"/>
+          </a:ln>
+        </p:spPr>
+      </p:sp>
+      <p:pic>
+        <p:nvPicPr>
+          <p:cNvPr id="7" name="Image 0" descr="C:\Users\User\Desktop\kiber xavfsizlik boyicha sayt\public\screenshots\08_cyberguard_ai.png">    </p:cNvPr>
+          <p:cNvPicPr>
+            <a:picLocks noChangeAspect="1"/>
+          </p:cNvPicPr>
+          <p:nvPr/>
+        </p:nvPicPr>
+        <p:blipFill>
+          <a:blip r:embed="rId1"/>
+          <a:stretch>
+            <a:fillRect/>
+          </a:stretch>
+        </p:blipFill>
+        <p:spPr>
+          <a:xfrm>
+            <a:off x="548640" y="1325880"/>
+            <a:ext cx="4023360" cy="3474720"/>
+          </a:xfrm>
+          <a:prstGeom prst="rect">
+            <a:avLst/>
+          </a:prstGeom>
+        </p:spPr>
+      </p:pic>
+      <p:sp>
+        <p:nvSpPr>
+          <p:cNvPr id="8" name="Text 5"/>
+          <p:cNvSpPr/>
+          <p:nvPr/>
+        </p:nvSpPr>
+        <p:spPr>
+          <a:xfrm>
+            <a:off x="548640" y="4837176"/>
+            <a:ext cx="4023360" cy="274320"/>
+          </a:xfrm>
+          <a:prstGeom prst="rect">
+            <a:avLst/>
+          </a:prstGeom>
+          <a:noFill/>
+          <a:ln/>
+        </p:spPr>
+        <p:txBody>
+          <a:bodyPr wrap="square" rtlCol="0" anchor="ctr"/>
+          <a:lstStyle/>
+          <a:p>
+            <a:pPr algn="ctr" indent="0" marL="0">
+              <a:buNone/>
+            </a:pPr>
+            <a:r>
+              <a:rPr lang="en-US" sz="900" dirty="0">
+                <a:solidFill>
+                  <a:srgbClr val="BAE6FD"/>
+                </a:solidFill>
+              </a:rPr>
+              <a:t>📸 CyberGuard AI — o‘zbek tilidagi kiberxavfsizlik assistenti</a:t>
+            </a:r>
+            <a:endParaRPr lang="en-US" sz="900" dirty="0"/>
+          </a:p>
+        </p:txBody>
+      </p:sp>
+      <p:sp>
+        <p:nvSpPr>
+          <p:cNvPr id="9" name="Shape 6"/>
+          <p:cNvSpPr/>
+          <p:nvPr/>
+        </p:nvSpPr>
+        <p:spPr>
+          <a:xfrm>
+            <a:off x="4846320" y="1325880"/>
+            <a:ext cx="3749040" cy="749808"/>
           </a:xfrm>
           <a:prstGeom prst="roundRect">
             <a:avLst/>
@@ -7108,122 +7385,86 @@
       </p:sp>
       <p:sp>
         <p:nvSpPr>
-          <p:cNvPr id="7" name="Shape 5"/>
-          <p:cNvSpPr/>
-          <p:nvPr/>
-        </p:nvSpPr>
-        <p:spPr>
-          <a:xfrm>
-            <a:off x="914400" y="1591056"/>
-            <a:ext cx="2011680" cy="438912"/>
-          </a:xfrm>
-          <a:prstGeom prst="roundRect">
-            <a:avLst/>
-          </a:prstGeom>
-          <a:solidFill>
-            <a:srgbClr val="F1F5F9"/>
-          </a:solidFill>
-          <a:ln w="19050">
-            <a:solidFill>
-              <a:srgbClr val="0284C7"/>
-            </a:solidFill>
-            <a:prstDash val="solid"/>
-          </a:ln>
-        </p:spPr>
-      </p:sp>
-      <p:sp>
-        <p:nvSpPr>
-          <p:cNvPr id="8" name="Text 6"/>
-          <p:cNvSpPr/>
-          <p:nvPr/>
-        </p:nvSpPr>
-        <p:spPr>
-          <a:xfrm>
-            <a:off x="960120" y="1591056"/>
-            <a:ext cx="1920240" cy="438912"/>
-          </a:xfrm>
-          <a:prstGeom prst="rect">
-            <a:avLst/>
-          </a:prstGeom>
-          <a:noFill/>
-          <a:ln/>
-        </p:spPr>
-        <p:txBody>
-          <a:bodyPr wrap="square" rtlCol="0" anchor="ctr"/>
-          <a:lstStyle/>
-          <a:p>
-            <a:pPr algn="ctr" indent="0" marL="0">
-              <a:buNone/>
-            </a:pPr>
-            <a:r>
-              <a:rPr lang="en-US" sz="1100" b="1" dirty="0">
+          <p:cNvPr id="10" name="Text 7"/>
+          <p:cNvSpPr/>
+          <p:nvPr/>
+        </p:nvSpPr>
+        <p:spPr>
+          <a:xfrm>
+            <a:off x="4983480" y="1399032"/>
+            <a:ext cx="3474720" cy="274320"/>
+          </a:xfrm>
+          <a:prstGeom prst="rect">
+            <a:avLst/>
+          </a:prstGeom>
+          <a:noFill/>
+          <a:ln/>
+        </p:spPr>
+        <p:txBody>
+          <a:bodyPr wrap="square" rtlCol="0" anchor="ctr"/>
+          <a:lstStyle/>
+          <a:p>
+            <a:pPr indent="0" marL="0">
+              <a:buNone/>
+            </a:pPr>
+            <a:r>
+              <a:rPr lang="en-US" sz="1200" b="1" dirty="0">
                 <a:solidFill>
                   <a:srgbClr val="0284C7"/>
                 </a:solidFill>
               </a:rPr>
               <a:t>React 18 &amp; Vite</a:t>
             </a:r>
-            <a:endParaRPr lang="en-US" sz="1100" dirty="0"/>
-          </a:p>
-        </p:txBody>
-      </p:sp>
-      <p:sp>
-        <p:nvSpPr>
-          <p:cNvPr id="9" name="Text 7"/>
-          <p:cNvSpPr/>
-          <p:nvPr/>
-        </p:nvSpPr>
-        <p:spPr>
-          <a:xfrm>
-            <a:off x="3108960" y="1572768"/>
-            <a:ext cx="5120640" cy="475488"/>
-          </a:xfrm>
-          <a:prstGeom prst="rect">
-            <a:avLst/>
-          </a:prstGeom>
-          <a:noFill/>
-          <a:ln/>
-        </p:spPr>
-        <p:txBody>
-          <a:bodyPr wrap="square" rtlCol="0" anchor="ctr"/>
-          <a:lstStyle/>
-          <a:p>
-            <a:pPr indent="0" marL="0">
-              <a:buNone/>
-            </a:pPr>
-            <a:r>
-              <a:rPr lang="en-US" sz="1050" b="1" dirty="0">
-                <a:solidFill>
-                  <a:srgbClr val="0F172A"/>
-                </a:solidFill>
-              </a:rPr>
-              <a:t>Frontend Asosi: </a:t>
-            </a:r>
-            <a:pPr indent="0" marL="0">
-              <a:buNone/>
-            </a:pPr>
-            <a:r>
-              <a:rPr lang="en-US" sz="1050" dirty="0">
+            <a:endParaRPr lang="en-US" sz="1200" dirty="0"/>
+          </a:p>
+        </p:txBody>
+      </p:sp>
+      <p:sp>
+        <p:nvSpPr>
+          <p:cNvPr id="11" name="Text 8"/>
+          <p:cNvSpPr/>
+          <p:nvPr/>
+        </p:nvSpPr>
+        <p:spPr>
+          <a:xfrm>
+            <a:off x="4983480" y="1673352"/>
+            <a:ext cx="3474720" cy="347472"/>
+          </a:xfrm>
+          <a:prstGeom prst="rect">
+            <a:avLst/>
+          </a:prstGeom>
+          <a:noFill/>
+          <a:ln/>
+        </p:spPr>
+        <p:txBody>
+          <a:bodyPr wrap="square" rtlCol="0" anchor="ctr"/>
+          <a:lstStyle/>
+          <a:p>
+            <a:pPr indent="0" marL="0">
+              <a:buNone/>
+            </a:pPr>
+            <a:r>
+              <a:rPr lang="en-US" sz="950" dirty="0">
                 <a:solidFill>
                   <a:srgbClr val="475569"/>
                 </a:solidFill>
               </a:rPr>
-              <a:t>Zamonaviy SPA arxitekturasi, tezkor render va komponentli strukturasi.</a:t>
-            </a:r>
-            <a:endParaRPr lang="en-US" sz="1050" dirty="0"/>
-          </a:p>
-        </p:txBody>
-      </p:sp>
-      <p:sp>
-        <p:nvSpPr>
-          <p:cNvPr id="10" name="Shape 8"/>
-          <p:cNvSpPr/>
-          <p:nvPr/>
-        </p:nvSpPr>
-        <p:spPr>
-          <a:xfrm>
-            <a:off x="731520" y="2267712"/>
-            <a:ext cx="7680960" cy="694944"/>
+              <a:t>Tezkor SPA arxitekturasi va modulli frontend.</a:t>
+            </a:r>
+            <a:endParaRPr lang="en-US" sz="950" dirty="0"/>
+          </a:p>
+        </p:txBody>
+      </p:sp>
+      <p:sp>
+        <p:nvSpPr>
+          <p:cNvPr id="12" name="Shape 9"/>
+          <p:cNvSpPr/>
+          <p:nvPr/>
+        </p:nvSpPr>
+        <p:spPr>
+          <a:xfrm>
+            <a:off x="4846320" y="2194560"/>
+            <a:ext cx="3749040" cy="749808"/>
           </a:xfrm>
           <a:prstGeom prst="roundRect">
             <a:avLst/>
@@ -7241,122 +7482,86 @@
       </p:sp>
       <p:sp>
         <p:nvSpPr>
-          <p:cNvPr id="11" name="Shape 9"/>
-          <p:cNvSpPr/>
-          <p:nvPr/>
-        </p:nvSpPr>
-        <p:spPr>
-          <a:xfrm>
-            <a:off x="914400" y="2395728"/>
-            <a:ext cx="2011680" cy="438912"/>
-          </a:xfrm>
-          <a:prstGeom prst="roundRect">
-            <a:avLst/>
-          </a:prstGeom>
-          <a:solidFill>
-            <a:srgbClr val="F1F5F9"/>
-          </a:solidFill>
-          <a:ln w="19050">
-            <a:solidFill>
-              <a:srgbClr val="059669"/>
-            </a:solidFill>
-            <a:prstDash val="solid"/>
-          </a:ln>
-        </p:spPr>
-      </p:sp>
-      <p:sp>
-        <p:nvSpPr>
-          <p:cNvPr id="12" name="Text 10"/>
-          <p:cNvSpPr/>
-          <p:nvPr/>
-        </p:nvSpPr>
-        <p:spPr>
-          <a:xfrm>
-            <a:off x="960120" y="2395728"/>
-            <a:ext cx="1920240" cy="438912"/>
-          </a:xfrm>
-          <a:prstGeom prst="rect">
-            <a:avLst/>
-          </a:prstGeom>
-          <a:noFill/>
-          <a:ln/>
-        </p:spPr>
-        <p:txBody>
-          <a:bodyPr wrap="square" rtlCol="0" anchor="ctr"/>
-          <a:lstStyle/>
-          <a:p>
-            <a:pPr algn="ctr" indent="0" marL="0">
-              <a:buNone/>
-            </a:pPr>
-            <a:r>
-              <a:rPr lang="en-US" sz="1100" b="1" dirty="0">
+          <p:cNvPr id="13" name="Text 10"/>
+          <p:cNvSpPr/>
+          <p:nvPr/>
+        </p:nvSpPr>
+        <p:spPr>
+          <a:xfrm>
+            <a:off x="4983480" y="2267712"/>
+            <a:ext cx="3474720" cy="274320"/>
+          </a:xfrm>
+          <a:prstGeom prst="rect">
+            <a:avLst/>
+          </a:prstGeom>
+          <a:noFill/>
+          <a:ln/>
+        </p:spPr>
+        <p:txBody>
+          <a:bodyPr wrap="square" rtlCol="0" anchor="ctr"/>
+          <a:lstStyle/>
+          <a:p>
+            <a:pPr indent="0" marL="0">
+              <a:buNone/>
+            </a:pPr>
+            <a:r>
+              <a:rPr lang="en-US" sz="1200" b="1" dirty="0">
                 <a:solidFill>
                   <a:srgbClr val="059669"/>
                 </a:solidFill>
               </a:rPr>
               <a:t>Tailwind CSS</a:t>
             </a:r>
-            <a:endParaRPr lang="en-US" sz="1100" dirty="0"/>
-          </a:p>
-        </p:txBody>
-      </p:sp>
-      <p:sp>
-        <p:nvSpPr>
-          <p:cNvPr id="13" name="Text 11"/>
-          <p:cNvSpPr/>
-          <p:nvPr/>
-        </p:nvSpPr>
-        <p:spPr>
-          <a:xfrm>
-            <a:off x="3108960" y="2377440"/>
-            <a:ext cx="5120640" cy="475488"/>
-          </a:xfrm>
-          <a:prstGeom prst="rect">
-            <a:avLst/>
-          </a:prstGeom>
-          <a:noFill/>
-          <a:ln/>
-        </p:spPr>
-        <p:txBody>
-          <a:bodyPr wrap="square" rtlCol="0" anchor="ctr"/>
-          <a:lstStyle/>
-          <a:p>
-            <a:pPr indent="0" marL="0">
-              <a:buNone/>
-            </a:pPr>
-            <a:r>
-              <a:rPr lang="en-US" sz="1050" b="1" dirty="0">
-                <a:solidFill>
-                  <a:srgbClr val="0F172A"/>
-                </a:solidFill>
-              </a:rPr>
-              <a:t>Stil va Dizayn: </a:t>
-            </a:r>
-            <a:pPr indent="0" marL="0">
-              <a:buNone/>
-            </a:pPr>
-            <a:r>
-              <a:rPr lang="en-US" sz="1050" dirty="0">
+            <a:endParaRPr lang="en-US" sz="1200" dirty="0"/>
+          </a:p>
+        </p:txBody>
+      </p:sp>
+      <p:sp>
+        <p:nvSpPr>
+          <p:cNvPr id="14" name="Text 11"/>
+          <p:cNvSpPr/>
+          <p:nvPr/>
+        </p:nvSpPr>
+        <p:spPr>
+          <a:xfrm>
+            <a:off x="4983480" y="2542032"/>
+            <a:ext cx="3474720" cy="347472"/>
+          </a:xfrm>
+          <a:prstGeom prst="rect">
+            <a:avLst/>
+          </a:prstGeom>
+          <a:noFill/>
+          <a:ln/>
+        </p:spPr>
+        <p:txBody>
+          <a:bodyPr wrap="square" rtlCol="0" anchor="ctr"/>
+          <a:lstStyle/>
+          <a:p>
+            <a:pPr indent="0" marL="0">
+              <a:buNone/>
+            </a:pPr>
+            <a:r>
+              <a:rPr lang="en-US" sz="950" dirty="0">
                 <a:solidFill>
                   <a:srgbClr val="475569"/>
                 </a:solidFill>
               </a:rPr>
-              <a:t>Javobgar (responsive) interfeys, neon kiber dizayn va qulay mobil moslashuv.</a:t>
-            </a:r>
-            <a:endParaRPr lang="en-US" sz="1050" dirty="0"/>
-          </a:p>
-        </p:txBody>
-      </p:sp>
-      <p:sp>
-        <p:nvSpPr>
-          <p:cNvPr id="14" name="Shape 12"/>
-          <p:cNvSpPr/>
-          <p:nvPr/>
-        </p:nvSpPr>
-        <p:spPr>
-          <a:xfrm>
-            <a:off x="731520" y="3072384"/>
-            <a:ext cx="7680960" cy="694944"/>
+              <a:t>To‘liq moslashuvchan (responsive) qorong‘i kiber-interfeys.</a:t>
+            </a:r>
+            <a:endParaRPr lang="en-US" sz="950" dirty="0"/>
+          </a:p>
+        </p:txBody>
+      </p:sp>
+      <p:sp>
+        <p:nvSpPr>
+          <p:cNvPr id="15" name="Shape 12"/>
+          <p:cNvSpPr/>
+          <p:nvPr/>
+        </p:nvSpPr>
+        <p:spPr>
+          <a:xfrm>
+            <a:off x="4846320" y="3063240"/>
+            <a:ext cx="3749040" cy="749808"/>
           </a:xfrm>
           <a:prstGeom prst="roundRect">
             <a:avLst/>
@@ -7374,122 +7579,86 @@
       </p:sp>
       <p:sp>
         <p:nvSpPr>
-          <p:cNvPr id="15" name="Shape 13"/>
-          <p:cNvSpPr/>
-          <p:nvPr/>
-        </p:nvSpPr>
-        <p:spPr>
-          <a:xfrm>
-            <a:off x="914400" y="3200400"/>
-            <a:ext cx="2011680" cy="438912"/>
-          </a:xfrm>
-          <a:prstGeom prst="roundRect">
-            <a:avLst/>
-          </a:prstGeom>
-          <a:solidFill>
-            <a:srgbClr val="F1F5F9"/>
-          </a:solidFill>
-          <a:ln w="19050">
-            <a:solidFill>
-              <a:srgbClr val="F59E0B"/>
-            </a:solidFill>
-            <a:prstDash val="solid"/>
-          </a:ln>
-        </p:spPr>
-      </p:sp>
-      <p:sp>
-        <p:nvSpPr>
-          <p:cNvPr id="16" name="Text 14"/>
-          <p:cNvSpPr/>
-          <p:nvPr/>
-        </p:nvSpPr>
-        <p:spPr>
-          <a:xfrm>
-            <a:off x="960120" y="3200400"/>
-            <a:ext cx="1920240" cy="438912"/>
-          </a:xfrm>
-          <a:prstGeom prst="rect">
-            <a:avLst/>
-          </a:prstGeom>
-          <a:noFill/>
-          <a:ln/>
-        </p:spPr>
-        <p:txBody>
-          <a:bodyPr wrap="square" rtlCol="0" anchor="ctr"/>
-          <a:lstStyle/>
-          <a:p>
-            <a:pPr algn="ctr" indent="0" marL="0">
-              <a:buNone/>
-            </a:pPr>
-            <a:r>
-              <a:rPr lang="en-US" sz="1100" b="1" dirty="0">
+          <p:cNvPr id="16" name="Text 13"/>
+          <p:cNvSpPr/>
+          <p:nvPr/>
+        </p:nvSpPr>
+        <p:spPr>
+          <a:xfrm>
+            <a:off x="4983480" y="3136392"/>
+            <a:ext cx="3474720" cy="274320"/>
+          </a:xfrm>
+          <a:prstGeom prst="rect">
+            <a:avLst/>
+          </a:prstGeom>
+          <a:noFill/>
+          <a:ln/>
+        </p:spPr>
+        <p:txBody>
+          <a:bodyPr wrap="square" rtlCol="0" anchor="ctr"/>
+          <a:lstStyle/>
+          <a:p>
+            <a:pPr indent="0" marL="0">
+              <a:buNone/>
+            </a:pPr>
+            <a:r>
+              <a:rPr lang="en-US" sz="1200" b="1" dirty="0">
                 <a:solidFill>
                   <a:srgbClr val="F59E0B"/>
                 </a:solidFill>
               </a:rPr>
-              <a:t>Lucide Icons &amp; Canvas Confetti</a:t>
-            </a:r>
-            <a:endParaRPr lang="en-US" sz="1100" dirty="0"/>
-          </a:p>
-        </p:txBody>
-      </p:sp>
-      <p:sp>
-        <p:nvSpPr>
-          <p:cNvPr id="17" name="Text 15"/>
-          <p:cNvSpPr/>
-          <p:nvPr/>
-        </p:nvSpPr>
-        <p:spPr>
-          <a:xfrm>
-            <a:off x="3108960" y="3182112"/>
-            <a:ext cx="5120640" cy="475488"/>
-          </a:xfrm>
-          <a:prstGeom prst="rect">
-            <a:avLst/>
-          </a:prstGeom>
-          <a:noFill/>
-          <a:ln/>
-        </p:spPr>
-        <p:txBody>
-          <a:bodyPr wrap="square" rtlCol="0" anchor="ctr"/>
-          <a:lstStyle/>
-          <a:p>
-            <a:pPr indent="0" marL="0">
-              <a:buNone/>
-            </a:pPr>
-            <a:r>
-              <a:rPr lang="en-US" sz="1050" b="1" dirty="0">
-                <a:solidFill>
-                  <a:srgbClr val="0F172A"/>
-                </a:solidFill>
-              </a:rPr>
-              <a:t>UI &amp; Gamifikatsiya: </a:t>
-            </a:r>
-            <a:pPr indent="0" marL="0">
-              <a:buNone/>
-            </a:pPr>
-            <a:r>
-              <a:rPr lang="en-US" sz="1050" dirty="0">
+              <a:t>Lucide Icons &amp; Confetti</a:t>
+            </a:r>
+            <a:endParaRPr lang="en-US" sz="1200" dirty="0"/>
+          </a:p>
+        </p:txBody>
+      </p:sp>
+      <p:sp>
+        <p:nvSpPr>
+          <p:cNvPr id="17" name="Text 14"/>
+          <p:cNvSpPr/>
+          <p:nvPr/>
+        </p:nvSpPr>
+        <p:spPr>
+          <a:xfrm>
+            <a:off x="4983480" y="3410712"/>
+            <a:ext cx="3474720" cy="347472"/>
+          </a:xfrm>
+          <a:prstGeom prst="rect">
+            <a:avLst/>
+          </a:prstGeom>
+          <a:noFill/>
+          <a:ln/>
+        </p:spPr>
+        <p:txBody>
+          <a:bodyPr wrap="square" rtlCol="0" anchor="ctr"/>
+          <a:lstStyle/>
+          <a:p>
+            <a:pPr indent="0" marL="0">
+              <a:buNone/>
+            </a:pPr>
+            <a:r>
+              <a:rPr lang="en-US" sz="950" dirty="0">
                 <a:solidFill>
                   <a:srgbClr val="475569"/>
                 </a:solidFill>
               </a:rPr>
-              <a:t>Vektorli piktogrammalar va yutuqlarni nishonlovchi animatsiya effektlari.</a:t>
-            </a:r>
-            <a:endParaRPr lang="en-US" sz="1050" dirty="0"/>
-          </a:p>
-        </p:txBody>
-      </p:sp>
-      <p:sp>
-        <p:nvSpPr>
-          <p:cNvPr id="18" name="Shape 16"/>
-          <p:cNvSpPr/>
-          <p:nvPr/>
-        </p:nvSpPr>
-        <p:spPr>
-          <a:xfrm>
-            <a:off x="731520" y="3877056"/>
-            <a:ext cx="7680960" cy="694944"/>
+              <a:t>Kiber piktogrammalar va gamifikatsiya effektlari.</a:t>
+            </a:r>
+            <a:endParaRPr lang="en-US" sz="950" dirty="0"/>
+          </a:p>
+        </p:txBody>
+      </p:sp>
+      <p:sp>
+        <p:nvSpPr>
+          <p:cNvPr id="18" name="Shape 15"/>
+          <p:cNvSpPr/>
+          <p:nvPr/>
+        </p:nvSpPr>
+        <p:spPr>
+          <a:xfrm>
+            <a:off x="4846320" y="3931920"/>
+            <a:ext cx="3749040" cy="749808"/>
           </a:xfrm>
           <a:prstGeom prst="roundRect">
             <a:avLst/>
@@ -7507,109 +7676,73 @@
       </p:sp>
       <p:sp>
         <p:nvSpPr>
-          <p:cNvPr id="19" name="Shape 17"/>
-          <p:cNvSpPr/>
-          <p:nvPr/>
-        </p:nvSpPr>
-        <p:spPr>
-          <a:xfrm>
-            <a:off x="914400" y="4005072"/>
-            <a:ext cx="2011680" cy="438912"/>
-          </a:xfrm>
-          <a:prstGeom prst="roundRect">
-            <a:avLst/>
-          </a:prstGeom>
-          <a:solidFill>
-            <a:srgbClr val="F1F5F9"/>
-          </a:solidFill>
-          <a:ln w="19050">
-            <a:solidFill>
-              <a:srgbClr val="0F172A"/>
-            </a:solidFill>
-            <a:prstDash val="solid"/>
-          </a:ln>
-        </p:spPr>
-      </p:sp>
-      <p:sp>
-        <p:nvSpPr>
-          <p:cNvPr id="20" name="Text 18"/>
-          <p:cNvSpPr/>
-          <p:nvPr/>
-        </p:nvSpPr>
-        <p:spPr>
-          <a:xfrm>
-            <a:off x="960120" y="4005072"/>
-            <a:ext cx="1920240" cy="438912"/>
-          </a:xfrm>
-          <a:prstGeom prst="rect">
-            <a:avLst/>
-          </a:prstGeom>
-          <a:noFill/>
-          <a:ln/>
-        </p:spPr>
-        <p:txBody>
-          <a:bodyPr wrap="square" rtlCol="0" anchor="ctr"/>
-          <a:lstStyle/>
-          <a:p>
-            <a:pPr algn="ctr" indent="0" marL="0">
-              <a:buNone/>
-            </a:pPr>
-            <a:r>
-              <a:rPr lang="en-US" sz="1100" b="1" dirty="0">
+          <p:cNvPr id="19" name="Text 16"/>
+          <p:cNvSpPr/>
+          <p:nvPr/>
+        </p:nvSpPr>
+        <p:spPr>
+          <a:xfrm>
+            <a:off x="4983480" y="4005072"/>
+            <a:ext cx="3474720" cy="274320"/>
+          </a:xfrm>
+          <a:prstGeom prst="rect">
+            <a:avLst/>
+          </a:prstGeom>
+          <a:noFill/>
+          <a:ln/>
+        </p:spPr>
+        <p:txBody>
+          <a:bodyPr wrap="square" rtlCol="0" anchor="ctr"/>
+          <a:lstStyle/>
+          <a:p>
+            <a:pPr indent="0" marL="0">
+              <a:buNone/>
+            </a:pPr>
+            <a:r>
+              <a:rPr lang="en-US" sz="1200" b="1" dirty="0">
                 <a:solidFill>
                   <a:srgbClr val="0F172A"/>
                 </a:solidFill>
               </a:rPr>
               <a:t>Vercel Edge Cloud</a:t>
             </a:r>
-            <a:endParaRPr lang="en-US" sz="1100" dirty="0"/>
-          </a:p>
-        </p:txBody>
-      </p:sp>
-      <p:sp>
-        <p:nvSpPr>
-          <p:cNvPr id="21" name="Text 19"/>
-          <p:cNvSpPr/>
-          <p:nvPr/>
-        </p:nvSpPr>
-        <p:spPr>
-          <a:xfrm>
-            <a:off x="3108960" y="3986784"/>
-            <a:ext cx="5120640" cy="475488"/>
-          </a:xfrm>
-          <a:prstGeom prst="rect">
-            <a:avLst/>
-          </a:prstGeom>
-          <a:noFill/>
-          <a:ln/>
-        </p:spPr>
-        <p:txBody>
-          <a:bodyPr wrap="square" rtlCol="0" anchor="ctr"/>
-          <a:lstStyle/>
-          <a:p>
-            <a:pPr indent="0" marL="0">
-              <a:buNone/>
-            </a:pPr>
-            <a:r>
-              <a:rPr lang="en-US" sz="1050" b="1" dirty="0">
-                <a:solidFill>
-                  <a:srgbClr val="0F172A"/>
-                </a:solidFill>
-              </a:rPr>
-              <a:t>Infratuzilma &amp; Xosting: </a:t>
-            </a:r>
-            <a:pPr indent="0" marL="0">
-              <a:buNone/>
-            </a:pPr>
-            <a:r>
-              <a:rPr lang="en-US" sz="1050" dirty="0">
+            <a:endParaRPr lang="en-US" sz="1200" dirty="0"/>
+          </a:p>
+        </p:txBody>
+      </p:sp>
+      <p:sp>
+        <p:nvSpPr>
+          <p:cNvPr id="20" name="Text 17"/>
+          <p:cNvSpPr/>
+          <p:nvPr/>
+        </p:nvSpPr>
+        <p:spPr>
+          <a:xfrm>
+            <a:off x="4983480" y="4279392"/>
+            <a:ext cx="3474720" cy="347472"/>
+          </a:xfrm>
+          <a:prstGeom prst="rect">
+            <a:avLst/>
+          </a:prstGeom>
+          <a:noFill/>
+          <a:ln/>
+        </p:spPr>
+        <p:txBody>
+          <a:bodyPr wrap="square" rtlCol="0" anchor="ctr"/>
+          <a:lstStyle/>
+          <a:p>
+            <a:pPr indent="0" marL="0">
+              <a:buNone/>
+            </a:pPr>
+            <a:r>
+              <a:rPr lang="en-US" sz="950" dirty="0">
                 <a:solidFill>
                   <a:srgbClr val="475569"/>
                 </a:solidFill>
               </a:rPr>
-              <a:t>Global CDN, 24/7 uzluksiz ishlovchi bulutli serverlar va HTTPS xavfsizligi.</a:t>
-            </a:r>
-            <a:endParaRPr lang="en-US" sz="1050" dirty="0"/>
+              <a:t>Global CDN, 24/7 uzluksiz ishlovchi bulutli serverlar.</a:t>
+            </a:r>
+            <a:endParaRPr lang="en-US" sz="950" dirty="0"/>
           </a:p>
         </p:txBody>
       </p:sp>
@@ -7627,7 +7760,7 @@
     <p:bg>
       <p:bgPr>
         <a:solidFill>
-          <a:srgbClr val="F8FAFC"/>
+          <a:srgbClr val="F4F6F9"/>
         </a:solidFill>
       </p:bgPr>
     </p:bg>
@@ -7653,8 +7786,8 @@
         </p:nvSpPr>
         <p:spPr>
           <a:xfrm>
-            <a:off x="731520" y="320040"/>
-            <a:ext cx="2194560" cy="292608"/>
+            <a:off x="548640" y="228600"/>
+            <a:ext cx="2011680" cy="274320"/>
           </a:xfrm>
           <a:prstGeom prst="roundRect">
             <a:avLst/>
@@ -7678,8 +7811,8 @@
         </p:nvSpPr>
         <p:spPr>
           <a:xfrm>
-            <a:off x="731520" y="320040"/>
-            <a:ext cx="2194560" cy="292608"/>
+            <a:off x="548640" y="228600"/>
+            <a:ext cx="2011680" cy="274320"/>
           </a:xfrm>
           <a:prstGeom prst="rect">
             <a:avLst/>
@@ -7714,31 +7847,31 @@
         </p:nvSpPr>
         <p:spPr>
           <a:xfrm>
-            <a:off x="731520" y="658368"/>
-            <a:ext cx="7680960" cy="457200"/>
-          </a:xfrm>
-          <a:prstGeom prst="rect">
-            <a:avLst/>
-          </a:prstGeom>
-          <a:noFill/>
-          <a:ln/>
-        </p:spPr>
-        <p:txBody>
-          <a:bodyPr wrap="square" rtlCol="0" anchor="ctr"/>
-          <a:lstStyle/>
-          <a:p>
-            <a:pPr indent="0" marL="0">
-              <a:buNone/>
-            </a:pPr>
-            <a:r>
-              <a:rPr lang="en-US" sz="2200" b="1" dirty="0">
+            <a:off x="548640" y="548640"/>
+            <a:ext cx="8046720" cy="411480"/>
+          </a:xfrm>
+          <a:prstGeom prst="rect">
+            <a:avLst/>
+          </a:prstGeom>
+          <a:noFill/>
+          <a:ln/>
+        </p:spPr>
+        <p:txBody>
+          <a:bodyPr wrap="square" rtlCol="0" anchor="ctr"/>
+          <a:lstStyle/>
+          <a:p>
+            <a:pPr indent="0" marL="0">
+              <a:buNone/>
+            </a:pPr>
+            <a:r>
+              <a:rPr lang="en-US" sz="2000" b="1" dirty="0">
                 <a:solidFill>
                   <a:srgbClr val="0F172A"/>
                 </a:solidFill>
               </a:rPr>
               <a:t>Afzalliklari: KiberQoriqchi nega ustun?</a:t>
             </a:r>
-            <a:endParaRPr lang="en-US" sz="2200" dirty="0"/>
+            <a:endParaRPr lang="en-US" sz="2000" dirty="0"/>
           </a:p>
         </p:txBody>
       </p:sp>
@@ -7750,31 +7883,31 @@
         </p:nvSpPr>
         <p:spPr>
           <a:xfrm>
-            <a:off x="731520" y="1078992"/>
-            <a:ext cx="7680960" cy="292608"/>
-          </a:xfrm>
-          <a:prstGeom prst="rect">
-            <a:avLst/>
-          </a:prstGeom>
-          <a:noFill/>
-          <a:ln/>
-        </p:spPr>
-        <p:txBody>
-          <a:bodyPr wrap="square" rtlCol="0" anchor="ctr"/>
-          <a:lstStyle/>
-          <a:p>
-            <a:pPr indent="0" marL="0">
-              <a:buNone/>
-            </a:pPr>
-            <a:r>
-              <a:rPr lang="en-US" sz="1200" dirty="0">
+            <a:off x="548640" y="960120"/>
+            <a:ext cx="8046720" cy="274320"/>
+          </a:xfrm>
+          <a:prstGeom prst="rect">
+            <a:avLst/>
+          </a:prstGeom>
+          <a:noFill/>
+          <a:ln/>
+        </p:spPr>
+        <p:txBody>
+          <a:bodyPr wrap="square" rtlCol="0" anchor="ctr"/>
+          <a:lstStyle/>
+          <a:p>
+            <a:pPr indent="0" marL="0">
+              <a:buNone/>
+            </a:pPr>
+            <a:r>
+              <a:rPr lang="en-US" sz="1100" dirty="0">
                 <a:solidFill>
                   <a:srgbClr val="475569"/>
                 </a:solidFill>
               </a:rPr>
-              <a:t>Xorijiy analoglar va an'anaviy kurslarga nisbatan real afzalliklar</a:t>
-            </a:r>
-            <a:endParaRPr lang="en-US" sz="1200" dirty="0"/>
+              <a:t>Saytning haqiqiy imkoniyatlariga asoslangan asosiy raqobat ustunliklari</a:t>
+            </a:r>
+            <a:endParaRPr lang="en-US" sz="1100" dirty="0"/>
           </a:p>
         </p:txBody>
       </p:sp>
@@ -7786,8 +7919,93 @@
         </p:nvSpPr>
         <p:spPr>
           <a:xfrm>
-            <a:off x="731520" y="1463040"/>
-            <a:ext cx="3657600" cy="1417320"/>
+            <a:off x="512064" y="1289304"/>
+            <a:ext cx="4096512" cy="3822192"/>
+          </a:xfrm>
+          <a:prstGeom prst="roundRect">
+            <a:avLst/>
+          </a:prstGeom>
+          <a:solidFill>
+            <a:srgbClr val="0D1A26"/>
+          </a:solidFill>
+          <a:ln w="19050">
+            <a:solidFill>
+              <a:srgbClr val="059669"/>
+            </a:solidFill>
+            <a:prstDash val="solid"/>
+          </a:ln>
+        </p:spPr>
+      </p:sp>
+      <p:pic>
+        <p:nvPicPr>
+          <p:cNvPr id="7" name="Image 0" descr="C:\Users\User\Desktop\kiber xavfsizlik boyicha sayt\public\screenshots\07_leaderboard.png">    </p:cNvPr>
+          <p:cNvPicPr>
+            <a:picLocks noChangeAspect="1"/>
+          </p:cNvPicPr>
+          <p:nvPr/>
+        </p:nvPicPr>
+        <p:blipFill>
+          <a:blip r:embed="rId1"/>
+          <a:stretch>
+            <a:fillRect/>
+          </a:stretch>
+        </p:blipFill>
+        <p:spPr>
+          <a:xfrm>
+            <a:off x="548640" y="1325880"/>
+            <a:ext cx="4023360" cy="3474720"/>
+          </a:xfrm>
+          <a:prstGeom prst="rect">
+            <a:avLst/>
+          </a:prstGeom>
+        </p:spPr>
+      </p:pic>
+      <p:sp>
+        <p:nvSpPr>
+          <p:cNvPr id="8" name="Text 5"/>
+          <p:cNvSpPr/>
+          <p:nvPr/>
+        </p:nvSpPr>
+        <p:spPr>
+          <a:xfrm>
+            <a:off x="548640" y="4837176"/>
+            <a:ext cx="4023360" cy="274320"/>
+          </a:xfrm>
+          <a:prstGeom prst="rect">
+            <a:avLst/>
+          </a:prstGeom>
+          <a:noFill/>
+          <a:ln/>
+        </p:spPr>
+        <p:txBody>
+          <a:bodyPr wrap="square" rtlCol="0" anchor="ctr"/>
+          <a:lstStyle/>
+          <a:p>
+            <a:pPr algn="ctr" indent="0" marL="0">
+              <a:buNone/>
+            </a:pPr>
+            <a:r>
+              <a:rPr lang="en-US" sz="900" dirty="0">
+                <a:solidFill>
+                  <a:srgbClr val="BAE6FD"/>
+                </a:solidFill>
+              </a:rPr>
+              <a:t>📸 "Leaderboard" — jonli reyting va musobaqa tizimi</a:t>
+            </a:r>
+            <a:endParaRPr lang="en-US" sz="900" dirty="0"/>
+          </a:p>
+        </p:txBody>
+      </p:sp>
+      <p:sp>
+        <p:nvSpPr>
+          <p:cNvPr id="9" name="Shape 6"/>
+          <p:cNvSpPr/>
+          <p:nvPr/>
+        </p:nvSpPr>
+        <p:spPr>
+          <a:xfrm>
+            <a:off x="4846320" y="1325880"/>
+            <a:ext cx="3749040" cy="749808"/>
           </a:xfrm>
           <a:prstGeom prst="roundRect">
             <a:avLst/>
@@ -7805,89 +8023,86 @@
       </p:sp>
       <p:sp>
         <p:nvSpPr>
-          <p:cNvPr id="7" name="Text 5"/>
-          <p:cNvSpPr/>
-          <p:nvPr/>
-        </p:nvSpPr>
-        <p:spPr>
-          <a:xfrm>
-            <a:off x="914400" y="1600200"/>
-            <a:ext cx="3291840" cy="320040"/>
-          </a:xfrm>
-          <a:prstGeom prst="rect">
-            <a:avLst/>
-          </a:prstGeom>
-          <a:noFill/>
-          <a:ln/>
-        </p:spPr>
-        <p:txBody>
-          <a:bodyPr wrap="square" rtlCol="0" anchor="ctr"/>
-          <a:lstStyle/>
-          <a:p>
-            <a:pPr indent="0" marL="0">
-              <a:buNone/>
-            </a:pPr>
-            <a:r>
-              <a:rPr lang="en-US" sz="1200" b="1" dirty="0">
+          <p:cNvPr id="10" name="Text 7"/>
+          <p:cNvSpPr/>
+          <p:nvPr/>
+        </p:nvSpPr>
+        <p:spPr>
+          <a:xfrm>
+            <a:off x="4983480" y="1399032"/>
+            <a:ext cx="3474720" cy="274320"/>
+          </a:xfrm>
+          <a:prstGeom prst="rect">
+            <a:avLst/>
+          </a:prstGeom>
+          <a:noFill/>
+          <a:ln/>
+        </p:spPr>
+        <p:txBody>
+          <a:bodyPr wrap="square" rtlCol="0" anchor="ctr"/>
+          <a:lstStyle/>
+          <a:p>
+            <a:pPr indent="0" marL="0">
+              <a:buNone/>
+            </a:pPr>
+            <a:r>
+              <a:rPr lang="en-US" sz="1100" b="1" dirty="0">
                 <a:solidFill>
                   <a:srgbClr val="059669"/>
                 </a:solidFill>
               </a:rPr>
-              <a:t>1. 100% Mahalliy kontekst va Ona tili</a:t>
-            </a:r>
-            <a:endParaRPr lang="en-US" sz="1200" dirty="0"/>
-          </a:p>
-        </p:txBody>
-      </p:sp>
-      <p:sp>
-        <p:nvSpPr>
-          <p:cNvPr id="8" name="Text 6"/>
-          <p:cNvSpPr/>
-          <p:nvPr/>
-        </p:nvSpPr>
-        <p:spPr>
-          <a:xfrm>
-            <a:off x="914400" y="1965960"/>
-            <a:ext cx="3291840" cy="777240"/>
-          </a:xfrm>
-          <a:prstGeom prst="rect">
-            <a:avLst/>
-          </a:prstGeom>
-          <a:noFill/>
-          <a:ln/>
-        </p:spPr>
-        <p:txBody>
-          <a:bodyPr wrap="square" rtlCol="0" anchor="ctr"/>
-          <a:lstStyle/>
-          <a:p>
-            <a:pPr indent="0" marL="0">
-              <a:lnSpc>
-                <a:spcPct val="115000"/>
-              </a:lnSpc>
-              <a:buNone/>
-            </a:pPr>
-            <a:r>
-              <a:rPr lang="en-US" sz="1000" dirty="0">
+              <a:t>1. 100% Ona Tilimizda</a:t>
+            </a:r>
+            <a:endParaRPr lang="en-US" sz="1100" dirty="0"/>
+          </a:p>
+        </p:txBody>
+      </p:sp>
+      <p:sp>
+        <p:nvSpPr>
+          <p:cNvPr id="11" name="Text 8"/>
+          <p:cNvSpPr/>
+          <p:nvPr/>
+        </p:nvSpPr>
+        <p:spPr>
+          <a:xfrm>
+            <a:off x="4983480" y="1673352"/>
+            <a:ext cx="3474720" cy="347472"/>
+          </a:xfrm>
+          <a:prstGeom prst="rect">
+            <a:avLst/>
+          </a:prstGeom>
+          <a:noFill/>
+          <a:ln/>
+        </p:spPr>
+        <p:txBody>
+          <a:bodyPr wrap="square" rtlCol="0" anchor="ctr"/>
+          <a:lstStyle/>
+          <a:p>
+            <a:pPr indent="0" marL="0">
+              <a:buNone/>
+            </a:pPr>
+            <a:r>
+              <a:rPr lang="en-US" sz="950" dirty="0">
                 <a:solidFill>
                   <a:srgbClr val="475569"/>
                 </a:solidFill>
               </a:rPr>
-              <a:t>O'zbekiston bank tizimi (Click, Payme, Uzcard) fishingiga qarshi maxsus yo'riqnomalar va o'zbek tilidagi tushuntirishlar.</a:t>
-            </a:r>
-            <a:endParaRPr lang="en-US" sz="1000" dirty="0"/>
-          </a:p>
-        </p:txBody>
-      </p:sp>
-      <p:sp>
-        <p:nvSpPr>
-          <p:cNvPr id="9" name="Shape 7"/>
-          <p:cNvSpPr/>
-          <p:nvPr/>
-        </p:nvSpPr>
-        <p:spPr>
-          <a:xfrm>
-            <a:off x="4754880" y="1463040"/>
-            <a:ext cx="3657600" cy="1417320"/>
+              <a:t>O‘zbekiston to‘lov tizimlari (Click, Payme, Uzcard) kiber-xavflariga moslangan.</a:t>
+            </a:r>
+            <a:endParaRPr lang="en-US" sz="950" dirty="0"/>
+          </a:p>
+        </p:txBody>
+      </p:sp>
+      <p:sp>
+        <p:nvSpPr>
+          <p:cNvPr id="12" name="Shape 9"/>
+          <p:cNvSpPr/>
+          <p:nvPr/>
+        </p:nvSpPr>
+        <p:spPr>
+          <a:xfrm>
+            <a:off x="4846320" y="2194560"/>
+            <a:ext cx="3749040" cy="749808"/>
           </a:xfrm>
           <a:prstGeom prst="roundRect">
             <a:avLst/>
@@ -7905,89 +8120,86 @@
       </p:sp>
       <p:sp>
         <p:nvSpPr>
-          <p:cNvPr id="10" name="Text 8"/>
-          <p:cNvSpPr/>
-          <p:nvPr/>
-        </p:nvSpPr>
-        <p:spPr>
-          <a:xfrm>
-            <a:off x="4937760" y="1600200"/>
-            <a:ext cx="3291840" cy="320040"/>
-          </a:xfrm>
-          <a:prstGeom prst="rect">
-            <a:avLst/>
-          </a:prstGeom>
-          <a:noFill/>
-          <a:ln/>
-        </p:spPr>
-        <p:txBody>
-          <a:bodyPr wrap="square" rtlCol="0" anchor="ctr"/>
-          <a:lstStyle/>
-          <a:p>
-            <a:pPr indent="0" marL="0">
-              <a:buNone/>
-            </a:pPr>
-            <a:r>
-              <a:rPr lang="en-US" sz="1200" b="1" dirty="0">
+          <p:cNvPr id="13" name="Text 10"/>
+          <p:cNvSpPr/>
+          <p:nvPr/>
+        </p:nvSpPr>
+        <p:spPr>
+          <a:xfrm>
+            <a:off x="4983480" y="2267712"/>
+            <a:ext cx="3474720" cy="274320"/>
+          </a:xfrm>
+          <a:prstGeom prst="rect">
+            <a:avLst/>
+          </a:prstGeom>
+          <a:noFill/>
+          <a:ln/>
+        </p:spPr>
+        <p:txBody>
+          <a:bodyPr wrap="square" rtlCol="0" anchor="ctr"/>
+          <a:lstStyle/>
+          <a:p>
+            <a:pPr indent="0" marL="0">
+              <a:buNone/>
+            </a:pPr>
+            <a:r>
+              <a:rPr lang="en-US" sz="1100" b="1" dirty="0">
                 <a:solidFill>
                   <a:srgbClr val="059669"/>
                 </a:solidFill>
               </a:rPr>
-              <a:t>2. Faqat nazariya emas — Jonli Himoya</a:t>
-            </a:r>
-            <a:endParaRPr lang="en-US" sz="1200" dirty="0"/>
-          </a:p>
-        </p:txBody>
-      </p:sp>
-      <p:sp>
-        <p:nvSpPr>
-          <p:cNvPr id="11" name="Text 9"/>
-          <p:cNvSpPr/>
-          <p:nvPr/>
-        </p:nvSpPr>
-        <p:spPr>
-          <a:xfrm>
-            <a:off x="4937760" y="1965960"/>
-            <a:ext cx="3291840" cy="777240"/>
-          </a:xfrm>
-          <a:prstGeom prst="rect">
-            <a:avLst/>
-          </a:prstGeom>
-          <a:noFill/>
-          <a:ln/>
-        </p:spPr>
-        <p:txBody>
-          <a:bodyPr wrap="square" rtlCol="0" anchor="ctr"/>
-          <a:lstStyle/>
-          <a:p>
-            <a:pPr indent="0" marL="0">
-              <a:lnSpc>
-                <a:spcPct val="115000"/>
-              </a:lnSpc>
-              <a:buNone/>
-            </a:pPr>
-            <a:r>
-              <a:rPr lang="en-US" sz="1000" dirty="0">
+              <a:t>2. Ta'lim + Jonli Himoya</a:t>
+            </a:r>
+            <a:endParaRPr lang="en-US" sz="1100" dirty="0"/>
+          </a:p>
+        </p:txBody>
+      </p:sp>
+      <p:sp>
+        <p:nvSpPr>
+          <p:cNvPr id="14" name="Text 11"/>
+          <p:cNvSpPr/>
+          <p:nvPr/>
+        </p:nvSpPr>
+        <p:spPr>
+          <a:xfrm>
+            <a:off x="4983480" y="2542032"/>
+            <a:ext cx="3474720" cy="347472"/>
+          </a:xfrm>
+          <a:prstGeom prst="rect">
+            <a:avLst/>
+          </a:prstGeom>
+          <a:noFill/>
+          <a:ln/>
+        </p:spPr>
+        <p:txBody>
+          <a:bodyPr wrap="square" rtlCol="0" anchor="ctr"/>
+          <a:lstStyle/>
+          <a:p>
+            <a:pPr indent="0" marL="0">
+              <a:buNone/>
+            </a:pPr>
+            <a:r>
+              <a:rPr lang="en-US" sz="950" dirty="0">
                 <a:solidFill>
                   <a:srgbClr val="475569"/>
                 </a:solidFill>
               </a:rPr>
-              <a:t>Platformada nafaqat o'qiladi, balki APK fayllar va smartfon zaifliklari amalda tekshiriladi.</a:t>
-            </a:r>
-            <a:endParaRPr lang="en-US" sz="1000" dirty="0"/>
-          </a:p>
-        </p:txBody>
-      </p:sp>
-      <p:sp>
-        <p:nvSpPr>
-          <p:cNvPr id="12" name="Shape 10"/>
-          <p:cNvSpPr/>
-          <p:nvPr/>
-        </p:nvSpPr>
-        <p:spPr>
-          <a:xfrm>
-            <a:off x="731520" y="3063240"/>
-            <a:ext cx="3657600" cy="1417320"/>
+              <a:t>Faqat ma'ruza emas — smartfon va fayllarni amalda tekshirish qurollari bor.</a:t>
+            </a:r>
+            <a:endParaRPr lang="en-US" sz="950" dirty="0"/>
+          </a:p>
+        </p:txBody>
+      </p:sp>
+      <p:sp>
+        <p:nvSpPr>
+          <p:cNvPr id="15" name="Shape 12"/>
+          <p:cNvSpPr/>
+          <p:nvPr/>
+        </p:nvSpPr>
+        <p:spPr>
+          <a:xfrm>
+            <a:off x="4846320" y="3063240"/>
+            <a:ext cx="3749040" cy="749808"/>
           </a:xfrm>
           <a:prstGeom prst="roundRect">
             <a:avLst/>
@@ -8005,89 +8217,86 @@
       </p:sp>
       <p:sp>
         <p:nvSpPr>
-          <p:cNvPr id="13" name="Text 11"/>
-          <p:cNvSpPr/>
-          <p:nvPr/>
-        </p:nvSpPr>
-        <p:spPr>
-          <a:xfrm>
-            <a:off x="914400" y="3200400"/>
-            <a:ext cx="3291840" cy="320040"/>
-          </a:xfrm>
-          <a:prstGeom prst="rect">
-            <a:avLst/>
-          </a:prstGeom>
-          <a:noFill/>
-          <a:ln/>
-        </p:spPr>
-        <p:txBody>
-          <a:bodyPr wrap="square" rtlCol="0" anchor="ctr"/>
-          <a:lstStyle/>
-          <a:p>
-            <a:pPr indent="0" marL="0">
-              <a:buNone/>
-            </a:pPr>
-            <a:r>
-              <a:rPr lang="en-US" sz="1200" b="1" dirty="0">
+          <p:cNvPr id="16" name="Text 13"/>
+          <p:cNvSpPr/>
+          <p:nvPr/>
+        </p:nvSpPr>
+        <p:spPr>
+          <a:xfrm>
+            <a:off x="4983480" y="3136392"/>
+            <a:ext cx="3474720" cy="274320"/>
+          </a:xfrm>
+          <a:prstGeom prst="rect">
+            <a:avLst/>
+          </a:prstGeom>
+          <a:noFill/>
+          <a:ln/>
+        </p:spPr>
+        <p:txBody>
+          <a:bodyPr wrap="square" rtlCol="0" anchor="ctr"/>
+          <a:lstStyle/>
+          <a:p>
+            <a:pPr indent="0" marL="0">
+              <a:buNone/>
+            </a:pPr>
+            <a:r>
+              <a:rPr lang="en-US" sz="1100" b="1" dirty="0">
                 <a:solidFill>
                   <a:srgbClr val="059669"/>
                 </a:solidFill>
               </a:rPr>
-              <a:t>3. Qulay va Tejamkor (Freemium)</a:t>
-            </a:r>
-            <a:endParaRPr lang="en-US" sz="1200" dirty="0"/>
-          </a:p>
-        </p:txBody>
-      </p:sp>
-      <p:sp>
-        <p:nvSpPr>
-          <p:cNvPr id="14" name="Text 12"/>
-          <p:cNvSpPr/>
-          <p:nvPr/>
-        </p:nvSpPr>
-        <p:spPr>
-          <a:xfrm>
-            <a:off x="914400" y="3566160"/>
-            <a:ext cx="3291840" cy="777240"/>
-          </a:xfrm>
-          <a:prstGeom prst="rect">
-            <a:avLst/>
-          </a:prstGeom>
-          <a:noFill/>
-          <a:ln/>
-        </p:spPr>
-        <p:txBody>
-          <a:bodyPr wrap="square" rtlCol="0" anchor="ctr"/>
-          <a:lstStyle/>
-          <a:p>
-            <a:pPr indent="0" marL="0">
-              <a:lnSpc>
-                <a:spcPct val="115000"/>
-              </a:lnSpc>
-              <a:buNone/>
-            </a:pPr>
-            <a:r>
-              <a:rPr lang="en-US" sz="1000" dirty="0">
+              <a:t>3. Gamifikatsiya va Musobaqa</a:t>
+            </a:r>
+            <a:endParaRPr lang="en-US" sz="1100" dirty="0"/>
+          </a:p>
+        </p:txBody>
+      </p:sp>
+      <p:sp>
+        <p:nvSpPr>
+          <p:cNvPr id="17" name="Text 14"/>
+          <p:cNvSpPr/>
+          <p:nvPr/>
+        </p:nvSpPr>
+        <p:spPr>
+          <a:xfrm>
+            <a:off x="4983480" y="3410712"/>
+            <a:ext cx="3474720" cy="347472"/>
+          </a:xfrm>
+          <a:prstGeom prst="rect">
+            <a:avLst/>
+          </a:prstGeom>
+          <a:noFill/>
+          <a:ln/>
+        </p:spPr>
+        <p:txBody>
+          <a:bodyPr wrap="square" rtlCol="0" anchor="ctr"/>
+          <a:lstStyle/>
+          <a:p>
+            <a:pPr indent="0" marL="0">
+              <a:buNone/>
+            </a:pPr>
+            <a:r>
+              <a:rPr lang="en-US" sz="950" dirty="0">
                 <a:solidFill>
                   <a:srgbClr val="475569"/>
                 </a:solidFill>
               </a:rPr>
-              <a:t>Asosiy kibergigiyena darslari aholi uchun bepul, xalqaro qimmat kartalar talab qilinmaydi.</a:t>
-            </a:r>
-            <a:endParaRPr lang="en-US" sz="1000" dirty="0"/>
-          </a:p>
-        </p:txBody>
-      </p:sp>
-      <p:sp>
-        <p:nvSpPr>
-          <p:cNvPr id="15" name="Shape 13"/>
-          <p:cNvSpPr/>
-          <p:nvPr/>
-        </p:nvSpPr>
-        <p:spPr>
-          <a:xfrm>
-            <a:off x="4754880" y="3063240"/>
-            <a:ext cx="3657600" cy="1417320"/>
+              <a:t>Topshiriqlarni bajarish orqali ballar to‘plab umumiy reytingda ko‘tarilish.</a:t>
+            </a:r>
+            <a:endParaRPr lang="en-US" sz="950" dirty="0"/>
+          </a:p>
+        </p:txBody>
+      </p:sp>
+      <p:sp>
+        <p:nvSpPr>
+          <p:cNvPr id="18" name="Shape 15"/>
+          <p:cNvSpPr/>
+          <p:nvPr/>
+        </p:nvSpPr>
+        <p:spPr>
+          <a:xfrm>
+            <a:off x="4846320" y="3931920"/>
+            <a:ext cx="3749040" cy="749808"/>
           </a:xfrm>
           <a:prstGeom prst="roundRect">
             <a:avLst/>
@@ -8105,76 +8314,73 @@
       </p:sp>
       <p:sp>
         <p:nvSpPr>
-          <p:cNvPr id="16" name="Text 14"/>
-          <p:cNvSpPr/>
-          <p:nvPr/>
-        </p:nvSpPr>
-        <p:spPr>
-          <a:xfrm>
-            <a:off x="4937760" y="3200400"/>
-            <a:ext cx="3291840" cy="320040"/>
-          </a:xfrm>
-          <a:prstGeom prst="rect">
-            <a:avLst/>
-          </a:prstGeom>
-          <a:noFill/>
-          <a:ln/>
-        </p:spPr>
-        <p:txBody>
-          <a:bodyPr wrap="square" rtlCol="0" anchor="ctr"/>
-          <a:lstStyle/>
-          <a:p>
-            <a:pPr indent="0" marL="0">
-              <a:buNone/>
-            </a:pPr>
-            <a:r>
-              <a:rPr lang="en-US" sz="1200" b="1" dirty="0">
+          <p:cNvPr id="19" name="Text 16"/>
+          <p:cNvSpPr/>
+          <p:nvPr/>
+        </p:nvSpPr>
+        <p:spPr>
+          <a:xfrm>
+            <a:off x="4983480" y="4005072"/>
+            <a:ext cx="3474720" cy="274320"/>
+          </a:xfrm>
+          <a:prstGeom prst="rect">
+            <a:avLst/>
+          </a:prstGeom>
+          <a:noFill/>
+          <a:ln/>
+        </p:spPr>
+        <p:txBody>
+          <a:bodyPr wrap="square" rtlCol="0" anchor="ctr"/>
+          <a:lstStyle/>
+          <a:p>
+            <a:pPr indent="0" marL="0">
+              <a:buNone/>
+            </a:pPr>
+            <a:r>
+              <a:rPr lang="en-US" sz="1100" b="1" dirty="0">
                 <a:solidFill>
                   <a:srgbClr val="059669"/>
                 </a:solidFill>
               </a:rPr>
-              <a:t>4. Sun'iy Intellekt Maslahatchisi</a:t>
-            </a:r>
-            <a:endParaRPr lang="en-US" sz="1200" dirty="0"/>
-          </a:p>
-        </p:txBody>
-      </p:sp>
-      <p:sp>
-        <p:nvSpPr>
-          <p:cNvPr id="17" name="Text 15"/>
-          <p:cNvSpPr/>
-          <p:nvPr/>
-        </p:nvSpPr>
-        <p:spPr>
-          <a:xfrm>
-            <a:off x="4937760" y="3566160"/>
-            <a:ext cx="3291840" cy="777240"/>
-          </a:xfrm>
-          <a:prstGeom prst="rect">
-            <a:avLst/>
-          </a:prstGeom>
-          <a:noFill/>
-          <a:ln/>
-        </p:spPr>
-        <p:txBody>
-          <a:bodyPr wrap="square" rtlCol="0" anchor="ctr"/>
-          <a:lstStyle/>
-          <a:p>
-            <a:pPr indent="0" marL="0">
-              <a:lnSpc>
-                <a:spcPct val="115000"/>
-              </a:lnSpc>
-              <a:buNone/>
-            </a:pPr>
-            <a:r>
-              <a:rPr lang="en-US" sz="1000" dirty="0">
+              <a:t>4. CyberGuard AI Maslahatchi</a:t>
+            </a:r>
+            <a:endParaRPr lang="en-US" sz="1100" dirty="0"/>
+          </a:p>
+        </p:txBody>
+      </p:sp>
+      <p:sp>
+        <p:nvSpPr>
+          <p:cNvPr id="20" name="Text 17"/>
+          <p:cNvSpPr/>
+          <p:nvPr/>
+        </p:nvSpPr>
+        <p:spPr>
+          <a:xfrm>
+            <a:off x="4983480" y="4279392"/>
+            <a:ext cx="3474720" cy="347472"/>
+          </a:xfrm>
+          <a:prstGeom prst="rect">
+            <a:avLst/>
+          </a:prstGeom>
+          <a:noFill/>
+          <a:ln/>
+        </p:spPr>
+        <p:txBody>
+          <a:bodyPr wrap="square" rtlCol="0" anchor="ctr"/>
+          <a:lstStyle/>
+          <a:p>
+            <a:pPr indent="0" marL="0">
+              <a:buNone/>
+            </a:pPr>
+            <a:r>
+              <a:rPr lang="en-US" sz="950" dirty="0">
                 <a:solidFill>
                   <a:srgbClr val="475569"/>
                 </a:solidFill>
               </a:rPr>
-              <a:t>CyberGuard AI assistenti istalgan kiber-savolga o'zbek tilida 24/7 professional javob beradi.</a:t>
-            </a:r>
-            <a:endParaRPr lang="en-US" sz="1000" dirty="0"/>
+              <a:t>Har qanday kiber-savolga o‘zbek tilida 24/7 tezkor va tushunarli javob.</a:t>
+            </a:r>
+            <a:endParaRPr lang="en-US" sz="950" dirty="0"/>
           </a:p>
         </p:txBody>
       </p:sp>

--- a/public/KiberQoriqchi_Prezentatsiya.pptx
+++ b/public/KiberQoriqchi_Prezentatsiya.pptx
@@ -17,9 +17,10 @@
     <p:sldId id="265" r:id="rId11"/>
     <p:sldId id="266" r:id="rId12"/>
     <p:sldId id="267" r:id="rId13"/>
+    <p:sldId id="268" r:id="rId14"/>
   </p:sldIdLst>
   <p:notesMasterIdLst>
-    <p:notesMasterId r:id="rId14"/>
+    <p:notesMasterId r:id="rId15"/>
   </p:notesMasterIdLst>
   <p:sldSz cx="9144000" cy="5143500"/>
   <p:notesSz cx="5143500" cy="9144000"/>
@@ -801,6 +802,94 @@
             <a:fld id="{F7021451-1387-4CA6-816F-3879F97B5CBC}" type="slidenum">
               <a:rPr lang="en-US"/>
               <a:t>12</a:t>
+            </a:fld>
+            <a:endParaRPr lang="en-US"/>
+          </a:p>
+        </p:txBody>
+      </p:sp>
+    </p:spTree>
+    <p:extLst>
+      <p:ext uri="{BB962C8B-B14F-4D97-AF65-F5344CB8AC3E}">
+        <p14:creationId xmlns:p14="http://schemas.microsoft.com/office/powerpoint/2010/main" val="1024086991"/>
+      </p:ext>
+    </p:extLst>
+  </p:cSld>
+  <p:clrMapOvr>
+    <a:masterClrMapping/>
+  </p:clrMapOvr>
+</p:notes>
+</file>
+
+<file path=ppt/notesSlides/notesSlide13.xml><?xml version="1.0" encoding="utf-8"?>
+<p:notes xmlns:a="http://schemas.openxmlformats.org/drawingml/2006/main" xmlns:r="http://schemas.openxmlformats.org/officeDocument/2006/relationships" xmlns:p="http://schemas.openxmlformats.org/presentationml/2006/main">
+  <p:cSld>
+    <p:spTree>
+      <p:nvGrpSpPr>
+        <p:cNvPr id="1" name=""/>
+        <p:cNvGrpSpPr/>
+        <p:nvPr/>
+      </p:nvGrpSpPr>
+      <p:grpSpPr>
+        <a:xfrm>
+          <a:off x="0" y="0"/>
+          <a:ext cx="0" cy="0"/>
+          <a:chOff x="0" y="0"/>
+          <a:chExt cx="0" cy="0"/>
+        </a:xfrm>
+      </p:grpSpPr>
+      <p:sp>
+        <p:nvSpPr>
+          <p:cNvPr id="2" name="Slide Image Placeholder 1"/>
+          <p:cNvSpPr>
+            <a:spLocks noGrp="1" noRot="1" noChangeAspect="1"/>
+          </p:cNvSpPr>
+          <p:nvPr>
+            <p:ph type="sldImg"/>
+          </p:nvPr>
+        </p:nvSpPr>
+        <p:spPr/>
+      </p:sp>
+      <p:sp>
+        <p:nvSpPr>
+          <p:cNvPr id="3" name="Notes Placeholder 2"/>
+          <p:cNvSpPr>
+            <a:spLocks noGrp="1"/>
+          </p:cNvSpPr>
+          <p:nvPr>
+            <p:ph type="body" idx="1"/>
+          </p:nvPr>
+        </p:nvSpPr>
+        <p:spPr/>
+        <p:txBody>
+          <a:bodyPr/>
+          <a:lstStyle/>
+          <a:p>
+            <a:r>
+              <a:rPr lang="en-US" dirty="0"/>
+              <a:t/>
+            </a:r>
+            <a:endParaRPr lang="en-US" dirty="0"/>
+          </a:p>
+        </p:txBody>
+      </p:sp>
+      <p:sp>
+        <p:nvSpPr>
+          <p:cNvPr id="4" name="Slide Number Placeholder 3"/>
+          <p:cNvSpPr>
+            <a:spLocks noGrp="1"/>
+          </p:cNvSpPr>
+          <p:nvPr>
+            <p:ph type="sldNum" sz="quarter" idx="10"/>
+          </p:nvPr>
+        </p:nvSpPr>
+        <p:spPr/>
+        <p:txBody>
+          <a:bodyPr/>
+          <a:lstStyle/>
+          <a:p>
+            <a:fld id="{F7021451-1387-4CA6-816F-3879F97B5CBC}" type="slidenum">
+              <a:rPr lang="en-US"/>
+              <a:t>13</a:t>
             </a:fld>
             <a:endParaRPr lang="en-US"/>
           </a:p>
@@ -2116,7 +2205,7 @@
                   <a:srgbClr val="10B981"/>
                 </a:solidFill>
               </a:rPr>
-              <a:t>✔ 100% O‘zbek tilida   ✔ Jonli Laboratoriyalar   ✔ APK Skaneri</a:t>
+              <a:t>Muallif: Abduraxmonov Bexruz   |   100% O‘zbek tilida</a:t>
             </a:r>
             <a:endParaRPr lang="en-US" sz="1100" dirty="0"/>
           </a:p>
@@ -2294,7 +2383,7 @@
                   <a:srgbClr val="059669"/>
                 </a:solidFill>
               </a:rPr>
-              <a:t>SLAYD 10 / 12</a:t>
+              <a:t>SLAYD 10 / 13</a:t>
             </a:r>
             <a:endParaRPr lang="en-US" sz="950" dirty="0"/>
           </a:p>
@@ -2330,7 +2419,7 @@
                   <a:srgbClr val="0F172A"/>
                 </a:solidFill>
               </a:rPr>
-              <a:t>Kamchiliklar va Rivojlantirish Rejalari</a:t>
+              <a:t>Afzalliklari: KiberQoriqchi nega ustun?</a:t>
             </a:r>
             <a:endParaRPr lang="en-US" sz="2000" dirty="0"/>
           </a:p>
@@ -2366,7 +2455,7 @@
                   <a:srgbClr val="475569"/>
                 </a:solidFill>
               </a:rPr>
-              <a:t>Haqiqiy holatni ochiq baholash va kelajakdagi takomillashtirish bosqichlari</a:t>
+              <a:t>Saytning haqiqiy imkoniyatlariga asoslangan asosiy raqobat ustunliklari</a:t>
             </a:r>
             <a:endParaRPr lang="en-US" sz="1100" dirty="0"/>
           </a:p>
@@ -2399,7 +2488,7 @@
       </p:sp>
       <p:pic>
         <p:nvPicPr>
-          <p:cNvPr id="7" name="Image 0" descr="C:\Users\User\Desktop\kiber xavfsizlik boyicha sayt\public\screenshots\12_casestudy.png">    </p:cNvPr>
+          <p:cNvPr id="7" name="Image 0" descr="C:\Users\User\Desktop\kiber xavfsizlik boyicha sayt\public\screenshots\07_leaderboard.png">    </p:cNvPr>
           <p:cNvPicPr>
             <a:picLocks noChangeAspect="1"/>
           </p:cNvPicPr>
@@ -2451,7 +2540,7 @@
                   <a:srgbClr val="BAE6FD"/>
                 </a:solidFill>
               </a:rPr>
-              <a:t>📸 "Hodisalar Tahlili" (Case Study) — kiber-hujumlar tahlili</a:t>
+              <a:t>📸 "Leaderboard" — jonli reyting va musobaqa tizimi</a:t>
             </a:r>
             <a:endParaRPr lang="en-US" sz="900" dirty="0"/>
           </a:p>
@@ -2466,161 +2555,7 @@
         <p:spPr>
           <a:xfrm>
             <a:off x="4846320" y="1325880"/>
-            <a:ext cx="3749040" cy="1645920"/>
-          </a:xfrm>
-          <a:prstGeom prst="roundRect">
-            <a:avLst/>
-          </a:prstGeom>
-          <a:solidFill>
-            <a:srgbClr val="FFFFFF"/>
-          </a:solidFill>
-          <a:ln w="19050">
-            <a:solidFill>
-              <a:srgbClr val="FCD34D"/>
-            </a:solidFill>
-            <a:prstDash val="solid"/>
-          </a:ln>
-        </p:spPr>
-      </p:sp>
-      <p:sp>
-        <p:nvSpPr>
-          <p:cNvPr id="10" name="Text 7"/>
-          <p:cNvSpPr/>
-          <p:nvPr/>
-        </p:nvSpPr>
-        <p:spPr>
-          <a:xfrm>
-            <a:off x="4983480" y="1417320"/>
-            <a:ext cx="3474720" cy="274320"/>
-          </a:xfrm>
-          <a:prstGeom prst="rect">
-            <a:avLst/>
-          </a:prstGeom>
-          <a:noFill/>
-          <a:ln/>
-        </p:spPr>
-        <p:txBody>
-          <a:bodyPr wrap="square" rtlCol="0" anchor="ctr"/>
-          <a:lstStyle/>
-          <a:p>
-            <a:pPr indent="0" marL="0">
-              <a:buNone/>
-            </a:pPr>
-            <a:r>
-              <a:rPr lang="en-US" sz="1100" b="1" dirty="0">
-                <a:solidFill>
-                  <a:srgbClr val="B45309"/>
-                </a:solidFill>
-              </a:rPr>
-              <a:t>⚠️ Aniqlangan Kamchiliklar (MVP):</a:t>
-            </a:r>
-            <a:endParaRPr lang="en-US" sz="1100" dirty="0"/>
-          </a:p>
-        </p:txBody>
-      </p:sp>
-      <p:sp>
-        <p:nvSpPr>
-          <p:cNvPr id="11" name="Text 8"/>
-          <p:cNvSpPr/>
-          <p:nvPr/>
-        </p:nvSpPr>
-        <p:spPr>
-          <a:xfrm>
-            <a:off x="4983480" y="1737360"/>
-            <a:ext cx="3474720" cy="1143000"/>
-          </a:xfrm>
-          <a:prstGeom prst="rect">
-            <a:avLst/>
-          </a:prstGeom>
-          <a:noFill/>
-          <a:ln/>
-        </p:spPr>
-        <p:txBody>
-          <a:bodyPr wrap="square" rtlCol="0" anchor="ctr"/>
-          <a:lstStyle/>
-          <a:p>
-            <a:pPr indent="0" marL="0">
-              <a:buNone/>
-            </a:pPr>
-            <a:r>
-              <a:rPr lang="en-US" sz="900" b="1" dirty="0">
-                <a:solidFill>
-                  <a:srgbClr val="0F172A"/>
-                </a:solidFill>
-              </a:rPr>
-              <a:t>• Dinamik Server Sandboxing: </a:t>
-            </a:r>
-            <a:pPr indent="0" marL="0">
-              <a:buNone/>
-            </a:pPr>
-            <a:r>
-              <a:rPr lang="en-US" sz="900" dirty="0">
-                <a:solidFill>
-                  <a:srgbClr val="475569"/>
-                </a:solidFill>
-              </a:rPr>
-              <a:t>Hozircha veb-simulyatsiya; to‘liq Docker muhiti zarur.
-</a:t>
-            </a:r>
-            <a:pPr indent="0" marL="0">
-              <a:buNone/>
-            </a:pPr>
-            <a:r>
-              <a:rPr lang="en-US" sz="900" b="1" dirty="0">
-                <a:solidFill>
-                  <a:srgbClr val="0F172A"/>
-                </a:solidFill>
-              </a:rPr>
-              <a:t>• Mahalliy ilova yo‘qligi: </a:t>
-            </a:r>
-            <a:pPr indent="0" marL="0">
-              <a:buNone/>
-            </a:pPr>
-            <a:r>
-              <a:rPr lang="en-US" sz="900" dirty="0">
-                <a:solidFill>
-                  <a:srgbClr val="475569"/>
-                </a:solidFill>
-              </a:rPr>
-              <a:t>Android/iOS ilovasi ishlab chiqilmoqda.
-</a:t>
-            </a:r>
-            <a:pPr indent="0" marL="0">
-              <a:buNone/>
-            </a:pPr>
-            <a:r>
-              <a:rPr lang="en-US" sz="900" b="1" dirty="0">
-                <a:solidFill>
-                  <a:srgbClr val="0F172A"/>
-                </a:solidFill>
-              </a:rPr>
-              <a:t>• Telegram bot: </a:t>
-            </a:r>
-            <a:pPr indent="0" marL="0">
-              <a:buNone/>
-            </a:pPr>
-            <a:r>
-              <a:rPr lang="en-US" sz="900" dirty="0">
-                <a:solidFill>
-                  <a:srgbClr val="475569"/>
-                </a:solidFill>
-              </a:rPr>
-              <a:t>Avtomatik APK tekshiruvchi bot ulanmoqda.</a:t>
-            </a:r>
-            <a:endParaRPr lang="en-US" sz="900" dirty="0"/>
-          </a:p>
-        </p:txBody>
-      </p:sp>
-      <p:sp>
-        <p:nvSpPr>
-          <p:cNvPr id="12" name="Shape 9"/>
-          <p:cNvSpPr/>
-          <p:nvPr/>
-        </p:nvSpPr>
-        <p:spPr>
-          <a:xfrm>
-            <a:off x="4846320" y="3154680"/>
-            <a:ext cx="3749040" cy="1645920"/>
+            <a:ext cx="3749040" cy="749808"/>
           </a:xfrm>
           <a:prstGeom prst="roundRect">
             <a:avLst/>
@@ -2638,13 +2573,110 @@
       </p:sp>
       <p:sp>
         <p:nvSpPr>
+          <p:cNvPr id="10" name="Text 7"/>
+          <p:cNvSpPr/>
+          <p:nvPr/>
+        </p:nvSpPr>
+        <p:spPr>
+          <a:xfrm>
+            <a:off x="4983480" y="1399032"/>
+            <a:ext cx="3474720" cy="274320"/>
+          </a:xfrm>
+          <a:prstGeom prst="rect">
+            <a:avLst/>
+          </a:prstGeom>
+          <a:noFill/>
+          <a:ln/>
+        </p:spPr>
+        <p:txBody>
+          <a:bodyPr wrap="square" rtlCol="0" anchor="ctr"/>
+          <a:lstStyle/>
+          <a:p>
+            <a:pPr indent="0" marL="0">
+              <a:buNone/>
+            </a:pPr>
+            <a:r>
+              <a:rPr lang="en-US" sz="1100" b="1" dirty="0">
+                <a:solidFill>
+                  <a:srgbClr val="059669"/>
+                </a:solidFill>
+              </a:rPr>
+              <a:t>1. 100% Ona Tilimizda</a:t>
+            </a:r>
+            <a:endParaRPr lang="en-US" sz="1100" dirty="0"/>
+          </a:p>
+        </p:txBody>
+      </p:sp>
+      <p:sp>
+        <p:nvSpPr>
+          <p:cNvPr id="11" name="Text 8"/>
+          <p:cNvSpPr/>
+          <p:nvPr/>
+        </p:nvSpPr>
+        <p:spPr>
+          <a:xfrm>
+            <a:off x="4983480" y="1673352"/>
+            <a:ext cx="3474720" cy="347472"/>
+          </a:xfrm>
+          <a:prstGeom prst="rect">
+            <a:avLst/>
+          </a:prstGeom>
+          <a:noFill/>
+          <a:ln/>
+        </p:spPr>
+        <p:txBody>
+          <a:bodyPr wrap="square" rtlCol="0" anchor="ctr"/>
+          <a:lstStyle/>
+          <a:p>
+            <a:pPr indent="0" marL="0">
+              <a:buNone/>
+            </a:pPr>
+            <a:r>
+              <a:rPr lang="en-US" sz="950" dirty="0">
+                <a:solidFill>
+                  <a:srgbClr val="475569"/>
+                </a:solidFill>
+              </a:rPr>
+              <a:t>O‘zbekiston to‘lov tizimlari (Click, Payme, Uzcard) kiber-xavflariga moslangan.</a:t>
+            </a:r>
+            <a:endParaRPr lang="en-US" sz="950" dirty="0"/>
+          </a:p>
+        </p:txBody>
+      </p:sp>
+      <p:sp>
+        <p:nvSpPr>
+          <p:cNvPr id="12" name="Shape 9"/>
+          <p:cNvSpPr/>
+          <p:nvPr/>
+        </p:nvSpPr>
+        <p:spPr>
+          <a:xfrm>
+            <a:off x="4846320" y="2194560"/>
+            <a:ext cx="3749040" cy="749808"/>
+          </a:xfrm>
+          <a:prstGeom prst="roundRect">
+            <a:avLst/>
+          </a:prstGeom>
+          <a:solidFill>
+            <a:srgbClr val="FFFFFF"/>
+          </a:solidFill>
+          <a:ln w="19050">
+            <a:solidFill>
+              <a:srgbClr val="6EE7B7"/>
+            </a:solidFill>
+            <a:prstDash val="solid"/>
+          </a:ln>
+        </p:spPr>
+      </p:sp>
+      <p:sp>
+        <p:nvSpPr>
           <p:cNvPr id="13" name="Text 10"/>
           <p:cNvSpPr/>
           <p:nvPr/>
         </p:nvSpPr>
         <p:spPr>
           <a:xfrm>
-            <a:off x="4983480" y="3246120"/>
+            <a:off x="4983480" y="2267712"/>
             <a:ext cx="3474720" cy="274320"/>
           </a:xfrm>
           <a:prstGeom prst="rect">
@@ -2666,7 +2698,7 @@
                   <a:srgbClr val="059669"/>
                 </a:solidFill>
               </a:rPr>
-              <a:t>🚀 Kelajakdagi Rivojlantirish:</a:t>
+              <a:t>2. Ta'lim + Jonli Himoya</a:t>
             </a:r>
             <a:endParaRPr lang="en-US" sz="1100" dirty="0"/>
           </a:p>
@@ -2680,88 +2712,225 @@
         </p:nvSpPr>
         <p:spPr>
           <a:xfrm>
-            <a:off x="4983480" y="3566160"/>
-            <a:ext cx="3474720" cy="1143000"/>
-          </a:xfrm>
-          <a:prstGeom prst="rect">
-            <a:avLst/>
-          </a:prstGeom>
-          <a:noFill/>
-          <a:ln/>
-        </p:spPr>
-        <p:txBody>
-          <a:bodyPr wrap="square" rtlCol="0" anchor="ctr"/>
-          <a:lstStyle/>
-          <a:p>
-            <a:pPr indent="0" marL="0">
-              <a:buNone/>
-            </a:pPr>
-            <a:r>
-              <a:rPr lang="en-US" sz="900" b="1" dirty="0">
-                <a:solidFill>
-                  <a:srgbClr val="0F172A"/>
-                </a:solidFill>
-              </a:rPr>
-              <a:t>• Telegram Xavfsizlik Boti: </a:t>
-            </a:r>
-            <a:pPr indent="0" marL="0">
-              <a:buNone/>
-            </a:pPr>
-            <a:r>
-              <a:rPr lang="en-US" sz="900" dirty="0">
+            <a:off x="4983480" y="2542032"/>
+            <a:ext cx="3474720" cy="347472"/>
+          </a:xfrm>
+          <a:prstGeom prst="rect">
+            <a:avLst/>
+          </a:prstGeom>
+          <a:noFill/>
+          <a:ln/>
+        </p:spPr>
+        <p:txBody>
+          <a:bodyPr wrap="square" rtlCol="0" anchor="ctr"/>
+          <a:lstStyle/>
+          <a:p>
+            <a:pPr indent="0" marL="0">
+              <a:buNone/>
+            </a:pPr>
+            <a:r>
+              <a:rPr lang="en-US" sz="950" dirty="0">
                 <a:solidFill>
                   <a:srgbClr val="475569"/>
                 </a:solidFill>
               </a:rPr>
-              <a:t>Shubhali faylni botga yuborib 2 soniyada natija olish.
-</a:t>
-            </a:r>
-            <a:pPr indent="0" marL="0">
-              <a:buNone/>
-            </a:pPr>
-            <a:r>
-              <a:rPr lang="en-US" sz="900" b="1" dirty="0">
-                <a:solidFill>
-                  <a:srgbClr val="0F172A"/>
-                </a:solidFill>
-              </a:rPr>
-              <a:t>• B2B Korporativ Audit: </a:t>
-            </a:r>
-            <a:pPr indent="0" marL="0">
-              <a:buNone/>
-            </a:pPr>
-            <a:r>
-              <a:rPr lang="en-US" sz="900" dirty="0">
+              <a:t>Faqat ma'ruza emas — smartfon va fayllarni amalda tekshirish qurollari bor.</a:t>
+            </a:r>
+            <a:endParaRPr lang="en-US" sz="950" dirty="0"/>
+          </a:p>
+        </p:txBody>
+      </p:sp>
+      <p:sp>
+        <p:nvSpPr>
+          <p:cNvPr id="15" name="Shape 12"/>
+          <p:cNvSpPr/>
+          <p:nvPr/>
+        </p:nvSpPr>
+        <p:spPr>
+          <a:xfrm>
+            <a:off x="4846320" y="3063240"/>
+            <a:ext cx="3749040" cy="749808"/>
+          </a:xfrm>
+          <a:prstGeom prst="roundRect">
+            <a:avLst/>
+          </a:prstGeom>
+          <a:solidFill>
+            <a:srgbClr val="FFFFFF"/>
+          </a:solidFill>
+          <a:ln w="19050">
+            <a:solidFill>
+              <a:srgbClr val="6EE7B7"/>
+            </a:solidFill>
+            <a:prstDash val="solid"/>
+          </a:ln>
+        </p:spPr>
+      </p:sp>
+      <p:sp>
+        <p:nvSpPr>
+          <p:cNvPr id="16" name="Text 13"/>
+          <p:cNvSpPr/>
+          <p:nvPr/>
+        </p:nvSpPr>
+        <p:spPr>
+          <a:xfrm>
+            <a:off x="4983480" y="3136392"/>
+            <a:ext cx="3474720" cy="274320"/>
+          </a:xfrm>
+          <a:prstGeom prst="rect">
+            <a:avLst/>
+          </a:prstGeom>
+          <a:noFill/>
+          <a:ln/>
+        </p:spPr>
+        <p:txBody>
+          <a:bodyPr wrap="square" rtlCol="0" anchor="ctr"/>
+          <a:lstStyle/>
+          <a:p>
+            <a:pPr indent="0" marL="0">
+              <a:buNone/>
+            </a:pPr>
+            <a:r>
+              <a:rPr lang="en-US" sz="1100" b="1" dirty="0">
+                <a:solidFill>
+                  <a:srgbClr val="059669"/>
+                </a:solidFill>
+              </a:rPr>
+              <a:t>3. Gamifikatsiya va Musobaqa</a:t>
+            </a:r>
+            <a:endParaRPr lang="en-US" sz="1100" dirty="0"/>
+          </a:p>
+        </p:txBody>
+      </p:sp>
+      <p:sp>
+        <p:nvSpPr>
+          <p:cNvPr id="17" name="Text 14"/>
+          <p:cNvSpPr/>
+          <p:nvPr/>
+        </p:nvSpPr>
+        <p:spPr>
+          <a:xfrm>
+            <a:off x="4983480" y="3410712"/>
+            <a:ext cx="3474720" cy="347472"/>
+          </a:xfrm>
+          <a:prstGeom prst="rect">
+            <a:avLst/>
+          </a:prstGeom>
+          <a:noFill/>
+          <a:ln/>
+        </p:spPr>
+        <p:txBody>
+          <a:bodyPr wrap="square" rtlCol="0" anchor="ctr"/>
+          <a:lstStyle/>
+          <a:p>
+            <a:pPr indent="0" marL="0">
+              <a:buNone/>
+            </a:pPr>
+            <a:r>
+              <a:rPr lang="en-US" sz="950" dirty="0">
                 <a:solidFill>
                   <a:srgbClr val="475569"/>
                 </a:solidFill>
               </a:rPr>
-              <a:t>Banklar va korxonalar uchun fishing simulyatsiyasi.
-</a:t>
-            </a:r>
-            <a:pPr indent="0" marL="0">
-              <a:buNone/>
-            </a:pPr>
-            <a:r>
-              <a:rPr lang="en-US" sz="900" b="1" dirty="0">
-                <a:solidFill>
-                  <a:srgbClr val="0F172A"/>
-                </a:solidFill>
-              </a:rPr>
-              <a:t>• Respublika CTF Musobaqasi: </a:t>
-            </a:r>
-            <a:pPr indent="0" marL="0">
-              <a:buNone/>
-            </a:pPr>
-            <a:r>
-              <a:rPr lang="en-US" sz="900" dirty="0">
+              <a:t>Topshiriqlarni bajarish orqali ballar to‘plab umumiy reytingda ko‘tarilish.</a:t>
+            </a:r>
+            <a:endParaRPr lang="en-US" sz="950" dirty="0"/>
+          </a:p>
+        </p:txBody>
+      </p:sp>
+      <p:sp>
+        <p:nvSpPr>
+          <p:cNvPr id="18" name="Shape 15"/>
+          <p:cNvSpPr/>
+          <p:nvPr/>
+        </p:nvSpPr>
+        <p:spPr>
+          <a:xfrm>
+            <a:off x="4846320" y="3931920"/>
+            <a:ext cx="3749040" cy="749808"/>
+          </a:xfrm>
+          <a:prstGeom prst="roundRect">
+            <a:avLst/>
+          </a:prstGeom>
+          <a:solidFill>
+            <a:srgbClr val="FFFFFF"/>
+          </a:solidFill>
+          <a:ln w="19050">
+            <a:solidFill>
+              <a:srgbClr val="6EE7B7"/>
+            </a:solidFill>
+            <a:prstDash val="solid"/>
+          </a:ln>
+        </p:spPr>
+      </p:sp>
+      <p:sp>
+        <p:nvSpPr>
+          <p:cNvPr id="19" name="Text 16"/>
+          <p:cNvSpPr/>
+          <p:nvPr/>
+        </p:nvSpPr>
+        <p:spPr>
+          <a:xfrm>
+            <a:off x="4983480" y="4005072"/>
+            <a:ext cx="3474720" cy="274320"/>
+          </a:xfrm>
+          <a:prstGeom prst="rect">
+            <a:avLst/>
+          </a:prstGeom>
+          <a:noFill/>
+          <a:ln/>
+        </p:spPr>
+        <p:txBody>
+          <a:bodyPr wrap="square" rtlCol="0" anchor="ctr"/>
+          <a:lstStyle/>
+          <a:p>
+            <a:pPr indent="0" marL="0">
+              <a:buNone/>
+            </a:pPr>
+            <a:r>
+              <a:rPr lang="en-US" sz="1100" b="1" dirty="0">
+                <a:solidFill>
+                  <a:srgbClr val="059669"/>
+                </a:solidFill>
+              </a:rPr>
+              <a:t>4. CyberGuard AI Maslahatchi</a:t>
+            </a:r>
+            <a:endParaRPr lang="en-US" sz="1100" dirty="0"/>
+          </a:p>
+        </p:txBody>
+      </p:sp>
+      <p:sp>
+        <p:nvSpPr>
+          <p:cNvPr id="20" name="Text 17"/>
+          <p:cNvSpPr/>
+          <p:nvPr/>
+        </p:nvSpPr>
+        <p:spPr>
+          <a:xfrm>
+            <a:off x="4983480" y="4279392"/>
+            <a:ext cx="3474720" cy="347472"/>
+          </a:xfrm>
+          <a:prstGeom prst="rect">
+            <a:avLst/>
+          </a:prstGeom>
+          <a:noFill/>
+          <a:ln/>
+        </p:spPr>
+        <p:txBody>
+          <a:bodyPr wrap="square" rtlCol="0" anchor="ctr"/>
+          <a:lstStyle/>
+          <a:p>
+            <a:pPr indent="0" marL="0">
+              <a:buNone/>
+            </a:pPr>
+            <a:r>
+              <a:rPr lang="en-US" sz="950" dirty="0">
                 <a:solidFill>
                   <a:srgbClr val="475569"/>
                 </a:solidFill>
               </a:rPr>
-              <a:t>Yoshlar o‘rtasida kiber-olimpiada o‘tkazish.</a:t>
-            </a:r>
-            <a:endParaRPr lang="en-US" sz="900" dirty="0"/>
+              <a:t>Har qanday kiber-savolga o‘zbek tilida 24/7 tezkor va tushunarli javob.</a:t>
+            </a:r>
+            <a:endParaRPr lang="en-US" sz="950" dirty="0"/>
           </a:p>
         </p:txBody>
       </p:sp>
@@ -2852,7 +3021,7 @@
                   <a:srgbClr val="059669"/>
                 </a:solidFill>
               </a:rPr>
-              <a:t>SLAYD 11 / 12</a:t>
+              <a:t>SLAYD 11 / 13</a:t>
             </a:r>
             <a:endParaRPr lang="en-US" sz="950" dirty="0"/>
           </a:p>
@@ -2888,7 +3057,7 @@
                   <a:srgbClr val="0F172A"/>
                 </a:solidFill>
               </a:rPr>
-              <a:t>Xulosa: Loyiha natijasi va jamiyatga foydasi</a:t>
+              <a:t>Kamchiliklar va Rivojlantirish Rejalari</a:t>
             </a:r>
             <a:endParaRPr lang="en-US" sz="2000" dirty="0"/>
           </a:p>
@@ -2924,7 +3093,7 @@
                   <a:srgbClr val="475569"/>
                 </a:solidFill>
               </a:rPr>
-              <a:t>Kiberxavfsizlik — faqat texnologiya emas, balki to‘g‘ri odatlar va amaliy bilimdir</a:t>
+              <a:t>Haqiqiy holatni ochiq baholash va kelajakdagi takomillashtirish bosqichlari</a:t>
             </a:r>
             <a:endParaRPr lang="en-US" sz="1100" dirty="0"/>
           </a:p>
@@ -2957,7 +3126,7 @@
       </p:sp>
       <p:pic>
         <p:nvPicPr>
-          <p:cNvPr id="7" name="Image 0" descr="C:\Users\User\Desktop\kiber xavfsizlik boyicha sayt\public\screenshots\10_login.png">    </p:cNvPr>
+          <p:cNvPr id="7" name="Image 0" descr="C:\Users\User\Desktop\kiber xavfsizlik boyicha sayt\public\screenshots\12_casestudy.png">    </p:cNvPr>
           <p:cNvPicPr>
             <a:picLocks noChangeAspect="1"/>
           </p:cNvPicPr>
@@ -3009,7 +3178,7 @@
                   <a:srgbClr val="BAE6FD"/>
                 </a:solidFill>
               </a:rPr>
-              <a:t>📸 Ro‘yxatdan o‘tish va shaxsiy kabinet interfeysi</a:t>
+              <a:t>📸 "Hodisalar Tahlili" (Case Study) — real kiber-hujumlar tahlili</a:t>
             </a:r>
             <a:endParaRPr lang="en-US" sz="900" dirty="0"/>
           </a:p>
@@ -3024,7 +3193,161 @@
         <p:spPr>
           <a:xfrm>
             <a:off x="4846320" y="1325880"/>
-            <a:ext cx="3749040" cy="1005840"/>
+            <a:ext cx="3749040" cy="1645920"/>
+          </a:xfrm>
+          <a:prstGeom prst="roundRect">
+            <a:avLst/>
+          </a:prstGeom>
+          <a:solidFill>
+            <a:srgbClr val="FFFFFF"/>
+          </a:solidFill>
+          <a:ln w="19050">
+            <a:solidFill>
+              <a:srgbClr val="FCD34D"/>
+            </a:solidFill>
+            <a:prstDash val="solid"/>
+          </a:ln>
+        </p:spPr>
+      </p:sp>
+      <p:sp>
+        <p:nvSpPr>
+          <p:cNvPr id="10" name="Text 7"/>
+          <p:cNvSpPr/>
+          <p:nvPr/>
+        </p:nvSpPr>
+        <p:spPr>
+          <a:xfrm>
+            <a:off x="4983480" y="1417320"/>
+            <a:ext cx="3474720" cy="274320"/>
+          </a:xfrm>
+          <a:prstGeom prst="rect">
+            <a:avLst/>
+          </a:prstGeom>
+          <a:noFill/>
+          <a:ln/>
+        </p:spPr>
+        <p:txBody>
+          <a:bodyPr wrap="square" rtlCol="0" anchor="ctr"/>
+          <a:lstStyle/>
+          <a:p>
+            <a:pPr indent="0" marL="0">
+              <a:buNone/>
+            </a:pPr>
+            <a:r>
+              <a:rPr lang="en-US" sz="1100" b="1" dirty="0">
+                <a:solidFill>
+                  <a:srgbClr val="B45309"/>
+                </a:solidFill>
+              </a:rPr>
+              <a:t>⚠️ Aniqlangan Kamchiliklar (MVP):</a:t>
+            </a:r>
+            <a:endParaRPr lang="en-US" sz="1100" dirty="0"/>
+          </a:p>
+        </p:txBody>
+      </p:sp>
+      <p:sp>
+        <p:nvSpPr>
+          <p:cNvPr id="11" name="Text 8"/>
+          <p:cNvSpPr/>
+          <p:nvPr/>
+        </p:nvSpPr>
+        <p:spPr>
+          <a:xfrm>
+            <a:off x="4983480" y="1737360"/>
+            <a:ext cx="3474720" cy="1143000"/>
+          </a:xfrm>
+          <a:prstGeom prst="rect">
+            <a:avLst/>
+          </a:prstGeom>
+          <a:noFill/>
+          <a:ln/>
+        </p:spPr>
+        <p:txBody>
+          <a:bodyPr wrap="square" rtlCol="0" anchor="ctr"/>
+          <a:lstStyle/>
+          <a:p>
+            <a:pPr indent="0" marL="0">
+              <a:buNone/>
+            </a:pPr>
+            <a:r>
+              <a:rPr lang="en-US" sz="900" b="1" dirty="0">
+                <a:solidFill>
+                  <a:srgbClr val="0F172A"/>
+                </a:solidFill>
+              </a:rPr>
+              <a:t>• Dinamik Server Sandboxing: </a:t>
+            </a:r>
+            <a:pPr indent="0" marL="0">
+              <a:buNone/>
+            </a:pPr>
+            <a:r>
+              <a:rPr lang="en-US" sz="900" dirty="0">
+                <a:solidFill>
+                  <a:srgbClr val="475569"/>
+                </a:solidFill>
+              </a:rPr>
+              <a:t>Hozircha veb-simulyatsiya; to‘liq Docker muhiti zarur.
+</a:t>
+            </a:r>
+            <a:pPr indent="0" marL="0">
+              <a:buNone/>
+            </a:pPr>
+            <a:r>
+              <a:rPr lang="en-US" sz="900" b="1" dirty="0">
+                <a:solidFill>
+                  <a:srgbClr val="0F172A"/>
+                </a:solidFill>
+              </a:rPr>
+              <a:t>• Mahalliy ilova yo‘qligi: </a:t>
+            </a:r>
+            <a:pPr indent="0" marL="0">
+              <a:buNone/>
+            </a:pPr>
+            <a:r>
+              <a:rPr lang="en-US" sz="900" dirty="0">
+                <a:solidFill>
+                  <a:srgbClr val="475569"/>
+                </a:solidFill>
+              </a:rPr>
+              <a:t>Android/iOS ilovasi ishlab chiqilmoqda.
+</a:t>
+            </a:r>
+            <a:pPr indent="0" marL="0">
+              <a:buNone/>
+            </a:pPr>
+            <a:r>
+              <a:rPr lang="en-US" sz="900" b="1" dirty="0">
+                <a:solidFill>
+                  <a:srgbClr val="0F172A"/>
+                </a:solidFill>
+              </a:rPr>
+              <a:t>• Telegram bot: </a:t>
+            </a:r>
+            <a:pPr indent="0" marL="0">
+              <a:buNone/>
+            </a:pPr>
+            <a:r>
+              <a:rPr lang="en-US" sz="900" dirty="0">
+                <a:solidFill>
+                  <a:srgbClr val="475569"/>
+                </a:solidFill>
+              </a:rPr>
+              <a:t>Avtomatik APK tekshiruvchi bot ulanmoqda.</a:t>
+            </a:r>
+            <a:endParaRPr lang="en-US" sz="900" dirty="0"/>
+          </a:p>
+        </p:txBody>
+      </p:sp>
+      <p:sp>
+        <p:nvSpPr>
+          <p:cNvPr id="12" name="Shape 9"/>
+          <p:cNvSpPr/>
+          <p:nvPr/>
+        </p:nvSpPr>
+        <p:spPr>
+          <a:xfrm>
+            <a:off x="4846320" y="3154680"/>
+            <a:ext cx="3749040" cy="1645920"/>
           </a:xfrm>
           <a:prstGeom prst="roundRect">
             <a:avLst/>
@@ -3042,267 +3365,130 @@
       </p:sp>
       <p:sp>
         <p:nvSpPr>
-          <p:cNvPr id="10" name="Text 7"/>
-          <p:cNvSpPr/>
-          <p:nvPr/>
-        </p:nvSpPr>
-        <p:spPr>
-          <a:xfrm>
-            <a:off x="5029200" y="1417320"/>
-            <a:ext cx="1280160" cy="731520"/>
-          </a:xfrm>
-          <a:prstGeom prst="rect">
-            <a:avLst/>
-          </a:prstGeom>
-          <a:noFill/>
-          <a:ln/>
-        </p:spPr>
-        <p:txBody>
-          <a:bodyPr wrap="square" rtlCol="0" anchor="ctr"/>
-          <a:lstStyle/>
-          <a:p>
-            <a:pPr algn="ctr" indent="0" marL="0">
-              <a:buNone/>
-            </a:pPr>
-            <a:r>
-              <a:rPr lang="en-US" sz="2600" b="1" dirty="0">
+          <p:cNvPr id="13" name="Text 10"/>
+          <p:cNvSpPr/>
+          <p:nvPr/>
+        </p:nvSpPr>
+        <p:spPr>
+          <a:xfrm>
+            <a:off x="4983480" y="3246120"/>
+            <a:ext cx="3474720" cy="274320"/>
+          </a:xfrm>
+          <a:prstGeom prst="rect">
+            <a:avLst/>
+          </a:prstGeom>
+          <a:noFill/>
+          <a:ln/>
+        </p:spPr>
+        <p:txBody>
+          <a:bodyPr wrap="square" rtlCol="0" anchor="ctr"/>
+          <a:lstStyle/>
+          <a:p>
+            <a:pPr indent="0" marL="0">
+              <a:buNone/>
+            </a:pPr>
+            <a:r>
+              <a:rPr lang="en-US" sz="1100" b="1" dirty="0">
                 <a:solidFill>
                   <a:srgbClr val="059669"/>
                 </a:solidFill>
               </a:rPr>
-              <a:t>32M+</a:t>
-            </a:r>
-            <a:endParaRPr lang="en-US" sz="2600" dirty="0"/>
-          </a:p>
-        </p:txBody>
-      </p:sp>
-      <p:sp>
-        <p:nvSpPr>
-          <p:cNvPr id="11" name="Text 8"/>
-          <p:cNvSpPr/>
-          <p:nvPr/>
-        </p:nvSpPr>
-        <p:spPr>
-          <a:xfrm>
-            <a:off x="6400800" y="1463040"/>
-            <a:ext cx="2057400" cy="731520"/>
-          </a:xfrm>
-          <a:prstGeom prst="rect">
-            <a:avLst/>
-          </a:prstGeom>
-          <a:noFill/>
-          <a:ln/>
-        </p:spPr>
-        <p:txBody>
-          <a:bodyPr wrap="square" rtlCol="0" anchor="ctr"/>
-          <a:lstStyle/>
-          <a:p>
-            <a:pPr indent="0" marL="0">
-              <a:buNone/>
-            </a:pPr>
-            <a:r>
-              <a:rPr lang="en-US" sz="1000" dirty="0">
+              <a:t>🚀 Kelajakdagi Rivojlantirish:</a:t>
+            </a:r>
+            <a:endParaRPr lang="en-US" sz="1100" dirty="0"/>
+          </a:p>
+        </p:txBody>
+      </p:sp>
+      <p:sp>
+        <p:nvSpPr>
+          <p:cNvPr id="14" name="Text 11"/>
+          <p:cNvSpPr/>
+          <p:nvPr/>
+        </p:nvSpPr>
+        <p:spPr>
+          <a:xfrm>
+            <a:off x="4983480" y="3566160"/>
+            <a:ext cx="3474720" cy="1143000"/>
+          </a:xfrm>
+          <a:prstGeom prst="rect">
+            <a:avLst/>
+          </a:prstGeom>
+          <a:noFill/>
+          <a:ln/>
+        </p:spPr>
+        <p:txBody>
+          <a:bodyPr wrap="square" rtlCol="0" anchor="ctr"/>
+          <a:lstStyle/>
+          <a:p>
+            <a:pPr indent="0" marL="0">
+              <a:buNone/>
+            </a:pPr>
+            <a:r>
+              <a:rPr lang="en-US" sz="900" b="1" dirty="0">
                 <a:solidFill>
                   <a:srgbClr val="0F172A"/>
                 </a:solidFill>
               </a:rPr>
-              <a:t>Aholi kiber-xavflardan himoyalanish madaniyatiga ega bo‘ladi.</a:t>
-            </a:r>
-            <a:endParaRPr lang="en-US" sz="1000" dirty="0"/>
-          </a:p>
-        </p:txBody>
-      </p:sp>
-      <p:sp>
-        <p:nvSpPr>
-          <p:cNvPr id="12" name="Shape 9"/>
-          <p:cNvSpPr/>
-          <p:nvPr/>
-        </p:nvSpPr>
-        <p:spPr>
-          <a:xfrm>
-            <a:off x="4846320" y="2468880"/>
-            <a:ext cx="3749040" cy="1005840"/>
-          </a:xfrm>
-          <a:prstGeom prst="roundRect">
-            <a:avLst/>
-          </a:prstGeom>
-          <a:solidFill>
-            <a:srgbClr val="FFFFFF"/>
-          </a:solidFill>
-          <a:ln w="19050">
-            <a:solidFill>
-              <a:srgbClr val="6EE7B7"/>
-            </a:solidFill>
-            <a:prstDash val="solid"/>
-          </a:ln>
-        </p:spPr>
-      </p:sp>
-      <p:sp>
-        <p:nvSpPr>
-          <p:cNvPr id="13" name="Text 10"/>
-          <p:cNvSpPr/>
-          <p:nvPr/>
-        </p:nvSpPr>
-        <p:spPr>
-          <a:xfrm>
-            <a:off x="5029200" y="2560320"/>
-            <a:ext cx="1280160" cy="731520"/>
-          </a:xfrm>
-          <a:prstGeom prst="rect">
-            <a:avLst/>
-          </a:prstGeom>
-          <a:noFill/>
-          <a:ln/>
-        </p:spPr>
-        <p:txBody>
-          <a:bodyPr wrap="square" rtlCol="0" anchor="ctr"/>
-          <a:lstStyle/>
-          <a:p>
-            <a:pPr algn="ctr" indent="0" marL="0">
-              <a:buNone/>
-            </a:pPr>
-            <a:r>
-              <a:rPr lang="en-US" sz="2600" b="1" dirty="0">
-                <a:solidFill>
-                  <a:srgbClr val="059669"/>
-                </a:solidFill>
-              </a:rPr>
-              <a:t>1-Click</a:t>
-            </a:r>
-            <a:endParaRPr lang="en-US" sz="2600" dirty="0"/>
-          </a:p>
-        </p:txBody>
-      </p:sp>
-      <p:sp>
-        <p:nvSpPr>
-          <p:cNvPr id="14" name="Text 11"/>
-          <p:cNvSpPr/>
-          <p:nvPr/>
-        </p:nvSpPr>
-        <p:spPr>
-          <a:xfrm>
-            <a:off x="6400800" y="2606040"/>
-            <a:ext cx="2057400" cy="731520"/>
-          </a:xfrm>
-          <a:prstGeom prst="rect">
-            <a:avLst/>
-          </a:prstGeom>
-          <a:noFill/>
-          <a:ln/>
-        </p:spPr>
-        <p:txBody>
-          <a:bodyPr wrap="square" rtlCol="0" anchor="ctr"/>
-          <a:lstStyle/>
-          <a:p>
-            <a:pPr indent="0" marL="0">
-              <a:buNone/>
-            </a:pPr>
-            <a:r>
-              <a:rPr lang="en-US" sz="1000" dirty="0">
+              <a:t>• Telegram Xavfsizlik Boti: </a:t>
+            </a:r>
+            <a:pPr indent="0" marL="0">
+              <a:buNone/>
+            </a:pPr>
+            <a:r>
+              <a:rPr lang="en-US" sz="900" dirty="0">
+                <a:solidFill>
+                  <a:srgbClr val="475569"/>
+                </a:solidFill>
+              </a:rPr>
+              <a:t>Shubhali faylni botga yuborib 2 soniyada natija olish.
+</a:t>
+            </a:r>
+            <a:pPr indent="0" marL="0">
+              <a:buNone/>
+            </a:pPr>
+            <a:r>
+              <a:rPr lang="en-US" sz="900" b="1" dirty="0">
                 <a:solidFill>
                   <a:srgbClr val="0F172A"/>
                 </a:solidFill>
               </a:rPr>
-              <a:t>Smartfon va APK xavfsizligini tekshirish uchun oson milliy yechim.</a:t>
-            </a:r>
-            <a:endParaRPr lang="en-US" sz="1000" dirty="0"/>
-          </a:p>
-        </p:txBody>
-      </p:sp>
-      <p:sp>
-        <p:nvSpPr>
-          <p:cNvPr id="15" name="Shape 12"/>
-          <p:cNvSpPr/>
-          <p:nvPr/>
-        </p:nvSpPr>
-        <p:spPr>
-          <a:xfrm>
-            <a:off x="4846320" y="3611880"/>
-            <a:ext cx="3749040" cy="1005840"/>
-          </a:xfrm>
-          <a:prstGeom prst="roundRect">
-            <a:avLst/>
-          </a:prstGeom>
-          <a:solidFill>
-            <a:srgbClr val="FFFFFF"/>
-          </a:solidFill>
-          <a:ln w="19050">
-            <a:solidFill>
-              <a:srgbClr val="6EE7B7"/>
-            </a:solidFill>
-            <a:prstDash val="solid"/>
-          </a:ln>
-        </p:spPr>
-      </p:sp>
-      <p:sp>
-        <p:nvSpPr>
-          <p:cNvPr id="16" name="Text 13"/>
-          <p:cNvSpPr/>
-          <p:nvPr/>
-        </p:nvSpPr>
-        <p:spPr>
-          <a:xfrm>
-            <a:off x="5029200" y="3703320"/>
-            <a:ext cx="1280160" cy="731520"/>
-          </a:xfrm>
-          <a:prstGeom prst="rect">
-            <a:avLst/>
-          </a:prstGeom>
-          <a:noFill/>
-          <a:ln/>
-        </p:spPr>
-        <p:txBody>
-          <a:bodyPr wrap="square" rtlCol="0" anchor="ctr"/>
-          <a:lstStyle/>
-          <a:p>
-            <a:pPr algn="ctr" indent="0" marL="0">
-              <a:buNone/>
-            </a:pPr>
-            <a:r>
-              <a:rPr lang="en-US" sz="2600" b="1" dirty="0">
-                <a:solidFill>
-                  <a:srgbClr val="059669"/>
-                </a:solidFill>
-              </a:rPr>
-              <a:t>100%</a:t>
-            </a:r>
-            <a:endParaRPr lang="en-US" sz="2600" dirty="0"/>
-          </a:p>
-        </p:txBody>
-      </p:sp>
-      <p:sp>
-        <p:nvSpPr>
-          <p:cNvPr id="17" name="Text 14"/>
-          <p:cNvSpPr/>
-          <p:nvPr/>
-        </p:nvSpPr>
-        <p:spPr>
-          <a:xfrm>
-            <a:off x="6400800" y="3749040"/>
-            <a:ext cx="2057400" cy="731520"/>
-          </a:xfrm>
-          <a:prstGeom prst="rect">
-            <a:avLst/>
-          </a:prstGeom>
-          <a:noFill/>
-          <a:ln/>
-        </p:spPr>
-        <p:txBody>
-          <a:bodyPr wrap="square" rtlCol="0" anchor="ctr"/>
-          <a:lstStyle/>
-          <a:p>
-            <a:pPr indent="0" marL="0">
-              <a:buNone/>
-            </a:pPr>
-            <a:r>
-              <a:rPr lang="en-US" sz="1000" dirty="0">
+              <a:t>• B2B Korporativ Audit: </a:t>
+            </a:r>
+            <a:pPr indent="0" marL="0">
+              <a:buNone/>
+            </a:pPr>
+            <a:r>
+              <a:rPr lang="en-US" sz="900" dirty="0">
+                <a:solidFill>
+                  <a:srgbClr val="475569"/>
+                </a:solidFill>
+              </a:rPr>
+              <a:t>Banklar va korxonalar uchun fishing simulyatsiyasi.
+</a:t>
+            </a:r>
+            <a:pPr indent="0" marL="0">
+              <a:buNone/>
+            </a:pPr>
+            <a:r>
+              <a:rPr lang="en-US" sz="900" b="1" dirty="0">
                 <a:solidFill>
                   <a:srgbClr val="0F172A"/>
                 </a:solidFill>
               </a:rPr>
-              <a:t>Ona tilimizda yangi avlod kiber-mutaxassislari tayyorlanadi.</a:t>
-            </a:r>
-            <a:endParaRPr lang="en-US" sz="1000" dirty="0"/>
+              <a:t>• Respublika CTF Musobaqasi: </a:t>
+            </a:r>
+            <a:pPr indent="0" marL="0">
+              <a:buNone/>
+            </a:pPr>
+            <a:r>
+              <a:rPr lang="en-US" sz="900" dirty="0">
+                <a:solidFill>
+                  <a:srgbClr val="475569"/>
+                </a:solidFill>
+              </a:rPr>
+              <a:t>Yoshlar o‘rtasida kiber-olimpiada o‘tkazish.</a:t>
+            </a:r>
+            <a:endParaRPr lang="en-US" sz="900" dirty="0"/>
           </a:p>
         </p:txBody>
       </p:sp>
@@ -3317,6 +3503,547 @@
 <file path=ppt/slides/slide12.xml><?xml version="1.0" encoding="utf-8"?>
 <p:sld xmlns:a="http://schemas.openxmlformats.org/drawingml/2006/main" xmlns:r="http://schemas.openxmlformats.org/officeDocument/2006/relationships" xmlns:p="http://schemas.openxmlformats.org/presentationml/2006/main">
   <p:cSld name="Slide 12">
+    <p:bg>
+      <p:bgPr>
+        <a:solidFill>
+          <a:srgbClr val="F4F6F9"/>
+        </a:solidFill>
+      </p:bgPr>
+    </p:bg>
+    <p:spTree>
+      <p:nvGrpSpPr>
+        <p:cNvPr id="1" name=""/>
+        <p:cNvGrpSpPr/>
+        <p:nvPr/>
+      </p:nvGrpSpPr>
+      <p:grpSpPr>
+        <a:xfrm>
+          <a:off x="0" y="0"/>
+          <a:ext cx="0" cy="0"/>
+          <a:chOff x="0" y="0"/>
+          <a:chExt cx="0" cy="0"/>
+        </a:xfrm>
+      </p:grpSpPr>
+      <p:sp>
+        <p:nvSpPr>
+          <p:cNvPr id="2" name="Shape 0"/>
+          <p:cNvSpPr/>
+          <p:nvPr/>
+        </p:nvSpPr>
+        <p:spPr>
+          <a:xfrm>
+            <a:off x="548640" y="228600"/>
+            <a:ext cx="2011680" cy="274320"/>
+          </a:xfrm>
+          <a:prstGeom prst="roundRect">
+            <a:avLst/>
+          </a:prstGeom>
+          <a:solidFill>
+            <a:srgbClr val="ECFDF5"/>
+          </a:solidFill>
+          <a:ln w="12700">
+            <a:solidFill>
+              <a:srgbClr val="10B981"/>
+            </a:solidFill>
+            <a:prstDash val="solid"/>
+          </a:ln>
+        </p:spPr>
+      </p:sp>
+      <p:sp>
+        <p:nvSpPr>
+          <p:cNvPr id="3" name="Text 1"/>
+          <p:cNvSpPr/>
+          <p:nvPr/>
+        </p:nvSpPr>
+        <p:spPr>
+          <a:xfrm>
+            <a:off x="548640" y="228600"/>
+            <a:ext cx="2011680" cy="274320"/>
+          </a:xfrm>
+          <a:prstGeom prst="rect">
+            <a:avLst/>
+          </a:prstGeom>
+          <a:noFill/>
+          <a:ln/>
+        </p:spPr>
+        <p:txBody>
+          <a:bodyPr wrap="square" rtlCol="0" anchor="ctr"/>
+          <a:lstStyle/>
+          <a:p>
+            <a:pPr algn="ctr" indent="0" marL="0">
+              <a:buNone/>
+            </a:pPr>
+            <a:r>
+              <a:rPr lang="en-US" sz="950" b="1" dirty="0">
+                <a:solidFill>
+                  <a:srgbClr val="059669"/>
+                </a:solidFill>
+              </a:rPr>
+              <a:t>SLAYD 12 / 13</a:t>
+            </a:r>
+            <a:endParaRPr lang="en-US" sz="950" dirty="0"/>
+          </a:p>
+        </p:txBody>
+      </p:sp>
+      <p:sp>
+        <p:nvSpPr>
+          <p:cNvPr id="4" name="Text 2"/>
+          <p:cNvSpPr/>
+          <p:nvPr/>
+        </p:nvSpPr>
+        <p:spPr>
+          <a:xfrm>
+            <a:off x="548640" y="548640"/>
+            <a:ext cx="8046720" cy="411480"/>
+          </a:xfrm>
+          <a:prstGeom prst="rect">
+            <a:avLst/>
+          </a:prstGeom>
+          <a:noFill/>
+          <a:ln/>
+        </p:spPr>
+        <p:txBody>
+          <a:bodyPr wrap="square" rtlCol="0" anchor="ctr"/>
+          <a:lstStyle/>
+          <a:p>
+            <a:pPr indent="0" marL="0">
+              <a:buNone/>
+            </a:pPr>
+            <a:r>
+              <a:rPr lang="en-US" sz="2000" b="1" dirty="0">
+                <a:solidFill>
+                  <a:srgbClr val="0F172A"/>
+                </a:solidFill>
+              </a:rPr>
+              <a:t>Xulosa: Loyiha natijasi va jamiyatga foydasi</a:t>
+            </a:r>
+            <a:endParaRPr lang="en-US" sz="2000" dirty="0"/>
+          </a:p>
+        </p:txBody>
+      </p:sp>
+      <p:sp>
+        <p:nvSpPr>
+          <p:cNvPr id="5" name="Text 3"/>
+          <p:cNvSpPr/>
+          <p:nvPr/>
+        </p:nvSpPr>
+        <p:spPr>
+          <a:xfrm>
+            <a:off x="548640" y="960120"/>
+            <a:ext cx="8046720" cy="274320"/>
+          </a:xfrm>
+          <a:prstGeom prst="rect">
+            <a:avLst/>
+          </a:prstGeom>
+          <a:noFill/>
+          <a:ln/>
+        </p:spPr>
+        <p:txBody>
+          <a:bodyPr wrap="square" rtlCol="0" anchor="ctr"/>
+          <a:lstStyle/>
+          <a:p>
+            <a:pPr indent="0" marL="0">
+              <a:buNone/>
+            </a:pPr>
+            <a:r>
+              <a:rPr lang="en-US" sz="1100" dirty="0">
+                <a:solidFill>
+                  <a:srgbClr val="475569"/>
+                </a:solidFill>
+              </a:rPr>
+              <a:t>Kiberxavfsizlik — faqat texnologiya emas, balki to‘g‘ri odatlar va amaliy bilimdir</a:t>
+            </a:r>
+            <a:endParaRPr lang="en-US" sz="1100" dirty="0"/>
+          </a:p>
+        </p:txBody>
+      </p:sp>
+      <p:sp>
+        <p:nvSpPr>
+          <p:cNvPr id="6" name="Shape 4"/>
+          <p:cNvSpPr/>
+          <p:nvPr/>
+        </p:nvSpPr>
+        <p:spPr>
+          <a:xfrm>
+            <a:off x="512064" y="1289304"/>
+            <a:ext cx="4096512" cy="3822192"/>
+          </a:xfrm>
+          <a:prstGeom prst="roundRect">
+            <a:avLst/>
+          </a:prstGeom>
+          <a:solidFill>
+            <a:srgbClr val="0D1A26"/>
+          </a:solidFill>
+          <a:ln w="19050">
+            <a:solidFill>
+              <a:srgbClr val="059669"/>
+            </a:solidFill>
+            <a:prstDash val="solid"/>
+          </a:ln>
+        </p:spPr>
+      </p:sp>
+      <p:pic>
+        <p:nvPicPr>
+          <p:cNvPr id="7" name="Image 0" descr="C:\Users\User\Desktop\kiber xavfsizlik boyicha sayt\public\screenshots\10_login.png">    </p:cNvPr>
+          <p:cNvPicPr>
+            <a:picLocks noChangeAspect="1"/>
+          </p:cNvPicPr>
+          <p:nvPr/>
+        </p:nvPicPr>
+        <p:blipFill>
+          <a:blip r:embed="rId1"/>
+          <a:stretch>
+            <a:fillRect/>
+          </a:stretch>
+        </p:blipFill>
+        <p:spPr>
+          <a:xfrm>
+            <a:off x="548640" y="1325880"/>
+            <a:ext cx="4023360" cy="3474720"/>
+          </a:xfrm>
+          <a:prstGeom prst="rect">
+            <a:avLst/>
+          </a:prstGeom>
+        </p:spPr>
+      </p:pic>
+      <p:sp>
+        <p:nvSpPr>
+          <p:cNvPr id="8" name="Text 5"/>
+          <p:cNvSpPr/>
+          <p:nvPr/>
+        </p:nvSpPr>
+        <p:spPr>
+          <a:xfrm>
+            <a:off x="548640" y="4837176"/>
+            <a:ext cx="4023360" cy="274320"/>
+          </a:xfrm>
+          <a:prstGeom prst="rect">
+            <a:avLst/>
+          </a:prstGeom>
+          <a:noFill/>
+          <a:ln/>
+        </p:spPr>
+        <p:txBody>
+          <a:bodyPr wrap="square" rtlCol="0" anchor="ctr"/>
+          <a:lstStyle/>
+          <a:p>
+            <a:pPr algn="ctr" indent="0" marL="0">
+              <a:buNone/>
+            </a:pPr>
+            <a:r>
+              <a:rPr lang="en-US" sz="900" dirty="0">
+                <a:solidFill>
+                  <a:srgbClr val="BAE6FD"/>
+                </a:solidFill>
+              </a:rPr>
+              <a:t>📸 Ro‘yxatdan o‘tish va shaxsiy kabinet interfeysi</a:t>
+            </a:r>
+            <a:endParaRPr lang="en-US" sz="900" dirty="0"/>
+          </a:p>
+        </p:txBody>
+      </p:sp>
+      <p:sp>
+        <p:nvSpPr>
+          <p:cNvPr id="9" name="Shape 6"/>
+          <p:cNvSpPr/>
+          <p:nvPr/>
+        </p:nvSpPr>
+        <p:spPr>
+          <a:xfrm>
+            <a:off x="4846320" y="1325880"/>
+            <a:ext cx="3749040" cy="1005840"/>
+          </a:xfrm>
+          <a:prstGeom prst="roundRect">
+            <a:avLst/>
+          </a:prstGeom>
+          <a:solidFill>
+            <a:srgbClr val="FFFFFF"/>
+          </a:solidFill>
+          <a:ln w="19050">
+            <a:solidFill>
+              <a:srgbClr val="6EE7B7"/>
+            </a:solidFill>
+            <a:prstDash val="solid"/>
+          </a:ln>
+        </p:spPr>
+      </p:sp>
+      <p:sp>
+        <p:nvSpPr>
+          <p:cNvPr id="10" name="Text 7"/>
+          <p:cNvSpPr/>
+          <p:nvPr/>
+        </p:nvSpPr>
+        <p:spPr>
+          <a:xfrm>
+            <a:off x="5029200" y="1417320"/>
+            <a:ext cx="1280160" cy="731520"/>
+          </a:xfrm>
+          <a:prstGeom prst="rect">
+            <a:avLst/>
+          </a:prstGeom>
+          <a:noFill/>
+          <a:ln/>
+        </p:spPr>
+        <p:txBody>
+          <a:bodyPr wrap="square" rtlCol="0" anchor="ctr"/>
+          <a:lstStyle/>
+          <a:p>
+            <a:pPr algn="ctr" indent="0" marL="0">
+              <a:buNone/>
+            </a:pPr>
+            <a:r>
+              <a:rPr lang="en-US" sz="2600" b="1" dirty="0">
+                <a:solidFill>
+                  <a:srgbClr val="059669"/>
+                </a:solidFill>
+              </a:rPr>
+              <a:t>32M+</a:t>
+            </a:r>
+            <a:endParaRPr lang="en-US" sz="2600" dirty="0"/>
+          </a:p>
+        </p:txBody>
+      </p:sp>
+      <p:sp>
+        <p:nvSpPr>
+          <p:cNvPr id="11" name="Text 8"/>
+          <p:cNvSpPr/>
+          <p:nvPr/>
+        </p:nvSpPr>
+        <p:spPr>
+          <a:xfrm>
+            <a:off x="6400800" y="1463040"/>
+            <a:ext cx="2057400" cy="731520"/>
+          </a:xfrm>
+          <a:prstGeom prst="rect">
+            <a:avLst/>
+          </a:prstGeom>
+          <a:noFill/>
+          <a:ln/>
+        </p:spPr>
+        <p:txBody>
+          <a:bodyPr wrap="square" rtlCol="0" anchor="ctr"/>
+          <a:lstStyle/>
+          <a:p>
+            <a:pPr indent="0" marL="0">
+              <a:buNone/>
+            </a:pPr>
+            <a:r>
+              <a:rPr lang="en-US" sz="1000" dirty="0">
+                <a:solidFill>
+                  <a:srgbClr val="0F172A"/>
+                </a:solidFill>
+              </a:rPr>
+              <a:t>Aholi kiber-xavflardan himoyalanish madaniyatiga ega bo‘ladi.</a:t>
+            </a:r>
+            <a:endParaRPr lang="en-US" sz="1000" dirty="0"/>
+          </a:p>
+        </p:txBody>
+      </p:sp>
+      <p:sp>
+        <p:nvSpPr>
+          <p:cNvPr id="12" name="Shape 9"/>
+          <p:cNvSpPr/>
+          <p:nvPr/>
+        </p:nvSpPr>
+        <p:spPr>
+          <a:xfrm>
+            <a:off x="4846320" y="2468880"/>
+            <a:ext cx="3749040" cy="1005840"/>
+          </a:xfrm>
+          <a:prstGeom prst="roundRect">
+            <a:avLst/>
+          </a:prstGeom>
+          <a:solidFill>
+            <a:srgbClr val="FFFFFF"/>
+          </a:solidFill>
+          <a:ln w="19050">
+            <a:solidFill>
+              <a:srgbClr val="6EE7B7"/>
+            </a:solidFill>
+            <a:prstDash val="solid"/>
+          </a:ln>
+        </p:spPr>
+      </p:sp>
+      <p:sp>
+        <p:nvSpPr>
+          <p:cNvPr id="13" name="Text 10"/>
+          <p:cNvSpPr/>
+          <p:nvPr/>
+        </p:nvSpPr>
+        <p:spPr>
+          <a:xfrm>
+            <a:off x="5029200" y="2560320"/>
+            <a:ext cx="1280160" cy="731520"/>
+          </a:xfrm>
+          <a:prstGeom prst="rect">
+            <a:avLst/>
+          </a:prstGeom>
+          <a:noFill/>
+          <a:ln/>
+        </p:spPr>
+        <p:txBody>
+          <a:bodyPr wrap="square" rtlCol="0" anchor="ctr"/>
+          <a:lstStyle/>
+          <a:p>
+            <a:pPr algn="ctr" indent="0" marL="0">
+              <a:buNone/>
+            </a:pPr>
+            <a:r>
+              <a:rPr lang="en-US" sz="2600" b="1" dirty="0">
+                <a:solidFill>
+                  <a:srgbClr val="059669"/>
+                </a:solidFill>
+              </a:rPr>
+              <a:t>1-Click</a:t>
+            </a:r>
+            <a:endParaRPr lang="en-US" sz="2600" dirty="0"/>
+          </a:p>
+        </p:txBody>
+      </p:sp>
+      <p:sp>
+        <p:nvSpPr>
+          <p:cNvPr id="14" name="Text 11"/>
+          <p:cNvSpPr/>
+          <p:nvPr/>
+        </p:nvSpPr>
+        <p:spPr>
+          <a:xfrm>
+            <a:off x="6400800" y="2606040"/>
+            <a:ext cx="2057400" cy="731520"/>
+          </a:xfrm>
+          <a:prstGeom prst="rect">
+            <a:avLst/>
+          </a:prstGeom>
+          <a:noFill/>
+          <a:ln/>
+        </p:spPr>
+        <p:txBody>
+          <a:bodyPr wrap="square" rtlCol="0" anchor="ctr"/>
+          <a:lstStyle/>
+          <a:p>
+            <a:pPr indent="0" marL="0">
+              <a:buNone/>
+            </a:pPr>
+            <a:r>
+              <a:rPr lang="en-US" sz="1000" dirty="0">
+                <a:solidFill>
+                  <a:srgbClr val="0F172A"/>
+                </a:solidFill>
+              </a:rPr>
+              <a:t>Smartfon va APK xavfsizligini tekshirish uchun oson milliy yechim.</a:t>
+            </a:r>
+            <a:endParaRPr lang="en-US" sz="1000" dirty="0"/>
+          </a:p>
+        </p:txBody>
+      </p:sp>
+      <p:sp>
+        <p:nvSpPr>
+          <p:cNvPr id="15" name="Shape 12"/>
+          <p:cNvSpPr/>
+          <p:nvPr/>
+        </p:nvSpPr>
+        <p:spPr>
+          <a:xfrm>
+            <a:off x="4846320" y="3611880"/>
+            <a:ext cx="3749040" cy="1005840"/>
+          </a:xfrm>
+          <a:prstGeom prst="roundRect">
+            <a:avLst/>
+          </a:prstGeom>
+          <a:solidFill>
+            <a:srgbClr val="FFFFFF"/>
+          </a:solidFill>
+          <a:ln w="19050">
+            <a:solidFill>
+              <a:srgbClr val="6EE7B7"/>
+            </a:solidFill>
+            <a:prstDash val="solid"/>
+          </a:ln>
+        </p:spPr>
+      </p:sp>
+      <p:sp>
+        <p:nvSpPr>
+          <p:cNvPr id="16" name="Text 13"/>
+          <p:cNvSpPr/>
+          <p:nvPr/>
+        </p:nvSpPr>
+        <p:spPr>
+          <a:xfrm>
+            <a:off x="5029200" y="3703320"/>
+            <a:ext cx="1280160" cy="731520"/>
+          </a:xfrm>
+          <a:prstGeom prst="rect">
+            <a:avLst/>
+          </a:prstGeom>
+          <a:noFill/>
+          <a:ln/>
+        </p:spPr>
+        <p:txBody>
+          <a:bodyPr wrap="square" rtlCol="0" anchor="ctr"/>
+          <a:lstStyle/>
+          <a:p>
+            <a:pPr algn="ctr" indent="0" marL="0">
+              <a:buNone/>
+            </a:pPr>
+            <a:r>
+              <a:rPr lang="en-US" sz="2600" b="1" dirty="0">
+                <a:solidFill>
+                  <a:srgbClr val="059669"/>
+                </a:solidFill>
+              </a:rPr>
+              <a:t>100%</a:t>
+            </a:r>
+            <a:endParaRPr lang="en-US" sz="2600" dirty="0"/>
+          </a:p>
+        </p:txBody>
+      </p:sp>
+      <p:sp>
+        <p:nvSpPr>
+          <p:cNvPr id="17" name="Text 14"/>
+          <p:cNvSpPr/>
+          <p:nvPr/>
+        </p:nvSpPr>
+        <p:spPr>
+          <a:xfrm>
+            <a:off x="6400800" y="3749040"/>
+            <a:ext cx="2057400" cy="731520"/>
+          </a:xfrm>
+          <a:prstGeom prst="rect">
+            <a:avLst/>
+          </a:prstGeom>
+          <a:noFill/>
+          <a:ln/>
+        </p:spPr>
+        <p:txBody>
+          <a:bodyPr wrap="square" rtlCol="0" anchor="ctr"/>
+          <a:lstStyle/>
+          <a:p>
+            <a:pPr indent="0" marL="0">
+              <a:buNone/>
+            </a:pPr>
+            <a:r>
+              <a:rPr lang="en-US" sz="1000" dirty="0">
+                <a:solidFill>
+                  <a:srgbClr val="0F172A"/>
+                </a:solidFill>
+              </a:rPr>
+              <a:t>Ona tilimizda yangi avlod kiber-mutaxassislari tayyorlanadi.</a:t>
+            </a:r>
+            <a:endParaRPr lang="en-US" sz="1000" dirty="0"/>
+          </a:p>
+        </p:txBody>
+      </p:sp>
+    </p:spTree>
+  </p:cSld>
+  <p:clrMapOvr>
+    <a:masterClrMapping/>
+  </p:clrMapOvr>
+</p:sld>
+</file>
+
+<file path=ppt/slides/slide13.xml><?xml version="1.0" encoding="utf-8"?>
+<p:sld xmlns:a="http://schemas.openxmlformats.org/drawingml/2006/main" xmlns:r="http://schemas.openxmlformats.org/officeDocument/2006/relationships" xmlns:p="http://schemas.openxmlformats.org/presentationml/2006/main">
+  <p:cSld name="Slide 13">
     <p:bg>
       <p:bgPr>
         <a:solidFill>
@@ -3518,7 +4245,7 @@
                   <a:srgbClr val="10B981"/>
                 </a:solidFill>
               </a:rPr>
-              <a:t>📩 Aloqa va Hamkorlik:
+              <a:t>👤 Loyiha Muallifi:
 </a:t>
             </a:r>
             <a:pPr indent="0" marL="0">
@@ -3533,7 +4260,7 @@
                   <a:srgbClr val="F8FAFC"/>
                 </a:solidFill>
               </a:rPr>
-              <a:t>Telegram: @cybershield_uz  |  Email: contact@cybershield.uz
+              <a:t>Abduraxmonov Bexruz (Muallif, dizayner va dasturchi)
 </a:t>
             </a:r>
             <a:pPr indent="0" marL="0">
@@ -3726,7 +4453,7 @@
                   <a:srgbClr val="059669"/>
                 </a:solidFill>
               </a:rPr>
-              <a:t>SLAYD 02 / 12</a:t>
+              <a:t>SLAYD 02 / 13</a:t>
             </a:r>
             <a:endParaRPr lang="en-US" sz="950" dirty="0"/>
           </a:p>
@@ -4159,7 +4886,7 @@
                   <a:srgbClr val="059669"/>
                 </a:solidFill>
               </a:rPr>
-              <a:t>SLAYD 03 / 12</a:t>
+              <a:t>SLAYD 03 / 13</a:t>
             </a:r>
             <a:endParaRPr lang="en-US" sz="950" dirty="0"/>
           </a:p>
@@ -4797,7 +5524,7 @@
                   <a:srgbClr val="059669"/>
                 </a:solidFill>
               </a:rPr>
-              <a:t>SLAYD 04 / 12</a:t>
+              <a:t>SLAYD 04 / 13</a:t>
             </a:r>
             <a:endParaRPr lang="en-US" sz="950" dirty="0"/>
           </a:p>
@@ -5447,7 +6174,7 @@
                   <a:srgbClr val="059669"/>
                 </a:solidFill>
               </a:rPr>
-              <a:t>SLAYD 05 / 12</a:t>
+              <a:t>SLAYD 05 / 13</a:t>
             </a:r>
             <a:endParaRPr lang="en-US" sz="950" dirty="0"/>
           </a:p>
@@ -5854,7 +6581,7 @@
                   <a:srgbClr val="059669"/>
                 </a:solidFill>
               </a:rPr>
-              <a:t>SLAYD 06 / 12</a:t>
+              <a:t>SLAYD 06 / 13</a:t>
             </a:r>
             <a:endParaRPr lang="en-US" sz="950" dirty="0"/>
           </a:p>
@@ -6333,7 +7060,7 @@
                   <a:srgbClr val="059669"/>
                 </a:solidFill>
               </a:rPr>
-              <a:t>SLAYD 07 / 12</a:t>
+              <a:t>SLAYD 07 / 13</a:t>
             </a:r>
             <a:endParaRPr lang="en-US" sz="950" dirty="0"/>
           </a:p>
@@ -7122,7 +7849,7 @@
     <p:bg>
       <p:bgPr>
         <a:solidFill>
-          <a:srgbClr val="F4F6F9"/>
+          <a:srgbClr val="0A192F"/>
         </a:solidFill>
       </p:bgPr>
     </p:bg>
@@ -7148,14 +7875,14 @@
         </p:nvSpPr>
         <p:spPr>
           <a:xfrm>
-            <a:off x="548640" y="228600"/>
+            <a:off x="548640" y="320040"/>
             <a:ext cx="2011680" cy="274320"/>
           </a:xfrm>
           <a:prstGeom prst="roundRect">
             <a:avLst/>
           </a:prstGeom>
           <a:solidFill>
-            <a:srgbClr val="ECFDF5"/>
+            <a:srgbClr val="064E3B"/>
           </a:solidFill>
           <a:ln w="12700">
             <a:solidFill>
@@ -7173,7 +7900,7 @@
         </p:nvSpPr>
         <p:spPr>
           <a:xfrm>
-            <a:off x="548640" y="228600"/>
+            <a:off x="548640" y="320040"/>
             <a:ext cx="2011680" cy="274320"/>
           </a:xfrm>
           <a:prstGeom prst="rect">
@@ -7190,14 +7917,14 @@
               <a:buNone/>
             </a:pPr>
             <a:r>
-              <a:rPr lang="en-US" sz="950" b="1" dirty="0">
-                <a:solidFill>
-                  <a:srgbClr val="059669"/>
-                </a:solidFill>
-              </a:rPr>
-              <a:t>SLAYD 08 / 12</a:t>
-            </a:r>
-            <a:endParaRPr lang="en-US" sz="950" dirty="0"/>
+              <a:rPr lang="en-US" sz="1000" b="1" dirty="0">
+                <a:solidFill>
+                  <a:srgbClr val="34D399"/>
+                </a:solidFill>
+              </a:rPr>
+              <a:t>08 · MUALLIF</a:t>
+            </a:r>
+            <a:endParaRPr lang="en-US" sz="1000" dirty="0"/>
           </a:p>
         </p:txBody>
       </p:sp>
@@ -7209,29 +7936,68 @@
         </p:nvSpPr>
         <p:spPr>
           <a:xfrm>
-            <a:off x="548640" y="548640"/>
-            <a:ext cx="8046720" cy="411480"/>
-          </a:xfrm>
-          <a:prstGeom prst="rect">
-            <a:avLst/>
-          </a:prstGeom>
-          <a:noFill/>
-          <a:ln/>
-        </p:spPr>
-        <p:txBody>
-          <a:bodyPr wrap="square" rtlCol="0" anchor="ctr"/>
-          <a:lstStyle/>
-          <a:p>
-            <a:pPr indent="0" marL="0">
+            <a:off x="548640" y="685800"/>
+            <a:ext cx="4937760" cy="457200"/>
+          </a:xfrm>
+          <a:prstGeom prst="rect">
+            <a:avLst/>
+          </a:prstGeom>
+          <a:noFill/>
+          <a:ln/>
+        </p:spPr>
+        <p:txBody>
+          <a:bodyPr wrap="square" rtlCol="0" anchor="ctr"/>
+          <a:lstStyle/>
+          <a:p>
+            <a:pPr indent="0" marL="0">
+              <a:buNone/>
+            </a:pPr>
+            <a:r>
+              <a:rPr lang="en-US" sz="2200" b="1" dirty="0">
+                <a:solidFill>
+                  <a:srgbClr val="000000"/>
+                </a:solidFill>
+              </a:rPr>
+              <a:t>Loyihani kim yaratdi?</a:t>
+            </a:r>
+            <a:endParaRPr lang="en-US" sz="2200" dirty="0"/>
+          </a:p>
+        </p:txBody>
+      </p:sp>
+      <p:sp>
+        <p:nvSpPr>
+          <p:cNvPr id="5" name="Text 3"/>
+          <p:cNvSpPr/>
+          <p:nvPr/>
+        </p:nvSpPr>
+        <p:spPr>
+          <a:xfrm>
+            <a:off x="548640" y="1143000"/>
+            <a:ext cx="4937760" cy="822960"/>
+          </a:xfrm>
+          <a:prstGeom prst="rect">
+            <a:avLst/>
+          </a:prstGeom>
+          <a:noFill/>
+          <a:ln/>
+        </p:spPr>
+        <p:txBody>
+          <a:bodyPr wrap="square" rtlCol="0" anchor="ctr"/>
+          <a:lstStyle/>
+          <a:p>
+            <a:pPr indent="0" marL="0">
+              <a:lnSpc>
+                <a:spcPct val="115000"/>
+              </a:lnSpc>
               <a:buNone/>
             </a:pPr>
             <a:r>
               <a:rPr lang="en-US" sz="2000" b="1" dirty="0">
                 <a:solidFill>
-                  <a:srgbClr val="0F172A"/>
-                </a:solidFill>
-              </a:rPr>
-              <a:t>Texnologiyalar: Loyihaning haqiqiy texnik asosi</a:t>
+                  <a:srgbClr val="F8FAFC"/>
+                </a:solidFill>
+              </a:rPr>
+              <a:t>Loyihaning barcha qismlari Abduraxmonov Bexruz tomonidan bajarilgan.</a:t>
             </a:r>
             <a:endParaRPr lang="en-US" sz="2000" dirty="0"/>
           </a:p>
@@ -7239,50 +8005,235 @@
       </p:sp>
       <p:sp>
         <p:nvSpPr>
-          <p:cNvPr id="5" name="Text 3"/>
-          <p:cNvSpPr/>
-          <p:nvPr/>
-        </p:nvSpPr>
-        <p:spPr>
-          <a:xfrm>
-            <a:off x="548640" y="960120"/>
-            <a:ext cx="8046720" cy="274320"/>
-          </a:xfrm>
-          <a:prstGeom prst="rect">
-            <a:avLst/>
-          </a:prstGeom>
-          <a:noFill/>
-          <a:ln/>
-        </p:spPr>
-        <p:txBody>
-          <a:bodyPr wrap="square" rtlCol="0" anchor="ctr"/>
-          <a:lstStyle/>
-          <a:p>
-            <a:pPr indent="0" marL="0">
+          <p:cNvPr id="6" name="Text 4"/>
+          <p:cNvSpPr/>
+          <p:nvPr/>
+        </p:nvSpPr>
+        <p:spPr>
+          <a:xfrm>
+            <a:off x="548640" y="2057400"/>
+            <a:ext cx="4937760" cy="320040"/>
+          </a:xfrm>
+          <a:prstGeom prst="rect">
+            <a:avLst/>
+          </a:prstGeom>
+          <a:noFill/>
+          <a:ln/>
+        </p:spPr>
+        <p:txBody>
+          <a:bodyPr wrap="square" rtlCol="0" anchor="ctr"/>
+          <a:lstStyle/>
+          <a:p>
+            <a:pPr indent="0" marL="0">
+              <a:buNone/>
+            </a:pPr>
+            <a:r>
+              <a:rPr lang="en-US" sz="1200" b="1" dirty="0">
+                <a:solidFill>
+                  <a:srgbClr val="6EE7B7"/>
+                </a:solidFill>
+              </a:rPr>
+              <a:t>ROLI:  Muallif, dizayner va dasturchi</a:t>
+            </a:r>
+            <a:endParaRPr lang="en-US" sz="1200" dirty="0"/>
+          </a:p>
+        </p:txBody>
+      </p:sp>
+      <p:sp>
+        <p:nvSpPr>
+          <p:cNvPr id="7" name="Shape 5"/>
+          <p:cNvSpPr/>
+          <p:nvPr/>
+        </p:nvSpPr>
+        <p:spPr>
+          <a:xfrm>
+            <a:off x="548640" y="2468880"/>
+            <a:ext cx="4937760" cy="2240280"/>
+          </a:xfrm>
+          <a:prstGeom prst="roundRect">
+            <a:avLst/>
+          </a:prstGeom>
+          <a:solidFill>
+            <a:srgbClr val="0F243A"/>
+          </a:solidFill>
+          <a:ln w="19050">
+            <a:solidFill>
+              <a:srgbClr val="1E3A52"/>
+            </a:solidFill>
+            <a:prstDash val="solid"/>
+          </a:ln>
+        </p:spPr>
+      </p:sp>
+      <p:sp>
+        <p:nvSpPr>
+          <p:cNvPr id="8" name="Text 6"/>
+          <p:cNvSpPr/>
+          <p:nvPr/>
+        </p:nvSpPr>
+        <p:spPr>
+          <a:xfrm>
+            <a:off x="731520" y="2560320"/>
+            <a:ext cx="4572000" cy="274320"/>
+          </a:xfrm>
+          <a:prstGeom prst="rect">
+            <a:avLst/>
+          </a:prstGeom>
+          <a:noFill/>
+          <a:ln/>
+        </p:spPr>
+        <p:txBody>
+          <a:bodyPr wrap="square" rtlCol="0" anchor="ctr"/>
+          <a:lstStyle/>
+          <a:p>
+            <a:pPr indent="0" marL="0">
+              <a:buNone/>
+            </a:pPr>
+            <a:r>
+              <a:rPr lang="en-US" sz="1200" b="1" dirty="0">
+                <a:solidFill>
+                  <a:srgbClr val="10B981"/>
+                </a:solidFill>
+              </a:rPr>
+              <a:t>Bajargan ishlari:</a:t>
+            </a:r>
+            <a:endParaRPr lang="en-US" sz="1200" dirty="0"/>
+          </a:p>
+        </p:txBody>
+      </p:sp>
+      <p:sp>
+        <p:nvSpPr>
+          <p:cNvPr id="9" name="Text 7"/>
+          <p:cNvSpPr/>
+          <p:nvPr/>
+        </p:nvSpPr>
+        <p:spPr>
+          <a:xfrm>
+            <a:off x="731520" y="2880360"/>
+            <a:ext cx="4572000" cy="1737360"/>
+          </a:xfrm>
+          <a:prstGeom prst="rect">
+            <a:avLst/>
+          </a:prstGeom>
+          <a:noFill/>
+          <a:ln/>
+        </p:spPr>
+        <p:txBody>
+          <a:bodyPr wrap="square" rtlCol="0" anchor="ctr"/>
+          <a:lstStyle/>
+          <a:p>
+            <a:pPr indent="0" marL="0">
+              <a:lnSpc>
+                <a:spcPct val="125000"/>
+              </a:lnSpc>
               <a:buNone/>
             </a:pPr>
             <a:r>
               <a:rPr lang="en-US" sz="1100" dirty="0">
                 <a:solidFill>
-                  <a:srgbClr val="475569"/>
-                </a:solidFill>
-              </a:rPr>
-              <a:t>Kod bazasi (package.json va arxitektura) orqali 100% tasdiqlangan texnologiyalar</a:t>
+                  <a:srgbClr val="F8FAFC"/>
+                </a:solidFill>
+              </a:rPr>
+              <a:t>• Loyiha g‘oyasi va arxitektura tuzilmasi</a:t>
             </a:r>
             <a:endParaRPr lang="en-US" sz="1100" dirty="0"/>
           </a:p>
-        </p:txBody>
-      </p:sp>
-      <p:sp>
-        <p:nvSpPr>
-          <p:cNvPr id="6" name="Shape 4"/>
-          <p:cNvSpPr/>
-          <p:nvPr/>
-        </p:nvSpPr>
-        <p:spPr>
-          <a:xfrm>
-            <a:off x="512064" y="1289304"/>
-            <a:ext cx="4096512" cy="3822192"/>
+          <a:p>
+            <a:pPr indent="0" marL="0">
+              <a:lnSpc>
+                <a:spcPct val="125000"/>
+              </a:lnSpc>
+              <a:buNone/>
+            </a:pPr>
+            <a:r>
+              <a:rPr lang="en-US" sz="1100" dirty="0">
+                <a:solidFill>
+                  <a:srgbClr val="F8FAFC"/>
+                </a:solidFill>
+              </a:rPr>
+              <a:t>• UI/UX dizayn va vizual interfeys</a:t>
+            </a:r>
+            <a:endParaRPr lang="en-US" sz="1100" dirty="0"/>
+          </a:p>
+          <a:p>
+            <a:pPr indent="0" marL="0">
+              <a:lnSpc>
+                <a:spcPct val="125000"/>
+              </a:lnSpc>
+              <a:buNone/>
+            </a:pPr>
+            <a:r>
+              <a:rPr lang="en-US" sz="1100" dirty="0">
+                <a:solidFill>
+                  <a:srgbClr val="F8FAFC"/>
+                </a:solidFill>
+              </a:rPr>
+              <a:t>• React, Vite va Tailwind CSS bilan dasturlash</a:t>
+            </a:r>
+            <a:endParaRPr lang="en-US" sz="1100" dirty="0"/>
+          </a:p>
+          <a:p>
+            <a:pPr indent="0" marL="0">
+              <a:lnSpc>
+                <a:spcPct val="125000"/>
+              </a:lnSpc>
+              <a:buNone/>
+            </a:pPr>
+            <a:r>
+              <a:rPr lang="en-US" sz="1100" dirty="0">
+                <a:solidFill>
+                  <a:srgbClr val="F8FAFC"/>
+                </a:solidFill>
+              </a:rPr>
+              <a:t>• O‘quv modullari, laboratoriyalar va Sezar shifri</a:t>
+            </a:r>
+            <a:endParaRPr lang="en-US" sz="1100" dirty="0"/>
+          </a:p>
+          <a:p>
+            <a:pPr indent="0" marL="0">
+              <a:lnSpc>
+                <a:spcPct val="125000"/>
+              </a:lnSpc>
+              <a:buNone/>
+            </a:pPr>
+            <a:r>
+              <a:rPr lang="en-US" sz="1100" dirty="0">
+                <a:solidFill>
+                  <a:srgbClr val="F8FAFC"/>
+                </a:solidFill>
+              </a:rPr>
+              <a:t>• Vercel bulutiga joylashtirish va CI/CD</a:t>
+            </a:r>
+            <a:endParaRPr lang="en-US" sz="1100" dirty="0"/>
+          </a:p>
+          <a:p>
+            <a:pPr indent="0" marL="0">
+              <a:lnSpc>
+                <a:spcPct val="125000"/>
+              </a:lnSpc>
+              <a:buNone/>
+            </a:pPr>
+            <a:r>
+              <a:rPr lang="en-US" sz="1100" dirty="0">
+                <a:solidFill>
+                  <a:srgbClr val="F8FAFC"/>
+                </a:solidFill>
+              </a:rPr>
+              <a:t>• Sinov va taqdimotga to‘liq tayyorlash</a:t>
+            </a:r>
+            <a:endParaRPr lang="en-US" sz="1100" dirty="0"/>
+          </a:p>
+        </p:txBody>
+      </p:sp>
+      <p:sp>
+        <p:nvSpPr>
+          <p:cNvPr id="10" name="Shape 8"/>
+          <p:cNvSpPr/>
+          <p:nvPr/>
+        </p:nvSpPr>
+        <p:spPr>
+          <a:xfrm>
+            <a:off x="5806440" y="640080"/>
+            <a:ext cx="2834640" cy="4069080"/>
           </a:xfrm>
           <a:prstGeom prst="roundRect">
             <a:avLst/>
@@ -7290,9 +8241,9 @@
           <a:solidFill>
             <a:srgbClr val="0D1A26"/>
           </a:solidFill>
-          <a:ln w="19050">
+          <a:ln w="25400">
             <a:solidFill>
-              <a:srgbClr val="059669"/>
+              <a:srgbClr val="10B981"/>
             </a:solidFill>
             <a:prstDash val="solid"/>
           </a:ln>
@@ -7300,7 +8251,7 @@
       </p:sp>
       <p:pic>
         <p:nvPicPr>
-          <p:cNvPr id="7" name="Image 0" descr="C:\Users\User\Desktop\kiber xavfsizlik boyicha sayt\public\screenshots\08_cyberguard_ai.png">    </p:cNvPr>
+          <p:cNvPr id="11" name="Image 0" descr="C:\Users\User\Desktop\kiber xavfsizlik boyicha sayt\public\screenshots\author_portrait.png">    </p:cNvPr>
           <p:cNvPicPr>
             <a:picLocks noChangeAspect="1"/>
           </p:cNvPicPr>
@@ -7314,438 +8265,14 @@
         </p:blipFill>
         <p:spPr>
           <a:xfrm>
-            <a:off x="548640" y="1325880"/>
-            <a:ext cx="4023360" cy="3474720"/>
+            <a:off x="5852160" y="685800"/>
+            <a:ext cx="2743200" cy="3977640"/>
           </a:xfrm>
           <a:prstGeom prst="rect">
             <a:avLst/>
           </a:prstGeom>
         </p:spPr>
       </p:pic>
-      <p:sp>
-        <p:nvSpPr>
-          <p:cNvPr id="8" name="Text 5"/>
-          <p:cNvSpPr/>
-          <p:nvPr/>
-        </p:nvSpPr>
-        <p:spPr>
-          <a:xfrm>
-            <a:off x="548640" y="4837176"/>
-            <a:ext cx="4023360" cy="274320"/>
-          </a:xfrm>
-          <a:prstGeom prst="rect">
-            <a:avLst/>
-          </a:prstGeom>
-          <a:noFill/>
-          <a:ln/>
-        </p:spPr>
-        <p:txBody>
-          <a:bodyPr wrap="square" rtlCol="0" anchor="ctr"/>
-          <a:lstStyle/>
-          <a:p>
-            <a:pPr algn="ctr" indent="0" marL="0">
-              <a:buNone/>
-            </a:pPr>
-            <a:r>
-              <a:rPr lang="en-US" sz="900" dirty="0">
-                <a:solidFill>
-                  <a:srgbClr val="BAE6FD"/>
-                </a:solidFill>
-              </a:rPr>
-              <a:t>📸 CyberGuard AI — o‘zbek tilidagi kiberxavfsizlik assistenti</a:t>
-            </a:r>
-            <a:endParaRPr lang="en-US" sz="900" dirty="0"/>
-          </a:p>
-        </p:txBody>
-      </p:sp>
-      <p:sp>
-        <p:nvSpPr>
-          <p:cNvPr id="9" name="Shape 6"/>
-          <p:cNvSpPr/>
-          <p:nvPr/>
-        </p:nvSpPr>
-        <p:spPr>
-          <a:xfrm>
-            <a:off x="4846320" y="1325880"/>
-            <a:ext cx="3749040" cy="749808"/>
-          </a:xfrm>
-          <a:prstGeom prst="roundRect">
-            <a:avLst/>
-          </a:prstGeom>
-          <a:solidFill>
-            <a:srgbClr val="FFFFFF"/>
-          </a:solidFill>
-          <a:ln w="12700">
-            <a:solidFill>
-              <a:srgbClr val="E2E8F0"/>
-            </a:solidFill>
-            <a:prstDash val="solid"/>
-          </a:ln>
-        </p:spPr>
-      </p:sp>
-      <p:sp>
-        <p:nvSpPr>
-          <p:cNvPr id="10" name="Text 7"/>
-          <p:cNvSpPr/>
-          <p:nvPr/>
-        </p:nvSpPr>
-        <p:spPr>
-          <a:xfrm>
-            <a:off x="4983480" y="1399032"/>
-            <a:ext cx="3474720" cy="274320"/>
-          </a:xfrm>
-          <a:prstGeom prst="rect">
-            <a:avLst/>
-          </a:prstGeom>
-          <a:noFill/>
-          <a:ln/>
-        </p:spPr>
-        <p:txBody>
-          <a:bodyPr wrap="square" rtlCol="0" anchor="ctr"/>
-          <a:lstStyle/>
-          <a:p>
-            <a:pPr indent="0" marL="0">
-              <a:buNone/>
-            </a:pPr>
-            <a:r>
-              <a:rPr lang="en-US" sz="1200" b="1" dirty="0">
-                <a:solidFill>
-                  <a:srgbClr val="0284C7"/>
-                </a:solidFill>
-              </a:rPr>
-              <a:t>React 18 &amp; Vite</a:t>
-            </a:r>
-            <a:endParaRPr lang="en-US" sz="1200" dirty="0"/>
-          </a:p>
-        </p:txBody>
-      </p:sp>
-      <p:sp>
-        <p:nvSpPr>
-          <p:cNvPr id="11" name="Text 8"/>
-          <p:cNvSpPr/>
-          <p:nvPr/>
-        </p:nvSpPr>
-        <p:spPr>
-          <a:xfrm>
-            <a:off x="4983480" y="1673352"/>
-            <a:ext cx="3474720" cy="347472"/>
-          </a:xfrm>
-          <a:prstGeom prst="rect">
-            <a:avLst/>
-          </a:prstGeom>
-          <a:noFill/>
-          <a:ln/>
-        </p:spPr>
-        <p:txBody>
-          <a:bodyPr wrap="square" rtlCol="0" anchor="ctr"/>
-          <a:lstStyle/>
-          <a:p>
-            <a:pPr indent="0" marL="0">
-              <a:buNone/>
-            </a:pPr>
-            <a:r>
-              <a:rPr lang="en-US" sz="950" dirty="0">
-                <a:solidFill>
-                  <a:srgbClr val="475569"/>
-                </a:solidFill>
-              </a:rPr>
-              <a:t>Tezkor SPA arxitekturasi va modulli frontend.</a:t>
-            </a:r>
-            <a:endParaRPr lang="en-US" sz="950" dirty="0"/>
-          </a:p>
-        </p:txBody>
-      </p:sp>
-      <p:sp>
-        <p:nvSpPr>
-          <p:cNvPr id="12" name="Shape 9"/>
-          <p:cNvSpPr/>
-          <p:nvPr/>
-        </p:nvSpPr>
-        <p:spPr>
-          <a:xfrm>
-            <a:off x="4846320" y="2194560"/>
-            <a:ext cx="3749040" cy="749808"/>
-          </a:xfrm>
-          <a:prstGeom prst="roundRect">
-            <a:avLst/>
-          </a:prstGeom>
-          <a:solidFill>
-            <a:srgbClr val="FFFFFF"/>
-          </a:solidFill>
-          <a:ln w="12700">
-            <a:solidFill>
-              <a:srgbClr val="E2E8F0"/>
-            </a:solidFill>
-            <a:prstDash val="solid"/>
-          </a:ln>
-        </p:spPr>
-      </p:sp>
-      <p:sp>
-        <p:nvSpPr>
-          <p:cNvPr id="13" name="Text 10"/>
-          <p:cNvSpPr/>
-          <p:nvPr/>
-        </p:nvSpPr>
-        <p:spPr>
-          <a:xfrm>
-            <a:off x="4983480" y="2267712"/>
-            <a:ext cx="3474720" cy="274320"/>
-          </a:xfrm>
-          <a:prstGeom prst="rect">
-            <a:avLst/>
-          </a:prstGeom>
-          <a:noFill/>
-          <a:ln/>
-        </p:spPr>
-        <p:txBody>
-          <a:bodyPr wrap="square" rtlCol="0" anchor="ctr"/>
-          <a:lstStyle/>
-          <a:p>
-            <a:pPr indent="0" marL="0">
-              <a:buNone/>
-            </a:pPr>
-            <a:r>
-              <a:rPr lang="en-US" sz="1200" b="1" dirty="0">
-                <a:solidFill>
-                  <a:srgbClr val="059669"/>
-                </a:solidFill>
-              </a:rPr>
-              <a:t>Tailwind CSS</a:t>
-            </a:r>
-            <a:endParaRPr lang="en-US" sz="1200" dirty="0"/>
-          </a:p>
-        </p:txBody>
-      </p:sp>
-      <p:sp>
-        <p:nvSpPr>
-          <p:cNvPr id="14" name="Text 11"/>
-          <p:cNvSpPr/>
-          <p:nvPr/>
-        </p:nvSpPr>
-        <p:spPr>
-          <a:xfrm>
-            <a:off x="4983480" y="2542032"/>
-            <a:ext cx="3474720" cy="347472"/>
-          </a:xfrm>
-          <a:prstGeom prst="rect">
-            <a:avLst/>
-          </a:prstGeom>
-          <a:noFill/>
-          <a:ln/>
-        </p:spPr>
-        <p:txBody>
-          <a:bodyPr wrap="square" rtlCol="0" anchor="ctr"/>
-          <a:lstStyle/>
-          <a:p>
-            <a:pPr indent="0" marL="0">
-              <a:buNone/>
-            </a:pPr>
-            <a:r>
-              <a:rPr lang="en-US" sz="950" dirty="0">
-                <a:solidFill>
-                  <a:srgbClr val="475569"/>
-                </a:solidFill>
-              </a:rPr>
-              <a:t>To‘liq moslashuvchan (responsive) qorong‘i kiber-interfeys.</a:t>
-            </a:r>
-            <a:endParaRPr lang="en-US" sz="950" dirty="0"/>
-          </a:p>
-        </p:txBody>
-      </p:sp>
-      <p:sp>
-        <p:nvSpPr>
-          <p:cNvPr id="15" name="Shape 12"/>
-          <p:cNvSpPr/>
-          <p:nvPr/>
-        </p:nvSpPr>
-        <p:spPr>
-          <a:xfrm>
-            <a:off x="4846320" y="3063240"/>
-            <a:ext cx="3749040" cy="749808"/>
-          </a:xfrm>
-          <a:prstGeom prst="roundRect">
-            <a:avLst/>
-          </a:prstGeom>
-          <a:solidFill>
-            <a:srgbClr val="FFFFFF"/>
-          </a:solidFill>
-          <a:ln w="12700">
-            <a:solidFill>
-              <a:srgbClr val="E2E8F0"/>
-            </a:solidFill>
-            <a:prstDash val="solid"/>
-          </a:ln>
-        </p:spPr>
-      </p:sp>
-      <p:sp>
-        <p:nvSpPr>
-          <p:cNvPr id="16" name="Text 13"/>
-          <p:cNvSpPr/>
-          <p:nvPr/>
-        </p:nvSpPr>
-        <p:spPr>
-          <a:xfrm>
-            <a:off x="4983480" y="3136392"/>
-            <a:ext cx="3474720" cy="274320"/>
-          </a:xfrm>
-          <a:prstGeom prst="rect">
-            <a:avLst/>
-          </a:prstGeom>
-          <a:noFill/>
-          <a:ln/>
-        </p:spPr>
-        <p:txBody>
-          <a:bodyPr wrap="square" rtlCol="0" anchor="ctr"/>
-          <a:lstStyle/>
-          <a:p>
-            <a:pPr indent="0" marL="0">
-              <a:buNone/>
-            </a:pPr>
-            <a:r>
-              <a:rPr lang="en-US" sz="1200" b="1" dirty="0">
-                <a:solidFill>
-                  <a:srgbClr val="F59E0B"/>
-                </a:solidFill>
-              </a:rPr>
-              <a:t>Lucide Icons &amp; Confetti</a:t>
-            </a:r>
-            <a:endParaRPr lang="en-US" sz="1200" dirty="0"/>
-          </a:p>
-        </p:txBody>
-      </p:sp>
-      <p:sp>
-        <p:nvSpPr>
-          <p:cNvPr id="17" name="Text 14"/>
-          <p:cNvSpPr/>
-          <p:nvPr/>
-        </p:nvSpPr>
-        <p:spPr>
-          <a:xfrm>
-            <a:off x="4983480" y="3410712"/>
-            <a:ext cx="3474720" cy="347472"/>
-          </a:xfrm>
-          <a:prstGeom prst="rect">
-            <a:avLst/>
-          </a:prstGeom>
-          <a:noFill/>
-          <a:ln/>
-        </p:spPr>
-        <p:txBody>
-          <a:bodyPr wrap="square" rtlCol="0" anchor="ctr"/>
-          <a:lstStyle/>
-          <a:p>
-            <a:pPr indent="0" marL="0">
-              <a:buNone/>
-            </a:pPr>
-            <a:r>
-              <a:rPr lang="en-US" sz="950" dirty="0">
-                <a:solidFill>
-                  <a:srgbClr val="475569"/>
-                </a:solidFill>
-              </a:rPr>
-              <a:t>Kiber piktogrammalar va gamifikatsiya effektlari.</a:t>
-            </a:r>
-            <a:endParaRPr lang="en-US" sz="950" dirty="0"/>
-          </a:p>
-        </p:txBody>
-      </p:sp>
-      <p:sp>
-        <p:nvSpPr>
-          <p:cNvPr id="18" name="Shape 15"/>
-          <p:cNvSpPr/>
-          <p:nvPr/>
-        </p:nvSpPr>
-        <p:spPr>
-          <a:xfrm>
-            <a:off x="4846320" y="3931920"/>
-            <a:ext cx="3749040" cy="749808"/>
-          </a:xfrm>
-          <a:prstGeom prst="roundRect">
-            <a:avLst/>
-          </a:prstGeom>
-          <a:solidFill>
-            <a:srgbClr val="FFFFFF"/>
-          </a:solidFill>
-          <a:ln w="12700">
-            <a:solidFill>
-              <a:srgbClr val="E2E8F0"/>
-            </a:solidFill>
-            <a:prstDash val="solid"/>
-          </a:ln>
-        </p:spPr>
-      </p:sp>
-      <p:sp>
-        <p:nvSpPr>
-          <p:cNvPr id="19" name="Text 16"/>
-          <p:cNvSpPr/>
-          <p:nvPr/>
-        </p:nvSpPr>
-        <p:spPr>
-          <a:xfrm>
-            <a:off x="4983480" y="4005072"/>
-            <a:ext cx="3474720" cy="274320"/>
-          </a:xfrm>
-          <a:prstGeom prst="rect">
-            <a:avLst/>
-          </a:prstGeom>
-          <a:noFill/>
-          <a:ln/>
-        </p:spPr>
-        <p:txBody>
-          <a:bodyPr wrap="square" rtlCol="0" anchor="ctr"/>
-          <a:lstStyle/>
-          <a:p>
-            <a:pPr indent="0" marL="0">
-              <a:buNone/>
-            </a:pPr>
-            <a:r>
-              <a:rPr lang="en-US" sz="1200" b="1" dirty="0">
-                <a:solidFill>
-                  <a:srgbClr val="0F172A"/>
-                </a:solidFill>
-              </a:rPr>
-              <a:t>Vercel Edge Cloud</a:t>
-            </a:r>
-            <a:endParaRPr lang="en-US" sz="1200" dirty="0"/>
-          </a:p>
-        </p:txBody>
-      </p:sp>
-      <p:sp>
-        <p:nvSpPr>
-          <p:cNvPr id="20" name="Text 17"/>
-          <p:cNvSpPr/>
-          <p:nvPr/>
-        </p:nvSpPr>
-        <p:spPr>
-          <a:xfrm>
-            <a:off x="4983480" y="4279392"/>
-            <a:ext cx="3474720" cy="347472"/>
-          </a:xfrm>
-          <a:prstGeom prst="rect">
-            <a:avLst/>
-          </a:prstGeom>
-          <a:noFill/>
-          <a:ln/>
-        </p:spPr>
-        <p:txBody>
-          <a:bodyPr wrap="square" rtlCol="0" anchor="ctr"/>
-          <a:lstStyle/>
-          <a:p>
-            <a:pPr indent="0" marL="0">
-              <a:buNone/>
-            </a:pPr>
-            <a:r>
-              <a:rPr lang="en-US" sz="950" dirty="0">
-                <a:solidFill>
-                  <a:srgbClr val="475569"/>
-                </a:solidFill>
-              </a:rPr>
-              <a:t>Global CDN, 24/7 uzluksiz ishlovchi bulutli serverlar.</a:t>
-            </a:r>
-            <a:endParaRPr lang="en-US" sz="950" dirty="0"/>
-          </a:p>
-        </p:txBody>
-      </p:sp>
     </p:spTree>
   </p:cSld>
   <p:clrMapOvr>
@@ -7833,7 +8360,7 @@
                   <a:srgbClr val="059669"/>
                 </a:solidFill>
               </a:rPr>
-              <a:t>SLAYD 09 / 12</a:t>
+              <a:t>SLAYD 09 / 13</a:t>
             </a:r>
             <a:endParaRPr lang="en-US" sz="950" dirty="0"/>
           </a:p>
@@ -7869,7 +8396,7 @@
                   <a:srgbClr val="0F172A"/>
                 </a:solidFill>
               </a:rPr>
-              <a:t>Afzalliklari: KiberQoriqchi nega ustun?</a:t>
+              <a:t>Texnologiyalar: Loyihaning haqiqiy texnik asosi</a:t>
             </a:r>
             <a:endParaRPr lang="en-US" sz="2000" dirty="0"/>
           </a:p>
@@ -7905,7 +8432,7 @@
                   <a:srgbClr val="475569"/>
                 </a:solidFill>
               </a:rPr>
-              <a:t>Saytning haqiqiy imkoniyatlariga asoslangan asosiy raqobat ustunliklari</a:t>
+              <a:t>Kod bazasi (package.json va arxitektura) orqali 100% tasdiqlangan texnologiyalar</a:t>
             </a:r>
             <a:endParaRPr lang="en-US" sz="1100" dirty="0"/>
           </a:p>
@@ -7938,7 +8465,7 @@
       </p:sp>
       <p:pic>
         <p:nvPicPr>
-          <p:cNvPr id="7" name="Image 0" descr="C:\Users\User\Desktop\kiber xavfsizlik boyicha sayt\public\screenshots\07_leaderboard.png">    </p:cNvPr>
+          <p:cNvPr id="7" name="Image 0" descr="C:\Users\User\Desktop\kiber xavfsizlik boyicha sayt\public\screenshots\08_cyberguard_ai.png">    </p:cNvPr>
           <p:cNvPicPr>
             <a:picLocks noChangeAspect="1"/>
           </p:cNvPicPr>
@@ -7990,7 +8517,7 @@
                   <a:srgbClr val="BAE6FD"/>
                 </a:solidFill>
               </a:rPr>
-              <a:t>📸 "Leaderboard" — jonli reyting va musobaqa tizimi</a:t>
+              <a:t>📸 CyberGuard AI — o‘zbek tilidagi kiberxavfsizlik assistenti</a:t>
             </a:r>
             <a:endParaRPr lang="en-US" sz="900" dirty="0"/>
           </a:p>
@@ -8013,9 +8540,9 @@
           <a:solidFill>
             <a:srgbClr val="FFFFFF"/>
           </a:solidFill>
-          <a:ln w="19050">
+          <a:ln w="12700">
             <a:solidFill>
-              <a:srgbClr val="6EE7B7"/>
+              <a:srgbClr val="E2E8F0"/>
             </a:solidFill>
             <a:prstDash val="solid"/>
           </a:ln>
@@ -8046,14 +8573,14 @@
               <a:buNone/>
             </a:pPr>
             <a:r>
-              <a:rPr lang="en-US" sz="1100" b="1" dirty="0">
-                <a:solidFill>
-                  <a:srgbClr val="059669"/>
-                </a:solidFill>
-              </a:rPr>
-              <a:t>1. 100% Ona Tilimizda</a:t>
-            </a:r>
-            <a:endParaRPr lang="en-US" sz="1100" dirty="0"/>
+              <a:rPr lang="en-US" sz="1200" b="1" dirty="0">
+                <a:solidFill>
+                  <a:srgbClr val="0284C7"/>
+                </a:solidFill>
+              </a:rPr>
+              <a:t>React 18 &amp; Vite</a:t>
+            </a:r>
+            <a:endParaRPr lang="en-US" sz="1200" dirty="0"/>
           </a:p>
         </p:txBody>
       </p:sp>
@@ -8087,7 +8614,7 @@
                   <a:srgbClr val="475569"/>
                 </a:solidFill>
               </a:rPr>
-              <a:t>O‘zbekiston to‘lov tizimlari (Click, Payme, Uzcard) kiber-xavflariga moslangan.</a:t>
+              <a:t>Tezkor SPA arxitekturasi va modulli frontend.</a:t>
             </a:r>
             <a:endParaRPr lang="en-US" sz="950" dirty="0"/>
           </a:p>
@@ -8110,9 +8637,9 @@
           <a:solidFill>
             <a:srgbClr val="FFFFFF"/>
           </a:solidFill>
-          <a:ln w="19050">
+          <a:ln w="12700">
             <a:solidFill>
-              <a:srgbClr val="6EE7B7"/>
+              <a:srgbClr val="E2E8F0"/>
             </a:solidFill>
             <a:prstDash val="solid"/>
           </a:ln>
@@ -8143,14 +8670,14 @@
               <a:buNone/>
             </a:pPr>
             <a:r>
-              <a:rPr lang="en-US" sz="1100" b="1" dirty="0">
+              <a:rPr lang="en-US" sz="1200" b="1" dirty="0">
                 <a:solidFill>
                   <a:srgbClr val="059669"/>
                 </a:solidFill>
               </a:rPr>
-              <a:t>2. Ta'lim + Jonli Himoya</a:t>
-            </a:r>
-            <a:endParaRPr lang="en-US" sz="1100" dirty="0"/>
+              <a:t>Tailwind CSS</a:t>
+            </a:r>
+            <a:endParaRPr lang="en-US" sz="1200" dirty="0"/>
           </a:p>
         </p:txBody>
       </p:sp>
@@ -8184,7 +8711,7 @@
                   <a:srgbClr val="475569"/>
                 </a:solidFill>
               </a:rPr>
-              <a:t>Faqat ma'ruza emas — smartfon va fayllarni amalda tekshirish qurollari bor.</a:t>
+              <a:t>To‘liq moslashuvchan (responsive) qorong‘i kiber-interfeys.</a:t>
             </a:r>
             <a:endParaRPr lang="en-US" sz="950" dirty="0"/>
           </a:p>
@@ -8207,9 +8734,9 @@
           <a:solidFill>
             <a:srgbClr val="FFFFFF"/>
           </a:solidFill>
-          <a:ln w="19050">
+          <a:ln w="12700">
             <a:solidFill>
-              <a:srgbClr val="6EE7B7"/>
+              <a:srgbClr val="E2E8F0"/>
             </a:solidFill>
             <a:prstDash val="solid"/>
           </a:ln>
@@ -8240,14 +8767,14 @@
               <a:buNone/>
             </a:pPr>
             <a:r>
-              <a:rPr lang="en-US" sz="1100" b="1" dirty="0">
-                <a:solidFill>
-                  <a:srgbClr val="059669"/>
-                </a:solidFill>
-              </a:rPr>
-              <a:t>3. Gamifikatsiya va Musobaqa</a:t>
-            </a:r>
-            <a:endParaRPr lang="en-US" sz="1100" dirty="0"/>
+              <a:rPr lang="en-US" sz="1200" b="1" dirty="0">
+                <a:solidFill>
+                  <a:srgbClr val="F59E0B"/>
+                </a:solidFill>
+              </a:rPr>
+              <a:t>Lucide Icons &amp; Confetti</a:t>
+            </a:r>
+            <a:endParaRPr lang="en-US" sz="1200" dirty="0"/>
           </a:p>
         </p:txBody>
       </p:sp>
@@ -8281,7 +8808,7 @@
                   <a:srgbClr val="475569"/>
                 </a:solidFill>
               </a:rPr>
-              <a:t>Topshiriqlarni bajarish orqali ballar to‘plab umumiy reytingda ko‘tarilish.</a:t>
+              <a:t>Kiber piktogrammalar va gamifikatsiya effektlari.</a:t>
             </a:r>
             <a:endParaRPr lang="en-US" sz="950" dirty="0"/>
           </a:p>
@@ -8304,9 +8831,9 @@
           <a:solidFill>
             <a:srgbClr val="FFFFFF"/>
           </a:solidFill>
-          <a:ln w="19050">
+          <a:ln w="12700">
             <a:solidFill>
-              <a:srgbClr val="6EE7B7"/>
+              <a:srgbClr val="E2E8F0"/>
             </a:solidFill>
             <a:prstDash val="solid"/>
           </a:ln>
@@ -8337,14 +8864,14 @@
               <a:buNone/>
             </a:pPr>
             <a:r>
-              <a:rPr lang="en-US" sz="1100" b="1" dirty="0">
-                <a:solidFill>
-                  <a:srgbClr val="059669"/>
-                </a:solidFill>
-              </a:rPr>
-              <a:t>4. CyberGuard AI Maslahatchi</a:t>
-            </a:r>
-            <a:endParaRPr lang="en-US" sz="1100" dirty="0"/>
+              <a:rPr lang="en-US" sz="1200" b="1" dirty="0">
+                <a:solidFill>
+                  <a:srgbClr val="0F172A"/>
+                </a:solidFill>
+              </a:rPr>
+              <a:t>Vercel Edge Cloud</a:t>
+            </a:r>
+            <a:endParaRPr lang="en-US" sz="1200" dirty="0"/>
           </a:p>
         </p:txBody>
       </p:sp>
@@ -8378,7 +8905,7 @@
                   <a:srgbClr val="475569"/>
                 </a:solidFill>
               </a:rPr>
-              <a:t>Har qanday kiber-savolga o‘zbek tilida 24/7 tezkor va tushunarli javob.</a:t>
+              <a:t>Global CDN, 24/7 uzluksiz ishlovchi bulutli serverlar.</a:t>
             </a:r>
             <a:endParaRPr lang="en-US" sz="950" dirty="0"/>
           </a:p>

--- a/public/KiberQoriqchi_Prezentatsiya.pptx
+++ b/public/KiberQoriqchi_Prezentatsiya.pptx
@@ -2419,7 +2419,7 @@
                   <a:srgbClr val="0F172A"/>
                 </a:solidFill>
               </a:rPr>
-              <a:t>Afzalliklari: KiberQoriqchi nega ustun?</a:t>
+              <a:t>Kamchiliklar va Rivojlantirish Rejalari</a:t>
             </a:r>
             <a:endParaRPr lang="en-US" sz="2000" dirty="0"/>
           </a:p>
@@ -2455,7 +2455,7 @@
                   <a:srgbClr val="475569"/>
                 </a:solidFill>
               </a:rPr>
-              <a:t>Saytning haqiqiy imkoniyatlariga asoslangan asosiy raqobat ustunliklari</a:t>
+              <a:t>Haqiqiy holatni ochiq baholash va kelajakdagi takomillashtirish bosqichlari</a:t>
             </a:r>
             <a:endParaRPr lang="en-US" sz="1100" dirty="0"/>
           </a:p>
@@ -2488,7 +2488,7 @@
       </p:sp>
       <p:pic>
         <p:nvPicPr>
-          <p:cNvPr id="7" name="Image 0" descr="C:\Users\User\Desktop\kiber xavfsizlik boyicha sayt\public\screenshots\07_leaderboard.png">    </p:cNvPr>
+          <p:cNvPr id="7" name="Image 0" descr="C:\Users\User\Desktop\kiber xavfsizlik boyicha sayt\public\screenshots\12_casestudy.png">    </p:cNvPr>
           <p:cNvPicPr>
             <a:picLocks noChangeAspect="1"/>
           </p:cNvPicPr>
@@ -2540,7 +2540,7 @@
                   <a:srgbClr val="BAE6FD"/>
                 </a:solidFill>
               </a:rPr>
-              <a:t>📸 "Leaderboard" — jonli reyting va musobaqa tizimi</a:t>
+              <a:t>📸 "Hodisalar Tahlili" (Case Study) — real kiber-hujumlar tahlili</a:t>
             </a:r>
             <a:endParaRPr lang="en-US" sz="900" dirty="0"/>
           </a:p>
@@ -2555,7 +2555,161 @@
         <p:spPr>
           <a:xfrm>
             <a:off x="4846320" y="1325880"/>
-            <a:ext cx="3749040" cy="749808"/>
+            <a:ext cx="3749040" cy="1645920"/>
+          </a:xfrm>
+          <a:prstGeom prst="roundRect">
+            <a:avLst/>
+          </a:prstGeom>
+          <a:solidFill>
+            <a:srgbClr val="FFFFFF"/>
+          </a:solidFill>
+          <a:ln w="19050">
+            <a:solidFill>
+              <a:srgbClr val="FCD34D"/>
+            </a:solidFill>
+            <a:prstDash val="solid"/>
+          </a:ln>
+        </p:spPr>
+      </p:sp>
+      <p:sp>
+        <p:nvSpPr>
+          <p:cNvPr id="10" name="Text 7"/>
+          <p:cNvSpPr/>
+          <p:nvPr/>
+        </p:nvSpPr>
+        <p:spPr>
+          <a:xfrm>
+            <a:off x="4983480" y="1417320"/>
+            <a:ext cx="3474720" cy="274320"/>
+          </a:xfrm>
+          <a:prstGeom prst="rect">
+            <a:avLst/>
+          </a:prstGeom>
+          <a:noFill/>
+          <a:ln/>
+        </p:spPr>
+        <p:txBody>
+          <a:bodyPr wrap="square" rtlCol="0" anchor="ctr"/>
+          <a:lstStyle/>
+          <a:p>
+            <a:pPr indent="0" marL="0">
+              <a:buNone/>
+            </a:pPr>
+            <a:r>
+              <a:rPr lang="en-US" sz="1100" b="1" dirty="0">
+                <a:solidFill>
+                  <a:srgbClr val="B45309"/>
+                </a:solidFill>
+              </a:rPr>
+              <a:t>⚠️ Aniqlangan Kamchiliklar (MVP):</a:t>
+            </a:r>
+            <a:endParaRPr lang="en-US" sz="1100" dirty="0"/>
+          </a:p>
+        </p:txBody>
+      </p:sp>
+      <p:sp>
+        <p:nvSpPr>
+          <p:cNvPr id="11" name="Text 8"/>
+          <p:cNvSpPr/>
+          <p:nvPr/>
+        </p:nvSpPr>
+        <p:spPr>
+          <a:xfrm>
+            <a:off x="4983480" y="1737360"/>
+            <a:ext cx="3474720" cy="1143000"/>
+          </a:xfrm>
+          <a:prstGeom prst="rect">
+            <a:avLst/>
+          </a:prstGeom>
+          <a:noFill/>
+          <a:ln/>
+        </p:spPr>
+        <p:txBody>
+          <a:bodyPr wrap="square" rtlCol="0" anchor="ctr"/>
+          <a:lstStyle/>
+          <a:p>
+            <a:pPr indent="0" marL="0">
+              <a:buNone/>
+            </a:pPr>
+            <a:r>
+              <a:rPr lang="en-US" sz="900" b="1" dirty="0">
+                <a:solidFill>
+                  <a:srgbClr val="0F172A"/>
+                </a:solidFill>
+              </a:rPr>
+              <a:t>• Dinamik Server Sandboxing: </a:t>
+            </a:r>
+            <a:pPr indent="0" marL="0">
+              <a:buNone/>
+            </a:pPr>
+            <a:r>
+              <a:rPr lang="en-US" sz="900" dirty="0">
+                <a:solidFill>
+                  <a:srgbClr val="475569"/>
+                </a:solidFill>
+              </a:rPr>
+              <a:t>Hozircha veb-simulyatsiya; to‘liq Docker muhiti zarur.
+</a:t>
+            </a:r>
+            <a:pPr indent="0" marL="0">
+              <a:buNone/>
+            </a:pPr>
+            <a:r>
+              <a:rPr lang="en-US" sz="900" b="1" dirty="0">
+                <a:solidFill>
+                  <a:srgbClr val="0F172A"/>
+                </a:solidFill>
+              </a:rPr>
+              <a:t>• Mahalliy ilova yo‘qligi: </a:t>
+            </a:r>
+            <a:pPr indent="0" marL="0">
+              <a:buNone/>
+            </a:pPr>
+            <a:r>
+              <a:rPr lang="en-US" sz="900" dirty="0">
+                <a:solidFill>
+                  <a:srgbClr val="475569"/>
+                </a:solidFill>
+              </a:rPr>
+              <a:t>Android/iOS ilovasi ishlab chiqilmoqda.
+</a:t>
+            </a:r>
+            <a:pPr indent="0" marL="0">
+              <a:buNone/>
+            </a:pPr>
+            <a:r>
+              <a:rPr lang="en-US" sz="900" b="1" dirty="0">
+                <a:solidFill>
+                  <a:srgbClr val="0F172A"/>
+                </a:solidFill>
+              </a:rPr>
+              <a:t>• Telegram bot: </a:t>
+            </a:r>
+            <a:pPr indent="0" marL="0">
+              <a:buNone/>
+            </a:pPr>
+            <a:r>
+              <a:rPr lang="en-US" sz="900" dirty="0">
+                <a:solidFill>
+                  <a:srgbClr val="475569"/>
+                </a:solidFill>
+              </a:rPr>
+              <a:t>Avtomatik APK tekshiruvchi bot ulanmoqda.</a:t>
+            </a:r>
+            <a:endParaRPr lang="en-US" sz="900" dirty="0"/>
+          </a:p>
+        </p:txBody>
+      </p:sp>
+      <p:sp>
+        <p:nvSpPr>
+          <p:cNvPr id="12" name="Shape 9"/>
+          <p:cNvSpPr/>
+          <p:nvPr/>
+        </p:nvSpPr>
+        <p:spPr>
+          <a:xfrm>
+            <a:off x="4846320" y="3154680"/>
+            <a:ext cx="3749040" cy="1645920"/>
           </a:xfrm>
           <a:prstGeom prst="roundRect">
             <a:avLst/>
@@ -2573,13 +2727,13 @@
       </p:sp>
       <p:sp>
         <p:nvSpPr>
-          <p:cNvPr id="10" name="Text 7"/>
-          <p:cNvSpPr/>
-          <p:nvPr/>
-        </p:nvSpPr>
-        <p:spPr>
-          <a:xfrm>
-            <a:off x="4983480" y="1399032"/>
+          <p:cNvPr id="13" name="Text 10"/>
+          <p:cNvSpPr/>
+          <p:nvPr/>
+        </p:nvSpPr>
+        <p:spPr>
+          <a:xfrm>
+            <a:off x="4983480" y="3246120"/>
             <a:ext cx="3474720" cy="274320"/>
           </a:xfrm>
           <a:prstGeom prst="rect">
@@ -2601,7 +2755,7 @@
                   <a:srgbClr val="059669"/>
                 </a:solidFill>
               </a:rPr>
-              <a:t>1. 100% Ona Tilimizda</a:t>
+              <a:t>🚀 Kelajakdagi Rivojlantirish:</a:t>
             </a:r>
             <a:endParaRPr lang="en-US" sz="1100" dirty="0"/>
           </a:p>
@@ -2609,328 +2763,94 @@
       </p:sp>
       <p:sp>
         <p:nvSpPr>
-          <p:cNvPr id="11" name="Text 8"/>
-          <p:cNvSpPr/>
-          <p:nvPr/>
-        </p:nvSpPr>
-        <p:spPr>
-          <a:xfrm>
-            <a:off x="4983480" y="1673352"/>
-            <a:ext cx="3474720" cy="347472"/>
-          </a:xfrm>
-          <a:prstGeom prst="rect">
-            <a:avLst/>
-          </a:prstGeom>
-          <a:noFill/>
-          <a:ln/>
-        </p:spPr>
-        <p:txBody>
-          <a:bodyPr wrap="square" rtlCol="0" anchor="ctr"/>
-          <a:lstStyle/>
-          <a:p>
-            <a:pPr indent="0" marL="0">
-              <a:buNone/>
-            </a:pPr>
-            <a:r>
-              <a:rPr lang="en-US" sz="950" dirty="0">
+          <p:cNvPr id="14" name="Text 11"/>
+          <p:cNvSpPr/>
+          <p:nvPr/>
+        </p:nvSpPr>
+        <p:spPr>
+          <a:xfrm>
+            <a:off x="4983480" y="3566160"/>
+            <a:ext cx="3474720" cy="1143000"/>
+          </a:xfrm>
+          <a:prstGeom prst="rect">
+            <a:avLst/>
+          </a:prstGeom>
+          <a:noFill/>
+          <a:ln/>
+        </p:spPr>
+        <p:txBody>
+          <a:bodyPr wrap="square" rtlCol="0" anchor="ctr"/>
+          <a:lstStyle/>
+          <a:p>
+            <a:pPr indent="0" marL="0">
+              <a:buNone/>
+            </a:pPr>
+            <a:r>
+              <a:rPr lang="en-US" sz="900" b="1" dirty="0">
+                <a:solidFill>
+                  <a:srgbClr val="0F172A"/>
+                </a:solidFill>
+              </a:rPr>
+              <a:t>• Telegram Xavfsizlik Boti: </a:t>
+            </a:r>
+            <a:pPr indent="0" marL="0">
+              <a:buNone/>
+            </a:pPr>
+            <a:r>
+              <a:rPr lang="en-US" sz="900" dirty="0">
                 <a:solidFill>
                   <a:srgbClr val="475569"/>
                 </a:solidFill>
               </a:rPr>
-              <a:t>O‘zbekiston to‘lov tizimlari (Click, Payme, Uzcard) kiber-xavflariga moslangan.</a:t>
-            </a:r>
-            <a:endParaRPr lang="en-US" sz="950" dirty="0"/>
-          </a:p>
-        </p:txBody>
-      </p:sp>
-      <p:sp>
-        <p:nvSpPr>
-          <p:cNvPr id="12" name="Shape 9"/>
-          <p:cNvSpPr/>
-          <p:nvPr/>
-        </p:nvSpPr>
-        <p:spPr>
-          <a:xfrm>
-            <a:off x="4846320" y="2194560"/>
-            <a:ext cx="3749040" cy="749808"/>
-          </a:xfrm>
-          <a:prstGeom prst="roundRect">
-            <a:avLst/>
-          </a:prstGeom>
-          <a:solidFill>
-            <a:srgbClr val="FFFFFF"/>
-          </a:solidFill>
-          <a:ln w="19050">
-            <a:solidFill>
-              <a:srgbClr val="6EE7B7"/>
-            </a:solidFill>
-            <a:prstDash val="solid"/>
-          </a:ln>
-        </p:spPr>
-      </p:sp>
-      <p:sp>
-        <p:nvSpPr>
-          <p:cNvPr id="13" name="Text 10"/>
-          <p:cNvSpPr/>
-          <p:nvPr/>
-        </p:nvSpPr>
-        <p:spPr>
-          <a:xfrm>
-            <a:off x="4983480" y="2267712"/>
-            <a:ext cx="3474720" cy="274320"/>
-          </a:xfrm>
-          <a:prstGeom prst="rect">
-            <a:avLst/>
-          </a:prstGeom>
-          <a:noFill/>
-          <a:ln/>
-        </p:spPr>
-        <p:txBody>
-          <a:bodyPr wrap="square" rtlCol="0" anchor="ctr"/>
-          <a:lstStyle/>
-          <a:p>
-            <a:pPr indent="0" marL="0">
-              <a:buNone/>
-            </a:pPr>
-            <a:r>
-              <a:rPr lang="en-US" sz="1100" b="1" dirty="0">
-                <a:solidFill>
-                  <a:srgbClr val="059669"/>
-                </a:solidFill>
-              </a:rPr>
-              <a:t>2. Ta'lim + Jonli Himoya</a:t>
-            </a:r>
-            <a:endParaRPr lang="en-US" sz="1100" dirty="0"/>
-          </a:p>
-        </p:txBody>
-      </p:sp>
-      <p:sp>
-        <p:nvSpPr>
-          <p:cNvPr id="14" name="Text 11"/>
-          <p:cNvSpPr/>
-          <p:nvPr/>
-        </p:nvSpPr>
-        <p:spPr>
-          <a:xfrm>
-            <a:off x="4983480" y="2542032"/>
-            <a:ext cx="3474720" cy="347472"/>
-          </a:xfrm>
-          <a:prstGeom prst="rect">
-            <a:avLst/>
-          </a:prstGeom>
-          <a:noFill/>
-          <a:ln/>
-        </p:spPr>
-        <p:txBody>
-          <a:bodyPr wrap="square" rtlCol="0" anchor="ctr"/>
-          <a:lstStyle/>
-          <a:p>
-            <a:pPr indent="0" marL="0">
-              <a:buNone/>
-            </a:pPr>
-            <a:r>
-              <a:rPr lang="en-US" sz="950" dirty="0">
+              <a:t>Shubhali faylni botga yuborib 2 soniyada natija olish.
+</a:t>
+            </a:r>
+            <a:pPr indent="0" marL="0">
+              <a:buNone/>
+            </a:pPr>
+            <a:r>
+              <a:rPr lang="en-US" sz="900" b="1" dirty="0">
+                <a:solidFill>
+                  <a:srgbClr val="0F172A"/>
+                </a:solidFill>
+              </a:rPr>
+              <a:t>• B2B Korporativ Audit: </a:t>
+            </a:r>
+            <a:pPr indent="0" marL="0">
+              <a:buNone/>
+            </a:pPr>
+            <a:r>
+              <a:rPr lang="en-US" sz="900" dirty="0">
                 <a:solidFill>
                   <a:srgbClr val="475569"/>
                 </a:solidFill>
               </a:rPr>
-              <a:t>Faqat ma'ruza emas — smartfon va fayllarni amalda tekshirish qurollari bor.</a:t>
-            </a:r>
-            <a:endParaRPr lang="en-US" sz="950" dirty="0"/>
-          </a:p>
-        </p:txBody>
-      </p:sp>
-      <p:sp>
-        <p:nvSpPr>
-          <p:cNvPr id="15" name="Shape 12"/>
-          <p:cNvSpPr/>
-          <p:nvPr/>
-        </p:nvSpPr>
-        <p:spPr>
-          <a:xfrm>
-            <a:off x="4846320" y="3063240"/>
-            <a:ext cx="3749040" cy="749808"/>
-          </a:xfrm>
-          <a:prstGeom prst="roundRect">
-            <a:avLst/>
-          </a:prstGeom>
-          <a:solidFill>
-            <a:srgbClr val="FFFFFF"/>
-          </a:solidFill>
-          <a:ln w="19050">
-            <a:solidFill>
-              <a:srgbClr val="6EE7B7"/>
-            </a:solidFill>
-            <a:prstDash val="solid"/>
-          </a:ln>
-        </p:spPr>
-      </p:sp>
-      <p:sp>
-        <p:nvSpPr>
-          <p:cNvPr id="16" name="Text 13"/>
-          <p:cNvSpPr/>
-          <p:nvPr/>
-        </p:nvSpPr>
-        <p:spPr>
-          <a:xfrm>
-            <a:off x="4983480" y="3136392"/>
-            <a:ext cx="3474720" cy="274320"/>
-          </a:xfrm>
-          <a:prstGeom prst="rect">
-            <a:avLst/>
-          </a:prstGeom>
-          <a:noFill/>
-          <a:ln/>
-        </p:spPr>
-        <p:txBody>
-          <a:bodyPr wrap="square" rtlCol="0" anchor="ctr"/>
-          <a:lstStyle/>
-          <a:p>
-            <a:pPr indent="0" marL="0">
-              <a:buNone/>
-            </a:pPr>
-            <a:r>
-              <a:rPr lang="en-US" sz="1100" b="1" dirty="0">
-                <a:solidFill>
-                  <a:srgbClr val="059669"/>
-                </a:solidFill>
-              </a:rPr>
-              <a:t>3. Gamifikatsiya va Musobaqa</a:t>
-            </a:r>
-            <a:endParaRPr lang="en-US" sz="1100" dirty="0"/>
-          </a:p>
-        </p:txBody>
-      </p:sp>
-      <p:sp>
-        <p:nvSpPr>
-          <p:cNvPr id="17" name="Text 14"/>
-          <p:cNvSpPr/>
-          <p:nvPr/>
-        </p:nvSpPr>
-        <p:spPr>
-          <a:xfrm>
-            <a:off x="4983480" y="3410712"/>
-            <a:ext cx="3474720" cy="347472"/>
-          </a:xfrm>
-          <a:prstGeom prst="rect">
-            <a:avLst/>
-          </a:prstGeom>
-          <a:noFill/>
-          <a:ln/>
-        </p:spPr>
-        <p:txBody>
-          <a:bodyPr wrap="square" rtlCol="0" anchor="ctr"/>
-          <a:lstStyle/>
-          <a:p>
-            <a:pPr indent="0" marL="0">
-              <a:buNone/>
-            </a:pPr>
-            <a:r>
-              <a:rPr lang="en-US" sz="950" dirty="0">
+              <a:t>Banklar va korxonalar uchun fishing simulyatsiyasi.
+</a:t>
+            </a:r>
+            <a:pPr indent="0" marL="0">
+              <a:buNone/>
+            </a:pPr>
+            <a:r>
+              <a:rPr lang="en-US" sz="900" b="1" dirty="0">
+                <a:solidFill>
+                  <a:srgbClr val="0F172A"/>
+                </a:solidFill>
+              </a:rPr>
+              <a:t>• Respublika CTF Musobaqasi: </a:t>
+            </a:r>
+            <a:pPr indent="0" marL="0">
+              <a:buNone/>
+            </a:pPr>
+            <a:r>
+              <a:rPr lang="en-US" sz="900" dirty="0">
                 <a:solidFill>
                   <a:srgbClr val="475569"/>
                 </a:solidFill>
               </a:rPr>
-              <a:t>Topshiriqlarni bajarish orqali ballar to‘plab umumiy reytingda ko‘tarilish.</a:t>
-            </a:r>
-            <a:endParaRPr lang="en-US" sz="950" dirty="0"/>
-          </a:p>
-        </p:txBody>
-      </p:sp>
-      <p:sp>
-        <p:nvSpPr>
-          <p:cNvPr id="18" name="Shape 15"/>
-          <p:cNvSpPr/>
-          <p:nvPr/>
-        </p:nvSpPr>
-        <p:spPr>
-          <a:xfrm>
-            <a:off x="4846320" y="3931920"/>
-            <a:ext cx="3749040" cy="749808"/>
-          </a:xfrm>
-          <a:prstGeom prst="roundRect">
-            <a:avLst/>
-          </a:prstGeom>
-          <a:solidFill>
-            <a:srgbClr val="FFFFFF"/>
-          </a:solidFill>
-          <a:ln w="19050">
-            <a:solidFill>
-              <a:srgbClr val="6EE7B7"/>
-            </a:solidFill>
-            <a:prstDash val="solid"/>
-          </a:ln>
-        </p:spPr>
-      </p:sp>
-      <p:sp>
-        <p:nvSpPr>
-          <p:cNvPr id="19" name="Text 16"/>
-          <p:cNvSpPr/>
-          <p:nvPr/>
-        </p:nvSpPr>
-        <p:spPr>
-          <a:xfrm>
-            <a:off x="4983480" y="4005072"/>
-            <a:ext cx="3474720" cy="274320"/>
-          </a:xfrm>
-          <a:prstGeom prst="rect">
-            <a:avLst/>
-          </a:prstGeom>
-          <a:noFill/>
-          <a:ln/>
-        </p:spPr>
-        <p:txBody>
-          <a:bodyPr wrap="square" rtlCol="0" anchor="ctr"/>
-          <a:lstStyle/>
-          <a:p>
-            <a:pPr indent="0" marL="0">
-              <a:buNone/>
-            </a:pPr>
-            <a:r>
-              <a:rPr lang="en-US" sz="1100" b="1" dirty="0">
-                <a:solidFill>
-                  <a:srgbClr val="059669"/>
-                </a:solidFill>
-              </a:rPr>
-              <a:t>4. CyberGuard AI Maslahatchi</a:t>
-            </a:r>
-            <a:endParaRPr lang="en-US" sz="1100" dirty="0"/>
-          </a:p>
-        </p:txBody>
-      </p:sp>
-      <p:sp>
-        <p:nvSpPr>
-          <p:cNvPr id="20" name="Text 17"/>
-          <p:cNvSpPr/>
-          <p:nvPr/>
-        </p:nvSpPr>
-        <p:spPr>
-          <a:xfrm>
-            <a:off x="4983480" y="4279392"/>
-            <a:ext cx="3474720" cy="347472"/>
-          </a:xfrm>
-          <a:prstGeom prst="rect">
-            <a:avLst/>
-          </a:prstGeom>
-          <a:noFill/>
-          <a:ln/>
-        </p:spPr>
-        <p:txBody>
-          <a:bodyPr wrap="square" rtlCol="0" anchor="ctr"/>
-          <a:lstStyle/>
-          <a:p>
-            <a:pPr indent="0" marL="0">
-              <a:buNone/>
-            </a:pPr>
-            <a:r>
-              <a:rPr lang="en-US" sz="950" dirty="0">
-                <a:solidFill>
-                  <a:srgbClr val="475569"/>
-                </a:solidFill>
-              </a:rPr>
-              <a:t>Har qanday kiber-savolga o‘zbek tilida 24/7 tezkor va tushunarli javob.</a:t>
-            </a:r>
-            <a:endParaRPr lang="en-US" sz="950" dirty="0"/>
+              <a:t>Yoshlar o‘rtasida kiber-olimpiada o‘tkazish.</a:t>
+            </a:r>
+            <a:endParaRPr lang="en-US" sz="900" dirty="0"/>
           </a:p>
         </p:txBody>
       </p:sp>
@@ -2948,7 +2868,7 @@
     <p:bg>
       <p:bgPr>
         <a:solidFill>
-          <a:srgbClr val="F4F6F9"/>
+          <a:srgbClr val="0A192F"/>
         </a:solidFill>
       </p:bgPr>
     </p:bg>
@@ -2974,14 +2894,14 @@
         </p:nvSpPr>
         <p:spPr>
           <a:xfrm>
-            <a:off x="548640" y="228600"/>
+            <a:off x="548640" y="320040"/>
             <a:ext cx="2011680" cy="274320"/>
           </a:xfrm>
           <a:prstGeom prst="roundRect">
             <a:avLst/>
           </a:prstGeom>
           <a:solidFill>
-            <a:srgbClr val="ECFDF5"/>
+            <a:srgbClr val="064E3B"/>
           </a:solidFill>
           <a:ln w="12700">
             <a:solidFill>
@@ -2999,7 +2919,7 @@
         </p:nvSpPr>
         <p:spPr>
           <a:xfrm>
-            <a:off x="548640" y="228600"/>
+            <a:off x="548640" y="320040"/>
             <a:ext cx="2011680" cy="274320"/>
           </a:xfrm>
           <a:prstGeom prst="rect">
@@ -3016,14 +2936,14 @@
               <a:buNone/>
             </a:pPr>
             <a:r>
-              <a:rPr lang="en-US" sz="950" b="1" dirty="0">
-                <a:solidFill>
-                  <a:srgbClr val="059669"/>
-                </a:solidFill>
-              </a:rPr>
-              <a:t>SLAYD 11 / 13</a:t>
-            </a:r>
-            <a:endParaRPr lang="en-US" sz="950" dirty="0"/>
+              <a:rPr lang="en-US" sz="1000" b="1" dirty="0">
+                <a:solidFill>
+                  <a:srgbClr val="34D399"/>
+                </a:solidFill>
+              </a:rPr>
+              <a:t>11 · MUALLIF</a:t>
+            </a:r>
+            <a:endParaRPr lang="en-US" sz="1000" dirty="0"/>
           </a:p>
         </p:txBody>
       </p:sp>
@@ -3035,29 +2955,68 @@
         </p:nvSpPr>
         <p:spPr>
           <a:xfrm>
-            <a:off x="548640" y="548640"/>
-            <a:ext cx="8046720" cy="411480"/>
-          </a:xfrm>
-          <a:prstGeom prst="rect">
-            <a:avLst/>
-          </a:prstGeom>
-          <a:noFill/>
-          <a:ln/>
-        </p:spPr>
-        <p:txBody>
-          <a:bodyPr wrap="square" rtlCol="0" anchor="ctr"/>
-          <a:lstStyle/>
-          <a:p>
-            <a:pPr indent="0" marL="0">
+            <a:off x="548640" y="685800"/>
+            <a:ext cx="4937760" cy="457200"/>
+          </a:xfrm>
+          <a:prstGeom prst="rect">
+            <a:avLst/>
+          </a:prstGeom>
+          <a:noFill/>
+          <a:ln/>
+        </p:spPr>
+        <p:txBody>
+          <a:bodyPr wrap="square" rtlCol="0" anchor="ctr"/>
+          <a:lstStyle/>
+          <a:p>
+            <a:pPr indent="0" marL="0">
+              <a:buNone/>
+            </a:pPr>
+            <a:r>
+              <a:rPr lang="en-US" sz="2200" b="1" dirty="0">
+                <a:solidFill>
+                  <a:srgbClr val="000000"/>
+                </a:solidFill>
+              </a:rPr>
+              <a:t>Loyihani kim yaratdi?</a:t>
+            </a:r>
+            <a:endParaRPr lang="en-US" sz="2200" dirty="0"/>
+          </a:p>
+        </p:txBody>
+      </p:sp>
+      <p:sp>
+        <p:nvSpPr>
+          <p:cNvPr id="5" name="Text 3"/>
+          <p:cNvSpPr/>
+          <p:nvPr/>
+        </p:nvSpPr>
+        <p:spPr>
+          <a:xfrm>
+            <a:off x="548640" y="1143000"/>
+            <a:ext cx="4937760" cy="822960"/>
+          </a:xfrm>
+          <a:prstGeom prst="rect">
+            <a:avLst/>
+          </a:prstGeom>
+          <a:noFill/>
+          <a:ln/>
+        </p:spPr>
+        <p:txBody>
+          <a:bodyPr wrap="square" rtlCol="0" anchor="ctr"/>
+          <a:lstStyle/>
+          <a:p>
+            <a:pPr indent="0" marL="0">
+              <a:lnSpc>
+                <a:spcPct val="115000"/>
+              </a:lnSpc>
               <a:buNone/>
             </a:pPr>
             <a:r>
               <a:rPr lang="en-US" sz="2000" b="1" dirty="0">
                 <a:solidFill>
-                  <a:srgbClr val="0F172A"/>
-                </a:solidFill>
-              </a:rPr>
-              <a:t>Kamchiliklar va Rivojlantirish Rejalari</a:t>
+                  <a:srgbClr val="F8FAFC"/>
+                </a:solidFill>
+              </a:rPr>
+              <a:t>Loyihaning barcha qismlari Abduraxmonov Bexruz tomonidan bajarilgan.</a:t>
             </a:r>
             <a:endParaRPr lang="en-US" sz="2000" dirty="0"/>
           </a:p>
@@ -3065,50 +3024,235 @@
       </p:sp>
       <p:sp>
         <p:nvSpPr>
-          <p:cNvPr id="5" name="Text 3"/>
-          <p:cNvSpPr/>
-          <p:nvPr/>
-        </p:nvSpPr>
-        <p:spPr>
-          <a:xfrm>
-            <a:off x="548640" y="960120"/>
-            <a:ext cx="8046720" cy="274320"/>
-          </a:xfrm>
-          <a:prstGeom prst="rect">
-            <a:avLst/>
-          </a:prstGeom>
-          <a:noFill/>
-          <a:ln/>
-        </p:spPr>
-        <p:txBody>
-          <a:bodyPr wrap="square" rtlCol="0" anchor="ctr"/>
-          <a:lstStyle/>
-          <a:p>
-            <a:pPr indent="0" marL="0">
+          <p:cNvPr id="6" name="Text 4"/>
+          <p:cNvSpPr/>
+          <p:nvPr/>
+        </p:nvSpPr>
+        <p:spPr>
+          <a:xfrm>
+            <a:off x="548640" y="2057400"/>
+            <a:ext cx="4937760" cy="320040"/>
+          </a:xfrm>
+          <a:prstGeom prst="rect">
+            <a:avLst/>
+          </a:prstGeom>
+          <a:noFill/>
+          <a:ln/>
+        </p:spPr>
+        <p:txBody>
+          <a:bodyPr wrap="square" rtlCol="0" anchor="ctr"/>
+          <a:lstStyle/>
+          <a:p>
+            <a:pPr indent="0" marL="0">
+              <a:buNone/>
+            </a:pPr>
+            <a:r>
+              <a:rPr lang="en-US" sz="1200" b="1" dirty="0">
+                <a:solidFill>
+                  <a:srgbClr val="6EE7B7"/>
+                </a:solidFill>
+              </a:rPr>
+              <a:t>ROLI:  Muallif, dizayner va dasturchi</a:t>
+            </a:r>
+            <a:endParaRPr lang="en-US" sz="1200" dirty="0"/>
+          </a:p>
+        </p:txBody>
+      </p:sp>
+      <p:sp>
+        <p:nvSpPr>
+          <p:cNvPr id="7" name="Shape 5"/>
+          <p:cNvSpPr/>
+          <p:nvPr/>
+        </p:nvSpPr>
+        <p:spPr>
+          <a:xfrm>
+            <a:off x="548640" y="2468880"/>
+            <a:ext cx="4937760" cy="2240280"/>
+          </a:xfrm>
+          <a:prstGeom prst="roundRect">
+            <a:avLst/>
+          </a:prstGeom>
+          <a:solidFill>
+            <a:srgbClr val="0F243A"/>
+          </a:solidFill>
+          <a:ln w="19050">
+            <a:solidFill>
+              <a:srgbClr val="1E3A52"/>
+            </a:solidFill>
+            <a:prstDash val="solid"/>
+          </a:ln>
+        </p:spPr>
+      </p:sp>
+      <p:sp>
+        <p:nvSpPr>
+          <p:cNvPr id="8" name="Text 6"/>
+          <p:cNvSpPr/>
+          <p:nvPr/>
+        </p:nvSpPr>
+        <p:spPr>
+          <a:xfrm>
+            <a:off x="731520" y="2560320"/>
+            <a:ext cx="4572000" cy="274320"/>
+          </a:xfrm>
+          <a:prstGeom prst="rect">
+            <a:avLst/>
+          </a:prstGeom>
+          <a:noFill/>
+          <a:ln/>
+        </p:spPr>
+        <p:txBody>
+          <a:bodyPr wrap="square" rtlCol="0" anchor="ctr"/>
+          <a:lstStyle/>
+          <a:p>
+            <a:pPr indent="0" marL="0">
+              <a:buNone/>
+            </a:pPr>
+            <a:r>
+              <a:rPr lang="en-US" sz="1200" b="1" dirty="0">
+                <a:solidFill>
+                  <a:srgbClr val="10B981"/>
+                </a:solidFill>
+              </a:rPr>
+              <a:t>Bajargan ishlari:</a:t>
+            </a:r>
+            <a:endParaRPr lang="en-US" sz="1200" dirty="0"/>
+          </a:p>
+        </p:txBody>
+      </p:sp>
+      <p:sp>
+        <p:nvSpPr>
+          <p:cNvPr id="9" name="Text 7"/>
+          <p:cNvSpPr/>
+          <p:nvPr/>
+        </p:nvSpPr>
+        <p:spPr>
+          <a:xfrm>
+            <a:off x="731520" y="2880360"/>
+            <a:ext cx="4572000" cy="1737360"/>
+          </a:xfrm>
+          <a:prstGeom prst="rect">
+            <a:avLst/>
+          </a:prstGeom>
+          <a:noFill/>
+          <a:ln/>
+        </p:spPr>
+        <p:txBody>
+          <a:bodyPr wrap="square" rtlCol="0" anchor="ctr"/>
+          <a:lstStyle/>
+          <a:p>
+            <a:pPr indent="0" marL="0">
+              <a:lnSpc>
+                <a:spcPct val="125000"/>
+              </a:lnSpc>
               <a:buNone/>
             </a:pPr>
             <a:r>
               <a:rPr lang="en-US" sz="1100" dirty="0">
                 <a:solidFill>
-                  <a:srgbClr val="475569"/>
-                </a:solidFill>
-              </a:rPr>
-              <a:t>Haqiqiy holatni ochiq baholash va kelajakdagi takomillashtirish bosqichlari</a:t>
+                  <a:srgbClr val="F8FAFC"/>
+                </a:solidFill>
+              </a:rPr>
+              <a:t>• Loyiha g‘oyasi va arxitektura tuzilmasi</a:t>
             </a:r>
             <a:endParaRPr lang="en-US" sz="1100" dirty="0"/>
           </a:p>
-        </p:txBody>
-      </p:sp>
-      <p:sp>
-        <p:nvSpPr>
-          <p:cNvPr id="6" name="Shape 4"/>
-          <p:cNvSpPr/>
-          <p:nvPr/>
-        </p:nvSpPr>
-        <p:spPr>
-          <a:xfrm>
-            <a:off x="512064" y="1289304"/>
-            <a:ext cx="4096512" cy="3822192"/>
+          <a:p>
+            <a:pPr indent="0" marL="0">
+              <a:lnSpc>
+                <a:spcPct val="125000"/>
+              </a:lnSpc>
+              <a:buNone/>
+            </a:pPr>
+            <a:r>
+              <a:rPr lang="en-US" sz="1100" dirty="0">
+                <a:solidFill>
+                  <a:srgbClr val="F8FAFC"/>
+                </a:solidFill>
+              </a:rPr>
+              <a:t>• UI/UX dizayn va vizual interfeys</a:t>
+            </a:r>
+            <a:endParaRPr lang="en-US" sz="1100" dirty="0"/>
+          </a:p>
+          <a:p>
+            <a:pPr indent="0" marL="0">
+              <a:lnSpc>
+                <a:spcPct val="125000"/>
+              </a:lnSpc>
+              <a:buNone/>
+            </a:pPr>
+            <a:r>
+              <a:rPr lang="en-US" sz="1100" dirty="0">
+                <a:solidFill>
+                  <a:srgbClr val="F8FAFC"/>
+                </a:solidFill>
+              </a:rPr>
+              <a:t>• React, Vite va Tailwind CSS bilan dasturlash</a:t>
+            </a:r>
+            <a:endParaRPr lang="en-US" sz="1100" dirty="0"/>
+          </a:p>
+          <a:p>
+            <a:pPr indent="0" marL="0">
+              <a:lnSpc>
+                <a:spcPct val="125000"/>
+              </a:lnSpc>
+              <a:buNone/>
+            </a:pPr>
+            <a:r>
+              <a:rPr lang="en-US" sz="1100" dirty="0">
+                <a:solidFill>
+                  <a:srgbClr val="F8FAFC"/>
+                </a:solidFill>
+              </a:rPr>
+              <a:t>• O‘quv modullari, laboratoriyalar va Sezar shifri</a:t>
+            </a:r>
+            <a:endParaRPr lang="en-US" sz="1100" dirty="0"/>
+          </a:p>
+          <a:p>
+            <a:pPr indent="0" marL="0">
+              <a:lnSpc>
+                <a:spcPct val="125000"/>
+              </a:lnSpc>
+              <a:buNone/>
+            </a:pPr>
+            <a:r>
+              <a:rPr lang="en-US" sz="1100" dirty="0">
+                <a:solidFill>
+                  <a:srgbClr val="F8FAFC"/>
+                </a:solidFill>
+              </a:rPr>
+              <a:t>• Vercel bulutiga joylashtirish va CI/CD</a:t>
+            </a:r>
+            <a:endParaRPr lang="en-US" sz="1100" dirty="0"/>
+          </a:p>
+          <a:p>
+            <a:pPr indent="0" marL="0">
+              <a:lnSpc>
+                <a:spcPct val="125000"/>
+              </a:lnSpc>
+              <a:buNone/>
+            </a:pPr>
+            <a:r>
+              <a:rPr lang="en-US" sz="1100" dirty="0">
+                <a:solidFill>
+                  <a:srgbClr val="F8FAFC"/>
+                </a:solidFill>
+              </a:rPr>
+              <a:t>• Sinov va taqdimotga to‘liq tayyorlash</a:t>
+            </a:r>
+            <a:endParaRPr lang="en-US" sz="1100" dirty="0"/>
+          </a:p>
+        </p:txBody>
+      </p:sp>
+      <p:sp>
+        <p:nvSpPr>
+          <p:cNvPr id="10" name="Shape 8"/>
+          <p:cNvSpPr/>
+          <p:nvPr/>
+        </p:nvSpPr>
+        <p:spPr>
+          <a:xfrm>
+            <a:off x="5806440" y="640080"/>
+            <a:ext cx="2834640" cy="4069080"/>
           </a:xfrm>
           <a:prstGeom prst="roundRect">
             <a:avLst/>
@@ -3116,9 +3260,9 @@
           <a:solidFill>
             <a:srgbClr val="0D1A26"/>
           </a:solidFill>
-          <a:ln w="19050">
+          <a:ln w="25400">
             <a:solidFill>
-              <a:srgbClr val="059669"/>
+              <a:srgbClr val="10B981"/>
             </a:solidFill>
             <a:prstDash val="solid"/>
           </a:ln>
@@ -3126,7 +3270,7 @@
       </p:sp>
       <p:pic>
         <p:nvPicPr>
-          <p:cNvPr id="7" name="Image 0" descr="C:\Users\User\Desktop\kiber xavfsizlik boyicha sayt\public\screenshots\12_casestudy.png">    </p:cNvPr>
+          <p:cNvPr id="11" name="Image 0" descr="C:\Users\User\Desktop\kiber xavfsizlik boyicha sayt\public\screenshots\author_portrait.png">    </p:cNvPr>
           <p:cNvPicPr>
             <a:picLocks noChangeAspect="1"/>
           </p:cNvPicPr>
@@ -3140,358 +3284,14 @@
         </p:blipFill>
         <p:spPr>
           <a:xfrm>
-            <a:off x="548640" y="1325880"/>
-            <a:ext cx="4023360" cy="3474720"/>
+            <a:off x="5852160" y="685800"/>
+            <a:ext cx="2743200" cy="3977640"/>
           </a:xfrm>
           <a:prstGeom prst="rect">
             <a:avLst/>
           </a:prstGeom>
         </p:spPr>
       </p:pic>
-      <p:sp>
-        <p:nvSpPr>
-          <p:cNvPr id="8" name="Text 5"/>
-          <p:cNvSpPr/>
-          <p:nvPr/>
-        </p:nvSpPr>
-        <p:spPr>
-          <a:xfrm>
-            <a:off x="548640" y="4837176"/>
-            <a:ext cx="4023360" cy="274320"/>
-          </a:xfrm>
-          <a:prstGeom prst="rect">
-            <a:avLst/>
-          </a:prstGeom>
-          <a:noFill/>
-          <a:ln/>
-        </p:spPr>
-        <p:txBody>
-          <a:bodyPr wrap="square" rtlCol="0" anchor="ctr"/>
-          <a:lstStyle/>
-          <a:p>
-            <a:pPr algn="ctr" indent="0" marL="0">
-              <a:buNone/>
-            </a:pPr>
-            <a:r>
-              <a:rPr lang="en-US" sz="900" dirty="0">
-                <a:solidFill>
-                  <a:srgbClr val="BAE6FD"/>
-                </a:solidFill>
-              </a:rPr>
-              <a:t>📸 "Hodisalar Tahlili" (Case Study) — real kiber-hujumlar tahlili</a:t>
-            </a:r>
-            <a:endParaRPr lang="en-US" sz="900" dirty="0"/>
-          </a:p>
-        </p:txBody>
-      </p:sp>
-      <p:sp>
-        <p:nvSpPr>
-          <p:cNvPr id="9" name="Shape 6"/>
-          <p:cNvSpPr/>
-          <p:nvPr/>
-        </p:nvSpPr>
-        <p:spPr>
-          <a:xfrm>
-            <a:off x="4846320" y="1325880"/>
-            <a:ext cx="3749040" cy="1645920"/>
-          </a:xfrm>
-          <a:prstGeom prst="roundRect">
-            <a:avLst/>
-          </a:prstGeom>
-          <a:solidFill>
-            <a:srgbClr val="FFFFFF"/>
-          </a:solidFill>
-          <a:ln w="19050">
-            <a:solidFill>
-              <a:srgbClr val="FCD34D"/>
-            </a:solidFill>
-            <a:prstDash val="solid"/>
-          </a:ln>
-        </p:spPr>
-      </p:sp>
-      <p:sp>
-        <p:nvSpPr>
-          <p:cNvPr id="10" name="Text 7"/>
-          <p:cNvSpPr/>
-          <p:nvPr/>
-        </p:nvSpPr>
-        <p:spPr>
-          <a:xfrm>
-            <a:off x="4983480" y="1417320"/>
-            <a:ext cx="3474720" cy="274320"/>
-          </a:xfrm>
-          <a:prstGeom prst="rect">
-            <a:avLst/>
-          </a:prstGeom>
-          <a:noFill/>
-          <a:ln/>
-        </p:spPr>
-        <p:txBody>
-          <a:bodyPr wrap="square" rtlCol="0" anchor="ctr"/>
-          <a:lstStyle/>
-          <a:p>
-            <a:pPr indent="0" marL="0">
-              <a:buNone/>
-            </a:pPr>
-            <a:r>
-              <a:rPr lang="en-US" sz="1100" b="1" dirty="0">
-                <a:solidFill>
-                  <a:srgbClr val="B45309"/>
-                </a:solidFill>
-              </a:rPr>
-              <a:t>⚠️ Aniqlangan Kamchiliklar (MVP):</a:t>
-            </a:r>
-            <a:endParaRPr lang="en-US" sz="1100" dirty="0"/>
-          </a:p>
-        </p:txBody>
-      </p:sp>
-      <p:sp>
-        <p:nvSpPr>
-          <p:cNvPr id="11" name="Text 8"/>
-          <p:cNvSpPr/>
-          <p:nvPr/>
-        </p:nvSpPr>
-        <p:spPr>
-          <a:xfrm>
-            <a:off x="4983480" y="1737360"/>
-            <a:ext cx="3474720" cy="1143000"/>
-          </a:xfrm>
-          <a:prstGeom prst="rect">
-            <a:avLst/>
-          </a:prstGeom>
-          <a:noFill/>
-          <a:ln/>
-        </p:spPr>
-        <p:txBody>
-          <a:bodyPr wrap="square" rtlCol="0" anchor="ctr"/>
-          <a:lstStyle/>
-          <a:p>
-            <a:pPr indent="0" marL="0">
-              <a:buNone/>
-            </a:pPr>
-            <a:r>
-              <a:rPr lang="en-US" sz="900" b="1" dirty="0">
-                <a:solidFill>
-                  <a:srgbClr val="0F172A"/>
-                </a:solidFill>
-              </a:rPr>
-              <a:t>• Dinamik Server Sandboxing: </a:t>
-            </a:r>
-            <a:pPr indent="0" marL="0">
-              <a:buNone/>
-            </a:pPr>
-            <a:r>
-              <a:rPr lang="en-US" sz="900" dirty="0">
-                <a:solidFill>
-                  <a:srgbClr val="475569"/>
-                </a:solidFill>
-              </a:rPr>
-              <a:t>Hozircha veb-simulyatsiya; to‘liq Docker muhiti zarur.
-</a:t>
-            </a:r>
-            <a:pPr indent="0" marL="0">
-              <a:buNone/>
-            </a:pPr>
-            <a:r>
-              <a:rPr lang="en-US" sz="900" b="1" dirty="0">
-                <a:solidFill>
-                  <a:srgbClr val="0F172A"/>
-                </a:solidFill>
-              </a:rPr>
-              <a:t>• Mahalliy ilova yo‘qligi: </a:t>
-            </a:r>
-            <a:pPr indent="0" marL="0">
-              <a:buNone/>
-            </a:pPr>
-            <a:r>
-              <a:rPr lang="en-US" sz="900" dirty="0">
-                <a:solidFill>
-                  <a:srgbClr val="475569"/>
-                </a:solidFill>
-              </a:rPr>
-              <a:t>Android/iOS ilovasi ishlab chiqilmoqda.
-</a:t>
-            </a:r>
-            <a:pPr indent="0" marL="0">
-              <a:buNone/>
-            </a:pPr>
-            <a:r>
-              <a:rPr lang="en-US" sz="900" b="1" dirty="0">
-                <a:solidFill>
-                  <a:srgbClr val="0F172A"/>
-                </a:solidFill>
-              </a:rPr>
-              <a:t>• Telegram bot: </a:t>
-            </a:r>
-            <a:pPr indent="0" marL="0">
-              <a:buNone/>
-            </a:pPr>
-            <a:r>
-              <a:rPr lang="en-US" sz="900" dirty="0">
-                <a:solidFill>
-                  <a:srgbClr val="475569"/>
-                </a:solidFill>
-              </a:rPr>
-              <a:t>Avtomatik APK tekshiruvchi bot ulanmoqda.</a:t>
-            </a:r>
-            <a:endParaRPr lang="en-US" sz="900" dirty="0"/>
-          </a:p>
-        </p:txBody>
-      </p:sp>
-      <p:sp>
-        <p:nvSpPr>
-          <p:cNvPr id="12" name="Shape 9"/>
-          <p:cNvSpPr/>
-          <p:nvPr/>
-        </p:nvSpPr>
-        <p:spPr>
-          <a:xfrm>
-            <a:off x="4846320" y="3154680"/>
-            <a:ext cx="3749040" cy="1645920"/>
-          </a:xfrm>
-          <a:prstGeom prst="roundRect">
-            <a:avLst/>
-          </a:prstGeom>
-          <a:solidFill>
-            <a:srgbClr val="FFFFFF"/>
-          </a:solidFill>
-          <a:ln w="19050">
-            <a:solidFill>
-              <a:srgbClr val="6EE7B7"/>
-            </a:solidFill>
-            <a:prstDash val="solid"/>
-          </a:ln>
-        </p:spPr>
-      </p:sp>
-      <p:sp>
-        <p:nvSpPr>
-          <p:cNvPr id="13" name="Text 10"/>
-          <p:cNvSpPr/>
-          <p:nvPr/>
-        </p:nvSpPr>
-        <p:spPr>
-          <a:xfrm>
-            <a:off x="4983480" y="3246120"/>
-            <a:ext cx="3474720" cy="274320"/>
-          </a:xfrm>
-          <a:prstGeom prst="rect">
-            <a:avLst/>
-          </a:prstGeom>
-          <a:noFill/>
-          <a:ln/>
-        </p:spPr>
-        <p:txBody>
-          <a:bodyPr wrap="square" rtlCol="0" anchor="ctr"/>
-          <a:lstStyle/>
-          <a:p>
-            <a:pPr indent="0" marL="0">
-              <a:buNone/>
-            </a:pPr>
-            <a:r>
-              <a:rPr lang="en-US" sz="1100" b="1" dirty="0">
-                <a:solidFill>
-                  <a:srgbClr val="059669"/>
-                </a:solidFill>
-              </a:rPr>
-              <a:t>🚀 Kelajakdagi Rivojlantirish:</a:t>
-            </a:r>
-            <a:endParaRPr lang="en-US" sz="1100" dirty="0"/>
-          </a:p>
-        </p:txBody>
-      </p:sp>
-      <p:sp>
-        <p:nvSpPr>
-          <p:cNvPr id="14" name="Text 11"/>
-          <p:cNvSpPr/>
-          <p:nvPr/>
-        </p:nvSpPr>
-        <p:spPr>
-          <a:xfrm>
-            <a:off x="4983480" y="3566160"/>
-            <a:ext cx="3474720" cy="1143000"/>
-          </a:xfrm>
-          <a:prstGeom prst="rect">
-            <a:avLst/>
-          </a:prstGeom>
-          <a:noFill/>
-          <a:ln/>
-        </p:spPr>
-        <p:txBody>
-          <a:bodyPr wrap="square" rtlCol="0" anchor="ctr"/>
-          <a:lstStyle/>
-          <a:p>
-            <a:pPr indent="0" marL="0">
-              <a:buNone/>
-            </a:pPr>
-            <a:r>
-              <a:rPr lang="en-US" sz="900" b="1" dirty="0">
-                <a:solidFill>
-                  <a:srgbClr val="0F172A"/>
-                </a:solidFill>
-              </a:rPr>
-              <a:t>• Telegram Xavfsizlik Boti: </a:t>
-            </a:r>
-            <a:pPr indent="0" marL="0">
-              <a:buNone/>
-            </a:pPr>
-            <a:r>
-              <a:rPr lang="en-US" sz="900" dirty="0">
-                <a:solidFill>
-                  <a:srgbClr val="475569"/>
-                </a:solidFill>
-              </a:rPr>
-              <a:t>Shubhali faylni botga yuborib 2 soniyada natija olish.
-</a:t>
-            </a:r>
-            <a:pPr indent="0" marL="0">
-              <a:buNone/>
-            </a:pPr>
-            <a:r>
-              <a:rPr lang="en-US" sz="900" b="1" dirty="0">
-                <a:solidFill>
-                  <a:srgbClr val="0F172A"/>
-                </a:solidFill>
-              </a:rPr>
-              <a:t>• B2B Korporativ Audit: </a:t>
-            </a:r>
-            <a:pPr indent="0" marL="0">
-              <a:buNone/>
-            </a:pPr>
-            <a:r>
-              <a:rPr lang="en-US" sz="900" dirty="0">
-                <a:solidFill>
-                  <a:srgbClr val="475569"/>
-                </a:solidFill>
-              </a:rPr>
-              <a:t>Banklar va korxonalar uchun fishing simulyatsiyasi.
-</a:t>
-            </a:r>
-            <a:pPr indent="0" marL="0">
-              <a:buNone/>
-            </a:pPr>
-            <a:r>
-              <a:rPr lang="en-US" sz="900" b="1" dirty="0">
-                <a:solidFill>
-                  <a:srgbClr val="0F172A"/>
-                </a:solidFill>
-              </a:rPr>
-              <a:t>• Respublika CTF Musobaqasi: </a:t>
-            </a:r>
-            <a:pPr indent="0" marL="0">
-              <a:buNone/>
-            </a:pPr>
-            <a:r>
-              <a:rPr lang="en-US" sz="900" dirty="0">
-                <a:solidFill>
-                  <a:srgbClr val="475569"/>
-                </a:solidFill>
-              </a:rPr>
-              <a:t>Yoshlar o‘rtasida kiber-olimpiada o‘tkazish.</a:t>
-            </a:r>
-            <a:endParaRPr lang="en-US" sz="900" dirty="0"/>
-          </a:p>
-        </p:txBody>
-      </p:sp>
     </p:spTree>
   </p:cSld>
   <p:clrMapOvr>
@@ -7849,7 +7649,7 @@
     <p:bg>
       <p:bgPr>
         <a:solidFill>
-          <a:srgbClr val="0A192F"/>
+          <a:srgbClr val="F4F6F9"/>
         </a:solidFill>
       </p:bgPr>
     </p:bg>
@@ -7875,14 +7675,14 @@
         </p:nvSpPr>
         <p:spPr>
           <a:xfrm>
-            <a:off x="548640" y="320040"/>
+            <a:off x="548640" y="228600"/>
             <a:ext cx="2011680" cy="274320"/>
           </a:xfrm>
           <a:prstGeom prst="roundRect">
             <a:avLst/>
           </a:prstGeom>
           <a:solidFill>
-            <a:srgbClr val="064E3B"/>
+            <a:srgbClr val="ECFDF5"/>
           </a:solidFill>
           <a:ln w="12700">
             <a:solidFill>
@@ -7900,7 +7700,7 @@
         </p:nvSpPr>
         <p:spPr>
           <a:xfrm>
-            <a:off x="548640" y="320040"/>
+            <a:off x="548640" y="228600"/>
             <a:ext cx="2011680" cy="274320"/>
           </a:xfrm>
           <a:prstGeom prst="rect">
@@ -7917,14 +7717,14 @@
               <a:buNone/>
             </a:pPr>
             <a:r>
-              <a:rPr lang="en-US" sz="1000" b="1" dirty="0">
-                <a:solidFill>
-                  <a:srgbClr val="34D399"/>
-                </a:solidFill>
-              </a:rPr>
-              <a:t>08 · MUALLIF</a:t>
-            </a:r>
-            <a:endParaRPr lang="en-US" sz="1000" dirty="0"/>
+              <a:rPr lang="en-US" sz="950" b="1" dirty="0">
+                <a:solidFill>
+                  <a:srgbClr val="059669"/>
+                </a:solidFill>
+              </a:rPr>
+              <a:t>SLAYD 08 / 13</a:t>
+            </a:r>
+            <a:endParaRPr lang="en-US" sz="950" dirty="0"/>
           </a:p>
         </p:txBody>
       </p:sp>
@@ -7936,31 +7736,31 @@
         </p:nvSpPr>
         <p:spPr>
           <a:xfrm>
-            <a:off x="548640" y="685800"/>
-            <a:ext cx="4937760" cy="457200"/>
-          </a:xfrm>
-          <a:prstGeom prst="rect">
-            <a:avLst/>
-          </a:prstGeom>
-          <a:noFill/>
-          <a:ln/>
-        </p:spPr>
-        <p:txBody>
-          <a:bodyPr wrap="square" rtlCol="0" anchor="ctr"/>
-          <a:lstStyle/>
-          <a:p>
-            <a:pPr indent="0" marL="0">
-              <a:buNone/>
-            </a:pPr>
-            <a:r>
-              <a:rPr lang="en-US" sz="2200" b="1" dirty="0">
-                <a:solidFill>
-                  <a:srgbClr val="000000"/>
-                </a:solidFill>
-              </a:rPr>
-              <a:t>Loyihani kim yaratdi?</a:t>
-            </a:r>
-            <a:endParaRPr lang="en-US" sz="2200" dirty="0"/>
+            <a:off x="548640" y="548640"/>
+            <a:ext cx="8046720" cy="411480"/>
+          </a:xfrm>
+          <a:prstGeom prst="rect">
+            <a:avLst/>
+          </a:prstGeom>
+          <a:noFill/>
+          <a:ln/>
+        </p:spPr>
+        <p:txBody>
+          <a:bodyPr wrap="square" rtlCol="0" anchor="ctr"/>
+          <a:lstStyle/>
+          <a:p>
+            <a:pPr indent="0" marL="0">
+              <a:buNone/>
+            </a:pPr>
+            <a:r>
+              <a:rPr lang="en-US" sz="2000" b="1" dirty="0">
+                <a:solidFill>
+                  <a:srgbClr val="0F172A"/>
+                </a:solidFill>
+              </a:rPr>
+              <a:t>Texnologiyalar: Loyihaning haqiqiy texnik asosi</a:t>
+            </a:r>
+            <a:endParaRPr lang="en-US" sz="2000" dirty="0"/>
           </a:p>
         </p:txBody>
       </p:sp>
@@ -7972,286 +7772,62 @@
         </p:nvSpPr>
         <p:spPr>
           <a:xfrm>
-            <a:off x="548640" y="1143000"/>
-            <a:ext cx="4937760" cy="822960"/>
-          </a:xfrm>
-          <a:prstGeom prst="rect">
-            <a:avLst/>
-          </a:prstGeom>
-          <a:noFill/>
-          <a:ln/>
-        </p:spPr>
-        <p:txBody>
-          <a:bodyPr wrap="square" rtlCol="0" anchor="ctr"/>
-          <a:lstStyle/>
-          <a:p>
-            <a:pPr indent="0" marL="0">
-              <a:lnSpc>
-                <a:spcPct val="115000"/>
-              </a:lnSpc>
-              <a:buNone/>
-            </a:pPr>
-            <a:r>
-              <a:rPr lang="en-US" sz="2000" b="1" dirty="0">
-                <a:solidFill>
-                  <a:srgbClr val="F8FAFC"/>
-                </a:solidFill>
-              </a:rPr>
-              <a:t>Loyihaning barcha qismlari Abduraxmonov Bexruz tomonidan bajarilgan.</a:t>
-            </a:r>
-            <a:endParaRPr lang="en-US" sz="2000" dirty="0"/>
-          </a:p>
-        </p:txBody>
-      </p:sp>
-      <p:sp>
-        <p:nvSpPr>
-          <p:cNvPr id="6" name="Text 4"/>
-          <p:cNvSpPr/>
-          <p:nvPr/>
-        </p:nvSpPr>
-        <p:spPr>
-          <a:xfrm>
-            <a:off x="548640" y="2057400"/>
-            <a:ext cx="4937760" cy="320040"/>
-          </a:xfrm>
-          <a:prstGeom prst="rect">
-            <a:avLst/>
-          </a:prstGeom>
-          <a:noFill/>
-          <a:ln/>
-        </p:spPr>
-        <p:txBody>
-          <a:bodyPr wrap="square" rtlCol="0" anchor="ctr"/>
-          <a:lstStyle/>
-          <a:p>
-            <a:pPr indent="0" marL="0">
-              <a:buNone/>
-            </a:pPr>
-            <a:r>
-              <a:rPr lang="en-US" sz="1200" b="1" dirty="0">
-                <a:solidFill>
-                  <a:srgbClr val="6EE7B7"/>
-                </a:solidFill>
-              </a:rPr>
-              <a:t>ROLI:  Muallif, dizayner va dasturchi</a:t>
-            </a:r>
-            <a:endParaRPr lang="en-US" sz="1200" dirty="0"/>
-          </a:p>
-        </p:txBody>
-      </p:sp>
-      <p:sp>
-        <p:nvSpPr>
-          <p:cNvPr id="7" name="Shape 5"/>
-          <p:cNvSpPr/>
-          <p:nvPr/>
-        </p:nvSpPr>
-        <p:spPr>
-          <a:xfrm>
-            <a:off x="548640" y="2468880"/>
-            <a:ext cx="4937760" cy="2240280"/>
+            <a:off x="548640" y="960120"/>
+            <a:ext cx="8046720" cy="274320"/>
+          </a:xfrm>
+          <a:prstGeom prst="rect">
+            <a:avLst/>
+          </a:prstGeom>
+          <a:noFill/>
+          <a:ln/>
+        </p:spPr>
+        <p:txBody>
+          <a:bodyPr wrap="square" rtlCol="0" anchor="ctr"/>
+          <a:lstStyle/>
+          <a:p>
+            <a:pPr indent="0" marL="0">
+              <a:buNone/>
+            </a:pPr>
+            <a:r>
+              <a:rPr lang="en-US" sz="1100" dirty="0">
+                <a:solidFill>
+                  <a:srgbClr val="475569"/>
+                </a:solidFill>
+              </a:rPr>
+              <a:t>Kod bazasi (package.json va arxitektura) orqali 100% tasdiqlangan texnologiyalar</a:t>
+            </a:r>
+            <a:endParaRPr lang="en-US" sz="1100" dirty="0"/>
+          </a:p>
+        </p:txBody>
+      </p:sp>
+      <p:sp>
+        <p:nvSpPr>
+          <p:cNvPr id="6" name="Shape 4"/>
+          <p:cNvSpPr/>
+          <p:nvPr/>
+        </p:nvSpPr>
+        <p:spPr>
+          <a:xfrm>
+            <a:off x="512064" y="1289304"/>
+            <a:ext cx="4096512" cy="3822192"/>
           </a:xfrm>
           <a:prstGeom prst="roundRect">
             <a:avLst/>
           </a:prstGeom>
           <a:solidFill>
-            <a:srgbClr val="0F243A"/>
+            <a:srgbClr val="0D1A26"/>
           </a:solidFill>
           <a:ln w="19050">
             <a:solidFill>
-              <a:srgbClr val="1E3A52"/>
+              <a:srgbClr val="059669"/>
             </a:solidFill>
             <a:prstDash val="solid"/>
           </a:ln>
         </p:spPr>
       </p:sp>
-      <p:sp>
-        <p:nvSpPr>
-          <p:cNvPr id="8" name="Text 6"/>
-          <p:cNvSpPr/>
-          <p:nvPr/>
-        </p:nvSpPr>
-        <p:spPr>
-          <a:xfrm>
-            <a:off x="731520" y="2560320"/>
-            <a:ext cx="4572000" cy="274320"/>
-          </a:xfrm>
-          <a:prstGeom prst="rect">
-            <a:avLst/>
-          </a:prstGeom>
-          <a:noFill/>
-          <a:ln/>
-        </p:spPr>
-        <p:txBody>
-          <a:bodyPr wrap="square" rtlCol="0" anchor="ctr"/>
-          <a:lstStyle/>
-          <a:p>
-            <a:pPr indent="0" marL="0">
-              <a:buNone/>
-            </a:pPr>
-            <a:r>
-              <a:rPr lang="en-US" sz="1200" b="1" dirty="0">
-                <a:solidFill>
-                  <a:srgbClr val="10B981"/>
-                </a:solidFill>
-              </a:rPr>
-              <a:t>Bajargan ishlari:</a:t>
-            </a:r>
-            <a:endParaRPr lang="en-US" sz="1200" dirty="0"/>
-          </a:p>
-        </p:txBody>
-      </p:sp>
-      <p:sp>
-        <p:nvSpPr>
-          <p:cNvPr id="9" name="Text 7"/>
-          <p:cNvSpPr/>
-          <p:nvPr/>
-        </p:nvSpPr>
-        <p:spPr>
-          <a:xfrm>
-            <a:off x="731520" y="2880360"/>
-            <a:ext cx="4572000" cy="1737360"/>
-          </a:xfrm>
-          <a:prstGeom prst="rect">
-            <a:avLst/>
-          </a:prstGeom>
-          <a:noFill/>
-          <a:ln/>
-        </p:spPr>
-        <p:txBody>
-          <a:bodyPr wrap="square" rtlCol="0" anchor="ctr"/>
-          <a:lstStyle/>
-          <a:p>
-            <a:pPr indent="0" marL="0">
-              <a:lnSpc>
-                <a:spcPct val="125000"/>
-              </a:lnSpc>
-              <a:buNone/>
-            </a:pPr>
-            <a:r>
-              <a:rPr lang="en-US" sz="1100" dirty="0">
-                <a:solidFill>
-                  <a:srgbClr val="F8FAFC"/>
-                </a:solidFill>
-              </a:rPr>
-              <a:t>• Loyiha g‘oyasi va arxitektura tuzilmasi</a:t>
-            </a:r>
-            <a:endParaRPr lang="en-US" sz="1100" dirty="0"/>
-          </a:p>
-          <a:p>
-            <a:pPr indent="0" marL="0">
-              <a:lnSpc>
-                <a:spcPct val="125000"/>
-              </a:lnSpc>
-              <a:buNone/>
-            </a:pPr>
-            <a:r>
-              <a:rPr lang="en-US" sz="1100" dirty="0">
-                <a:solidFill>
-                  <a:srgbClr val="F8FAFC"/>
-                </a:solidFill>
-              </a:rPr>
-              <a:t>• UI/UX dizayn va vizual interfeys</a:t>
-            </a:r>
-            <a:endParaRPr lang="en-US" sz="1100" dirty="0"/>
-          </a:p>
-          <a:p>
-            <a:pPr indent="0" marL="0">
-              <a:lnSpc>
-                <a:spcPct val="125000"/>
-              </a:lnSpc>
-              <a:buNone/>
-            </a:pPr>
-            <a:r>
-              <a:rPr lang="en-US" sz="1100" dirty="0">
-                <a:solidFill>
-                  <a:srgbClr val="F8FAFC"/>
-                </a:solidFill>
-              </a:rPr>
-              <a:t>• React, Vite va Tailwind CSS bilan dasturlash</a:t>
-            </a:r>
-            <a:endParaRPr lang="en-US" sz="1100" dirty="0"/>
-          </a:p>
-          <a:p>
-            <a:pPr indent="0" marL="0">
-              <a:lnSpc>
-                <a:spcPct val="125000"/>
-              </a:lnSpc>
-              <a:buNone/>
-            </a:pPr>
-            <a:r>
-              <a:rPr lang="en-US" sz="1100" dirty="0">
-                <a:solidFill>
-                  <a:srgbClr val="F8FAFC"/>
-                </a:solidFill>
-              </a:rPr>
-              <a:t>• O‘quv modullari, laboratoriyalar va Sezar shifri</a:t>
-            </a:r>
-            <a:endParaRPr lang="en-US" sz="1100" dirty="0"/>
-          </a:p>
-          <a:p>
-            <a:pPr indent="0" marL="0">
-              <a:lnSpc>
-                <a:spcPct val="125000"/>
-              </a:lnSpc>
-              <a:buNone/>
-            </a:pPr>
-            <a:r>
-              <a:rPr lang="en-US" sz="1100" dirty="0">
-                <a:solidFill>
-                  <a:srgbClr val="F8FAFC"/>
-                </a:solidFill>
-              </a:rPr>
-              <a:t>• Vercel bulutiga joylashtirish va CI/CD</a:t>
-            </a:r>
-            <a:endParaRPr lang="en-US" sz="1100" dirty="0"/>
-          </a:p>
-          <a:p>
-            <a:pPr indent="0" marL="0">
-              <a:lnSpc>
-                <a:spcPct val="125000"/>
-              </a:lnSpc>
-              <a:buNone/>
-            </a:pPr>
-            <a:r>
-              <a:rPr lang="en-US" sz="1100" dirty="0">
-                <a:solidFill>
-                  <a:srgbClr val="F8FAFC"/>
-                </a:solidFill>
-              </a:rPr>
-              <a:t>• Sinov va taqdimotga to‘liq tayyorlash</a:t>
-            </a:r>
-            <a:endParaRPr lang="en-US" sz="1100" dirty="0"/>
-          </a:p>
-        </p:txBody>
-      </p:sp>
-      <p:sp>
-        <p:nvSpPr>
-          <p:cNvPr id="10" name="Shape 8"/>
-          <p:cNvSpPr/>
-          <p:nvPr/>
-        </p:nvSpPr>
-        <p:spPr>
-          <a:xfrm>
-            <a:off x="5806440" y="640080"/>
-            <a:ext cx="2834640" cy="4069080"/>
-          </a:xfrm>
-          <a:prstGeom prst="roundRect">
-            <a:avLst/>
-          </a:prstGeom>
-          <a:solidFill>
-            <a:srgbClr val="0D1A26"/>
-          </a:solidFill>
-          <a:ln w="25400">
-            <a:solidFill>
-              <a:srgbClr val="10B981"/>
-            </a:solidFill>
-            <a:prstDash val="solid"/>
-          </a:ln>
-        </p:spPr>
-      </p:sp>
       <p:pic>
         <p:nvPicPr>
-          <p:cNvPr id="11" name="Image 0" descr="C:\Users\User\Desktop\kiber xavfsizlik boyicha sayt\public\screenshots\author_portrait.png">    </p:cNvPr>
+          <p:cNvPr id="7" name="Image 0" descr="C:\Users\User\Desktop\kiber xavfsizlik boyicha sayt\public\screenshots\08_cyberguard_ai.png">    </p:cNvPr>
           <p:cNvPicPr>
             <a:picLocks noChangeAspect="1"/>
           </p:cNvPicPr>
@@ -8265,14 +7841,438 @@
         </p:blipFill>
         <p:spPr>
           <a:xfrm>
-            <a:off x="5852160" y="685800"/>
-            <a:ext cx="2743200" cy="3977640"/>
+            <a:off x="548640" y="1325880"/>
+            <a:ext cx="4023360" cy="3474720"/>
           </a:xfrm>
           <a:prstGeom prst="rect">
             <a:avLst/>
           </a:prstGeom>
         </p:spPr>
       </p:pic>
+      <p:sp>
+        <p:nvSpPr>
+          <p:cNvPr id="8" name="Text 5"/>
+          <p:cNvSpPr/>
+          <p:nvPr/>
+        </p:nvSpPr>
+        <p:spPr>
+          <a:xfrm>
+            <a:off x="548640" y="4837176"/>
+            <a:ext cx="4023360" cy="274320"/>
+          </a:xfrm>
+          <a:prstGeom prst="rect">
+            <a:avLst/>
+          </a:prstGeom>
+          <a:noFill/>
+          <a:ln/>
+        </p:spPr>
+        <p:txBody>
+          <a:bodyPr wrap="square" rtlCol="0" anchor="ctr"/>
+          <a:lstStyle/>
+          <a:p>
+            <a:pPr algn="ctr" indent="0" marL="0">
+              <a:buNone/>
+            </a:pPr>
+            <a:r>
+              <a:rPr lang="en-US" sz="900" dirty="0">
+                <a:solidFill>
+                  <a:srgbClr val="BAE6FD"/>
+                </a:solidFill>
+              </a:rPr>
+              <a:t>📸 CyberGuard AI — o‘zbek tilidagi kiberxavfsizlik assistenti</a:t>
+            </a:r>
+            <a:endParaRPr lang="en-US" sz="900" dirty="0"/>
+          </a:p>
+        </p:txBody>
+      </p:sp>
+      <p:sp>
+        <p:nvSpPr>
+          <p:cNvPr id="9" name="Shape 6"/>
+          <p:cNvSpPr/>
+          <p:nvPr/>
+        </p:nvSpPr>
+        <p:spPr>
+          <a:xfrm>
+            <a:off x="4846320" y="1325880"/>
+            <a:ext cx="3749040" cy="749808"/>
+          </a:xfrm>
+          <a:prstGeom prst="roundRect">
+            <a:avLst/>
+          </a:prstGeom>
+          <a:solidFill>
+            <a:srgbClr val="FFFFFF"/>
+          </a:solidFill>
+          <a:ln w="12700">
+            <a:solidFill>
+              <a:srgbClr val="E2E8F0"/>
+            </a:solidFill>
+            <a:prstDash val="solid"/>
+          </a:ln>
+        </p:spPr>
+      </p:sp>
+      <p:sp>
+        <p:nvSpPr>
+          <p:cNvPr id="10" name="Text 7"/>
+          <p:cNvSpPr/>
+          <p:nvPr/>
+        </p:nvSpPr>
+        <p:spPr>
+          <a:xfrm>
+            <a:off x="4983480" y="1399032"/>
+            <a:ext cx="3474720" cy="274320"/>
+          </a:xfrm>
+          <a:prstGeom prst="rect">
+            <a:avLst/>
+          </a:prstGeom>
+          <a:noFill/>
+          <a:ln/>
+        </p:spPr>
+        <p:txBody>
+          <a:bodyPr wrap="square" rtlCol="0" anchor="ctr"/>
+          <a:lstStyle/>
+          <a:p>
+            <a:pPr indent="0" marL="0">
+              <a:buNone/>
+            </a:pPr>
+            <a:r>
+              <a:rPr lang="en-US" sz="1200" b="1" dirty="0">
+                <a:solidFill>
+                  <a:srgbClr val="0284C7"/>
+                </a:solidFill>
+              </a:rPr>
+              <a:t>React 18 &amp; Vite</a:t>
+            </a:r>
+            <a:endParaRPr lang="en-US" sz="1200" dirty="0"/>
+          </a:p>
+        </p:txBody>
+      </p:sp>
+      <p:sp>
+        <p:nvSpPr>
+          <p:cNvPr id="11" name="Text 8"/>
+          <p:cNvSpPr/>
+          <p:nvPr/>
+        </p:nvSpPr>
+        <p:spPr>
+          <a:xfrm>
+            <a:off x="4983480" y="1673352"/>
+            <a:ext cx="3474720" cy="347472"/>
+          </a:xfrm>
+          <a:prstGeom prst="rect">
+            <a:avLst/>
+          </a:prstGeom>
+          <a:noFill/>
+          <a:ln/>
+        </p:spPr>
+        <p:txBody>
+          <a:bodyPr wrap="square" rtlCol="0" anchor="ctr"/>
+          <a:lstStyle/>
+          <a:p>
+            <a:pPr indent="0" marL="0">
+              <a:buNone/>
+            </a:pPr>
+            <a:r>
+              <a:rPr lang="en-US" sz="950" dirty="0">
+                <a:solidFill>
+                  <a:srgbClr val="475569"/>
+                </a:solidFill>
+              </a:rPr>
+              <a:t>Tezkor SPA arxitekturasi va modulli frontend.</a:t>
+            </a:r>
+            <a:endParaRPr lang="en-US" sz="950" dirty="0"/>
+          </a:p>
+        </p:txBody>
+      </p:sp>
+      <p:sp>
+        <p:nvSpPr>
+          <p:cNvPr id="12" name="Shape 9"/>
+          <p:cNvSpPr/>
+          <p:nvPr/>
+        </p:nvSpPr>
+        <p:spPr>
+          <a:xfrm>
+            <a:off x="4846320" y="2194560"/>
+            <a:ext cx="3749040" cy="749808"/>
+          </a:xfrm>
+          <a:prstGeom prst="roundRect">
+            <a:avLst/>
+          </a:prstGeom>
+          <a:solidFill>
+            <a:srgbClr val="FFFFFF"/>
+          </a:solidFill>
+          <a:ln w="12700">
+            <a:solidFill>
+              <a:srgbClr val="E2E8F0"/>
+            </a:solidFill>
+            <a:prstDash val="solid"/>
+          </a:ln>
+        </p:spPr>
+      </p:sp>
+      <p:sp>
+        <p:nvSpPr>
+          <p:cNvPr id="13" name="Text 10"/>
+          <p:cNvSpPr/>
+          <p:nvPr/>
+        </p:nvSpPr>
+        <p:spPr>
+          <a:xfrm>
+            <a:off x="4983480" y="2267712"/>
+            <a:ext cx="3474720" cy="274320"/>
+          </a:xfrm>
+          <a:prstGeom prst="rect">
+            <a:avLst/>
+          </a:prstGeom>
+          <a:noFill/>
+          <a:ln/>
+        </p:spPr>
+        <p:txBody>
+          <a:bodyPr wrap="square" rtlCol="0" anchor="ctr"/>
+          <a:lstStyle/>
+          <a:p>
+            <a:pPr indent="0" marL="0">
+              <a:buNone/>
+            </a:pPr>
+            <a:r>
+              <a:rPr lang="en-US" sz="1200" b="1" dirty="0">
+                <a:solidFill>
+                  <a:srgbClr val="059669"/>
+                </a:solidFill>
+              </a:rPr>
+              <a:t>Tailwind CSS</a:t>
+            </a:r>
+            <a:endParaRPr lang="en-US" sz="1200" dirty="0"/>
+          </a:p>
+        </p:txBody>
+      </p:sp>
+      <p:sp>
+        <p:nvSpPr>
+          <p:cNvPr id="14" name="Text 11"/>
+          <p:cNvSpPr/>
+          <p:nvPr/>
+        </p:nvSpPr>
+        <p:spPr>
+          <a:xfrm>
+            <a:off x="4983480" y="2542032"/>
+            <a:ext cx="3474720" cy="347472"/>
+          </a:xfrm>
+          <a:prstGeom prst="rect">
+            <a:avLst/>
+          </a:prstGeom>
+          <a:noFill/>
+          <a:ln/>
+        </p:spPr>
+        <p:txBody>
+          <a:bodyPr wrap="square" rtlCol="0" anchor="ctr"/>
+          <a:lstStyle/>
+          <a:p>
+            <a:pPr indent="0" marL="0">
+              <a:buNone/>
+            </a:pPr>
+            <a:r>
+              <a:rPr lang="en-US" sz="950" dirty="0">
+                <a:solidFill>
+                  <a:srgbClr val="475569"/>
+                </a:solidFill>
+              </a:rPr>
+              <a:t>To‘liq moslashuvchan (responsive) qorong‘i kiber-interfeys.</a:t>
+            </a:r>
+            <a:endParaRPr lang="en-US" sz="950" dirty="0"/>
+          </a:p>
+        </p:txBody>
+      </p:sp>
+      <p:sp>
+        <p:nvSpPr>
+          <p:cNvPr id="15" name="Shape 12"/>
+          <p:cNvSpPr/>
+          <p:nvPr/>
+        </p:nvSpPr>
+        <p:spPr>
+          <a:xfrm>
+            <a:off x="4846320" y="3063240"/>
+            <a:ext cx="3749040" cy="749808"/>
+          </a:xfrm>
+          <a:prstGeom prst="roundRect">
+            <a:avLst/>
+          </a:prstGeom>
+          <a:solidFill>
+            <a:srgbClr val="FFFFFF"/>
+          </a:solidFill>
+          <a:ln w="12700">
+            <a:solidFill>
+              <a:srgbClr val="E2E8F0"/>
+            </a:solidFill>
+            <a:prstDash val="solid"/>
+          </a:ln>
+        </p:spPr>
+      </p:sp>
+      <p:sp>
+        <p:nvSpPr>
+          <p:cNvPr id="16" name="Text 13"/>
+          <p:cNvSpPr/>
+          <p:nvPr/>
+        </p:nvSpPr>
+        <p:spPr>
+          <a:xfrm>
+            <a:off x="4983480" y="3136392"/>
+            <a:ext cx="3474720" cy="274320"/>
+          </a:xfrm>
+          <a:prstGeom prst="rect">
+            <a:avLst/>
+          </a:prstGeom>
+          <a:noFill/>
+          <a:ln/>
+        </p:spPr>
+        <p:txBody>
+          <a:bodyPr wrap="square" rtlCol="0" anchor="ctr"/>
+          <a:lstStyle/>
+          <a:p>
+            <a:pPr indent="0" marL="0">
+              <a:buNone/>
+            </a:pPr>
+            <a:r>
+              <a:rPr lang="en-US" sz="1200" b="1" dirty="0">
+                <a:solidFill>
+                  <a:srgbClr val="F59E0B"/>
+                </a:solidFill>
+              </a:rPr>
+              <a:t>Lucide Icons &amp; Confetti</a:t>
+            </a:r>
+            <a:endParaRPr lang="en-US" sz="1200" dirty="0"/>
+          </a:p>
+        </p:txBody>
+      </p:sp>
+      <p:sp>
+        <p:nvSpPr>
+          <p:cNvPr id="17" name="Text 14"/>
+          <p:cNvSpPr/>
+          <p:nvPr/>
+        </p:nvSpPr>
+        <p:spPr>
+          <a:xfrm>
+            <a:off x="4983480" y="3410712"/>
+            <a:ext cx="3474720" cy="347472"/>
+          </a:xfrm>
+          <a:prstGeom prst="rect">
+            <a:avLst/>
+          </a:prstGeom>
+          <a:noFill/>
+          <a:ln/>
+        </p:spPr>
+        <p:txBody>
+          <a:bodyPr wrap="square" rtlCol="0" anchor="ctr"/>
+          <a:lstStyle/>
+          <a:p>
+            <a:pPr indent="0" marL="0">
+              <a:buNone/>
+            </a:pPr>
+            <a:r>
+              <a:rPr lang="en-US" sz="950" dirty="0">
+                <a:solidFill>
+                  <a:srgbClr val="475569"/>
+                </a:solidFill>
+              </a:rPr>
+              <a:t>Kiber piktogrammalar va gamifikatsiya effektlari.</a:t>
+            </a:r>
+            <a:endParaRPr lang="en-US" sz="950" dirty="0"/>
+          </a:p>
+        </p:txBody>
+      </p:sp>
+      <p:sp>
+        <p:nvSpPr>
+          <p:cNvPr id="18" name="Shape 15"/>
+          <p:cNvSpPr/>
+          <p:nvPr/>
+        </p:nvSpPr>
+        <p:spPr>
+          <a:xfrm>
+            <a:off x="4846320" y="3931920"/>
+            <a:ext cx="3749040" cy="749808"/>
+          </a:xfrm>
+          <a:prstGeom prst="roundRect">
+            <a:avLst/>
+          </a:prstGeom>
+          <a:solidFill>
+            <a:srgbClr val="FFFFFF"/>
+          </a:solidFill>
+          <a:ln w="12700">
+            <a:solidFill>
+              <a:srgbClr val="E2E8F0"/>
+            </a:solidFill>
+            <a:prstDash val="solid"/>
+          </a:ln>
+        </p:spPr>
+      </p:sp>
+      <p:sp>
+        <p:nvSpPr>
+          <p:cNvPr id="19" name="Text 16"/>
+          <p:cNvSpPr/>
+          <p:nvPr/>
+        </p:nvSpPr>
+        <p:spPr>
+          <a:xfrm>
+            <a:off x="4983480" y="4005072"/>
+            <a:ext cx="3474720" cy="274320"/>
+          </a:xfrm>
+          <a:prstGeom prst="rect">
+            <a:avLst/>
+          </a:prstGeom>
+          <a:noFill/>
+          <a:ln/>
+        </p:spPr>
+        <p:txBody>
+          <a:bodyPr wrap="square" rtlCol="0" anchor="ctr"/>
+          <a:lstStyle/>
+          <a:p>
+            <a:pPr indent="0" marL="0">
+              <a:buNone/>
+            </a:pPr>
+            <a:r>
+              <a:rPr lang="en-US" sz="1200" b="1" dirty="0">
+                <a:solidFill>
+                  <a:srgbClr val="0F172A"/>
+                </a:solidFill>
+              </a:rPr>
+              <a:t>Vercel Edge Cloud</a:t>
+            </a:r>
+            <a:endParaRPr lang="en-US" sz="1200" dirty="0"/>
+          </a:p>
+        </p:txBody>
+      </p:sp>
+      <p:sp>
+        <p:nvSpPr>
+          <p:cNvPr id="20" name="Text 17"/>
+          <p:cNvSpPr/>
+          <p:nvPr/>
+        </p:nvSpPr>
+        <p:spPr>
+          <a:xfrm>
+            <a:off x="4983480" y="4279392"/>
+            <a:ext cx="3474720" cy="347472"/>
+          </a:xfrm>
+          <a:prstGeom prst="rect">
+            <a:avLst/>
+          </a:prstGeom>
+          <a:noFill/>
+          <a:ln/>
+        </p:spPr>
+        <p:txBody>
+          <a:bodyPr wrap="square" rtlCol="0" anchor="ctr"/>
+          <a:lstStyle/>
+          <a:p>
+            <a:pPr indent="0" marL="0">
+              <a:buNone/>
+            </a:pPr>
+            <a:r>
+              <a:rPr lang="en-US" sz="950" dirty="0">
+                <a:solidFill>
+                  <a:srgbClr val="475569"/>
+                </a:solidFill>
+              </a:rPr>
+              <a:t>Global CDN, 24/7 uzluksiz ishlovchi bulutli serverlar.</a:t>
+            </a:r>
+            <a:endParaRPr lang="en-US" sz="950" dirty="0"/>
+          </a:p>
+        </p:txBody>
+      </p:sp>
     </p:spTree>
   </p:cSld>
   <p:clrMapOvr>
@@ -8396,7 +8396,7 @@
                   <a:srgbClr val="0F172A"/>
                 </a:solidFill>
               </a:rPr>
-              <a:t>Texnologiyalar: Loyihaning haqiqiy texnik asosi</a:t>
+              <a:t>Afzalliklari: KiberQoriqchi nega ustun?</a:t>
             </a:r>
             <a:endParaRPr lang="en-US" sz="2000" dirty="0"/>
           </a:p>
@@ -8432,7 +8432,7 @@
                   <a:srgbClr val="475569"/>
                 </a:solidFill>
               </a:rPr>
-              <a:t>Kod bazasi (package.json va arxitektura) orqali 100% tasdiqlangan texnologiyalar</a:t>
+              <a:t>Saytning haqiqiy imkoniyatlariga asoslangan asosiy raqobat ustunliklari</a:t>
             </a:r>
             <a:endParaRPr lang="en-US" sz="1100" dirty="0"/>
           </a:p>
@@ -8465,7 +8465,7 @@
       </p:sp>
       <p:pic>
         <p:nvPicPr>
-          <p:cNvPr id="7" name="Image 0" descr="C:\Users\User\Desktop\kiber xavfsizlik boyicha sayt\public\screenshots\08_cyberguard_ai.png">    </p:cNvPr>
+          <p:cNvPr id="7" name="Image 0" descr="C:\Users\User\Desktop\kiber xavfsizlik boyicha sayt\public\screenshots\07_leaderboard.png">    </p:cNvPr>
           <p:cNvPicPr>
             <a:picLocks noChangeAspect="1"/>
           </p:cNvPicPr>
@@ -8517,7 +8517,7 @@
                   <a:srgbClr val="BAE6FD"/>
                 </a:solidFill>
               </a:rPr>
-              <a:t>📸 CyberGuard AI — o‘zbek tilidagi kiberxavfsizlik assistenti</a:t>
+              <a:t>📸 "Leaderboard" — jonli reyting va musobaqa tizimi</a:t>
             </a:r>
             <a:endParaRPr lang="en-US" sz="900" dirty="0"/>
           </a:p>
@@ -8540,9 +8540,9 @@
           <a:solidFill>
             <a:srgbClr val="FFFFFF"/>
           </a:solidFill>
-          <a:ln w="12700">
+          <a:ln w="19050">
             <a:solidFill>
-              <a:srgbClr val="E2E8F0"/>
+              <a:srgbClr val="6EE7B7"/>
             </a:solidFill>
             <a:prstDash val="solid"/>
           </a:ln>
@@ -8573,14 +8573,14 @@
               <a:buNone/>
             </a:pPr>
             <a:r>
-              <a:rPr lang="en-US" sz="1200" b="1" dirty="0">
-                <a:solidFill>
-                  <a:srgbClr val="0284C7"/>
-                </a:solidFill>
-              </a:rPr>
-              <a:t>React 18 &amp; Vite</a:t>
-            </a:r>
-            <a:endParaRPr lang="en-US" sz="1200" dirty="0"/>
+              <a:rPr lang="en-US" sz="1100" b="1" dirty="0">
+                <a:solidFill>
+                  <a:srgbClr val="059669"/>
+                </a:solidFill>
+              </a:rPr>
+              <a:t>1. 100% Ona Tilimizda</a:t>
+            </a:r>
+            <a:endParaRPr lang="en-US" sz="1100" dirty="0"/>
           </a:p>
         </p:txBody>
       </p:sp>
@@ -8614,7 +8614,7 @@
                   <a:srgbClr val="475569"/>
                 </a:solidFill>
               </a:rPr>
-              <a:t>Tezkor SPA arxitekturasi va modulli frontend.</a:t>
+              <a:t>O‘zbekiston to‘lov tizimlari (Click, Payme, Uzcard) kiber-xavflariga moslangan.</a:t>
             </a:r>
             <a:endParaRPr lang="en-US" sz="950" dirty="0"/>
           </a:p>
@@ -8637,9 +8637,9 @@
           <a:solidFill>
             <a:srgbClr val="FFFFFF"/>
           </a:solidFill>
-          <a:ln w="12700">
+          <a:ln w="19050">
             <a:solidFill>
-              <a:srgbClr val="E2E8F0"/>
+              <a:srgbClr val="6EE7B7"/>
             </a:solidFill>
             <a:prstDash val="solid"/>
           </a:ln>
@@ -8670,14 +8670,14 @@
               <a:buNone/>
             </a:pPr>
             <a:r>
-              <a:rPr lang="en-US" sz="1200" b="1" dirty="0">
+              <a:rPr lang="en-US" sz="1100" b="1" dirty="0">
                 <a:solidFill>
                   <a:srgbClr val="059669"/>
                 </a:solidFill>
               </a:rPr>
-              <a:t>Tailwind CSS</a:t>
-            </a:r>
-            <a:endParaRPr lang="en-US" sz="1200" dirty="0"/>
+              <a:t>2. Ta'lim + Jonli Himoya</a:t>
+            </a:r>
+            <a:endParaRPr lang="en-US" sz="1100" dirty="0"/>
           </a:p>
         </p:txBody>
       </p:sp>
@@ -8711,7 +8711,7 @@
                   <a:srgbClr val="475569"/>
                 </a:solidFill>
               </a:rPr>
-              <a:t>To‘liq moslashuvchan (responsive) qorong‘i kiber-interfeys.</a:t>
+              <a:t>Faqat ma'ruza emas — smartfon va fayllarni amalda tekshirish qurollari bor.</a:t>
             </a:r>
             <a:endParaRPr lang="en-US" sz="950" dirty="0"/>
           </a:p>
@@ -8734,9 +8734,9 @@
           <a:solidFill>
             <a:srgbClr val="FFFFFF"/>
           </a:solidFill>
-          <a:ln w="12700">
+          <a:ln w="19050">
             <a:solidFill>
-              <a:srgbClr val="E2E8F0"/>
+              <a:srgbClr val="6EE7B7"/>
             </a:solidFill>
             <a:prstDash val="solid"/>
           </a:ln>
@@ -8767,14 +8767,14 @@
               <a:buNone/>
             </a:pPr>
             <a:r>
-              <a:rPr lang="en-US" sz="1200" b="1" dirty="0">
-                <a:solidFill>
-                  <a:srgbClr val="F59E0B"/>
-                </a:solidFill>
-              </a:rPr>
-              <a:t>Lucide Icons &amp; Confetti</a:t>
-            </a:r>
-            <a:endParaRPr lang="en-US" sz="1200" dirty="0"/>
+              <a:rPr lang="en-US" sz="1100" b="1" dirty="0">
+                <a:solidFill>
+                  <a:srgbClr val="059669"/>
+                </a:solidFill>
+              </a:rPr>
+              <a:t>3. Gamifikatsiya va Musobaqa</a:t>
+            </a:r>
+            <a:endParaRPr lang="en-US" sz="1100" dirty="0"/>
           </a:p>
         </p:txBody>
       </p:sp>
@@ -8808,7 +8808,7 @@
                   <a:srgbClr val="475569"/>
                 </a:solidFill>
               </a:rPr>
-              <a:t>Kiber piktogrammalar va gamifikatsiya effektlari.</a:t>
+              <a:t>Topshiriqlarni bajarish orqali ballar to‘plab umumiy reytingda ko‘tarilish.</a:t>
             </a:r>
             <a:endParaRPr lang="en-US" sz="950" dirty="0"/>
           </a:p>
@@ -8831,9 +8831,9 @@
           <a:solidFill>
             <a:srgbClr val="FFFFFF"/>
           </a:solidFill>
-          <a:ln w="12700">
+          <a:ln w="19050">
             <a:solidFill>
-              <a:srgbClr val="E2E8F0"/>
+              <a:srgbClr val="6EE7B7"/>
             </a:solidFill>
             <a:prstDash val="solid"/>
           </a:ln>
@@ -8864,14 +8864,14 @@
               <a:buNone/>
             </a:pPr>
             <a:r>
-              <a:rPr lang="en-US" sz="1200" b="1" dirty="0">
-                <a:solidFill>
-                  <a:srgbClr val="0F172A"/>
-                </a:solidFill>
-              </a:rPr>
-              <a:t>Vercel Edge Cloud</a:t>
-            </a:r>
-            <a:endParaRPr lang="en-US" sz="1200" dirty="0"/>
+              <a:rPr lang="en-US" sz="1100" b="1" dirty="0">
+                <a:solidFill>
+                  <a:srgbClr val="059669"/>
+                </a:solidFill>
+              </a:rPr>
+              <a:t>4. CyberGuard AI Maslahatchi</a:t>
+            </a:r>
+            <a:endParaRPr lang="en-US" sz="1100" dirty="0"/>
           </a:p>
         </p:txBody>
       </p:sp>
@@ -8905,7 +8905,7 @@
                   <a:srgbClr val="475569"/>
                 </a:solidFill>
               </a:rPr>
-              <a:t>Global CDN, 24/7 uzluksiz ishlovchi bulutli serverlar.</a:t>
+              <a:t>Har qanday kiber-savolga o‘zbek tilida 24/7 tezkor va tushunarli javob.</a:t>
             </a:r>
             <a:endParaRPr lang="en-US" sz="950" dirty="0"/>
           </a:p>
